--- a/docs/public/course-assets/course-pptx/in-001.pptx
+++ b/docs/public/course-assets/course-pptx/in-001.pptx
@@ -2,25 +2,25 @@
 <file path=ppt/presentation.xml><?xml version="1.0" encoding="utf-8"?>
 <p:presentation xmlns:p="http://schemas.openxmlformats.org/presentationml/2006/main">
   <p:sldMasterIdLst>
-    <p:sldMasterId xmlns:r="http://schemas.openxmlformats.org/officeDocument/2006/relationships" id="2147483648" r:id="R2391321993d04b31"/>
+    <p:sldMasterId xmlns:r="http://schemas.openxmlformats.org/officeDocument/2006/relationships" id="2147483648" r:id="R0f6a82a5db7043c1"/>
   </p:sldMasterIdLst>
   <p:notesMasterIdLst>
-    <p:notesMasterId xmlns:r="http://schemas.openxmlformats.org/officeDocument/2006/relationships" r:id="Rfeeea93aba2c48c5"/>
+    <p:notesMasterId xmlns:r="http://schemas.openxmlformats.org/officeDocument/2006/relationships" r:id="Ref083f67417c49ae"/>
   </p:notesMasterIdLst>
   <p:sldIdLst>
-    <p:sldId xmlns:r="http://schemas.openxmlformats.org/officeDocument/2006/relationships" id="256" r:id="Rac4065aac5d94720"/>
-    <p:sldId xmlns:r="http://schemas.openxmlformats.org/officeDocument/2006/relationships" id="257" r:id="R0d6de38e578949f5"/>
-    <p:sldId xmlns:r="http://schemas.openxmlformats.org/officeDocument/2006/relationships" id="258" r:id="Rd9867c89850a4c05"/>
-    <p:sldId xmlns:r="http://schemas.openxmlformats.org/officeDocument/2006/relationships" id="259" r:id="Rab896e33f23f48be"/>
-    <p:sldId xmlns:r="http://schemas.openxmlformats.org/officeDocument/2006/relationships" id="260" r:id="R956d1e4cc8b64fee"/>
-    <p:sldId xmlns:r="http://schemas.openxmlformats.org/officeDocument/2006/relationships" id="261" r:id="Ra3683018b77f451b"/>
-    <p:sldId xmlns:r="http://schemas.openxmlformats.org/officeDocument/2006/relationships" id="262" r:id="R35b55ec2c7de4fd8"/>
-    <p:sldId xmlns:r="http://schemas.openxmlformats.org/officeDocument/2006/relationships" id="263" r:id="Rac9db0e2e328430c"/>
-    <p:sldId xmlns:r="http://schemas.openxmlformats.org/officeDocument/2006/relationships" id="264" r:id="Ra2f4f42fca7e444c"/>
-    <p:sldId xmlns:r="http://schemas.openxmlformats.org/officeDocument/2006/relationships" id="265" r:id="R0356341e002e4b84"/>
-    <p:sldId xmlns:r="http://schemas.openxmlformats.org/officeDocument/2006/relationships" id="266" r:id="Reb246f5a752e43f0"/>
-    <p:sldId xmlns:r="http://schemas.openxmlformats.org/officeDocument/2006/relationships" id="267" r:id="Re28e20a4565e404e"/>
-    <p:sldId xmlns:r="http://schemas.openxmlformats.org/officeDocument/2006/relationships" id="268" r:id="R14cd03a4ecdf4489"/>
+    <p:sldId xmlns:r="http://schemas.openxmlformats.org/officeDocument/2006/relationships" id="256" r:id="Rd08ab3ce0f934648"/>
+    <p:sldId xmlns:r="http://schemas.openxmlformats.org/officeDocument/2006/relationships" id="257" r:id="Ra097b812b6df47af"/>
+    <p:sldId xmlns:r="http://schemas.openxmlformats.org/officeDocument/2006/relationships" id="258" r:id="R14399fbdc88f4876"/>
+    <p:sldId xmlns:r="http://schemas.openxmlformats.org/officeDocument/2006/relationships" id="259" r:id="R2ee01b1426d34125"/>
+    <p:sldId xmlns:r="http://schemas.openxmlformats.org/officeDocument/2006/relationships" id="260" r:id="R830f9871d34c44d2"/>
+    <p:sldId xmlns:r="http://schemas.openxmlformats.org/officeDocument/2006/relationships" id="261" r:id="R0bd237496b984e1e"/>
+    <p:sldId xmlns:r="http://schemas.openxmlformats.org/officeDocument/2006/relationships" id="262" r:id="Rc358a63dc26545a4"/>
+    <p:sldId xmlns:r="http://schemas.openxmlformats.org/officeDocument/2006/relationships" id="263" r:id="R50665e7e97914636"/>
+    <p:sldId xmlns:r="http://schemas.openxmlformats.org/officeDocument/2006/relationships" id="264" r:id="Rcaf63838c33445f7"/>
+    <p:sldId xmlns:r="http://schemas.openxmlformats.org/officeDocument/2006/relationships" id="265" r:id="Rd190253fd45d4a4c"/>
+    <p:sldId xmlns:r="http://schemas.openxmlformats.org/officeDocument/2006/relationships" id="266" r:id="R9c985ca745294518"/>
+    <p:sldId xmlns:r="http://schemas.openxmlformats.org/officeDocument/2006/relationships" id="267" r:id="Rd1ca4f5778804283"/>
+    <p:sldId xmlns:r="http://schemas.openxmlformats.org/officeDocument/2006/relationships" id="268" r:id="R4403f97f3e7e45aa"/>
   </p:sldIdLst>
   <p:sldSz cx="12192000" cy="6858000"/>
   <p:notesSz cx="6858000" cy="9144000"/>
@@ -1405,7 +1405,7 @@
   </p:cSld>
   <p:clrMap bg1="lt1" tx1="dk1" bg2="lt2" tx2="dk2" accent1="accent1" accent2="accent2" accent3="accent3" accent4="accent4" accent5="accent5" accent6="accent6" hlink="hlink" folHlink="folHlink"/>
   <p:sldLayoutIdLst>
-    <p:sldLayoutId xmlns:r="http://schemas.openxmlformats.org/officeDocument/2006/relationships" id="2147483649" r:id="R8634a4ee80034ec4"/>
+    <p:sldLayoutId xmlns:r="http://schemas.openxmlformats.org/officeDocument/2006/relationships" id="2147483649" r:id="R6922189ee89d4af0"/>
   </p:sldLayoutIdLst>
   <p:txStyles>
     <p:titleStyle>
@@ -1956,7 +1956,7 @@
           <p:cNvPr id="1" name="cover-rule">
             <a:extLst xmlns:a="http://schemas.openxmlformats.org/drawingml/2006/main">
               <a:ext uri="{FF2B5EF4-FFF2-40B4-BE49-F238E27FC236}">
-                <a16:creationId xmlns:a16="http://schemas.microsoft.com/office/drawing/2014/main" id="{1644DFF3-86FA-414B-8A21-5509D5C0872D}"/>
+                <a16:creationId xmlns:a16="http://schemas.microsoft.com/office/drawing/2014/main" id="{9E3FAFF8-1D26-46CF-9EA0-F6D9B1C7AA1D}"/>
               </a:ext>
             </a:extLst>
           </p:cNvPr>
@@ -1989,7 +1989,7 @@
           <p:cNvPr id="2" name="cover-ring-1">
             <a:extLst xmlns:a="http://schemas.openxmlformats.org/drawingml/2006/main">
               <a:ext uri="{FF2B5EF4-FFF2-40B4-BE49-F238E27FC236}">
-                <a16:creationId xmlns:a16="http://schemas.microsoft.com/office/drawing/2014/main" id="{E15AF398-BD62-4450-9943-B4D49C426E65}"/>
+                <a16:creationId xmlns:a16="http://schemas.microsoft.com/office/drawing/2014/main" id="{3DD5F489-65E0-41A6-885D-82F38C6CA547}"/>
               </a:ext>
             </a:extLst>
           </p:cNvPr>
@@ -2020,7 +2020,7 @@
           <p:cNvPr id="3" name="cover-ring-2">
             <a:extLst xmlns:a="http://schemas.openxmlformats.org/drawingml/2006/main">
               <a:ext uri="{FF2B5EF4-FFF2-40B4-BE49-F238E27FC236}">
-                <a16:creationId xmlns:a16="http://schemas.microsoft.com/office/drawing/2014/main" id="{E13A810B-FC53-4625-B1A7-BBF86ACC21C9}"/>
+                <a16:creationId xmlns:a16="http://schemas.microsoft.com/office/drawing/2014/main" id="{44F50904-509F-44C7-A146-EF9C786C8E39}"/>
               </a:ext>
             </a:extLst>
           </p:cNvPr>
@@ -2051,7 +2051,7 @@
           <p:cNvPr id="4" name="cover-core">
             <a:extLst xmlns:a="http://schemas.openxmlformats.org/drawingml/2006/main">
               <a:ext uri="{FF2B5EF4-FFF2-40B4-BE49-F238E27FC236}">
-                <a16:creationId xmlns:a16="http://schemas.microsoft.com/office/drawing/2014/main" id="{5FAF4477-5300-445C-BEAA-78961C131809}"/>
+                <a16:creationId xmlns:a16="http://schemas.microsoft.com/office/drawing/2014/main" id="{B4B21456-34E9-4484-9D3C-4798592D78B0}"/>
               </a:ext>
             </a:extLst>
           </p:cNvPr>
@@ -2084,7 +2084,7 @@
           <p:cNvPr id="5" name="cover-line-1">
             <a:extLst xmlns:a="http://schemas.openxmlformats.org/drawingml/2006/main">
               <a:ext uri="{FF2B5EF4-FFF2-40B4-BE49-F238E27FC236}">
-                <a16:creationId xmlns:a16="http://schemas.microsoft.com/office/drawing/2014/main" id="{8D500D18-FFBC-41F0-95BF-27E4BFA1FFE5}"/>
+                <a16:creationId xmlns:a16="http://schemas.microsoft.com/office/drawing/2014/main" id="{CEB936FD-CCBE-48FC-B784-E2EE16702DF8}"/>
               </a:ext>
             </a:extLst>
           </p:cNvPr>
@@ -2115,7 +2115,7 @@
           <p:cNvPr id="6" name="cover-line-2">
             <a:extLst xmlns:a="http://schemas.openxmlformats.org/drawingml/2006/main">
               <a:ext uri="{FF2B5EF4-FFF2-40B4-BE49-F238E27FC236}">
-                <a16:creationId xmlns:a16="http://schemas.microsoft.com/office/drawing/2014/main" id="{3587F72E-CAE7-4FE0-B90F-78E1606BA9A0}"/>
+                <a16:creationId xmlns:a16="http://schemas.microsoft.com/office/drawing/2014/main" id="{E1BD70FA-B75C-40AA-A90F-1A28907BDD8B}"/>
               </a:ext>
             </a:extLst>
           </p:cNvPr>
@@ -2146,7 +2146,7 @@
           <p:cNvPr id="7" name="cover-eyebrow">
             <a:extLst xmlns:a="http://schemas.openxmlformats.org/drawingml/2006/main">
               <a:ext uri="{FF2B5EF4-FFF2-40B4-BE49-F238E27FC236}">
-                <a16:creationId xmlns:a16="http://schemas.microsoft.com/office/drawing/2014/main" id="{4CFBB355-3EDF-40F1-9066-BC274EFCDCD4}"/>
+                <a16:creationId xmlns:a16="http://schemas.microsoft.com/office/drawing/2014/main" id="{DF458740-E20B-4C40-B76B-6072BC2206B4}"/>
               </a:ext>
             </a:extLst>
           </p:cNvPr>
@@ -2204,7 +2204,7 @@
           <p:cNvPr id="8" name="cover-title">
             <a:extLst xmlns:a="http://schemas.openxmlformats.org/drawingml/2006/main">
               <a:ext uri="{FF2B5EF4-FFF2-40B4-BE49-F238E27FC236}">
-                <a16:creationId xmlns:a16="http://schemas.microsoft.com/office/drawing/2014/main" id="{2E3B7E7D-E109-4B8A-A977-5386B7B64F3C}"/>
+                <a16:creationId xmlns:a16="http://schemas.microsoft.com/office/drawing/2014/main" id="{790E07EA-30C2-4E3D-97D0-229FA84ABD54}"/>
               </a:ext>
             </a:extLst>
           </p:cNvPr>
@@ -2262,7 +2262,7 @@
           <p:cNvPr id="9" name="cover-subtitle">
             <a:extLst xmlns:a="http://schemas.openxmlformats.org/drawingml/2006/main">
               <a:ext uri="{FF2B5EF4-FFF2-40B4-BE49-F238E27FC236}">
-                <a16:creationId xmlns:a16="http://schemas.microsoft.com/office/drawing/2014/main" id="{1638AD06-F653-4C37-BDD9-CA7841D574C7}"/>
+                <a16:creationId xmlns:a16="http://schemas.microsoft.com/office/drawing/2014/main" id="{D66D2DAB-9531-444B-A6A0-DD4A22DDBD00}"/>
               </a:ext>
             </a:extLst>
           </p:cNvPr>
@@ -2324,7 +2324,7 @@
           <p:cNvPr id="10" name="cover-lead">
             <a:extLst xmlns:a="http://schemas.openxmlformats.org/drawingml/2006/main">
               <a:ext uri="{FF2B5EF4-FFF2-40B4-BE49-F238E27FC236}">
-                <a16:creationId xmlns:a16="http://schemas.microsoft.com/office/drawing/2014/main" id="{C10E0D05-5FD4-4F66-BB73-F851FA931219}"/>
+                <a16:creationId xmlns:a16="http://schemas.microsoft.com/office/drawing/2014/main" id="{FA3927FA-01F5-4C20-91E0-A6D724AF7C64}"/>
               </a:ext>
             </a:extLst>
           </p:cNvPr>
@@ -2349,7 +2349,7 @@
         </p:spPr>
         <p:txBody>
           <a:bodyPr xmlns:a="http://schemas.openxmlformats.org/drawingml/2006/main" lIns="0" tIns="0" rIns="0" bIns="0" anchor="t">
-            <a:normAutofit fontScale="78988"/>
+            <a:normAutofit fontScale="80917"/>
           </a:bodyPr>
           <a:lstStyle xmlns:a="http://schemas.openxmlformats.org/drawingml/2006/main"/>
           <a:p xmlns:a="http://schemas.openxmlformats.org/drawingml/2006/main">
@@ -2372,7 +2372,7 @@
                 <a:ea typeface="PingFang SC"/>
                 <a:cs typeface="PingFang SC"/>
               </a:rPr>
-              <a:t>行业 AI 项目最容易出现的误区，是先购买模型或平台，再四处寻找它能解决的问题。演示中的回答流畅、图片漂亮，并不等于真实流程更快、更准或更安全。落地判断必须回到一个朴素问题…</a:t>
+              <a:t>行业 AI 项目最容易出现的误区；是先购买模型或平台；再四处寻找它能解决的问题；演示中的回答流畅、图片漂亮；并不等于真实流程更快、更准或更安全；落地判断必须回到一个朴素问题</a:t>
             </a:r>
           </a:p>
         </p:txBody>
@@ -2382,7 +2382,7 @@
           <p:cNvPr id="11" name="cover-course">
             <a:extLst xmlns:a="http://schemas.openxmlformats.org/drawingml/2006/main">
               <a:ext uri="{FF2B5EF4-FFF2-40B4-BE49-F238E27FC236}">
-                <a16:creationId xmlns:a16="http://schemas.microsoft.com/office/drawing/2014/main" id="{DF57793B-1281-4B06-BF7C-B047AB1A20E5}"/>
+                <a16:creationId xmlns:a16="http://schemas.microsoft.com/office/drawing/2014/main" id="{F4928327-A7E5-47FC-A171-64AF6FA74712}"/>
               </a:ext>
             </a:extLst>
           </p:cNvPr>
@@ -2440,7 +2440,7 @@
           <p:cNvPr id="12" name="cover-id">
             <a:extLst xmlns:a="http://schemas.openxmlformats.org/drawingml/2006/main">
               <a:ext uri="{FF2B5EF4-FFF2-40B4-BE49-F238E27FC236}">
-                <a16:creationId xmlns:a16="http://schemas.microsoft.com/office/drawing/2014/main" id="{2582F300-C761-492D-A2AD-D0F1B1DBFEF1}"/>
+                <a16:creationId xmlns:a16="http://schemas.microsoft.com/office/drawing/2014/main" id="{276893B7-BA70-4EAD-98D3-0BF524E344F2}"/>
               </a:ext>
             </a:extLst>
           </p:cNvPr>
@@ -2496,7 +2496,7 @@
     </p:spTree>
     <p:extLst>
       <p:ext uri="{BB962C8B-B14F-4D97-AF65-F5344CB8AC3E}">
-        <p14:creationId xmlns:p14="http://schemas.microsoft.com/office/powerpoint/2010/main" val="5898943"/>
+        <p14:creationId xmlns:p14="http://schemas.microsoft.com/office/powerpoint/2010/main" val="312304544"/>
       </p:ext>
     </p:extLst>
   </p:cSld>
@@ -2527,7 +2527,7 @@
           <p:cNvPr id="1" name="s10-rule">
             <a:extLst xmlns:a="http://schemas.openxmlformats.org/drawingml/2006/main">
               <a:ext uri="{FF2B5EF4-FFF2-40B4-BE49-F238E27FC236}">
-                <a16:creationId xmlns:a16="http://schemas.microsoft.com/office/drawing/2014/main" id="{887EDFEF-905B-464B-96B9-4107F8950A4C}"/>
+                <a16:creationId xmlns:a16="http://schemas.microsoft.com/office/drawing/2014/main" id="{E2427349-52F7-40DA-A0F8-7963B1CA3EC3}"/>
               </a:ext>
             </a:extLst>
           </p:cNvPr>
@@ -2560,7 +2560,7 @@
           <p:cNvPr id="2" name="s10-eyebrow">
             <a:extLst xmlns:a="http://schemas.openxmlformats.org/drawingml/2006/main">
               <a:ext uri="{FF2B5EF4-FFF2-40B4-BE49-F238E27FC236}">
-                <a16:creationId xmlns:a16="http://schemas.microsoft.com/office/drawing/2014/main" id="{EFD8BB8E-27F9-48D9-B1D1-D88A71398010}"/>
+                <a16:creationId xmlns:a16="http://schemas.microsoft.com/office/drawing/2014/main" id="{4F389CD0-7A3F-4D06-8CA4-7A5F0BD7D9FE}"/>
               </a:ext>
             </a:extLst>
           </p:cNvPr>
@@ -2618,7 +2618,7 @@
           <p:cNvPr id="3" name="s10-title">
             <a:extLst xmlns:a="http://schemas.openxmlformats.org/drawingml/2006/main">
               <a:ext uri="{FF2B5EF4-FFF2-40B4-BE49-F238E27FC236}">
-                <a16:creationId xmlns:a16="http://schemas.microsoft.com/office/drawing/2014/main" id="{DE2E2F36-5F84-4CA8-BEB8-C7BDCC15A26D}"/>
+                <a16:creationId xmlns:a16="http://schemas.microsoft.com/office/drawing/2014/main" id="{DAC2C490-158B-4C50-8FD3-83418F68485B}"/>
               </a:ext>
             </a:extLst>
           </p:cNvPr>
@@ -2676,7 +2676,7 @@
           <p:cNvPr id="4" name="s10-footer">
             <a:extLst xmlns:a="http://schemas.openxmlformats.org/drawingml/2006/main">
               <a:ext uri="{FF2B5EF4-FFF2-40B4-BE49-F238E27FC236}">
-                <a16:creationId xmlns:a16="http://schemas.microsoft.com/office/drawing/2014/main" id="{48A8E6C6-A2B1-4D2D-B07F-D6FC40C599C2}"/>
+                <a16:creationId xmlns:a16="http://schemas.microsoft.com/office/drawing/2014/main" id="{25014AE0-B2AE-43F5-B613-ADB4D89071B9}"/>
               </a:ext>
             </a:extLst>
           </p:cNvPr>
@@ -2707,7 +2707,7 @@
           <p:cNvPr id="5" name="s10-identity">
             <a:extLst xmlns:a="http://schemas.openxmlformats.org/drawingml/2006/main">
               <a:ext uri="{FF2B5EF4-FFF2-40B4-BE49-F238E27FC236}">
-                <a16:creationId xmlns:a16="http://schemas.microsoft.com/office/drawing/2014/main" id="{BC7AC866-1635-4296-A158-F7531F7B655C}"/>
+                <a16:creationId xmlns:a16="http://schemas.microsoft.com/office/drawing/2014/main" id="{9688E158-3522-4791-ACE5-22244438EDAA}"/>
               </a:ext>
             </a:extLst>
           </p:cNvPr>
@@ -2765,7 +2765,7 @@
           <p:cNvPr id="6" name="case-title">
             <a:extLst xmlns:a="http://schemas.openxmlformats.org/drawingml/2006/main">
               <a:ext uri="{FF2B5EF4-FFF2-40B4-BE49-F238E27FC236}">
-                <a16:creationId xmlns:a16="http://schemas.microsoft.com/office/drawing/2014/main" id="{DC8071C5-4271-45E0-80F6-8030A682F0F2}"/>
+                <a16:creationId xmlns:a16="http://schemas.microsoft.com/office/drawing/2014/main" id="{C5BC596A-B5BB-4A05-BD91-8ED93307AB98}"/>
               </a:ext>
             </a:extLst>
           </p:cNvPr>
@@ -2829,7 +2829,7 @@
           <p:cNvPr id="7" name="case-row-0">
             <a:extLst xmlns:a="http://schemas.openxmlformats.org/drawingml/2006/main">
               <a:ext uri="{FF2B5EF4-FFF2-40B4-BE49-F238E27FC236}">
-                <a16:creationId xmlns:a16="http://schemas.microsoft.com/office/drawing/2014/main" id="{D314A21B-1D57-4E43-83B2-689C0128B0DF}"/>
+                <a16:creationId xmlns:a16="http://schemas.microsoft.com/office/drawing/2014/main" id="{6AA54462-B479-4A46-8FEF-E2A2321DA6DD}"/>
               </a:ext>
             </a:extLst>
           </p:cNvPr>
@@ -2893,7 +2893,7 @@
           <p:cNvPr id="8" name="case-row-1">
             <a:extLst xmlns:a="http://schemas.openxmlformats.org/drawingml/2006/main">
               <a:ext uri="{FF2B5EF4-FFF2-40B4-BE49-F238E27FC236}">
-                <a16:creationId xmlns:a16="http://schemas.microsoft.com/office/drawing/2014/main" id="{2CBB5C42-48F8-4DBA-A25A-6E32C865F044}"/>
+                <a16:creationId xmlns:a16="http://schemas.microsoft.com/office/drawing/2014/main" id="{BDE538BB-9FCD-479D-9B00-5F0FFA167E7E}"/>
               </a:ext>
             </a:extLst>
           </p:cNvPr>
@@ -2957,7 +2957,7 @@
           <p:cNvPr id="9" name="case-row-2">
             <a:extLst xmlns:a="http://schemas.openxmlformats.org/drawingml/2006/main">
               <a:ext uri="{FF2B5EF4-FFF2-40B4-BE49-F238E27FC236}">
-                <a16:creationId xmlns:a16="http://schemas.microsoft.com/office/drawing/2014/main" id="{2FF166E8-9D6D-46EA-8A38-2F7F1E006B1F}"/>
+                <a16:creationId xmlns:a16="http://schemas.microsoft.com/office/drawing/2014/main" id="{72609B32-4AB3-4EA0-A228-CAD7B58257C2}"/>
               </a:ext>
             </a:extLst>
           </p:cNvPr>
@@ -2981,7 +2981,7 @@
           </a:solidFill>
           <a:ln xmlns:a="http://schemas.openxmlformats.org/drawingml/2006/main" w="9525">
             <a:solidFill>
-              <a:srgbClr val="E5783F"/>
+              <a:srgbClr val="9A3F16"/>
             </a:solidFill>
             <a:prstDash val="solid"/>
           </a:ln>
@@ -3021,7 +3021,7 @@
           <p:cNvPr id="10" name="s10-takeaway-rule">
             <a:extLst xmlns:a="http://schemas.openxmlformats.org/drawingml/2006/main">
               <a:ext uri="{FF2B5EF4-FFF2-40B4-BE49-F238E27FC236}">
-                <a16:creationId xmlns:a16="http://schemas.microsoft.com/office/drawing/2014/main" id="{EFA89D9B-2D5F-4077-8770-9DAF34A74FA1}"/>
+                <a16:creationId xmlns:a16="http://schemas.microsoft.com/office/drawing/2014/main" id="{52839893-AE32-4DEA-9E89-88880EDE437B}"/>
               </a:ext>
             </a:extLst>
           </p:cNvPr>
@@ -3054,7 +3054,7 @@
           <p:cNvPr id="11" name="s10-takeaway">
             <a:extLst xmlns:a="http://schemas.openxmlformats.org/drawingml/2006/main">
               <a:ext uri="{FF2B5EF4-FFF2-40B4-BE49-F238E27FC236}">
-                <a16:creationId xmlns:a16="http://schemas.microsoft.com/office/drawing/2014/main" id="{D23283D2-6CAE-4884-AF91-CD92FA0CE54F}"/>
+                <a16:creationId xmlns:a16="http://schemas.microsoft.com/office/drawing/2014/main" id="{AB54A642-173B-411C-8072-9B7532F3389E}"/>
               </a:ext>
             </a:extLst>
           </p:cNvPr>
@@ -3110,7 +3110,7 @@
     </p:spTree>
     <p:extLst>
       <p:ext uri="{BB962C8B-B14F-4D97-AF65-F5344CB8AC3E}">
-        <p14:creationId xmlns:p14="http://schemas.microsoft.com/office/powerpoint/2010/main" val="1146399363"/>
+        <p14:creationId xmlns:p14="http://schemas.microsoft.com/office/powerpoint/2010/main" val="67973387"/>
       </p:ext>
     </p:extLst>
   </p:cSld>
@@ -3141,7 +3141,7 @@
           <p:cNvPr id="1" name="s11-rule">
             <a:extLst xmlns:a="http://schemas.openxmlformats.org/drawingml/2006/main">
               <a:ext uri="{FF2B5EF4-FFF2-40B4-BE49-F238E27FC236}">
-                <a16:creationId xmlns:a16="http://schemas.microsoft.com/office/drawing/2014/main" id="{B4501468-EF5A-4A8A-8501-7E966623FF74}"/>
+                <a16:creationId xmlns:a16="http://schemas.microsoft.com/office/drawing/2014/main" id="{9A9A4BB7-A094-4F97-806D-019742174EAC}"/>
               </a:ext>
             </a:extLst>
           </p:cNvPr>
@@ -3174,7 +3174,7 @@
           <p:cNvPr id="2" name="s11-eyebrow">
             <a:extLst xmlns:a="http://schemas.openxmlformats.org/drawingml/2006/main">
               <a:ext uri="{FF2B5EF4-FFF2-40B4-BE49-F238E27FC236}">
-                <a16:creationId xmlns:a16="http://schemas.microsoft.com/office/drawing/2014/main" id="{9852AAEE-C4DF-4208-94C0-2C51836DF317}"/>
+                <a16:creationId xmlns:a16="http://schemas.microsoft.com/office/drawing/2014/main" id="{F50CAB27-4333-4DE2-8C5F-52D28C100F72}"/>
               </a:ext>
             </a:extLst>
           </p:cNvPr>
@@ -3232,7 +3232,7 @@
           <p:cNvPr id="3" name="s11-title">
             <a:extLst xmlns:a="http://schemas.openxmlformats.org/drawingml/2006/main">
               <a:ext uri="{FF2B5EF4-FFF2-40B4-BE49-F238E27FC236}">
-                <a16:creationId xmlns:a16="http://schemas.microsoft.com/office/drawing/2014/main" id="{F5D729BC-B1BA-4588-822C-A317BD8EFCF8}"/>
+                <a16:creationId xmlns:a16="http://schemas.microsoft.com/office/drawing/2014/main" id="{2D2D979D-864A-492F-A1A2-8B3ED9EBB5B9}"/>
               </a:ext>
             </a:extLst>
           </p:cNvPr>
@@ -3280,7 +3280,7 @@
                 <a:ea typeface="PingFang SC"/>
                 <a:cs typeface="PingFang SC"/>
               </a:rPr>
-              <a:t>把方法落实为可验证的行动</a:t>
+              <a:t>行业 AI 落地与 ROI：一次可验收练习</a:t>
             </a:r>
           </a:p>
         </p:txBody>
@@ -3290,7 +3290,7 @@
           <p:cNvPr id="4" name="s11-footer">
             <a:extLst xmlns:a="http://schemas.openxmlformats.org/drawingml/2006/main">
               <a:ext uri="{FF2B5EF4-FFF2-40B4-BE49-F238E27FC236}">
-                <a16:creationId xmlns:a16="http://schemas.microsoft.com/office/drawing/2014/main" id="{6F3F29F9-915A-4B48-8690-A027328F92A5}"/>
+                <a16:creationId xmlns:a16="http://schemas.microsoft.com/office/drawing/2014/main" id="{A052230E-F5A3-489A-B508-A30FE45CEB5B}"/>
               </a:ext>
             </a:extLst>
           </p:cNvPr>
@@ -3321,7 +3321,7 @@
           <p:cNvPr id="5" name="s11-identity">
             <a:extLst xmlns:a="http://schemas.openxmlformats.org/drawingml/2006/main">
               <a:ext uri="{FF2B5EF4-FFF2-40B4-BE49-F238E27FC236}">
-                <a16:creationId xmlns:a16="http://schemas.microsoft.com/office/drawing/2014/main" id="{5316CD82-C55B-490A-8845-93A71E209C74}"/>
+                <a16:creationId xmlns:a16="http://schemas.microsoft.com/office/drawing/2014/main" id="{FBC71A5C-1E32-487B-9EE5-7B25F9C0E3F8}"/>
               </a:ext>
             </a:extLst>
           </p:cNvPr>
@@ -3379,7 +3379,7 @@
           <p:cNvPr id="6" name="practice-circle-0">
             <a:extLst xmlns:a="http://schemas.openxmlformats.org/drawingml/2006/main">
               <a:ext uri="{FF2B5EF4-FFF2-40B4-BE49-F238E27FC236}">
-                <a16:creationId xmlns:a16="http://schemas.microsoft.com/office/drawing/2014/main" id="{F93C9438-2B1A-449E-AECD-7B3B008F234E}"/>
+                <a16:creationId xmlns:a16="http://schemas.microsoft.com/office/drawing/2014/main" id="{16057B2D-A82F-40BB-B568-3140D6515EA3}"/>
               </a:ext>
             </a:extLst>
           </p:cNvPr>
@@ -3412,7 +3412,7 @@
           <p:cNvPr id="7" name="practice-number-0">
             <a:extLst xmlns:a="http://schemas.openxmlformats.org/drawingml/2006/main">
               <a:ext uri="{FF2B5EF4-FFF2-40B4-BE49-F238E27FC236}">
-                <a16:creationId xmlns:a16="http://schemas.microsoft.com/office/drawing/2014/main" id="{DA7C5F43-A20E-4604-9410-DF3F8ED7F962}"/>
+                <a16:creationId xmlns:a16="http://schemas.microsoft.com/office/drawing/2014/main" id="{984F2046-77F7-4B6A-8324-3F2BEE406DA7}"/>
               </a:ext>
             </a:extLst>
           </p:cNvPr>
@@ -3470,7 +3470,7 @@
           <p:cNvPr id="8" name="practice-item-0">
             <a:extLst xmlns:a="http://schemas.openxmlformats.org/drawingml/2006/main">
               <a:ext uri="{FF2B5EF4-FFF2-40B4-BE49-F238E27FC236}">
-                <a16:creationId xmlns:a16="http://schemas.microsoft.com/office/drawing/2014/main" id="{15423574-4EE4-4A29-A409-1B2AF2AA7006}"/>
+                <a16:creationId xmlns:a16="http://schemas.microsoft.com/office/drawing/2014/main" id="{091635AA-5F1E-4D64-9147-565021A7E304}"/>
               </a:ext>
             </a:extLst>
           </p:cNvPr>
@@ -3534,7 +3534,7 @@
           <p:cNvPr id="9" name="practice-connector-0">
             <a:extLst xmlns:a="http://schemas.openxmlformats.org/drawingml/2006/main">
               <a:ext uri="{FF2B5EF4-FFF2-40B4-BE49-F238E27FC236}">
-                <a16:creationId xmlns:a16="http://schemas.microsoft.com/office/drawing/2014/main" id="{5D30C3A8-138E-43FF-83A5-09731CF2EDE8}"/>
+                <a16:creationId xmlns:a16="http://schemas.microsoft.com/office/drawing/2014/main" id="{946856A2-3E31-4D86-BBDE-6306C79406F3}"/>
               </a:ext>
             </a:extLst>
           </p:cNvPr>
@@ -3554,7 +3554,7 @@
           <a:noFill xmlns:a="http://schemas.openxmlformats.org/drawingml/2006/main"/>
           <a:ln xmlns:a="http://schemas.openxmlformats.org/drawingml/2006/main" w="28575">
             <a:solidFill>
-              <a:srgbClr val="E5783F"/>
+              <a:srgbClr val="9A3F16"/>
             </a:solidFill>
             <a:prstDash val="solid"/>
           </a:ln>
@@ -3565,7 +3565,7 @@
           <p:cNvPr id="10" name="practice-circle-1">
             <a:extLst xmlns:a="http://schemas.openxmlformats.org/drawingml/2006/main">
               <a:ext uri="{FF2B5EF4-FFF2-40B4-BE49-F238E27FC236}">
-                <a16:creationId xmlns:a16="http://schemas.microsoft.com/office/drawing/2014/main" id="{A61335C9-C9CF-4CC7-8F20-A076DD568C97}"/>
+                <a16:creationId xmlns:a16="http://schemas.microsoft.com/office/drawing/2014/main" id="{71972BAF-C163-4669-839D-7589C1B0FDAD}"/>
               </a:ext>
             </a:extLst>
           </p:cNvPr>
@@ -3598,7 +3598,7 @@
           <p:cNvPr id="11" name="practice-number-1">
             <a:extLst xmlns:a="http://schemas.openxmlformats.org/drawingml/2006/main">
               <a:ext uri="{FF2B5EF4-FFF2-40B4-BE49-F238E27FC236}">
-                <a16:creationId xmlns:a16="http://schemas.microsoft.com/office/drawing/2014/main" id="{D7C91D56-9E27-4A71-B8B7-EEAFCFC6786C}"/>
+                <a16:creationId xmlns:a16="http://schemas.microsoft.com/office/drawing/2014/main" id="{D9774060-2DB7-4448-A43B-14330E1087C6}"/>
               </a:ext>
             </a:extLst>
           </p:cNvPr>
@@ -3656,7 +3656,7 @@
           <p:cNvPr id="12" name="practice-item-1">
             <a:extLst xmlns:a="http://schemas.openxmlformats.org/drawingml/2006/main">
               <a:ext uri="{FF2B5EF4-FFF2-40B4-BE49-F238E27FC236}">
-                <a16:creationId xmlns:a16="http://schemas.microsoft.com/office/drawing/2014/main" id="{18F8698B-703D-4064-845D-0AE8B82FED39}"/>
+                <a16:creationId xmlns:a16="http://schemas.microsoft.com/office/drawing/2014/main" id="{6B8A9C8F-43D0-4C73-8BF2-88EA0F02A47C}"/>
               </a:ext>
             </a:extLst>
           </p:cNvPr>
@@ -3720,7 +3720,7 @@
           <p:cNvPr id="13" name="practice-connector-1">
             <a:extLst xmlns:a="http://schemas.openxmlformats.org/drawingml/2006/main">
               <a:ext uri="{FF2B5EF4-FFF2-40B4-BE49-F238E27FC236}">
-                <a16:creationId xmlns:a16="http://schemas.microsoft.com/office/drawing/2014/main" id="{D16ED79A-8BA1-4E74-AAE1-597106344201}"/>
+                <a16:creationId xmlns:a16="http://schemas.microsoft.com/office/drawing/2014/main" id="{04EFEA6B-6679-4BF5-8890-8390CAA26289}"/>
               </a:ext>
             </a:extLst>
           </p:cNvPr>
@@ -3740,7 +3740,7 @@
           <a:noFill xmlns:a="http://schemas.openxmlformats.org/drawingml/2006/main"/>
           <a:ln xmlns:a="http://schemas.openxmlformats.org/drawingml/2006/main" w="28575">
             <a:solidFill>
-              <a:srgbClr val="E5783F"/>
+              <a:srgbClr val="9A3F16"/>
             </a:solidFill>
             <a:prstDash val="solid"/>
           </a:ln>
@@ -3751,7 +3751,7 @@
           <p:cNvPr id="14" name="practice-circle-2">
             <a:extLst xmlns:a="http://schemas.openxmlformats.org/drawingml/2006/main">
               <a:ext uri="{FF2B5EF4-FFF2-40B4-BE49-F238E27FC236}">
-                <a16:creationId xmlns:a16="http://schemas.microsoft.com/office/drawing/2014/main" id="{D1C6F3C8-30D4-4058-84E5-F2F4835CB492}"/>
+                <a16:creationId xmlns:a16="http://schemas.microsoft.com/office/drawing/2014/main" id="{CD08845D-27F4-4CED-B2C1-599022018230}"/>
               </a:ext>
             </a:extLst>
           </p:cNvPr>
@@ -3769,7 +3769,7 @@
             <a:avLst/>
           </a:prstGeom>
           <a:solidFill xmlns:a="http://schemas.openxmlformats.org/drawingml/2006/main">
-            <a:srgbClr val="E5783F"/>
+            <a:srgbClr val="9A3F16"/>
           </a:solidFill>
           <a:ln xmlns:a="http://schemas.openxmlformats.org/drawingml/2006/main" w="28575">
             <a:solidFill>
@@ -3784,7 +3784,7 @@
           <p:cNvPr id="15" name="practice-number-2">
             <a:extLst xmlns:a="http://schemas.openxmlformats.org/drawingml/2006/main">
               <a:ext uri="{FF2B5EF4-FFF2-40B4-BE49-F238E27FC236}">
-                <a16:creationId xmlns:a16="http://schemas.microsoft.com/office/drawing/2014/main" id="{77167856-F617-4610-8CA3-B1C514CA6652}"/>
+                <a16:creationId xmlns:a16="http://schemas.microsoft.com/office/drawing/2014/main" id="{A9374991-E8A2-45F3-875E-DCA00C67A8A3}"/>
               </a:ext>
             </a:extLst>
           </p:cNvPr>
@@ -3842,7 +3842,7 @@
           <p:cNvPr id="16" name="practice-item-2">
             <a:extLst xmlns:a="http://schemas.openxmlformats.org/drawingml/2006/main">
               <a:ext uri="{FF2B5EF4-FFF2-40B4-BE49-F238E27FC236}">
-                <a16:creationId xmlns:a16="http://schemas.microsoft.com/office/drawing/2014/main" id="{E9749E6D-70D7-4647-9B01-1E377464D499}"/>
+                <a16:creationId xmlns:a16="http://schemas.microsoft.com/office/drawing/2014/main" id="{062D41AC-0E34-43A5-AEF9-8558EFF03A92}"/>
               </a:ext>
             </a:extLst>
           </p:cNvPr>
@@ -3866,7 +3866,7 @@
           </a:solidFill>
           <a:ln xmlns:a="http://schemas.openxmlformats.org/drawingml/2006/main" w="19050">
             <a:solidFill>
-              <a:srgbClr val="E5783F"/>
+              <a:srgbClr val="9A3F16"/>
             </a:solidFill>
             <a:prstDash val="solid"/>
           </a:ln>
@@ -3904,7 +3904,7 @@
     </p:spTree>
     <p:extLst>
       <p:ext uri="{BB962C8B-B14F-4D97-AF65-F5344CB8AC3E}">
-        <p14:creationId xmlns:p14="http://schemas.microsoft.com/office/powerpoint/2010/main" val="325332555"/>
+        <p14:creationId xmlns:p14="http://schemas.microsoft.com/office/powerpoint/2010/main" val="2013552921"/>
       </p:ext>
     </p:extLst>
   </p:cSld>
@@ -3935,7 +3935,7 @@
           <p:cNvPr id="1" name="s12-rule">
             <a:extLst xmlns:a="http://schemas.openxmlformats.org/drawingml/2006/main">
               <a:ext uri="{FF2B5EF4-FFF2-40B4-BE49-F238E27FC236}">
-                <a16:creationId xmlns:a16="http://schemas.microsoft.com/office/drawing/2014/main" id="{8502F009-60F3-4549-9EB8-4588343759F4}"/>
+                <a16:creationId xmlns:a16="http://schemas.microsoft.com/office/drawing/2014/main" id="{193D5C1E-6C5B-424D-AB85-8FF3B9BEF146}"/>
               </a:ext>
             </a:extLst>
           </p:cNvPr>
@@ -3968,7 +3968,7 @@
           <p:cNvPr id="2" name="s12-eyebrow">
             <a:extLst xmlns:a="http://schemas.openxmlformats.org/drawingml/2006/main">
               <a:ext uri="{FF2B5EF4-FFF2-40B4-BE49-F238E27FC236}">
-                <a16:creationId xmlns:a16="http://schemas.microsoft.com/office/drawing/2014/main" id="{BFD7A54F-78B6-4499-934C-F41C20BB8F34}"/>
+                <a16:creationId xmlns:a16="http://schemas.microsoft.com/office/drawing/2014/main" id="{2FE277EE-2987-4304-AB87-344DD40B3318}"/>
               </a:ext>
             </a:extLst>
           </p:cNvPr>
@@ -4026,7 +4026,7 @@
           <p:cNvPr id="3" name="s12-title">
             <a:extLst xmlns:a="http://schemas.openxmlformats.org/drawingml/2006/main">
               <a:ext uri="{FF2B5EF4-FFF2-40B4-BE49-F238E27FC236}">
-                <a16:creationId xmlns:a16="http://schemas.microsoft.com/office/drawing/2014/main" id="{FDA15300-9BB7-40CC-991D-FFD07A1CDEE3}"/>
+                <a16:creationId xmlns:a16="http://schemas.microsoft.com/office/drawing/2014/main" id="{6CACB4EF-DAD2-40B8-A9F5-EA4EBBE20605}"/>
               </a:ext>
             </a:extLst>
           </p:cNvPr>
@@ -4074,7 +4074,7 @@
                 <a:ea typeface="PingFang SC"/>
                 <a:cs typeface="PingFang SC"/>
               </a:rPr>
-              <a:t>带走三条可复用的判断原则</a:t>
+              <a:t>行业 AI 落地与 ROI：判断时先抓住三点</a:t>
             </a:r>
           </a:p>
         </p:txBody>
@@ -4084,7 +4084,7 @@
           <p:cNvPr id="4" name="s12-footer">
             <a:extLst xmlns:a="http://schemas.openxmlformats.org/drawingml/2006/main">
               <a:ext uri="{FF2B5EF4-FFF2-40B4-BE49-F238E27FC236}">
-                <a16:creationId xmlns:a16="http://schemas.microsoft.com/office/drawing/2014/main" id="{76CB8C08-3AF2-4415-AE9E-581C25C02450}"/>
+                <a16:creationId xmlns:a16="http://schemas.microsoft.com/office/drawing/2014/main" id="{80D9C438-5CAD-421F-84EF-B05206606F86}"/>
               </a:ext>
             </a:extLst>
           </p:cNvPr>
@@ -4115,7 +4115,7 @@
           <p:cNvPr id="5" name="s12-identity">
             <a:extLst xmlns:a="http://schemas.openxmlformats.org/drawingml/2006/main">
               <a:ext uri="{FF2B5EF4-FFF2-40B4-BE49-F238E27FC236}">
-                <a16:creationId xmlns:a16="http://schemas.microsoft.com/office/drawing/2014/main" id="{A0E01307-490D-4F0A-9A08-7E1A48150D0A}"/>
+                <a16:creationId xmlns:a16="http://schemas.microsoft.com/office/drawing/2014/main" id="{9B9ACE8F-8FDC-400F-9882-76EBC805B57F}"/>
               </a:ext>
             </a:extLst>
           </p:cNvPr>
@@ -4173,7 +4173,7 @@
           <p:cNvPr id="6" name="recap-circle-0">
             <a:extLst xmlns:a="http://schemas.openxmlformats.org/drawingml/2006/main">
               <a:ext uri="{FF2B5EF4-FFF2-40B4-BE49-F238E27FC236}">
-                <a16:creationId xmlns:a16="http://schemas.microsoft.com/office/drawing/2014/main" id="{92D1F4AB-91AA-4AE5-A6B2-6B72005A24F5}"/>
+                <a16:creationId xmlns:a16="http://schemas.microsoft.com/office/drawing/2014/main" id="{C10C04EA-985E-4ABF-939D-970A686E7E26}"/>
               </a:ext>
             </a:extLst>
           </p:cNvPr>
@@ -4206,7 +4206,7 @@
           <p:cNvPr id="7" name="recap-number-0">
             <a:extLst xmlns:a="http://schemas.openxmlformats.org/drawingml/2006/main">
               <a:ext uri="{FF2B5EF4-FFF2-40B4-BE49-F238E27FC236}">
-                <a16:creationId xmlns:a16="http://schemas.microsoft.com/office/drawing/2014/main" id="{5FD2B495-61D2-4562-9562-EB00FC518DF9}"/>
+                <a16:creationId xmlns:a16="http://schemas.microsoft.com/office/drawing/2014/main" id="{5581EC07-81AC-4EF5-A619-C8AFFD922AA0}"/>
               </a:ext>
             </a:extLst>
           </p:cNvPr>
@@ -4264,7 +4264,7 @@
           <p:cNvPr id="8" name="recap-item-0">
             <a:extLst xmlns:a="http://schemas.openxmlformats.org/drawingml/2006/main">
               <a:ext uri="{FF2B5EF4-FFF2-40B4-BE49-F238E27FC236}">
-                <a16:creationId xmlns:a16="http://schemas.microsoft.com/office/drawing/2014/main" id="{D720B91A-88FD-48E7-8A58-07BDCA0F6F10}"/>
+                <a16:creationId xmlns:a16="http://schemas.microsoft.com/office/drawing/2014/main" id="{112D250F-6AB8-4D4D-A914-A84EAD9ED572}"/>
               </a:ext>
             </a:extLst>
           </p:cNvPr>
@@ -4328,7 +4328,7 @@
           <p:cNvPr id="9" name="recap-connector-0">
             <a:extLst xmlns:a="http://schemas.openxmlformats.org/drawingml/2006/main">
               <a:ext uri="{FF2B5EF4-FFF2-40B4-BE49-F238E27FC236}">
-                <a16:creationId xmlns:a16="http://schemas.microsoft.com/office/drawing/2014/main" id="{21BE2197-9060-4683-A786-8CB8E2F1481C}"/>
+                <a16:creationId xmlns:a16="http://schemas.microsoft.com/office/drawing/2014/main" id="{C190A3F8-E4AB-4297-BACA-3221FD9031C7}"/>
               </a:ext>
             </a:extLst>
           </p:cNvPr>
@@ -4348,7 +4348,7 @@
           <a:noFill xmlns:a="http://schemas.openxmlformats.org/drawingml/2006/main"/>
           <a:ln xmlns:a="http://schemas.openxmlformats.org/drawingml/2006/main" w="28575">
             <a:solidFill>
-              <a:srgbClr val="E5783F"/>
+              <a:srgbClr val="9A3F16"/>
             </a:solidFill>
             <a:prstDash val="solid"/>
           </a:ln>
@@ -4359,7 +4359,7 @@
           <p:cNvPr id="10" name="recap-circle-1">
             <a:extLst xmlns:a="http://schemas.openxmlformats.org/drawingml/2006/main">
               <a:ext uri="{FF2B5EF4-FFF2-40B4-BE49-F238E27FC236}">
-                <a16:creationId xmlns:a16="http://schemas.microsoft.com/office/drawing/2014/main" id="{D8EAE9B8-E3BA-40F6-A48E-E25E5C764DCF}"/>
+                <a16:creationId xmlns:a16="http://schemas.microsoft.com/office/drawing/2014/main" id="{7BC2D9BB-63C4-408B-BFDB-00088AC27AD9}"/>
               </a:ext>
             </a:extLst>
           </p:cNvPr>
@@ -4392,7 +4392,7 @@
           <p:cNvPr id="11" name="recap-number-1">
             <a:extLst xmlns:a="http://schemas.openxmlformats.org/drawingml/2006/main">
               <a:ext uri="{FF2B5EF4-FFF2-40B4-BE49-F238E27FC236}">
-                <a16:creationId xmlns:a16="http://schemas.microsoft.com/office/drawing/2014/main" id="{A471963D-77CA-4EA0-85EE-B299E069CE39}"/>
+                <a16:creationId xmlns:a16="http://schemas.microsoft.com/office/drawing/2014/main" id="{05118521-61FF-4FDB-B274-5F3471730F07}"/>
               </a:ext>
             </a:extLst>
           </p:cNvPr>
@@ -4450,7 +4450,7 @@
           <p:cNvPr id="12" name="recap-item-1">
             <a:extLst xmlns:a="http://schemas.openxmlformats.org/drawingml/2006/main">
               <a:ext uri="{FF2B5EF4-FFF2-40B4-BE49-F238E27FC236}">
-                <a16:creationId xmlns:a16="http://schemas.microsoft.com/office/drawing/2014/main" id="{0E272E90-F069-4766-A679-D78FFB334C88}"/>
+                <a16:creationId xmlns:a16="http://schemas.microsoft.com/office/drawing/2014/main" id="{3872CCAA-A904-4196-AAA5-1C72F30CD639}"/>
               </a:ext>
             </a:extLst>
           </p:cNvPr>
@@ -4514,7 +4514,7 @@
           <p:cNvPr id="13" name="recap-connector-1">
             <a:extLst xmlns:a="http://schemas.openxmlformats.org/drawingml/2006/main">
               <a:ext uri="{FF2B5EF4-FFF2-40B4-BE49-F238E27FC236}">
-                <a16:creationId xmlns:a16="http://schemas.microsoft.com/office/drawing/2014/main" id="{351935B5-BED4-4FF7-8DF8-95CA8E560135}"/>
+                <a16:creationId xmlns:a16="http://schemas.microsoft.com/office/drawing/2014/main" id="{326B2A32-C3C3-43DA-A001-65EF4FEB424F}"/>
               </a:ext>
             </a:extLst>
           </p:cNvPr>
@@ -4534,7 +4534,7 @@
           <a:noFill xmlns:a="http://schemas.openxmlformats.org/drawingml/2006/main"/>
           <a:ln xmlns:a="http://schemas.openxmlformats.org/drawingml/2006/main" w="28575">
             <a:solidFill>
-              <a:srgbClr val="E5783F"/>
+              <a:srgbClr val="9A3F16"/>
             </a:solidFill>
             <a:prstDash val="solid"/>
           </a:ln>
@@ -4545,7 +4545,7 @@
           <p:cNvPr id="14" name="recap-circle-2">
             <a:extLst xmlns:a="http://schemas.openxmlformats.org/drawingml/2006/main">
               <a:ext uri="{FF2B5EF4-FFF2-40B4-BE49-F238E27FC236}">
-                <a16:creationId xmlns:a16="http://schemas.microsoft.com/office/drawing/2014/main" id="{D0952733-E7D5-4759-AB82-3CFEA6AD3757}"/>
+                <a16:creationId xmlns:a16="http://schemas.microsoft.com/office/drawing/2014/main" id="{D02F504D-B572-48FE-A628-05EA76923B03}"/>
               </a:ext>
             </a:extLst>
           </p:cNvPr>
@@ -4563,7 +4563,7 @@
             <a:avLst/>
           </a:prstGeom>
           <a:solidFill xmlns:a="http://schemas.openxmlformats.org/drawingml/2006/main">
-            <a:srgbClr val="E5783F"/>
+            <a:srgbClr val="9A3F16"/>
           </a:solidFill>
           <a:ln xmlns:a="http://schemas.openxmlformats.org/drawingml/2006/main" w="28575">
             <a:solidFill>
@@ -4578,7 +4578,7 @@
           <p:cNvPr id="15" name="recap-number-2">
             <a:extLst xmlns:a="http://schemas.openxmlformats.org/drawingml/2006/main">
               <a:ext uri="{FF2B5EF4-FFF2-40B4-BE49-F238E27FC236}">
-                <a16:creationId xmlns:a16="http://schemas.microsoft.com/office/drawing/2014/main" id="{E891E49F-4240-4776-8C30-2689350F6FF8}"/>
+                <a16:creationId xmlns:a16="http://schemas.microsoft.com/office/drawing/2014/main" id="{B8D948D9-CFB2-4D48-B123-E4CFCC5A30AB}"/>
               </a:ext>
             </a:extLst>
           </p:cNvPr>
@@ -4636,7 +4636,7 @@
           <p:cNvPr id="16" name="recap-item-2">
             <a:extLst xmlns:a="http://schemas.openxmlformats.org/drawingml/2006/main">
               <a:ext uri="{FF2B5EF4-FFF2-40B4-BE49-F238E27FC236}">
-                <a16:creationId xmlns:a16="http://schemas.microsoft.com/office/drawing/2014/main" id="{568A8840-4500-46F4-AD4A-BCD0A9E6CD12}"/>
+                <a16:creationId xmlns:a16="http://schemas.microsoft.com/office/drawing/2014/main" id="{E1869728-7902-42B1-912A-8F7BACBE09EE}"/>
               </a:ext>
             </a:extLst>
           </p:cNvPr>
@@ -4660,7 +4660,7 @@
           </a:solidFill>
           <a:ln xmlns:a="http://schemas.openxmlformats.org/drawingml/2006/main" w="19050">
             <a:solidFill>
-              <a:srgbClr val="E5783F"/>
+              <a:srgbClr val="9A3F16"/>
             </a:solidFill>
             <a:prstDash val="solid"/>
           </a:ln>
@@ -4698,7 +4698,7 @@
     </p:spTree>
     <p:extLst>
       <p:ext uri="{BB962C8B-B14F-4D97-AF65-F5344CB8AC3E}">
-        <p14:creationId xmlns:p14="http://schemas.microsoft.com/office/powerpoint/2010/main" val="1863458111"/>
+        <p14:creationId xmlns:p14="http://schemas.microsoft.com/office/powerpoint/2010/main" val="1250881970"/>
       </p:ext>
     </p:extLst>
   </p:cSld>
@@ -4729,7 +4729,7 @@
           <p:cNvPr id="1" name="s13-rule">
             <a:extLst xmlns:a="http://schemas.openxmlformats.org/drawingml/2006/main">
               <a:ext uri="{FF2B5EF4-FFF2-40B4-BE49-F238E27FC236}">
-                <a16:creationId xmlns:a16="http://schemas.microsoft.com/office/drawing/2014/main" id="{A69B2819-3BC5-46FC-B19A-5474132EF94D}"/>
+                <a16:creationId xmlns:a16="http://schemas.microsoft.com/office/drawing/2014/main" id="{8D74E5D5-EEBD-43F6-8011-D5AC5AFB60D9}"/>
               </a:ext>
             </a:extLst>
           </p:cNvPr>
@@ -4762,7 +4762,7 @@
           <p:cNvPr id="2" name="s13-eyebrow">
             <a:extLst xmlns:a="http://schemas.openxmlformats.org/drawingml/2006/main">
               <a:ext uri="{FF2B5EF4-FFF2-40B4-BE49-F238E27FC236}">
-                <a16:creationId xmlns:a16="http://schemas.microsoft.com/office/drawing/2014/main" id="{930E4D5C-86B5-4EDB-9131-C1F6C9F2139E}"/>
+                <a16:creationId xmlns:a16="http://schemas.microsoft.com/office/drawing/2014/main" id="{E9E219AD-ED53-439E-9161-164F85196BD4}"/>
               </a:ext>
             </a:extLst>
           </p:cNvPr>
@@ -4820,7 +4820,7 @@
           <p:cNvPr id="3" name="s13-title">
             <a:extLst xmlns:a="http://schemas.openxmlformats.org/drawingml/2006/main">
               <a:ext uri="{FF2B5EF4-FFF2-40B4-BE49-F238E27FC236}">
-                <a16:creationId xmlns:a16="http://schemas.microsoft.com/office/drawing/2014/main" id="{5420B50F-B8F5-4E12-9A5C-6834257C4C73}"/>
+                <a16:creationId xmlns:a16="http://schemas.microsoft.com/office/drawing/2014/main" id="{528644F3-9FD6-4693-A3C3-8E38F79D09A4}"/>
               </a:ext>
             </a:extLst>
           </p:cNvPr>
@@ -4868,7 +4868,7 @@
                 <a:ea typeface="PingFang SC"/>
                 <a:cs typeface="PingFang SC"/>
               </a:rPr>
-              <a:t>从公开重制课件回到可核对的学习资料</a:t>
+              <a:t>行业 AI 落地与 ROI：依据、边界与延伸</a:t>
             </a:r>
           </a:p>
         </p:txBody>
@@ -4878,7 +4878,7 @@
           <p:cNvPr id="4" name="s13-footer">
             <a:extLst xmlns:a="http://schemas.openxmlformats.org/drawingml/2006/main">
               <a:ext uri="{FF2B5EF4-FFF2-40B4-BE49-F238E27FC236}">
-                <a16:creationId xmlns:a16="http://schemas.microsoft.com/office/drawing/2014/main" id="{CD072A9B-AFDE-49C2-9490-F52D268C70D5}"/>
+                <a16:creationId xmlns:a16="http://schemas.microsoft.com/office/drawing/2014/main" id="{9685E289-83AB-4BDE-B19B-B12D7326B771}"/>
               </a:ext>
             </a:extLst>
           </p:cNvPr>
@@ -4909,7 +4909,7 @@
           <p:cNvPr id="5" name="s13-identity">
             <a:extLst xmlns:a="http://schemas.openxmlformats.org/drawingml/2006/main">
               <a:ext uri="{FF2B5EF4-FFF2-40B4-BE49-F238E27FC236}">
-                <a16:creationId xmlns:a16="http://schemas.microsoft.com/office/drawing/2014/main" id="{748A38D5-2225-4EFD-B1D2-4D0EE3F7553F}"/>
+                <a16:creationId xmlns:a16="http://schemas.microsoft.com/office/drawing/2014/main" id="{04EEF58F-B2E2-4B0F-8CB1-A5C90F70245D}"/>
               </a:ext>
             </a:extLst>
           </p:cNvPr>
@@ -4967,7 +4967,7 @@
           <p:cNvPr id="6" name="source-0">
             <a:extLst xmlns:a="http://schemas.openxmlformats.org/drawingml/2006/main">
               <a:ext uri="{FF2B5EF4-FFF2-40B4-BE49-F238E27FC236}">
-                <a16:creationId xmlns:a16="http://schemas.microsoft.com/office/drawing/2014/main" id="{CD5D9B21-D3F5-42AA-8270-B57019563F98}"/>
+                <a16:creationId xmlns:a16="http://schemas.microsoft.com/office/drawing/2014/main" id="{E91004A4-1925-48A0-90CF-2944392A2F88}"/>
               </a:ext>
             </a:extLst>
           </p:cNvPr>
@@ -4991,7 +4991,7 @@
           </a:solidFill>
           <a:ln xmlns:a="http://schemas.openxmlformats.org/drawingml/2006/main" w="9525">
             <a:solidFill>
-              <a:srgbClr val="E5783F"/>
+              <a:srgbClr val="9A3F16"/>
             </a:solidFill>
             <a:prstDash val="solid"/>
           </a:ln>
@@ -5031,7 +5031,7 @@
           <p:cNvPr id="7" name="source-1">
             <a:extLst xmlns:a="http://schemas.openxmlformats.org/drawingml/2006/main">
               <a:ext uri="{FF2B5EF4-FFF2-40B4-BE49-F238E27FC236}">
-                <a16:creationId xmlns:a16="http://schemas.microsoft.com/office/drawing/2014/main" id="{3E981AFF-536B-4411-A061-6CBCAC70251E}"/>
+                <a16:creationId xmlns:a16="http://schemas.microsoft.com/office/drawing/2014/main" id="{B9BBB8D9-218F-4E41-8092-ADCDF2434ABC}"/>
               </a:ext>
             </a:extLst>
           </p:cNvPr>
@@ -5095,7 +5095,7 @@
           <p:cNvPr id="8" name="source-2">
             <a:extLst xmlns:a="http://schemas.openxmlformats.org/drawingml/2006/main">
               <a:ext uri="{FF2B5EF4-FFF2-40B4-BE49-F238E27FC236}">
-                <a16:creationId xmlns:a16="http://schemas.microsoft.com/office/drawing/2014/main" id="{8B82E39A-C336-4F9F-9897-51F8F3E546E7}"/>
+                <a16:creationId xmlns:a16="http://schemas.microsoft.com/office/drawing/2014/main" id="{D66031D6-CA70-4060-9308-6EF56955BAEF}"/>
               </a:ext>
             </a:extLst>
           </p:cNvPr>
@@ -5159,7 +5159,7 @@
           <p:cNvPr id="9" name="source-3">
             <a:extLst xmlns:a="http://schemas.openxmlformats.org/drawingml/2006/main">
               <a:ext uri="{FF2B5EF4-FFF2-40B4-BE49-F238E27FC236}">
-                <a16:creationId xmlns:a16="http://schemas.microsoft.com/office/drawing/2014/main" id="{81ED6C47-BC02-4A3E-9FAE-085F4ED54958}"/>
+                <a16:creationId xmlns:a16="http://schemas.microsoft.com/office/drawing/2014/main" id="{23FCEDD9-BE98-4E9F-95C1-AD67FBE08118}"/>
               </a:ext>
             </a:extLst>
           </p:cNvPr>
@@ -5223,7 +5223,7 @@
           <p:cNvPr id="10" name="s13-takeaway-rule">
             <a:extLst xmlns:a="http://schemas.openxmlformats.org/drawingml/2006/main">
               <a:ext uri="{FF2B5EF4-FFF2-40B4-BE49-F238E27FC236}">
-                <a16:creationId xmlns:a16="http://schemas.microsoft.com/office/drawing/2014/main" id="{369190A7-1B37-4283-AF4C-8505E2FAC00A}"/>
+                <a16:creationId xmlns:a16="http://schemas.microsoft.com/office/drawing/2014/main" id="{17A1CFCB-F90C-4F7F-A819-4DED322FE2C2}"/>
               </a:ext>
             </a:extLst>
           </p:cNvPr>
@@ -5256,7 +5256,7 @@
           <p:cNvPr id="11" name="s13-takeaway">
             <a:extLst xmlns:a="http://schemas.openxmlformats.org/drawingml/2006/main">
               <a:ext uri="{FF2B5EF4-FFF2-40B4-BE49-F238E27FC236}">
-                <a16:creationId xmlns:a16="http://schemas.microsoft.com/office/drawing/2014/main" id="{B65489A8-FC8F-4772-982E-D95AACB77134}"/>
+                <a16:creationId xmlns:a16="http://schemas.microsoft.com/office/drawing/2014/main" id="{F5B12498-25D3-4450-9FCF-3E36DCCC047B}"/>
               </a:ext>
             </a:extLst>
           </p:cNvPr>
@@ -5312,7 +5312,7 @@
     </p:spTree>
     <p:extLst>
       <p:ext uri="{BB962C8B-B14F-4D97-AF65-F5344CB8AC3E}">
-        <p14:creationId xmlns:p14="http://schemas.microsoft.com/office/powerpoint/2010/main" val="1844992401"/>
+        <p14:creationId xmlns:p14="http://schemas.microsoft.com/office/powerpoint/2010/main" val="42111135"/>
       </p:ext>
     </p:extLst>
   </p:cSld>
@@ -5343,7 +5343,7 @@
           <p:cNvPr id="1" name="s2-rule">
             <a:extLst xmlns:a="http://schemas.openxmlformats.org/drawingml/2006/main">
               <a:ext uri="{FF2B5EF4-FFF2-40B4-BE49-F238E27FC236}">
-                <a16:creationId xmlns:a16="http://schemas.microsoft.com/office/drawing/2014/main" id="{341ED75E-305D-4E49-8352-3718FB969E3E}"/>
+                <a16:creationId xmlns:a16="http://schemas.microsoft.com/office/drawing/2014/main" id="{1112C332-D56C-4BA0-9E77-639A54A51445}"/>
               </a:ext>
             </a:extLst>
           </p:cNvPr>
@@ -5376,7 +5376,7 @@
           <p:cNvPr id="2" name="s2-eyebrow">
             <a:extLst xmlns:a="http://schemas.openxmlformats.org/drawingml/2006/main">
               <a:ext uri="{FF2B5EF4-FFF2-40B4-BE49-F238E27FC236}">
-                <a16:creationId xmlns:a16="http://schemas.microsoft.com/office/drawing/2014/main" id="{F35CD0C2-7049-482F-BBBE-9040A94B6FFB}"/>
+                <a16:creationId xmlns:a16="http://schemas.microsoft.com/office/drawing/2014/main" id="{079F64C4-DCD6-4FF9-BB41-B5E5B56A1C7E}"/>
               </a:ext>
             </a:extLst>
           </p:cNvPr>
@@ -5434,7 +5434,7 @@
           <p:cNvPr id="3" name="s2-title">
             <a:extLst xmlns:a="http://schemas.openxmlformats.org/drawingml/2006/main">
               <a:ext uri="{FF2B5EF4-FFF2-40B4-BE49-F238E27FC236}">
-                <a16:creationId xmlns:a16="http://schemas.microsoft.com/office/drawing/2014/main" id="{5649E73D-2FEC-4AE6-A392-B4DCE30111A8}"/>
+                <a16:creationId xmlns:a16="http://schemas.microsoft.com/office/drawing/2014/main" id="{62265D5E-AB65-414B-9A17-C80530ED8FAE}"/>
               </a:ext>
             </a:extLst>
           </p:cNvPr>
@@ -5482,7 +5482,7 @@
                 <a:ea typeface="PingFang SC"/>
                 <a:cs typeface="PingFang SC"/>
               </a:rPr>
-              <a:t>学完这一节，你能完成这些判断与行动</a:t>
+              <a:t>行业 AI 落地与 ROI：4项学习结果</a:t>
             </a:r>
           </a:p>
         </p:txBody>
@@ -5492,7 +5492,7 @@
           <p:cNvPr id="4" name="s2-footer">
             <a:extLst xmlns:a="http://schemas.openxmlformats.org/drawingml/2006/main">
               <a:ext uri="{FF2B5EF4-FFF2-40B4-BE49-F238E27FC236}">
-                <a16:creationId xmlns:a16="http://schemas.microsoft.com/office/drawing/2014/main" id="{D6C1348F-393A-45EA-AC4D-8D4E5D7F7091}"/>
+                <a16:creationId xmlns:a16="http://schemas.microsoft.com/office/drawing/2014/main" id="{FB3B48F7-510A-4786-8D5A-26BC980D8711}"/>
               </a:ext>
             </a:extLst>
           </p:cNvPr>
@@ -5523,7 +5523,7 @@
           <p:cNvPr id="5" name="s2-identity">
             <a:extLst xmlns:a="http://schemas.openxmlformats.org/drawingml/2006/main">
               <a:ext uri="{FF2B5EF4-FFF2-40B4-BE49-F238E27FC236}">
-                <a16:creationId xmlns:a16="http://schemas.microsoft.com/office/drawing/2014/main" id="{CE45DBE6-E359-4A10-91C4-4C8ECE604424}"/>
+                <a16:creationId xmlns:a16="http://schemas.microsoft.com/office/drawing/2014/main" id="{125EC867-9904-478C-93D9-318EFB32F75C}"/>
               </a:ext>
             </a:extLst>
           </p:cNvPr>
@@ -5581,7 +5581,7 @@
           <p:cNvPr id="6" name="objective-1">
             <a:extLst xmlns:a="http://schemas.openxmlformats.org/drawingml/2006/main">
               <a:ext uri="{FF2B5EF4-FFF2-40B4-BE49-F238E27FC236}">
-                <a16:creationId xmlns:a16="http://schemas.microsoft.com/office/drawing/2014/main" id="{021DC0B0-C3F4-45F1-A3B9-655D8C784BA6}"/>
+                <a16:creationId xmlns:a16="http://schemas.microsoft.com/office/drawing/2014/main" id="{9352496F-A757-450A-89B2-A1734C7BE532}"/>
               </a:ext>
             </a:extLst>
           </p:cNvPr>
@@ -5668,7 +5668,7 @@
           <p:cNvPr id="7" name="objective-2">
             <a:extLst xmlns:a="http://schemas.openxmlformats.org/drawingml/2006/main">
               <a:ext uri="{FF2B5EF4-FFF2-40B4-BE49-F238E27FC236}">
-                <a16:creationId xmlns:a16="http://schemas.microsoft.com/office/drawing/2014/main" id="{EE8AE858-8688-41C1-B56D-4B05C58BF3E7}"/>
+                <a16:creationId xmlns:a16="http://schemas.microsoft.com/office/drawing/2014/main" id="{D1C588F1-964A-4AD7-97DD-F203C6B6C4F5}"/>
               </a:ext>
             </a:extLst>
           </p:cNvPr>
@@ -5755,7 +5755,7 @@
           <p:cNvPr id="8" name="objective-3">
             <a:extLst xmlns:a="http://schemas.openxmlformats.org/drawingml/2006/main">
               <a:ext uri="{FF2B5EF4-FFF2-40B4-BE49-F238E27FC236}">
-                <a16:creationId xmlns:a16="http://schemas.microsoft.com/office/drawing/2014/main" id="{B0688E27-4D5E-4DE9-9A57-134171DA7CE7}"/>
+                <a16:creationId xmlns:a16="http://schemas.microsoft.com/office/drawing/2014/main" id="{EE7B71DE-396B-4749-815D-7F1B5AD29216}"/>
               </a:ext>
             </a:extLst>
           </p:cNvPr>
@@ -5842,7 +5842,7 @@
           <p:cNvPr id="9" name="objective-4">
             <a:extLst xmlns:a="http://schemas.openxmlformats.org/drawingml/2006/main">
               <a:ext uri="{FF2B5EF4-FFF2-40B4-BE49-F238E27FC236}">
-                <a16:creationId xmlns:a16="http://schemas.microsoft.com/office/drawing/2014/main" id="{63565A0F-2173-43CF-BECB-9E9DCCA5B84B}"/>
+                <a16:creationId xmlns:a16="http://schemas.microsoft.com/office/drawing/2014/main" id="{BD99009E-9F41-4FA2-89D6-586C5FF01CE4}"/>
               </a:ext>
             </a:extLst>
           </p:cNvPr>
@@ -5866,7 +5866,7 @@
           </a:solidFill>
           <a:ln xmlns:a="http://schemas.openxmlformats.org/drawingml/2006/main" w="19050">
             <a:solidFill>
-              <a:srgbClr val="E5783F"/>
+              <a:srgbClr val="9A3F16"/>
             </a:solidFill>
             <a:prstDash val="solid"/>
           </a:ln>
@@ -5927,7 +5927,7 @@
     </p:spTree>
     <p:extLst>
       <p:ext uri="{BB962C8B-B14F-4D97-AF65-F5344CB8AC3E}">
-        <p14:creationId xmlns:p14="http://schemas.microsoft.com/office/powerpoint/2010/main" val="866634555"/>
+        <p14:creationId xmlns:p14="http://schemas.microsoft.com/office/powerpoint/2010/main" val="1461444123"/>
       </p:ext>
     </p:extLst>
   </p:cSld>
@@ -5958,7 +5958,7 @@
           <p:cNvPr id="1" name="s3-rule">
             <a:extLst xmlns:a="http://schemas.openxmlformats.org/drawingml/2006/main">
               <a:ext uri="{FF2B5EF4-FFF2-40B4-BE49-F238E27FC236}">
-                <a16:creationId xmlns:a16="http://schemas.microsoft.com/office/drawing/2014/main" id="{41E704CD-91A8-4431-A9E4-4F699B5C00E2}"/>
+                <a16:creationId xmlns:a16="http://schemas.microsoft.com/office/drawing/2014/main" id="{5E0ACAD0-D045-49EE-9A46-A7855952D981}"/>
               </a:ext>
             </a:extLst>
           </p:cNvPr>
@@ -5991,7 +5991,7 @@
           <p:cNvPr id="2" name="s3-eyebrow">
             <a:extLst xmlns:a="http://schemas.openxmlformats.org/drawingml/2006/main">
               <a:ext uri="{FF2B5EF4-FFF2-40B4-BE49-F238E27FC236}">
-                <a16:creationId xmlns:a16="http://schemas.microsoft.com/office/drawing/2014/main" id="{7CA67C98-8074-4D4B-9D9B-DEA47738FF6C}"/>
+                <a16:creationId xmlns:a16="http://schemas.microsoft.com/office/drawing/2014/main" id="{ACD8C6AD-CE88-4F61-BD90-1249C103D8BA}"/>
               </a:ext>
             </a:extLst>
           </p:cNvPr>
@@ -6049,7 +6049,7 @@
           <p:cNvPr id="3" name="s3-title">
             <a:extLst xmlns:a="http://schemas.openxmlformats.org/drawingml/2006/main">
               <a:ext uri="{FF2B5EF4-FFF2-40B4-BE49-F238E27FC236}">
-                <a16:creationId xmlns:a16="http://schemas.microsoft.com/office/drawing/2014/main" id="{5E1067FD-3536-418B-8D68-87E8BC88ED1F}"/>
+                <a16:creationId xmlns:a16="http://schemas.microsoft.com/office/drawing/2014/main" id="{DFAD3622-B5C1-4DC7-B9E4-846E84F88872}"/>
               </a:ext>
             </a:extLst>
           </p:cNvPr>
@@ -6107,7 +6107,7 @@
           <p:cNvPr id="4" name="s3-footer">
             <a:extLst xmlns:a="http://schemas.openxmlformats.org/drawingml/2006/main">
               <a:ext uri="{FF2B5EF4-FFF2-40B4-BE49-F238E27FC236}">
-                <a16:creationId xmlns:a16="http://schemas.microsoft.com/office/drawing/2014/main" id="{F890BDAC-A799-49BA-8A8B-7D496CBBA3B9}"/>
+                <a16:creationId xmlns:a16="http://schemas.microsoft.com/office/drawing/2014/main" id="{84AF50E4-BEC1-4101-9E0E-E0C17A5ADDBB}"/>
               </a:ext>
             </a:extLst>
           </p:cNvPr>
@@ -6138,7 +6138,7 @@
           <p:cNvPr id="5" name="s3-identity">
             <a:extLst xmlns:a="http://schemas.openxmlformats.org/drawingml/2006/main">
               <a:ext uri="{FF2B5EF4-FFF2-40B4-BE49-F238E27FC236}">
-                <a16:creationId xmlns:a16="http://schemas.microsoft.com/office/drawing/2014/main" id="{40F2B54B-675A-4BAD-9267-EA339415D091}"/>
+                <a16:creationId xmlns:a16="http://schemas.microsoft.com/office/drawing/2014/main" id="{E0BF8CDA-B9CC-4AC8-BDDD-0703AD7BD105}"/>
               </a:ext>
             </a:extLst>
           </p:cNvPr>
@@ -6196,7 +6196,7 @@
           <p:cNvPr id="6" name="core-no-0">
             <a:extLst xmlns:a="http://schemas.openxmlformats.org/drawingml/2006/main">
               <a:ext uri="{FF2B5EF4-FFF2-40B4-BE49-F238E27FC236}">
-                <a16:creationId xmlns:a16="http://schemas.microsoft.com/office/drawing/2014/main" id="{0B958763-8F1D-41FF-A739-E3903EEA771F}"/>
+                <a16:creationId xmlns:a16="http://schemas.microsoft.com/office/drawing/2014/main" id="{A22B6904-E5D4-4D5F-B52D-1A85AB647EC9}"/>
               </a:ext>
             </a:extLst>
           </p:cNvPr>
@@ -6228,7 +6228,7 @@
             <a:pPr algn="l">
               <a:defRPr sz="2250" b="1">
                 <a:solidFill>
-                  <a:srgbClr val="E5783F"/>
+                  <a:srgbClr val="9A3F16"/>
                 </a:solidFill>
                 <a:latin typeface="PingFang SC"/>
                 <a:ea typeface="PingFang SC"/>
@@ -6238,7 +6238,7 @@
             <a:r>
               <a:rPr sz="2250" b="1">
                 <a:solidFill>
-                  <a:srgbClr val="E5783F"/>
+                  <a:srgbClr val="9A3F16"/>
                 </a:solidFill>
                 <a:latin typeface="PingFang SC"/>
                 <a:ea typeface="PingFang SC"/>
@@ -6254,7 +6254,7 @@
           <p:cNvPr id="7" name="core-label-0">
             <a:extLst xmlns:a="http://schemas.openxmlformats.org/drawingml/2006/main">
               <a:ext uri="{FF2B5EF4-FFF2-40B4-BE49-F238E27FC236}">
-                <a16:creationId xmlns:a16="http://schemas.microsoft.com/office/drawing/2014/main" id="{9C82C714-D6C4-434C-B25E-945CE34111B3}"/>
+                <a16:creationId xmlns:a16="http://schemas.microsoft.com/office/drawing/2014/main" id="{512496D4-E76A-452B-A4CC-825C53A9CD83}"/>
               </a:ext>
             </a:extLst>
           </p:cNvPr>
@@ -6312,7 +6312,7 @@
           <p:cNvPr id="8" name="core-body-0">
             <a:extLst xmlns:a="http://schemas.openxmlformats.org/drawingml/2006/main">
               <a:ext uri="{FF2B5EF4-FFF2-40B4-BE49-F238E27FC236}">
-                <a16:creationId xmlns:a16="http://schemas.microsoft.com/office/drawing/2014/main" id="{C2DDC92A-7CB2-4BCC-83E3-7F0B3792936A}"/>
+                <a16:creationId xmlns:a16="http://schemas.microsoft.com/office/drawing/2014/main" id="{9D9D4592-BA50-48EF-BF75-B8B3EC2ECCAD}"/>
               </a:ext>
             </a:extLst>
           </p:cNvPr>
@@ -6336,7 +6336,7 @@
           </a:solidFill>
           <a:ln xmlns:a="http://schemas.openxmlformats.org/drawingml/2006/main" w="19050">
             <a:solidFill>
-              <a:srgbClr val="E5783F"/>
+              <a:srgbClr val="9A3F16"/>
             </a:solidFill>
             <a:prstDash val="solid"/>
           </a:ln>
@@ -6366,7 +6366,7 @@
                 <a:ea typeface="PingFang SC"/>
                 <a:cs typeface="PingFang SC"/>
               </a:rPr>
-              <a:t>一句“用 AI 提升客服效率”仍然过于宽泛。可执行的任务描述至少包括六项：使用者、触发条件、输入资料、期望输出、完成时限和最终责任人。例如，可把它改写为“客服收到售后咨询后…</a:t>
+              <a:t>一句“用 AI 提升客服效率”仍然过于宽泛；可执行的任务描述至少包括六项；使用者、触发条件、输入资料、期望输出、完成时限和最终责任人；例如，可把它改写为“客服收到售后咨询后</a:t>
             </a:r>
           </a:p>
         </p:txBody>
@@ -6376,7 +6376,7 @@
           <p:cNvPr id="9" name="core-no-1">
             <a:extLst xmlns:a="http://schemas.openxmlformats.org/drawingml/2006/main">
               <a:ext uri="{FF2B5EF4-FFF2-40B4-BE49-F238E27FC236}">
-                <a16:creationId xmlns:a16="http://schemas.microsoft.com/office/drawing/2014/main" id="{3093415B-0617-4CEA-B281-57BFFD584B3E}"/>
+                <a16:creationId xmlns:a16="http://schemas.microsoft.com/office/drawing/2014/main" id="{7D019930-E48F-4B32-9202-D1435B15AA5B}"/>
               </a:ext>
             </a:extLst>
           </p:cNvPr>
@@ -6408,7 +6408,7 @@
             <a:pPr algn="l">
               <a:defRPr sz="2250" b="1">
                 <a:solidFill>
-                  <a:srgbClr val="E5783F"/>
+                  <a:srgbClr val="9A3F16"/>
                 </a:solidFill>
                 <a:latin typeface="PingFang SC"/>
                 <a:ea typeface="PingFang SC"/>
@@ -6418,7 +6418,7 @@
             <a:r>
               <a:rPr sz="2250" b="1">
                 <a:solidFill>
-                  <a:srgbClr val="E5783F"/>
+                  <a:srgbClr val="9A3F16"/>
                 </a:solidFill>
                 <a:latin typeface="PingFang SC"/>
                 <a:ea typeface="PingFang SC"/>
@@ -6434,7 +6434,7 @@
           <p:cNvPr id="10" name="core-body-1">
             <a:extLst xmlns:a="http://schemas.openxmlformats.org/drawingml/2006/main">
               <a:ext uri="{FF2B5EF4-FFF2-40B4-BE49-F238E27FC236}">
-                <a16:creationId xmlns:a16="http://schemas.microsoft.com/office/drawing/2014/main" id="{50AD097C-278C-4D62-AAC8-28C998A22BFD}"/>
+                <a16:creationId xmlns:a16="http://schemas.microsoft.com/office/drawing/2014/main" id="{D05A79EE-3F97-4C9E-A589-57D811A3646A}"/>
               </a:ext>
             </a:extLst>
           </p:cNvPr>
@@ -6488,7 +6488,7 @@
                 <a:ea typeface="PingFang SC"/>
                 <a:cs typeface="PingFang SC"/>
               </a:rPr>
-              <a:t>优先试点的任务通常高频、边界稳定、结果可检查、数据可合法取得，而且失败后可以回到原流程。若资料权属不清、输出无法验证、错误会直接影响人身安全或重要权益，就应先补治理条件…</a:t>
+              <a:t>优先试点的任务通常高频、边界稳定、结果可检查、数据可合法取得；而且失败后可以回到原流程；若资料权属不清、输出无法验证、错误会直接影响人身安全或重要权益</a:t>
             </a:r>
           </a:p>
         </p:txBody>
@@ -6498,7 +6498,7 @@
           <p:cNvPr id="11" name="s3-takeaway-rule">
             <a:extLst xmlns:a="http://schemas.openxmlformats.org/drawingml/2006/main">
               <a:ext uri="{FF2B5EF4-FFF2-40B4-BE49-F238E27FC236}">
-                <a16:creationId xmlns:a16="http://schemas.microsoft.com/office/drawing/2014/main" id="{1016BC3D-DC1E-42E3-82D6-97059DA79312}"/>
+                <a16:creationId xmlns:a16="http://schemas.microsoft.com/office/drawing/2014/main" id="{469D215C-5296-4E33-9632-375CE3A95BA4}"/>
               </a:ext>
             </a:extLst>
           </p:cNvPr>
@@ -6531,7 +6531,7 @@
           <p:cNvPr id="12" name="s3-takeaway">
             <a:extLst xmlns:a="http://schemas.openxmlformats.org/drawingml/2006/main">
               <a:ext uri="{FF2B5EF4-FFF2-40B4-BE49-F238E27FC236}">
-                <a16:creationId xmlns:a16="http://schemas.microsoft.com/office/drawing/2014/main" id="{5F9DDD7A-1E39-41D5-B4CC-6DF1CCFB200A}"/>
+                <a16:creationId xmlns:a16="http://schemas.microsoft.com/office/drawing/2014/main" id="{49D83DE1-C657-4F0E-9916-AC2D2104E2BC}"/>
               </a:ext>
             </a:extLst>
           </p:cNvPr>
@@ -6587,7 +6587,7 @@
     </p:spTree>
     <p:extLst>
       <p:ext uri="{BB962C8B-B14F-4D97-AF65-F5344CB8AC3E}">
-        <p14:creationId xmlns:p14="http://schemas.microsoft.com/office/powerpoint/2010/main" val="482718318"/>
+        <p14:creationId xmlns:p14="http://schemas.microsoft.com/office/powerpoint/2010/main" val="1485698871"/>
       </p:ext>
     </p:extLst>
   </p:cSld>
@@ -6618,7 +6618,7 @@
           <p:cNvPr id="1" name="s4-rule">
             <a:extLst xmlns:a="http://schemas.openxmlformats.org/drawingml/2006/main">
               <a:ext uri="{FF2B5EF4-FFF2-40B4-BE49-F238E27FC236}">
-                <a16:creationId xmlns:a16="http://schemas.microsoft.com/office/drawing/2014/main" id="{FD1A5438-3CD3-4D53-B968-3A9724389098}"/>
+                <a16:creationId xmlns:a16="http://schemas.microsoft.com/office/drawing/2014/main" id="{5318389F-BAB6-448B-B3AA-DA6F978FE824}"/>
               </a:ext>
             </a:extLst>
           </p:cNvPr>
@@ -6651,7 +6651,7 @@
           <p:cNvPr id="2" name="s4-eyebrow">
             <a:extLst xmlns:a="http://schemas.openxmlformats.org/drawingml/2006/main">
               <a:ext uri="{FF2B5EF4-FFF2-40B4-BE49-F238E27FC236}">
-                <a16:creationId xmlns:a16="http://schemas.microsoft.com/office/drawing/2014/main" id="{BC791591-8A25-4E0C-89CD-3E9F6C82D2CE}"/>
+                <a16:creationId xmlns:a16="http://schemas.microsoft.com/office/drawing/2014/main" id="{E441FB2B-0C93-4962-810B-F02EF8D537D7}"/>
               </a:ext>
             </a:extLst>
           </p:cNvPr>
@@ -6709,7 +6709,7 @@
           <p:cNvPr id="3" name="s4-title">
             <a:extLst xmlns:a="http://schemas.openxmlformats.org/drawingml/2006/main">
               <a:ext uri="{FF2B5EF4-FFF2-40B4-BE49-F238E27FC236}">
-                <a16:creationId xmlns:a16="http://schemas.microsoft.com/office/drawing/2014/main" id="{66DD4946-E701-44E6-9754-2D8C4BBE2EFB}"/>
+                <a16:creationId xmlns:a16="http://schemas.microsoft.com/office/drawing/2014/main" id="{F828D3B1-2389-4790-8E74-34029C7E71F6}"/>
               </a:ext>
             </a:extLst>
           </p:cNvPr>
@@ -6767,7 +6767,7 @@
           <p:cNvPr id="4" name="s4-footer">
             <a:extLst xmlns:a="http://schemas.openxmlformats.org/drawingml/2006/main">
               <a:ext uri="{FF2B5EF4-FFF2-40B4-BE49-F238E27FC236}">
-                <a16:creationId xmlns:a16="http://schemas.microsoft.com/office/drawing/2014/main" id="{A30A531D-9770-4DE1-85BB-7CA831C69B55}"/>
+                <a16:creationId xmlns:a16="http://schemas.microsoft.com/office/drawing/2014/main" id="{33FE1A99-35B6-4FDE-9B7A-B7A355B24CC3}"/>
               </a:ext>
             </a:extLst>
           </p:cNvPr>
@@ -6798,7 +6798,7 @@
           <p:cNvPr id="5" name="s4-identity">
             <a:extLst xmlns:a="http://schemas.openxmlformats.org/drawingml/2006/main">
               <a:ext uri="{FF2B5EF4-FFF2-40B4-BE49-F238E27FC236}">
-                <a16:creationId xmlns:a16="http://schemas.microsoft.com/office/drawing/2014/main" id="{849B9826-F1B8-47C1-A385-983A41302592}"/>
+                <a16:creationId xmlns:a16="http://schemas.microsoft.com/office/drawing/2014/main" id="{51CA6540-FF99-4E99-9A6C-CF7ACD3D5C5F}"/>
               </a:ext>
             </a:extLst>
           </p:cNvPr>
@@ -6856,7 +6856,7 @@
           <p:cNvPr id="6" name="core-no-0">
             <a:extLst xmlns:a="http://schemas.openxmlformats.org/drawingml/2006/main">
               <a:ext uri="{FF2B5EF4-FFF2-40B4-BE49-F238E27FC236}">
-                <a16:creationId xmlns:a16="http://schemas.microsoft.com/office/drawing/2014/main" id="{2DF68B3D-917D-4FF7-88F2-9287A28F8880}"/>
+                <a16:creationId xmlns:a16="http://schemas.microsoft.com/office/drawing/2014/main" id="{CACCB43E-0BA8-45B1-AC48-A5DA44C5D598}"/>
               </a:ext>
             </a:extLst>
           </p:cNvPr>
@@ -6888,7 +6888,7 @@
             <a:pPr algn="l">
               <a:defRPr sz="2250" b="1">
                 <a:solidFill>
-                  <a:srgbClr val="E5783F"/>
+                  <a:srgbClr val="9A3F16"/>
                 </a:solidFill>
                 <a:latin typeface="PingFang SC"/>
                 <a:ea typeface="PingFang SC"/>
@@ -6898,7 +6898,7 @@
             <a:r>
               <a:rPr sz="2250" b="1">
                 <a:solidFill>
-                  <a:srgbClr val="E5783F"/>
+                  <a:srgbClr val="9A3F16"/>
                 </a:solidFill>
                 <a:latin typeface="PingFang SC"/>
                 <a:ea typeface="PingFang SC"/>
@@ -6914,7 +6914,7 @@
           <p:cNvPr id="7" name="core-label-0">
             <a:extLst xmlns:a="http://schemas.openxmlformats.org/drawingml/2006/main">
               <a:ext uri="{FF2B5EF4-FFF2-40B4-BE49-F238E27FC236}">
-                <a16:creationId xmlns:a16="http://schemas.microsoft.com/office/drawing/2014/main" id="{96BB1A2D-CB2F-47CF-95DB-F2E3C87B4EDF}"/>
+                <a16:creationId xmlns:a16="http://schemas.microsoft.com/office/drawing/2014/main" id="{8F5ED636-5C53-4485-B064-077904A7B6A6}"/>
               </a:ext>
             </a:extLst>
           </p:cNvPr>
@@ -6972,7 +6972,7 @@
           <p:cNvPr id="8" name="core-body-0">
             <a:extLst xmlns:a="http://schemas.openxmlformats.org/drawingml/2006/main">
               <a:ext uri="{FF2B5EF4-FFF2-40B4-BE49-F238E27FC236}">
-                <a16:creationId xmlns:a16="http://schemas.microsoft.com/office/drawing/2014/main" id="{5F665E19-24BD-46FC-B7EA-1DA8330798AC}"/>
+                <a16:creationId xmlns:a16="http://schemas.microsoft.com/office/drawing/2014/main" id="{54CD7910-BDE8-4CE6-B6A8-1D77372819E6}"/>
               </a:ext>
             </a:extLst>
           </p:cNvPr>
@@ -6996,7 +6996,7 @@
           </a:solidFill>
           <a:ln xmlns:a="http://schemas.openxmlformats.org/drawingml/2006/main" w="19050">
             <a:solidFill>
-              <a:srgbClr val="E5783F"/>
+              <a:srgbClr val="9A3F16"/>
             </a:solidFill>
             <a:prstDash val="solid"/>
           </a:ln>
@@ -7036,7 +7036,7 @@
           <p:cNvPr id="9" name="core-no-1">
             <a:extLst xmlns:a="http://schemas.openxmlformats.org/drawingml/2006/main">
               <a:ext uri="{FF2B5EF4-FFF2-40B4-BE49-F238E27FC236}">
-                <a16:creationId xmlns:a16="http://schemas.microsoft.com/office/drawing/2014/main" id="{BDFDEA7F-2538-4DD1-B6C4-0A6F471F4474}"/>
+                <a16:creationId xmlns:a16="http://schemas.microsoft.com/office/drawing/2014/main" id="{067B8E89-C364-4519-8484-EAC4E1D91964}"/>
               </a:ext>
             </a:extLst>
           </p:cNvPr>
@@ -7068,7 +7068,7 @@
             <a:pPr algn="l">
               <a:defRPr sz="2250" b="1">
                 <a:solidFill>
-                  <a:srgbClr val="E5783F"/>
+                  <a:srgbClr val="9A3F16"/>
                 </a:solidFill>
                 <a:latin typeface="PingFang SC"/>
                 <a:ea typeface="PingFang SC"/>
@@ -7078,7 +7078,7 @@
             <a:r>
               <a:rPr sz="2250" b="1">
                 <a:solidFill>
-                  <a:srgbClr val="E5783F"/>
+                  <a:srgbClr val="9A3F16"/>
                 </a:solidFill>
                 <a:latin typeface="PingFang SC"/>
                 <a:ea typeface="PingFang SC"/>
@@ -7094,7 +7094,7 @@
           <p:cNvPr id="10" name="core-body-1">
             <a:extLst xmlns:a="http://schemas.openxmlformats.org/drawingml/2006/main">
               <a:ext uri="{FF2B5EF4-FFF2-40B4-BE49-F238E27FC236}">
-                <a16:creationId xmlns:a16="http://schemas.microsoft.com/office/drawing/2014/main" id="{F30E05CD-532A-40A5-8224-9EB1321ABFDD}"/>
+                <a16:creationId xmlns:a16="http://schemas.microsoft.com/office/drawing/2014/main" id="{81E16B2D-9ABC-47E1-BF8D-6E221AB1D688}"/>
               </a:ext>
             </a:extLst>
           </p:cNvPr>
@@ -7148,7 +7148,7 @@
                 <a:ea typeface="PingFang SC"/>
                 <a:cs typeface="PingFang SC"/>
               </a:rPr>
-              <a:t>质量指标应连接业务后果。知识问答不仅看答案是否通顺，还要看引用是否支持结论、规则版本是否有效、应转人工的问题是否被正确转交。内容生成不仅看数量，还要看事实错误、品牌一致性、授权状态和修改成本…</a:t>
+              <a:t>质量指标应连接业务后果；知识问答不仅看答案是否通顺；还要看引用是否支持结论、规则版本是否有效、应转人工的问题是否被正确转交；内容生成不仅看数量；还要看事实错误、品牌一致性、授权状态和修改成本</a:t>
             </a:r>
           </a:p>
         </p:txBody>
@@ -7158,7 +7158,7 @@
           <p:cNvPr id="11" name="s4-takeaway-rule">
             <a:extLst xmlns:a="http://schemas.openxmlformats.org/drawingml/2006/main">
               <a:ext uri="{FF2B5EF4-FFF2-40B4-BE49-F238E27FC236}">
-                <a16:creationId xmlns:a16="http://schemas.microsoft.com/office/drawing/2014/main" id="{47568EF4-23B2-4543-92A2-84DF7342DD41}"/>
+                <a16:creationId xmlns:a16="http://schemas.microsoft.com/office/drawing/2014/main" id="{E04999E0-DCD7-4747-96BE-046AC528C62D}"/>
               </a:ext>
             </a:extLst>
           </p:cNvPr>
@@ -7191,7 +7191,7 @@
           <p:cNvPr id="12" name="s4-takeaway">
             <a:extLst xmlns:a="http://schemas.openxmlformats.org/drawingml/2006/main">
               <a:ext uri="{FF2B5EF4-FFF2-40B4-BE49-F238E27FC236}">
-                <a16:creationId xmlns:a16="http://schemas.microsoft.com/office/drawing/2014/main" id="{1F4B3173-1AB8-4FF0-80EA-15AB198D9FD4}"/>
+                <a16:creationId xmlns:a16="http://schemas.microsoft.com/office/drawing/2014/main" id="{75E0BF78-CBB9-41E5-8E1A-CADA62CC19A1}"/>
               </a:ext>
             </a:extLst>
           </p:cNvPr>
@@ -7247,7 +7247,7 @@
     </p:spTree>
     <p:extLst>
       <p:ext uri="{BB962C8B-B14F-4D97-AF65-F5344CB8AC3E}">
-        <p14:creationId xmlns:p14="http://schemas.microsoft.com/office/powerpoint/2010/main" val="426410144"/>
+        <p14:creationId xmlns:p14="http://schemas.microsoft.com/office/powerpoint/2010/main" val="153153296"/>
       </p:ext>
     </p:extLst>
   </p:cSld>
@@ -7278,7 +7278,7 @@
           <p:cNvPr id="1" name="s5-rule">
             <a:extLst xmlns:a="http://schemas.openxmlformats.org/drawingml/2006/main">
               <a:ext uri="{FF2B5EF4-FFF2-40B4-BE49-F238E27FC236}">
-                <a16:creationId xmlns:a16="http://schemas.microsoft.com/office/drawing/2014/main" id="{96EA6CB3-9D02-4B55-81AE-BD8EF8B790AB}"/>
+                <a16:creationId xmlns:a16="http://schemas.microsoft.com/office/drawing/2014/main" id="{FED20D1B-3402-4A0B-A39F-843D19FD2E29}"/>
               </a:ext>
             </a:extLst>
           </p:cNvPr>
@@ -7311,7 +7311,7 @@
           <p:cNvPr id="2" name="s5-eyebrow">
             <a:extLst xmlns:a="http://schemas.openxmlformats.org/drawingml/2006/main">
               <a:ext uri="{FF2B5EF4-FFF2-40B4-BE49-F238E27FC236}">
-                <a16:creationId xmlns:a16="http://schemas.microsoft.com/office/drawing/2014/main" id="{CCB08D56-45D1-4246-A312-5AE15C12D71B}"/>
+                <a16:creationId xmlns:a16="http://schemas.microsoft.com/office/drawing/2014/main" id="{A4C7CB0E-29F7-4508-A117-334751B43F97}"/>
               </a:ext>
             </a:extLst>
           </p:cNvPr>
@@ -7369,7 +7369,7 @@
           <p:cNvPr id="3" name="s5-title">
             <a:extLst xmlns:a="http://schemas.openxmlformats.org/drawingml/2006/main">
               <a:ext uri="{FF2B5EF4-FFF2-40B4-BE49-F238E27FC236}">
-                <a16:creationId xmlns:a16="http://schemas.microsoft.com/office/drawing/2014/main" id="{E9B90A6A-C24C-47DD-ACEE-A526AC6C988E}"/>
+                <a16:creationId xmlns:a16="http://schemas.microsoft.com/office/drawing/2014/main" id="{7EEC9D94-6012-4DE8-BA49-24F6D01A3659}"/>
               </a:ext>
             </a:extLst>
           </p:cNvPr>
@@ -7427,7 +7427,7 @@
           <p:cNvPr id="4" name="s5-footer">
             <a:extLst xmlns:a="http://schemas.openxmlformats.org/drawingml/2006/main">
               <a:ext uri="{FF2B5EF4-FFF2-40B4-BE49-F238E27FC236}">
-                <a16:creationId xmlns:a16="http://schemas.microsoft.com/office/drawing/2014/main" id="{1264D0BD-8B18-4C7E-86B2-FCAF86B411C7}"/>
+                <a16:creationId xmlns:a16="http://schemas.microsoft.com/office/drawing/2014/main" id="{4DB5BB30-E176-48C6-8A1B-E8DF0C898BC1}"/>
               </a:ext>
             </a:extLst>
           </p:cNvPr>
@@ -7458,7 +7458,7 @@
           <p:cNvPr id="5" name="s5-identity">
             <a:extLst xmlns:a="http://schemas.openxmlformats.org/drawingml/2006/main">
               <a:ext uri="{FF2B5EF4-FFF2-40B4-BE49-F238E27FC236}">
-                <a16:creationId xmlns:a16="http://schemas.microsoft.com/office/drawing/2014/main" id="{5CC5F845-FE4C-41AE-94AD-25C8CF1E202C}"/>
+                <a16:creationId xmlns:a16="http://schemas.microsoft.com/office/drawing/2014/main" id="{98368054-04AF-49AA-9B11-0484A566733D}"/>
               </a:ext>
             </a:extLst>
           </p:cNvPr>
@@ -7516,7 +7516,7 @@
           <p:cNvPr id="6" name="core-no-0">
             <a:extLst xmlns:a="http://schemas.openxmlformats.org/drawingml/2006/main">
               <a:ext uri="{FF2B5EF4-FFF2-40B4-BE49-F238E27FC236}">
-                <a16:creationId xmlns:a16="http://schemas.microsoft.com/office/drawing/2014/main" id="{14636FCB-16EA-472C-AA4E-9A0F3BA2A83E}"/>
+                <a16:creationId xmlns:a16="http://schemas.microsoft.com/office/drawing/2014/main" id="{41BF5002-AD1E-4DE2-B7BF-BFE6AB7A468D}"/>
               </a:ext>
             </a:extLst>
           </p:cNvPr>
@@ -7548,7 +7548,7 @@
             <a:pPr algn="l">
               <a:defRPr sz="2250" b="1">
                 <a:solidFill>
-                  <a:srgbClr val="E5783F"/>
+                  <a:srgbClr val="9A3F16"/>
                 </a:solidFill>
                 <a:latin typeface="PingFang SC"/>
                 <a:ea typeface="PingFang SC"/>
@@ -7558,7 +7558,7 @@
             <a:r>
               <a:rPr sz="2250" b="1">
                 <a:solidFill>
-                  <a:srgbClr val="E5783F"/>
+                  <a:srgbClr val="9A3F16"/>
                 </a:solidFill>
                 <a:latin typeface="PingFang SC"/>
                 <a:ea typeface="PingFang SC"/>
@@ -7574,7 +7574,7 @@
           <p:cNvPr id="7" name="core-label-0">
             <a:extLst xmlns:a="http://schemas.openxmlformats.org/drawingml/2006/main">
               <a:ext uri="{FF2B5EF4-FFF2-40B4-BE49-F238E27FC236}">
-                <a16:creationId xmlns:a16="http://schemas.microsoft.com/office/drawing/2014/main" id="{FC78FE11-D559-46BA-BEC9-1C1CD0DBB236}"/>
+                <a16:creationId xmlns:a16="http://schemas.microsoft.com/office/drawing/2014/main" id="{C2EA45A3-30A4-4F12-A5F1-FF851ACC237A}"/>
               </a:ext>
             </a:extLst>
           </p:cNvPr>
@@ -7632,7 +7632,7 @@
           <p:cNvPr id="8" name="core-body-0">
             <a:extLst xmlns:a="http://schemas.openxmlformats.org/drawingml/2006/main">
               <a:ext uri="{FF2B5EF4-FFF2-40B4-BE49-F238E27FC236}">
-                <a16:creationId xmlns:a16="http://schemas.microsoft.com/office/drawing/2014/main" id="{93C8A88E-65A2-4C96-96ED-CB29BEE71037}"/>
+                <a16:creationId xmlns:a16="http://schemas.microsoft.com/office/drawing/2014/main" id="{BCCD4E7C-9838-4044-8F70-8015814B93C2}"/>
               </a:ext>
             </a:extLst>
           </p:cNvPr>
@@ -7656,14 +7656,14 @@
           </a:solidFill>
           <a:ln xmlns:a="http://schemas.openxmlformats.org/drawingml/2006/main" w="19050">
             <a:solidFill>
-              <a:srgbClr val="E5783F"/>
+              <a:srgbClr val="9A3F16"/>
             </a:solidFill>
             <a:prstDash val="solid"/>
           </a:ln>
         </p:spPr>
         <p:txBody>
           <a:bodyPr xmlns:a="http://schemas.openxmlformats.org/drawingml/2006/main" lIns="152400" tIns="133350" rIns="152400" bIns="133350" anchor="ctr">
-            <a:normAutofit fontScale="98233"/>
+            <a:normAutofit fontScale="100000"/>
           </a:bodyPr>
           <a:lstStyle xmlns:a="http://schemas.openxmlformats.org/drawingml/2006/main"/>
           <a:p xmlns:a="http://schemas.openxmlformats.org/drawingml/2006/main">
@@ -7686,7 +7686,7 @@
                 <a:ea typeface="PingFang SC"/>
                 <a:cs typeface="PingFang SC"/>
               </a:rPr>
-              <a:t>稳定流程通常包含资料检索、草稿生成、规则校验、人工审批、正式交付和事后反馈。每一步都要回答三个问题：模型看得到什么，模型能做什么，谁对结果负责。低置信度、资料冲突…</a:t>
+              <a:t>稳定流程通常包含资料检索、草稿生成、规则校验、人工审批、正式交付和事后反馈；每一步都要回答三个问题；模型看得到什么，模型能做什么</a:t>
             </a:r>
           </a:p>
         </p:txBody>
@@ -7696,7 +7696,7 @@
           <p:cNvPr id="9" name="core-no-1">
             <a:extLst xmlns:a="http://schemas.openxmlformats.org/drawingml/2006/main">
               <a:ext uri="{FF2B5EF4-FFF2-40B4-BE49-F238E27FC236}">
-                <a16:creationId xmlns:a16="http://schemas.microsoft.com/office/drawing/2014/main" id="{F50BF0BB-15A9-4C63-91DF-06149D3DDF0C}"/>
+                <a16:creationId xmlns:a16="http://schemas.microsoft.com/office/drawing/2014/main" id="{34AC77CA-7506-456C-9F0F-0CC9F051DD5D}"/>
               </a:ext>
             </a:extLst>
           </p:cNvPr>
@@ -7728,7 +7728,7 @@
             <a:pPr algn="l">
               <a:defRPr sz="2250" b="1">
                 <a:solidFill>
-                  <a:srgbClr val="E5783F"/>
+                  <a:srgbClr val="9A3F16"/>
                 </a:solidFill>
                 <a:latin typeface="PingFang SC"/>
                 <a:ea typeface="PingFang SC"/>
@@ -7738,7 +7738,7 @@
             <a:r>
               <a:rPr sz="2250" b="1">
                 <a:solidFill>
-                  <a:srgbClr val="E5783F"/>
+                  <a:srgbClr val="9A3F16"/>
                 </a:solidFill>
                 <a:latin typeface="PingFang SC"/>
                 <a:ea typeface="PingFang SC"/>
@@ -7754,7 +7754,7 @@
           <p:cNvPr id="10" name="core-body-1">
             <a:extLst xmlns:a="http://schemas.openxmlformats.org/drawingml/2006/main">
               <a:ext uri="{FF2B5EF4-FFF2-40B4-BE49-F238E27FC236}">
-                <a16:creationId xmlns:a16="http://schemas.microsoft.com/office/drawing/2014/main" id="{1841F21C-DD01-4346-AC1F-D7F7DE0D856C}"/>
+                <a16:creationId xmlns:a16="http://schemas.microsoft.com/office/drawing/2014/main" id="{7AD34FFE-F7EA-42E5-B9DC-CD9DBF34E211}"/>
               </a:ext>
             </a:extLst>
           </p:cNvPr>
@@ -7808,7 +7808,7 @@
                 <a:ea typeface="PingFang SC"/>
                 <a:cs typeface="PingFang SC"/>
               </a:rPr>
-              <a:t>试点阶段宜采用“影子运行”或“双轨对照”：AI 先给建议但不直接改变业务结果，与原流程并行比较。通过抽样复核记录错误类型，而不是只统计平均分。上线后仍要保存输入版本、引用、模型版本…</a:t>
+              <a:t>试点阶段宜采用“影子运行”或“双轨对照”；AI 先给建议但不直接改变业务结果；与原流程并行比较，通过抽样复核记录错误类型；而不是只统计平均分</a:t>
             </a:r>
           </a:p>
         </p:txBody>
@@ -7818,7 +7818,7 @@
           <p:cNvPr id="11" name="s5-takeaway-rule">
             <a:extLst xmlns:a="http://schemas.openxmlformats.org/drawingml/2006/main">
               <a:ext uri="{FF2B5EF4-FFF2-40B4-BE49-F238E27FC236}">
-                <a16:creationId xmlns:a16="http://schemas.microsoft.com/office/drawing/2014/main" id="{B4557BDE-035B-41A9-B5B0-156FFEF34932}"/>
+                <a16:creationId xmlns:a16="http://schemas.microsoft.com/office/drawing/2014/main" id="{9A49D4CA-9234-437D-BC78-74E2E66093A1}"/>
               </a:ext>
             </a:extLst>
           </p:cNvPr>
@@ -7851,7 +7851,7 @@
           <p:cNvPr id="12" name="s5-takeaway">
             <a:extLst xmlns:a="http://schemas.openxmlformats.org/drawingml/2006/main">
               <a:ext uri="{FF2B5EF4-FFF2-40B4-BE49-F238E27FC236}">
-                <a16:creationId xmlns:a16="http://schemas.microsoft.com/office/drawing/2014/main" id="{1230E159-3CFF-4777-9283-1BBE313CB181}"/>
+                <a16:creationId xmlns:a16="http://schemas.microsoft.com/office/drawing/2014/main" id="{FCE7634F-7F7A-419B-AE1D-C1A452A9CEC9}"/>
               </a:ext>
             </a:extLst>
           </p:cNvPr>
@@ -7907,7 +7907,7 @@
     </p:spTree>
     <p:extLst>
       <p:ext uri="{BB962C8B-B14F-4D97-AF65-F5344CB8AC3E}">
-        <p14:creationId xmlns:p14="http://schemas.microsoft.com/office/powerpoint/2010/main" val="627985298"/>
+        <p14:creationId xmlns:p14="http://schemas.microsoft.com/office/powerpoint/2010/main" val="834065665"/>
       </p:ext>
     </p:extLst>
   </p:cSld>
@@ -7938,7 +7938,7 @@
           <p:cNvPr id="1" name="s6-rule">
             <a:extLst xmlns:a="http://schemas.openxmlformats.org/drawingml/2006/main">
               <a:ext uri="{FF2B5EF4-FFF2-40B4-BE49-F238E27FC236}">
-                <a16:creationId xmlns:a16="http://schemas.microsoft.com/office/drawing/2014/main" id="{D51A748B-496C-44FA-AC71-F7CDBB768292}"/>
+                <a16:creationId xmlns:a16="http://schemas.microsoft.com/office/drawing/2014/main" id="{E5B5EB29-C01F-43D6-89AF-B66A407AEE91}"/>
               </a:ext>
             </a:extLst>
           </p:cNvPr>
@@ -7971,7 +7971,7 @@
           <p:cNvPr id="2" name="s6-eyebrow">
             <a:extLst xmlns:a="http://schemas.openxmlformats.org/drawingml/2006/main">
               <a:ext uri="{FF2B5EF4-FFF2-40B4-BE49-F238E27FC236}">
-                <a16:creationId xmlns:a16="http://schemas.microsoft.com/office/drawing/2014/main" id="{6934314B-F78F-4F4D-BF36-6D002FED1408}"/>
+                <a16:creationId xmlns:a16="http://schemas.microsoft.com/office/drawing/2014/main" id="{8393FE4B-2B7F-4606-8A7D-63DA9F9BBA5D}"/>
               </a:ext>
             </a:extLst>
           </p:cNvPr>
@@ -8029,7 +8029,7 @@
           <p:cNvPr id="3" name="s6-title">
             <a:extLst xmlns:a="http://schemas.openxmlformats.org/drawingml/2006/main">
               <a:ext uri="{FF2B5EF4-FFF2-40B4-BE49-F238E27FC236}">
-                <a16:creationId xmlns:a16="http://schemas.microsoft.com/office/drawing/2014/main" id="{7B7CA05C-9C80-4789-A56B-13464D18DCE9}"/>
+                <a16:creationId xmlns:a16="http://schemas.microsoft.com/office/drawing/2014/main" id="{A522B168-D209-4CA0-910C-3C2A2AC1DDA8}"/>
               </a:ext>
             </a:extLst>
           </p:cNvPr>
@@ -8087,7 +8087,7 @@
           <p:cNvPr id="4" name="s6-footer">
             <a:extLst xmlns:a="http://schemas.openxmlformats.org/drawingml/2006/main">
               <a:ext uri="{FF2B5EF4-FFF2-40B4-BE49-F238E27FC236}">
-                <a16:creationId xmlns:a16="http://schemas.microsoft.com/office/drawing/2014/main" id="{13D34897-FC80-4BC7-9C67-195D45ECAF24}"/>
+                <a16:creationId xmlns:a16="http://schemas.microsoft.com/office/drawing/2014/main" id="{ECFF72C8-245B-44E7-B7E6-F8D41DAF5E5B}"/>
               </a:ext>
             </a:extLst>
           </p:cNvPr>
@@ -8118,7 +8118,7 @@
           <p:cNvPr id="5" name="s6-identity">
             <a:extLst xmlns:a="http://schemas.openxmlformats.org/drawingml/2006/main">
               <a:ext uri="{FF2B5EF4-FFF2-40B4-BE49-F238E27FC236}">
-                <a16:creationId xmlns:a16="http://schemas.microsoft.com/office/drawing/2014/main" id="{AFC8B8FE-291A-43D9-8F50-E40477676E3E}"/>
+                <a16:creationId xmlns:a16="http://schemas.microsoft.com/office/drawing/2014/main" id="{A8E71C4E-15EE-460D-8BA4-D53AB8560FF6}"/>
               </a:ext>
             </a:extLst>
           </p:cNvPr>
@@ -8176,7 +8176,7 @@
           <p:cNvPr id="6" name="core-no-0">
             <a:extLst xmlns:a="http://schemas.openxmlformats.org/drawingml/2006/main">
               <a:ext uri="{FF2B5EF4-FFF2-40B4-BE49-F238E27FC236}">
-                <a16:creationId xmlns:a16="http://schemas.microsoft.com/office/drawing/2014/main" id="{E717690F-8CAB-42E8-B68E-55CEE6C9A7A1}"/>
+                <a16:creationId xmlns:a16="http://schemas.microsoft.com/office/drawing/2014/main" id="{F4FA9F78-8009-48B2-89C7-2B0DCF62F48F}"/>
               </a:ext>
             </a:extLst>
           </p:cNvPr>
@@ -8208,7 +8208,7 @@
             <a:pPr algn="l">
               <a:defRPr sz="2250" b="1">
                 <a:solidFill>
-                  <a:srgbClr val="E5783F"/>
+                  <a:srgbClr val="9A3F16"/>
                 </a:solidFill>
                 <a:latin typeface="PingFang SC"/>
                 <a:ea typeface="PingFang SC"/>
@@ -8218,7 +8218,7 @@
             <a:r>
               <a:rPr sz="2250" b="1">
                 <a:solidFill>
-                  <a:srgbClr val="E5783F"/>
+                  <a:srgbClr val="9A3F16"/>
                 </a:solidFill>
                 <a:latin typeface="PingFang SC"/>
                 <a:ea typeface="PingFang SC"/>
@@ -8234,7 +8234,7 @@
           <p:cNvPr id="7" name="core-label-0">
             <a:extLst xmlns:a="http://schemas.openxmlformats.org/drawingml/2006/main">
               <a:ext uri="{FF2B5EF4-FFF2-40B4-BE49-F238E27FC236}">
-                <a16:creationId xmlns:a16="http://schemas.microsoft.com/office/drawing/2014/main" id="{40D96F36-792F-4F69-BD5C-A742D1289F2F}"/>
+                <a16:creationId xmlns:a16="http://schemas.microsoft.com/office/drawing/2014/main" id="{F9A30B20-9866-479B-AA72-A112FEB1077B}"/>
               </a:ext>
             </a:extLst>
           </p:cNvPr>
@@ -8292,7 +8292,7 @@
           <p:cNvPr id="8" name="core-body-0">
             <a:extLst xmlns:a="http://schemas.openxmlformats.org/drawingml/2006/main">
               <a:ext uri="{FF2B5EF4-FFF2-40B4-BE49-F238E27FC236}">
-                <a16:creationId xmlns:a16="http://schemas.microsoft.com/office/drawing/2014/main" id="{C93DC161-4004-4D3E-B224-CE5AC8FEBD12}"/>
+                <a16:creationId xmlns:a16="http://schemas.microsoft.com/office/drawing/2014/main" id="{455A8D0B-E809-4464-BD1E-43161BA25904}"/>
               </a:ext>
             </a:extLst>
           </p:cNvPr>
@@ -8316,7 +8316,7 @@
           </a:solidFill>
           <a:ln xmlns:a="http://schemas.openxmlformats.org/drawingml/2006/main" w="19050">
             <a:solidFill>
-              <a:srgbClr val="E5783F"/>
+              <a:srgbClr val="9A3F16"/>
             </a:solidFill>
             <a:prstDash val="solid"/>
           </a:ln>
@@ -8346,7 +8346,7 @@
                 <a:ea typeface="PingFang SC"/>
                 <a:cs typeface="PingFang SC"/>
               </a:rPr>
-              <a:t>收益可以来自节省工时、缩短等待、降低返工、减少损耗、提高产能或避免风险。成本则包括数据清理、系统集成、模型调用、算力、培训、人工审核、监控、安全、版权与持续维护。一次性投入应按合理周期分摊…</a:t>
+              <a:t>收益可以来自节省工时、缩短等待、降低返工、减少损耗、提高产能或避免风险；成本则包括数据清理、系统集成、模型调用、算力、培训、人工审核、监控、安全、版权与持续维护；一次性投入应按合理周期分摊</a:t>
             </a:r>
           </a:p>
         </p:txBody>
@@ -8356,7 +8356,7 @@
           <p:cNvPr id="9" name="core-no-1">
             <a:extLst xmlns:a="http://schemas.openxmlformats.org/drawingml/2006/main">
               <a:ext uri="{FF2B5EF4-FFF2-40B4-BE49-F238E27FC236}">
-                <a16:creationId xmlns:a16="http://schemas.microsoft.com/office/drawing/2014/main" id="{7FFDCC6A-9B10-4AEB-90CB-44EFCDF9EBB5}"/>
+                <a16:creationId xmlns:a16="http://schemas.microsoft.com/office/drawing/2014/main" id="{8D3C26B5-01AC-465A-A4C8-0C3DE972B21B}"/>
               </a:ext>
             </a:extLst>
           </p:cNvPr>
@@ -8388,7 +8388,7 @@
             <a:pPr algn="l">
               <a:defRPr sz="2250" b="1">
                 <a:solidFill>
-                  <a:srgbClr val="E5783F"/>
+                  <a:srgbClr val="9A3F16"/>
                 </a:solidFill>
                 <a:latin typeface="PingFang SC"/>
                 <a:ea typeface="PingFang SC"/>
@@ -8398,7 +8398,7 @@
             <a:r>
               <a:rPr sz="2250" b="1">
                 <a:solidFill>
-                  <a:srgbClr val="E5783F"/>
+                  <a:srgbClr val="9A3F16"/>
                 </a:solidFill>
                 <a:latin typeface="PingFang SC"/>
                 <a:ea typeface="PingFang SC"/>
@@ -8414,7 +8414,7 @@
           <p:cNvPr id="10" name="core-body-1">
             <a:extLst xmlns:a="http://schemas.openxmlformats.org/drawingml/2006/main">
               <a:ext uri="{FF2B5EF4-FFF2-40B4-BE49-F238E27FC236}">
-                <a16:creationId xmlns:a16="http://schemas.microsoft.com/office/drawing/2014/main" id="{5465170E-259F-4943-8CAE-BB2A0C64103B}"/>
+                <a16:creationId xmlns:a16="http://schemas.microsoft.com/office/drawing/2014/main" id="{487EEC3D-84A0-47C4-AAF0-9ED6532CB8C6}"/>
               </a:ext>
             </a:extLst>
           </p:cNvPr>
@@ -8478,7 +8478,7 @@
           <p:cNvPr id="11" name="core-no-2">
             <a:extLst xmlns:a="http://schemas.openxmlformats.org/drawingml/2006/main">
               <a:ext uri="{FF2B5EF4-FFF2-40B4-BE49-F238E27FC236}">
-                <a16:creationId xmlns:a16="http://schemas.microsoft.com/office/drawing/2014/main" id="{5A0A6518-9344-4881-80DB-7F9854944C9A}"/>
+                <a16:creationId xmlns:a16="http://schemas.microsoft.com/office/drawing/2014/main" id="{704CD798-4DDD-472D-939E-144FE84F0651}"/>
               </a:ext>
             </a:extLst>
           </p:cNvPr>
@@ -8510,7 +8510,7 @@
             <a:pPr algn="l">
               <a:defRPr sz="2250" b="1">
                 <a:solidFill>
-                  <a:srgbClr val="E5783F"/>
+                  <a:srgbClr val="9A3F16"/>
                 </a:solidFill>
                 <a:latin typeface="PingFang SC"/>
                 <a:ea typeface="PingFang SC"/>
@@ -8520,7 +8520,7 @@
             <a:r>
               <a:rPr sz="2250" b="1">
                 <a:solidFill>
-                  <a:srgbClr val="E5783F"/>
+                  <a:srgbClr val="9A3F16"/>
                 </a:solidFill>
                 <a:latin typeface="PingFang SC"/>
                 <a:ea typeface="PingFang SC"/>
@@ -8536,7 +8536,7 @@
           <p:cNvPr id="12" name="core-body-2">
             <a:extLst xmlns:a="http://schemas.openxmlformats.org/drawingml/2006/main">
               <a:ext uri="{FF2B5EF4-FFF2-40B4-BE49-F238E27FC236}">
-                <a16:creationId xmlns:a16="http://schemas.microsoft.com/office/drawing/2014/main" id="{277D263F-9A32-4D73-9C2C-2B98D039B1A3}"/>
+                <a16:creationId xmlns:a16="http://schemas.microsoft.com/office/drawing/2014/main" id="{DCB9BFF0-B5A0-48F7-98BF-1A0DEFEE183A}"/>
               </a:ext>
             </a:extLst>
           </p:cNvPr>
@@ -8600,7 +8600,7 @@
           <p:cNvPr id="13" name="s6-takeaway-rule">
             <a:extLst xmlns:a="http://schemas.openxmlformats.org/drawingml/2006/main">
               <a:ext uri="{FF2B5EF4-FFF2-40B4-BE49-F238E27FC236}">
-                <a16:creationId xmlns:a16="http://schemas.microsoft.com/office/drawing/2014/main" id="{D7C67463-D1BF-4682-90A7-7279CF003ADD}"/>
+                <a16:creationId xmlns:a16="http://schemas.microsoft.com/office/drawing/2014/main" id="{87A9040A-727B-401E-A66F-C2C384477075}"/>
               </a:ext>
             </a:extLst>
           </p:cNvPr>
@@ -8633,7 +8633,7 @@
           <p:cNvPr id="14" name="s6-takeaway">
             <a:extLst xmlns:a="http://schemas.openxmlformats.org/drawingml/2006/main">
               <a:ext uri="{FF2B5EF4-FFF2-40B4-BE49-F238E27FC236}">
-                <a16:creationId xmlns:a16="http://schemas.microsoft.com/office/drawing/2014/main" id="{CD28A593-6948-46A1-8D7D-E499D037360E}"/>
+                <a16:creationId xmlns:a16="http://schemas.microsoft.com/office/drawing/2014/main" id="{A1403538-8C4A-4F39-8C7F-46C6417E4472}"/>
               </a:ext>
             </a:extLst>
           </p:cNvPr>
@@ -8689,7 +8689,7 @@
     </p:spTree>
     <p:extLst>
       <p:ext uri="{BB962C8B-B14F-4D97-AF65-F5344CB8AC3E}">
-        <p14:creationId xmlns:p14="http://schemas.microsoft.com/office/powerpoint/2010/main" val="292829450"/>
+        <p14:creationId xmlns:p14="http://schemas.microsoft.com/office/powerpoint/2010/main" val="269491504"/>
       </p:ext>
     </p:extLst>
   </p:cSld>
@@ -8720,7 +8720,7 @@
           <p:cNvPr id="1" name="s7-rule">
             <a:extLst xmlns:a="http://schemas.openxmlformats.org/drawingml/2006/main">
               <a:ext uri="{FF2B5EF4-FFF2-40B4-BE49-F238E27FC236}">
-                <a16:creationId xmlns:a16="http://schemas.microsoft.com/office/drawing/2014/main" id="{CBBF6814-843D-4AF3-AA10-666891DFCF23}"/>
+                <a16:creationId xmlns:a16="http://schemas.microsoft.com/office/drawing/2014/main" id="{90671825-1B3B-44E8-A8DF-C74E9A01E2AE}"/>
               </a:ext>
             </a:extLst>
           </p:cNvPr>
@@ -8753,7 +8753,7 @@
           <p:cNvPr id="2" name="s7-eyebrow">
             <a:extLst xmlns:a="http://schemas.openxmlformats.org/drawingml/2006/main">
               <a:ext uri="{FF2B5EF4-FFF2-40B4-BE49-F238E27FC236}">
-                <a16:creationId xmlns:a16="http://schemas.microsoft.com/office/drawing/2014/main" id="{D12EE0DD-1CB5-42D8-8B2A-EA910F3CCC10}"/>
+                <a16:creationId xmlns:a16="http://schemas.microsoft.com/office/drawing/2014/main" id="{2DFC4BD7-DF8C-4351-9052-127F6F71FDE3}"/>
               </a:ext>
             </a:extLst>
           </p:cNvPr>
@@ -8811,7 +8811,7 @@
           <p:cNvPr id="3" name="s7-title">
             <a:extLst xmlns:a="http://schemas.openxmlformats.org/drawingml/2006/main">
               <a:ext uri="{FF2B5EF4-FFF2-40B4-BE49-F238E27FC236}">
-                <a16:creationId xmlns:a16="http://schemas.microsoft.com/office/drawing/2014/main" id="{8E86D17A-CA51-4CE9-93C5-B19065AB16E3}"/>
+                <a16:creationId xmlns:a16="http://schemas.microsoft.com/office/drawing/2014/main" id="{934C0F66-6B3B-494D-8187-D624C6C590E9}"/>
               </a:ext>
             </a:extLst>
           </p:cNvPr>
@@ -8869,7 +8869,7 @@
           <p:cNvPr id="4" name="s7-footer">
             <a:extLst xmlns:a="http://schemas.openxmlformats.org/drawingml/2006/main">
               <a:ext uri="{FF2B5EF4-FFF2-40B4-BE49-F238E27FC236}">
-                <a16:creationId xmlns:a16="http://schemas.microsoft.com/office/drawing/2014/main" id="{A21974BC-2647-491B-A0EF-44527577D3C9}"/>
+                <a16:creationId xmlns:a16="http://schemas.microsoft.com/office/drawing/2014/main" id="{B43CA108-AA05-4E23-AF34-485D37E78694}"/>
               </a:ext>
             </a:extLst>
           </p:cNvPr>
@@ -8900,7 +8900,7 @@
           <p:cNvPr id="5" name="s7-identity">
             <a:extLst xmlns:a="http://schemas.openxmlformats.org/drawingml/2006/main">
               <a:ext uri="{FF2B5EF4-FFF2-40B4-BE49-F238E27FC236}">
-                <a16:creationId xmlns:a16="http://schemas.microsoft.com/office/drawing/2014/main" id="{580989B4-5301-4F92-B840-21A2ACB6CD86}"/>
+                <a16:creationId xmlns:a16="http://schemas.microsoft.com/office/drawing/2014/main" id="{10038C1F-4F3A-4E57-BFE0-B7199F06CF8B}"/>
               </a:ext>
             </a:extLst>
           </p:cNvPr>
@@ -8958,7 +8958,7 @@
           <p:cNvPr id="6" name="core-no-0">
             <a:extLst xmlns:a="http://schemas.openxmlformats.org/drawingml/2006/main">
               <a:ext uri="{FF2B5EF4-FFF2-40B4-BE49-F238E27FC236}">
-                <a16:creationId xmlns:a16="http://schemas.microsoft.com/office/drawing/2014/main" id="{078610FA-1ED2-4911-9442-7F1E60EF8787}"/>
+                <a16:creationId xmlns:a16="http://schemas.microsoft.com/office/drawing/2014/main" id="{3B38B420-6D0C-4D25-B18E-6D39DB9DF9E3}"/>
               </a:ext>
             </a:extLst>
           </p:cNvPr>
@@ -8990,7 +8990,7 @@
             <a:pPr algn="l">
               <a:defRPr sz="2250" b="1">
                 <a:solidFill>
-                  <a:srgbClr val="E5783F"/>
+                  <a:srgbClr val="9A3F16"/>
                 </a:solidFill>
                 <a:latin typeface="PingFang SC"/>
                 <a:ea typeface="PingFang SC"/>
@@ -9000,7 +9000,7 @@
             <a:r>
               <a:rPr sz="2250" b="1">
                 <a:solidFill>
-                  <a:srgbClr val="E5783F"/>
+                  <a:srgbClr val="9A3F16"/>
                 </a:solidFill>
                 <a:latin typeface="PingFang SC"/>
                 <a:ea typeface="PingFang SC"/>
@@ -9016,7 +9016,7 @@
           <p:cNvPr id="7" name="core-label-0">
             <a:extLst xmlns:a="http://schemas.openxmlformats.org/drawingml/2006/main">
               <a:ext uri="{FF2B5EF4-FFF2-40B4-BE49-F238E27FC236}">
-                <a16:creationId xmlns:a16="http://schemas.microsoft.com/office/drawing/2014/main" id="{B55B5B2B-0AF3-466E-A970-282E6D6AF116}"/>
+                <a16:creationId xmlns:a16="http://schemas.microsoft.com/office/drawing/2014/main" id="{5F684D92-E43C-4A32-B5AD-9E4EA95DF8AF}"/>
               </a:ext>
             </a:extLst>
           </p:cNvPr>
@@ -9074,7 +9074,7 @@
           <p:cNvPr id="8" name="core-body-0">
             <a:extLst xmlns:a="http://schemas.openxmlformats.org/drawingml/2006/main">
               <a:ext uri="{FF2B5EF4-FFF2-40B4-BE49-F238E27FC236}">
-                <a16:creationId xmlns:a16="http://schemas.microsoft.com/office/drawing/2014/main" id="{0BF2D728-2360-45A1-ABCE-74E8CF9F13CF}"/>
+                <a16:creationId xmlns:a16="http://schemas.microsoft.com/office/drawing/2014/main" id="{EC4C0385-CE76-494F-855B-A9807BF0CD3A}"/>
               </a:ext>
             </a:extLst>
           </p:cNvPr>
@@ -9098,14 +9098,14 @@
           </a:solidFill>
           <a:ln xmlns:a="http://schemas.openxmlformats.org/drawingml/2006/main" w="19050">
             <a:solidFill>
-              <a:srgbClr val="E5783F"/>
+              <a:srgbClr val="9A3F16"/>
             </a:solidFill>
             <a:prstDash val="solid"/>
           </a:ln>
         </p:spPr>
         <p:txBody>
           <a:bodyPr xmlns:a="http://schemas.openxmlformats.org/drawingml/2006/main" lIns="152400" tIns="133350" rIns="152400" bIns="133350" anchor="ctr">
-            <a:normAutofit fontScale="98233"/>
+            <a:normAutofit fontScale="100000"/>
           </a:bodyPr>
           <a:lstStyle xmlns:a="http://schemas.openxmlformats.org/drawingml/2006/main"/>
           <a:p xmlns:a="http://schemas.openxmlformats.org/drawingml/2006/main">
@@ -9128,7 +9128,7 @@
                 <a:ea typeface="PingFang SC"/>
                 <a:cs typeface="PingFang SC"/>
               </a:rPr>
-              <a:t>以下数字仅用于演示算法，不代表任何企业的实际表现。假设某团队每月处理 10,000 个低风险文本任务，人工平均每项 12 分钟，含管理与福利的小时成本假设为 90 元…</a:t>
+              <a:t>以下数字仅用于演示算法；不代表任何企业的实际表现；假设某团队每月处理 10,000 个低风险文本任务；人工平均每项 12 分钟；含管理与福利的小时成本假设为 90 元</a:t>
             </a:r>
           </a:p>
         </p:txBody>
@@ -9138,7 +9138,7 @@
           <p:cNvPr id="9" name="core-no-1">
             <a:extLst xmlns:a="http://schemas.openxmlformats.org/drawingml/2006/main">
               <a:ext uri="{FF2B5EF4-FFF2-40B4-BE49-F238E27FC236}">
-                <a16:creationId xmlns:a16="http://schemas.microsoft.com/office/drawing/2014/main" id="{3D97FAC6-31CB-4AEA-8079-0B3D7D6D6BA8}"/>
+                <a16:creationId xmlns:a16="http://schemas.microsoft.com/office/drawing/2014/main" id="{35D8ED11-2055-482F-8852-705C0C7A9DED}"/>
               </a:ext>
             </a:extLst>
           </p:cNvPr>
@@ -9170,7 +9170,7 @@
             <a:pPr algn="l">
               <a:defRPr sz="2250" b="1">
                 <a:solidFill>
-                  <a:srgbClr val="E5783F"/>
+                  <a:srgbClr val="9A3F16"/>
                 </a:solidFill>
                 <a:latin typeface="PingFang SC"/>
                 <a:ea typeface="PingFang SC"/>
@@ -9180,7 +9180,7 @@
             <a:r>
               <a:rPr sz="2250" b="1">
                 <a:solidFill>
-                  <a:srgbClr val="E5783F"/>
+                  <a:srgbClr val="9A3F16"/>
                 </a:solidFill>
                 <a:latin typeface="PingFang SC"/>
                 <a:ea typeface="PingFang SC"/>
@@ -9196,7 +9196,7 @@
           <p:cNvPr id="10" name="core-body-1">
             <a:extLst xmlns:a="http://schemas.openxmlformats.org/drawingml/2006/main">
               <a:ext uri="{FF2B5EF4-FFF2-40B4-BE49-F238E27FC236}">
-                <a16:creationId xmlns:a16="http://schemas.microsoft.com/office/drawing/2014/main" id="{F3EDB5B8-0D96-483C-AA01-7F59F99424DB}"/>
+                <a16:creationId xmlns:a16="http://schemas.microsoft.com/office/drawing/2014/main" id="{15F0293E-76B7-459B-B45B-60386B966697}"/>
               </a:ext>
             </a:extLst>
           </p:cNvPr>
@@ -9250,7 +9250,7 @@
                 <a:ea typeface="PingFang SC"/>
                 <a:cs typeface="PingFang SC"/>
               </a:rPr>
-              <a:t>再假设每月模型与运维为 2 万至 3.5 万元，集成分摊为 1.5 万至 2.5 万元，质量抽检与风险准备为 0.8 万至 1.5 万元。月度增量投入为 4.3 万至 7.5 万元…</a:t>
+              <a:t>再假设每月模型与运维为 2 万至 3.5 万元；集成分摊为 1.5 万至 2.5 万元；质量抽检与风险准备为 0.8 万至 1.5 万元；月度增量投入为 4.3 万至 7.5 万元</a:t>
             </a:r>
           </a:p>
         </p:txBody>
@@ -9260,7 +9260,7 @@
           <p:cNvPr id="11" name="s7-takeaway-rule">
             <a:extLst xmlns:a="http://schemas.openxmlformats.org/drawingml/2006/main">
               <a:ext uri="{FF2B5EF4-FFF2-40B4-BE49-F238E27FC236}">
-                <a16:creationId xmlns:a16="http://schemas.microsoft.com/office/drawing/2014/main" id="{0A8C0039-1681-48BA-A7F3-98F3A51800B9}"/>
+                <a16:creationId xmlns:a16="http://schemas.microsoft.com/office/drawing/2014/main" id="{D6E4C9B1-2F67-40D8-B6CD-7380904DB0DA}"/>
               </a:ext>
             </a:extLst>
           </p:cNvPr>
@@ -9293,7 +9293,7 @@
           <p:cNvPr id="12" name="s7-takeaway">
             <a:extLst xmlns:a="http://schemas.openxmlformats.org/drawingml/2006/main">
               <a:ext uri="{FF2B5EF4-FFF2-40B4-BE49-F238E27FC236}">
-                <a16:creationId xmlns:a16="http://schemas.microsoft.com/office/drawing/2014/main" id="{DE523409-4420-48A2-8BBD-EB034AF70DA7}"/>
+                <a16:creationId xmlns:a16="http://schemas.microsoft.com/office/drawing/2014/main" id="{0799985C-705D-4AB7-8C19-57513C63F969}"/>
               </a:ext>
             </a:extLst>
           </p:cNvPr>
@@ -9349,7 +9349,7 @@
     </p:spTree>
     <p:extLst>
       <p:ext uri="{BB962C8B-B14F-4D97-AF65-F5344CB8AC3E}">
-        <p14:creationId xmlns:p14="http://schemas.microsoft.com/office/powerpoint/2010/main" val="576717458"/>
+        <p14:creationId xmlns:p14="http://schemas.microsoft.com/office/powerpoint/2010/main" val="2100993344"/>
       </p:ext>
     </p:extLst>
   </p:cSld>
@@ -9380,7 +9380,7 @@
           <p:cNvPr id="1" name="s8-rule">
             <a:extLst xmlns:a="http://schemas.openxmlformats.org/drawingml/2006/main">
               <a:ext uri="{FF2B5EF4-FFF2-40B4-BE49-F238E27FC236}">
-                <a16:creationId xmlns:a16="http://schemas.microsoft.com/office/drawing/2014/main" id="{9D25C941-850E-44CA-8FB0-983802F32C8B}"/>
+                <a16:creationId xmlns:a16="http://schemas.microsoft.com/office/drawing/2014/main" id="{675BCA9F-D33D-455E-B5B2-09F0A58B9352}"/>
               </a:ext>
             </a:extLst>
           </p:cNvPr>
@@ -9413,7 +9413,7 @@
           <p:cNvPr id="2" name="s8-eyebrow">
             <a:extLst xmlns:a="http://schemas.openxmlformats.org/drawingml/2006/main">
               <a:ext uri="{FF2B5EF4-FFF2-40B4-BE49-F238E27FC236}">
-                <a16:creationId xmlns:a16="http://schemas.microsoft.com/office/drawing/2014/main" id="{487BDFF8-C683-4D9A-B34D-DACB3114948B}"/>
+                <a16:creationId xmlns:a16="http://schemas.microsoft.com/office/drawing/2014/main" id="{D2A1D671-A278-46B4-BC43-8D57CF1A1453}"/>
               </a:ext>
             </a:extLst>
           </p:cNvPr>
@@ -9471,7 +9471,7 @@
           <p:cNvPr id="3" name="s8-title">
             <a:extLst xmlns:a="http://schemas.openxmlformats.org/drawingml/2006/main">
               <a:ext uri="{FF2B5EF4-FFF2-40B4-BE49-F238E27FC236}">
-                <a16:creationId xmlns:a16="http://schemas.microsoft.com/office/drawing/2014/main" id="{ED519037-C15D-4AA0-B3DB-DC1E02816FF5}"/>
+                <a16:creationId xmlns:a16="http://schemas.microsoft.com/office/drawing/2014/main" id="{19DA0C5C-59D7-47BD-8CC5-797A218A1714}"/>
               </a:ext>
             </a:extLst>
           </p:cNvPr>
@@ -9529,7 +9529,7 @@
           <p:cNvPr id="4" name="s8-footer">
             <a:extLst xmlns:a="http://schemas.openxmlformats.org/drawingml/2006/main">
               <a:ext uri="{FF2B5EF4-FFF2-40B4-BE49-F238E27FC236}">
-                <a16:creationId xmlns:a16="http://schemas.microsoft.com/office/drawing/2014/main" id="{B2033386-22E8-4DEB-BCF8-B0E804BE0909}"/>
+                <a16:creationId xmlns:a16="http://schemas.microsoft.com/office/drawing/2014/main" id="{6295F0E7-6347-40DA-93A6-AD295B0E1C44}"/>
               </a:ext>
             </a:extLst>
           </p:cNvPr>
@@ -9560,7 +9560,7 @@
           <p:cNvPr id="5" name="s8-identity">
             <a:extLst xmlns:a="http://schemas.openxmlformats.org/drawingml/2006/main">
               <a:ext uri="{FF2B5EF4-FFF2-40B4-BE49-F238E27FC236}">
-                <a16:creationId xmlns:a16="http://schemas.microsoft.com/office/drawing/2014/main" id="{3997A4CA-1B09-471A-9D28-3697C617C974}"/>
+                <a16:creationId xmlns:a16="http://schemas.microsoft.com/office/drawing/2014/main" id="{A8A5E544-FBCF-4929-B4F2-DE264A0B846C}"/>
               </a:ext>
             </a:extLst>
           </p:cNvPr>
@@ -9618,7 +9618,7 @@
           <p:cNvPr id="6" name="core-no-0">
             <a:extLst xmlns:a="http://schemas.openxmlformats.org/drawingml/2006/main">
               <a:ext uri="{FF2B5EF4-FFF2-40B4-BE49-F238E27FC236}">
-                <a16:creationId xmlns:a16="http://schemas.microsoft.com/office/drawing/2014/main" id="{64CA8E43-BA38-43DA-89AC-A36573D83913}"/>
+                <a16:creationId xmlns:a16="http://schemas.microsoft.com/office/drawing/2014/main" id="{5F6E70C3-B83B-4193-918D-D9F32CD02B37}"/>
               </a:ext>
             </a:extLst>
           </p:cNvPr>
@@ -9650,7 +9650,7 @@
             <a:pPr algn="l">
               <a:defRPr sz="2250" b="1">
                 <a:solidFill>
-                  <a:srgbClr val="E5783F"/>
+                  <a:srgbClr val="9A3F16"/>
                 </a:solidFill>
                 <a:latin typeface="PingFang SC"/>
                 <a:ea typeface="PingFang SC"/>
@@ -9660,7 +9660,7 @@
             <a:r>
               <a:rPr sz="2250" b="1">
                 <a:solidFill>
-                  <a:srgbClr val="E5783F"/>
+                  <a:srgbClr val="9A3F16"/>
                 </a:solidFill>
                 <a:latin typeface="PingFang SC"/>
                 <a:ea typeface="PingFang SC"/>
@@ -9676,7 +9676,7 @@
           <p:cNvPr id="7" name="core-label-0">
             <a:extLst xmlns:a="http://schemas.openxmlformats.org/drawingml/2006/main">
               <a:ext uri="{FF2B5EF4-FFF2-40B4-BE49-F238E27FC236}">
-                <a16:creationId xmlns:a16="http://schemas.microsoft.com/office/drawing/2014/main" id="{01C60AA0-B7A5-4E07-875D-6223DC0CEA02}"/>
+                <a16:creationId xmlns:a16="http://schemas.microsoft.com/office/drawing/2014/main" id="{DDE08F6E-F99B-4342-93D8-267AE81E36A5}"/>
               </a:ext>
             </a:extLst>
           </p:cNvPr>
@@ -9734,7 +9734,7 @@
           <p:cNvPr id="8" name="core-body-0">
             <a:extLst xmlns:a="http://schemas.openxmlformats.org/drawingml/2006/main">
               <a:ext uri="{FF2B5EF4-FFF2-40B4-BE49-F238E27FC236}">
-                <a16:creationId xmlns:a16="http://schemas.microsoft.com/office/drawing/2014/main" id="{16564EF1-F38D-4AFD-AA82-E8D2F8DB15D3}"/>
+                <a16:creationId xmlns:a16="http://schemas.microsoft.com/office/drawing/2014/main" id="{A5BFD1BB-0900-44AE-B581-8383B61FF494}"/>
               </a:ext>
             </a:extLst>
           </p:cNvPr>
@@ -9758,7 +9758,7 @@
           </a:solidFill>
           <a:ln xmlns:a="http://schemas.openxmlformats.org/drawingml/2006/main" w="19050">
             <a:solidFill>
-              <a:srgbClr val="E5783F"/>
+              <a:srgbClr val="9A3F16"/>
             </a:solidFill>
             <a:prstDash val="solid"/>
           </a:ln>
@@ -9788,7 +9788,7 @@
                 <a:ea typeface="PingFang SC"/>
                 <a:cs typeface="PingFang SC"/>
               </a:rPr>
-              <a:t>成功标准必须在试点前确定，例如关键质量不低于现状、单位任务总成本下降、合规审查通过、人工接管可用，并且一线人员愿意持续使用。推广应逐步扩大任务类型和用户范围，每次扩展都重新测量…</a:t>
+              <a:t>成功标准必须在试点前确定；例如关键质量不低于现状、单位任务总成本下降、合规审查通过、人工接管可用；并且一线人员愿意持续使用；推广应逐步扩大任务类型和用户范围；每次扩展都重新测量</a:t>
             </a:r>
           </a:p>
         </p:txBody>
@@ -9798,7 +9798,7 @@
           <p:cNvPr id="9" name="core-no-1">
             <a:extLst xmlns:a="http://schemas.openxmlformats.org/drawingml/2006/main">
               <a:ext uri="{FF2B5EF4-FFF2-40B4-BE49-F238E27FC236}">
-                <a16:creationId xmlns:a16="http://schemas.microsoft.com/office/drawing/2014/main" id="{92F52549-1DB7-4C94-A0E3-958E196896F7}"/>
+                <a16:creationId xmlns:a16="http://schemas.microsoft.com/office/drawing/2014/main" id="{E12E7BE8-C13F-45FF-B84B-8834E6522D24}"/>
               </a:ext>
             </a:extLst>
           </p:cNvPr>
@@ -9830,7 +9830,7 @@
             <a:pPr algn="l">
               <a:defRPr sz="2250" b="1">
                 <a:solidFill>
-                  <a:srgbClr val="E5783F"/>
+                  <a:srgbClr val="9A3F16"/>
                 </a:solidFill>
                 <a:latin typeface="PingFang SC"/>
                 <a:ea typeface="PingFang SC"/>
@@ -9840,7 +9840,7 @@
             <a:r>
               <a:rPr sz="2250" b="1">
                 <a:solidFill>
-                  <a:srgbClr val="E5783F"/>
+                  <a:srgbClr val="9A3F16"/>
                 </a:solidFill>
                 <a:latin typeface="PingFang SC"/>
                 <a:ea typeface="PingFang SC"/>
@@ -9856,7 +9856,7 @@
           <p:cNvPr id="10" name="core-body-1">
             <a:extLst xmlns:a="http://schemas.openxmlformats.org/drawingml/2006/main">
               <a:ext uri="{FF2B5EF4-FFF2-40B4-BE49-F238E27FC236}">
-                <a16:creationId xmlns:a16="http://schemas.microsoft.com/office/drawing/2014/main" id="{958EE414-F68F-49EF-ABF7-E0EE1FC2E3DD}"/>
+                <a16:creationId xmlns:a16="http://schemas.microsoft.com/office/drawing/2014/main" id="{C605E277-D6A5-4297-8D9E-5297798F8F24}"/>
               </a:ext>
             </a:extLst>
           </p:cNvPr>
@@ -9910,7 +9910,7 @@
                 <a:ea typeface="PingFang SC"/>
                 <a:cs typeface="PingFang SC"/>
               </a:rPr>
-              <a:t>停止条件同样重要。出现未经授权的数据访问或披露，应立即暂停；关键错误超过事先约定上限，应退回人工流程并调查；连续两个评测周期未达到质量或成本门槛，应停止扩展；供应商、规则或数据发生重大变化…</a:t>
+              <a:t>停止条件同样重要，出现未经授权的数据访问或披露；应立即暂停，关键错误超过事先约定上限；应退回人工流程并调查；连续两个评测周期未达到质量或成本门槛；应停止扩展，供应商、规则或数据发生重大变化</a:t>
             </a:r>
           </a:p>
         </p:txBody>
@@ -9920,7 +9920,7 @@
           <p:cNvPr id="11" name="s8-takeaway-rule">
             <a:extLst xmlns:a="http://schemas.openxmlformats.org/drawingml/2006/main">
               <a:ext uri="{FF2B5EF4-FFF2-40B4-BE49-F238E27FC236}">
-                <a16:creationId xmlns:a16="http://schemas.microsoft.com/office/drawing/2014/main" id="{13B6E0C7-1948-4876-8E68-F7130DB08680}"/>
+                <a16:creationId xmlns:a16="http://schemas.microsoft.com/office/drawing/2014/main" id="{0EB24D0B-7AC6-4C16-9AF5-340A46796FDF}"/>
               </a:ext>
             </a:extLst>
           </p:cNvPr>
@@ -9953,7 +9953,7 @@
           <p:cNvPr id="12" name="s8-takeaway">
             <a:extLst xmlns:a="http://schemas.openxmlformats.org/drawingml/2006/main">
               <a:ext uri="{FF2B5EF4-FFF2-40B4-BE49-F238E27FC236}">
-                <a16:creationId xmlns:a16="http://schemas.microsoft.com/office/drawing/2014/main" id="{E1473657-E7BC-4994-813B-3D84637DAFBE}"/>
+                <a16:creationId xmlns:a16="http://schemas.microsoft.com/office/drawing/2014/main" id="{E8546499-279E-4BEA-9D0D-3BFFAB067213}"/>
               </a:ext>
             </a:extLst>
           </p:cNvPr>
@@ -10009,7 +10009,7 @@
     </p:spTree>
     <p:extLst>
       <p:ext uri="{BB962C8B-B14F-4D97-AF65-F5344CB8AC3E}">
-        <p14:creationId xmlns:p14="http://schemas.microsoft.com/office/powerpoint/2010/main" val="234389236"/>
+        <p14:creationId xmlns:p14="http://schemas.microsoft.com/office/powerpoint/2010/main" val="219001023"/>
       </p:ext>
     </p:extLst>
   </p:cSld>
@@ -10040,7 +10040,7 @@
           <p:cNvPr id="1" name="s9-rule">
             <a:extLst xmlns:a="http://schemas.openxmlformats.org/drawingml/2006/main">
               <a:ext uri="{FF2B5EF4-FFF2-40B4-BE49-F238E27FC236}">
-                <a16:creationId xmlns:a16="http://schemas.microsoft.com/office/drawing/2014/main" id="{2AA7B18B-F5E6-432D-9033-DD66789F57C6}"/>
+                <a16:creationId xmlns:a16="http://schemas.microsoft.com/office/drawing/2014/main" id="{C8D3B56C-5F41-4771-A6C8-A524C776509B}"/>
               </a:ext>
             </a:extLst>
           </p:cNvPr>
@@ -10073,7 +10073,7 @@
           <p:cNvPr id="2" name="s9-eyebrow">
             <a:extLst xmlns:a="http://schemas.openxmlformats.org/drawingml/2006/main">
               <a:ext uri="{FF2B5EF4-FFF2-40B4-BE49-F238E27FC236}">
-                <a16:creationId xmlns:a16="http://schemas.microsoft.com/office/drawing/2014/main" id="{3F29EF6F-E828-436D-85EF-5271B12CBACE}"/>
+                <a16:creationId xmlns:a16="http://schemas.microsoft.com/office/drawing/2014/main" id="{266A7DF2-43D3-4C49-836B-FBD579BE51EA}"/>
               </a:ext>
             </a:extLst>
           </p:cNvPr>
@@ -10131,7 +10131,7 @@
           <p:cNvPr id="3" name="s9-title">
             <a:extLst xmlns:a="http://schemas.openxmlformats.org/drawingml/2006/main">
               <a:ext uri="{FF2B5EF4-FFF2-40B4-BE49-F238E27FC236}">
-                <a16:creationId xmlns:a16="http://schemas.microsoft.com/office/drawing/2014/main" id="{BD4BD548-146E-4FF5-B8E7-4E204545827E}"/>
+                <a16:creationId xmlns:a16="http://schemas.microsoft.com/office/drawing/2014/main" id="{D5D25E83-92F3-4116-89F0-4CA6364E468A}"/>
               </a:ext>
             </a:extLst>
           </p:cNvPr>
@@ -10156,7 +10156,7 @@
         </p:spPr>
         <p:txBody>
           <a:bodyPr xmlns:a="http://schemas.openxmlformats.org/drawingml/2006/main" lIns="0" tIns="0" rIns="0" bIns="0" anchor="ctr">
-            <a:normAutofit fontScale="78824"/>
+            <a:normAutofit fontScale="100000"/>
           </a:bodyPr>
           <a:lstStyle xmlns:a="http://schemas.openxmlformats.org/drawingml/2006/main"/>
           <a:p xmlns:a="http://schemas.openxmlformats.org/drawingml/2006/main">
@@ -10179,7 +10179,7 @@
                 <a:ea typeface="PingFang SC"/>
                 <a:cs typeface="PingFang SC"/>
               </a:rPr>
-              <a:t>只有质量不低于人工基线且总成本在保守假设下仍下降，才扩大覆盖范围</a:t>
+              <a:t>试点只有质量与成本同时达标才值得扩展</a:t>
             </a:r>
           </a:p>
         </p:txBody>
@@ -10189,7 +10189,7 @@
           <p:cNvPr id="4" name="s9-footer">
             <a:extLst xmlns:a="http://schemas.openxmlformats.org/drawingml/2006/main">
               <a:ext uri="{FF2B5EF4-FFF2-40B4-BE49-F238E27FC236}">
-                <a16:creationId xmlns:a16="http://schemas.microsoft.com/office/drawing/2014/main" id="{2D41B69D-0597-4F87-81D0-E61759A5F83F}"/>
+                <a16:creationId xmlns:a16="http://schemas.microsoft.com/office/drawing/2014/main" id="{13466A9E-56D3-4225-80A9-050ECEC62C0B}"/>
               </a:ext>
             </a:extLst>
           </p:cNvPr>
@@ -10220,7 +10220,7 @@
           <p:cNvPr id="5" name="s9-identity">
             <a:extLst xmlns:a="http://schemas.openxmlformats.org/drawingml/2006/main">
               <a:ext uri="{FF2B5EF4-FFF2-40B4-BE49-F238E27FC236}">
-                <a16:creationId xmlns:a16="http://schemas.microsoft.com/office/drawing/2014/main" id="{1FAA4DBC-9D4E-4EC9-8B1C-07C9E91C8085}"/>
+                <a16:creationId xmlns:a16="http://schemas.microsoft.com/office/drawing/2014/main" id="{D651683F-B7D9-4A75-A6E8-821AA3BBD173}"/>
               </a:ext>
             </a:extLst>
           </p:cNvPr>
@@ -10278,7 +10278,7 @@
           <p:cNvPr id="6" name="case-title">
             <a:extLst xmlns:a="http://schemas.openxmlformats.org/drawingml/2006/main">
               <a:ext uri="{FF2B5EF4-FFF2-40B4-BE49-F238E27FC236}">
-                <a16:creationId xmlns:a16="http://schemas.microsoft.com/office/drawing/2014/main" id="{7DAC4593-58FD-42A5-BCF3-8210865EF7AE}"/>
+                <a16:creationId xmlns:a16="http://schemas.microsoft.com/office/drawing/2014/main" id="{09D8768B-41DD-4A00-8787-422FE197B9F4}"/>
               </a:ext>
             </a:extLst>
           </p:cNvPr>
@@ -10342,23 +10342,23 @@
           <p:cNvPr id="7" name="case-row-0">
             <a:extLst xmlns:a="http://schemas.openxmlformats.org/drawingml/2006/main">
               <a:ext uri="{FF2B5EF4-FFF2-40B4-BE49-F238E27FC236}">
-                <a16:creationId xmlns:a16="http://schemas.microsoft.com/office/drawing/2014/main" id="{A32400C8-0821-45A7-82E0-3D9A7AE13FE0}"/>
-              </a:ext>
-            </a:extLst>
-          </p:cNvPr>
-          <p:cNvSpPr>
-            <a:spLocks xmlns:a="http://schemas.openxmlformats.org/drawingml/2006/main" noGrp="1"/>
-          </p:cNvSpPr>
-          <p:nvPr/>
-        </p:nvSpPr>
-        <p:spPr>
-          <a:xfrm xmlns:a="http://schemas.openxmlformats.org/drawingml/2006/main">
-            <a:off x="4286250" y="2228850"/>
-            <a:ext cx="6534150" cy="1238250"/>
+                <a16:creationId xmlns:a16="http://schemas.microsoft.com/office/drawing/2014/main" id="{DBAA2CCE-8F68-4D67-B2AA-BD5A40FAE070}"/>
+              </a:ext>
+            </a:extLst>
+          </p:cNvPr>
+          <p:cNvSpPr>
+            <a:spLocks xmlns:a="http://schemas.openxmlformats.org/drawingml/2006/main" noGrp="1"/>
+          </p:cNvSpPr>
+          <p:nvPr/>
+        </p:nvSpPr>
+        <p:spPr>
+          <a:xfrm xmlns:a="http://schemas.openxmlformats.org/drawingml/2006/main">
+            <a:off x="4286250" y="2038350"/>
+            <a:ext cx="6534150" cy="514350"/>
           </a:xfrm>
           <a:prstGeom xmlns:a="http://schemas.openxmlformats.org/drawingml/2006/main" prst="roundRect">
             <a:avLst>
-              <a:gd name="adj" fmla="val 10000"/>
+              <a:gd name="adj" fmla="val 24074"/>
             </a:avLst>
           </a:prstGeom>
           <a:solidFill xmlns:a="http://schemas.openxmlformats.org/drawingml/2006/main">
@@ -10373,7 +10373,7 @@
         </p:spPr>
         <p:txBody>
           <a:bodyPr xmlns:a="http://schemas.openxmlformats.org/drawingml/2006/main" lIns="152400" tIns="133350" rIns="152400" bIns="133350" anchor="ctr">
-            <a:normAutofit fontScale="100000"/>
+            <a:normAutofit fontScale="72956"/>
           </a:bodyPr>
           <a:lstStyle xmlns:a="http://schemas.openxmlformats.org/drawingml/2006/main"/>
           <a:p xmlns:a="http://schemas.openxmlformats.org/drawingml/2006/main">
@@ -10406,23 +10406,151 @@
           <p:cNvPr id="8" name="case-row-1">
             <a:extLst xmlns:a="http://schemas.openxmlformats.org/drawingml/2006/main">
               <a:ext uri="{FF2B5EF4-FFF2-40B4-BE49-F238E27FC236}">
-                <a16:creationId xmlns:a16="http://schemas.microsoft.com/office/drawing/2014/main" id="{3041AB75-EBAE-47F3-9BDB-0B2D31B425E7}"/>
-              </a:ext>
-            </a:extLst>
-          </p:cNvPr>
-          <p:cNvSpPr>
-            <a:spLocks xmlns:a="http://schemas.openxmlformats.org/drawingml/2006/main" noGrp="1"/>
-          </p:cNvSpPr>
-          <p:nvPr/>
-        </p:nvSpPr>
-        <p:spPr>
-          <a:xfrm xmlns:a="http://schemas.openxmlformats.org/drawingml/2006/main">
-            <a:off x="4286250" y="3714750"/>
-            <a:ext cx="6534150" cy="1238250"/>
+                <a16:creationId xmlns:a16="http://schemas.microsoft.com/office/drawing/2014/main" id="{02BE1AEC-2C69-46C6-8EF2-567111121F0F}"/>
+              </a:ext>
+            </a:extLst>
+          </p:cNvPr>
+          <p:cNvSpPr>
+            <a:spLocks xmlns:a="http://schemas.openxmlformats.org/drawingml/2006/main" noGrp="1"/>
+          </p:cNvSpPr>
+          <p:nvPr/>
+        </p:nvSpPr>
+        <p:spPr>
+          <a:xfrm xmlns:a="http://schemas.openxmlformats.org/drawingml/2006/main">
+            <a:off x="4286250" y="2667000"/>
+            <a:ext cx="6534150" cy="514350"/>
           </a:xfrm>
           <a:prstGeom xmlns:a="http://schemas.openxmlformats.org/drawingml/2006/main" prst="roundRect">
             <a:avLst>
-              <a:gd name="adj" fmla="val 10000"/>
+              <a:gd name="adj" fmla="val 24074"/>
+            </a:avLst>
+          </a:prstGeom>
+          <a:solidFill xmlns:a="http://schemas.openxmlformats.org/drawingml/2006/main">
+            <a:srgbClr val="FFFFFF"/>
+          </a:solidFill>
+          <a:ln xmlns:a="http://schemas.openxmlformats.org/drawingml/2006/main" w="9525">
+            <a:solidFill>
+              <a:srgbClr val="D8E0E8"/>
+            </a:solidFill>
+            <a:prstDash val="solid"/>
+          </a:ln>
+        </p:spPr>
+        <p:txBody>
+          <a:bodyPr xmlns:a="http://schemas.openxmlformats.org/drawingml/2006/main" lIns="152400" tIns="133350" rIns="152400" bIns="133350" anchor="ctr">
+            <a:normAutofit fontScale="65512"/>
+          </a:bodyPr>
+          <a:lstStyle xmlns:a="http://schemas.openxmlformats.org/drawingml/2006/main"/>
+          <a:p xmlns:a="http://schemas.openxmlformats.org/drawingml/2006/main">
+            <a:pPr algn="l">
+              <a:defRPr sz="1575" b="0">
+                <a:solidFill>
+                  <a:srgbClr val="10233F"/>
+                </a:solidFill>
+                <a:latin typeface="PingFang SC"/>
+                <a:ea typeface="PingFang SC"/>
+                <a:cs typeface="PingFang SC"/>
+              </a:defRPr>
+            </a:pPr>
+            <a:r>
+              <a:rPr sz="1575" b="0">
+                <a:solidFill>
+                  <a:srgbClr val="10233F"/>
+                </a:solidFill>
+                <a:latin typeface="PingFang SC"/>
+                <a:ea typeface="PingFang SC"/>
+                <a:cs typeface="PingFang SC"/>
+              </a:rPr>
+              <a:t>设计｜只接入已批准且仍有效的制度，回答必须附引用；涉及例外审批、劳动关系或个人敏感信息时转人工</a:t>
+            </a:r>
+          </a:p>
+        </p:txBody>
+      </p:sp>
+      <p:sp>
+        <p:nvSpPr>
+          <p:cNvPr id="9" name="case-row-2">
+            <a:extLst xmlns:a="http://schemas.openxmlformats.org/drawingml/2006/main">
+              <a:ext uri="{FF2B5EF4-FFF2-40B4-BE49-F238E27FC236}">
+                <a16:creationId xmlns:a16="http://schemas.microsoft.com/office/drawing/2014/main" id="{44366778-5EC9-479E-ACC3-88E259F4A079}"/>
+              </a:ext>
+            </a:extLst>
+          </p:cNvPr>
+          <p:cNvSpPr>
+            <a:spLocks xmlns:a="http://schemas.openxmlformats.org/drawingml/2006/main" noGrp="1"/>
+          </p:cNvSpPr>
+          <p:nvPr/>
+        </p:nvSpPr>
+        <p:spPr>
+          <a:xfrm xmlns:a="http://schemas.openxmlformats.org/drawingml/2006/main">
+            <a:off x="4286250" y="3295650"/>
+            <a:ext cx="6534150" cy="514350"/>
+          </a:xfrm>
+          <a:prstGeom xmlns:a="http://schemas.openxmlformats.org/drawingml/2006/main" prst="roundRect">
+            <a:avLst>
+              <a:gd name="adj" fmla="val 24074"/>
+            </a:avLst>
+          </a:prstGeom>
+          <a:solidFill xmlns:a="http://schemas.openxmlformats.org/drawingml/2006/main">
+            <a:srgbClr val="FFFFFF"/>
+          </a:solidFill>
+          <a:ln xmlns:a="http://schemas.openxmlformats.org/drawingml/2006/main" w="9525">
+            <a:solidFill>
+              <a:srgbClr val="D8E0E8"/>
+            </a:solidFill>
+            <a:prstDash val="solid"/>
+          </a:ln>
+        </p:spPr>
+        <p:txBody>
+          <a:bodyPr xmlns:a="http://schemas.openxmlformats.org/drawingml/2006/main" lIns="152400" tIns="133350" rIns="152400" bIns="133350" anchor="ctr">
+            <a:normAutofit fontScale="61559"/>
+          </a:bodyPr>
+          <a:lstStyle xmlns:a="http://schemas.openxmlformats.org/drawingml/2006/main"/>
+          <a:p xmlns:a="http://schemas.openxmlformats.org/drawingml/2006/main">
+            <a:pPr algn="l">
+              <a:defRPr sz="1575" b="0">
+                <a:solidFill>
+                  <a:srgbClr val="10233F"/>
+                </a:solidFill>
+                <a:latin typeface="PingFang SC"/>
+                <a:ea typeface="PingFang SC"/>
+                <a:cs typeface="PingFang SC"/>
+              </a:defRPr>
+            </a:pPr>
+            <a:r>
+              <a:rPr sz="1575" b="0">
+                <a:solidFill>
+                  <a:srgbClr val="10233F"/>
+                </a:solidFill>
+                <a:latin typeface="PingFang SC"/>
+                <a:ea typeface="PingFang SC"/>
+                <a:cs typeface="PingFang SC"/>
+              </a:rPr>
+              <a:t>测量｜对比平均等待时间、一次解决率、引用正确率、人工接管率和单位问题总成本，并记录过期规则造成的错误</a:t>
+            </a:r>
+          </a:p>
+        </p:txBody>
+      </p:sp>
+      <p:sp>
+        <p:nvSpPr>
+          <p:cNvPr id="10" name="case-row-3">
+            <a:extLst xmlns:a="http://schemas.openxmlformats.org/drawingml/2006/main">
+              <a:ext uri="{FF2B5EF4-FFF2-40B4-BE49-F238E27FC236}">
+                <a16:creationId xmlns:a16="http://schemas.microsoft.com/office/drawing/2014/main" id="{616E2862-95E6-4F5C-BF06-2D9F736E0A27}"/>
+              </a:ext>
+            </a:extLst>
+          </p:cNvPr>
+          <p:cNvSpPr>
+            <a:spLocks xmlns:a="http://schemas.openxmlformats.org/drawingml/2006/main" noGrp="1"/>
+          </p:cNvSpPr>
+          <p:nvPr/>
+        </p:nvSpPr>
+        <p:spPr>
+          <a:xfrm xmlns:a="http://schemas.openxmlformats.org/drawingml/2006/main">
+            <a:off x="4286250" y="3924300"/>
+            <a:ext cx="6534150" cy="514350"/>
+          </a:xfrm>
+          <a:prstGeom xmlns:a="http://schemas.openxmlformats.org/drawingml/2006/main" prst="roundRect">
+            <a:avLst>
+              <a:gd name="adj" fmla="val 24074"/>
             </a:avLst>
           </a:prstGeom>
           <a:solidFill xmlns:a="http://schemas.openxmlformats.org/drawingml/2006/main">
@@ -10430,14 +10558,14 @@
           </a:solidFill>
           <a:ln xmlns:a="http://schemas.openxmlformats.org/drawingml/2006/main" w="9525">
             <a:solidFill>
-              <a:srgbClr val="E5783F"/>
+              <a:srgbClr val="9A3F16"/>
             </a:solidFill>
             <a:prstDash val="solid"/>
           </a:ln>
         </p:spPr>
         <p:txBody>
           <a:bodyPr xmlns:a="http://schemas.openxmlformats.org/drawingml/2006/main" lIns="152400" tIns="133350" rIns="152400" bIns="133350" anchor="ctr">
-            <a:normAutofit fontScale="100000"/>
+            <a:normAutofit fontScale="72956"/>
           </a:bodyPr>
           <a:lstStyle xmlns:a="http://schemas.openxmlformats.org/drawingml/2006/main"/>
           <a:p xmlns:a="http://schemas.openxmlformats.org/drawingml/2006/main">
@@ -10460,17 +10588,17 @@
                 <a:ea typeface="PingFang SC"/>
                 <a:cs typeface="PingFang SC"/>
               </a:rPr>
-              <a:t>验证｜验收“企业制度问答试点”时，要同时记录适用场景、证据来源、失败条件与人工责任</a:t>
-            </a:r>
-          </a:p>
-        </p:txBody>
-      </p:sp>
-      <p:sp>
-        <p:nvSpPr>
-          <p:cNvPr id="9" name="s9-takeaway-rule">
-            <a:extLst xmlns:a="http://schemas.openxmlformats.org/drawingml/2006/main">
-              <a:ext uri="{FF2B5EF4-FFF2-40B4-BE49-F238E27FC236}">
-                <a16:creationId xmlns:a16="http://schemas.microsoft.com/office/drawing/2014/main" id="{03BF28C9-D758-460E-B0B4-FC1A95A52F7A}"/>
+              <a:t>决策｜只有质量不低于人工基线且总成本在保守假设下仍下降，才扩大覆盖范围</a:t>
+            </a:r>
+          </a:p>
+        </p:txBody>
+      </p:sp>
+      <p:sp>
+        <p:nvSpPr>
+          <p:cNvPr id="11" name="s9-takeaway-rule">
+            <a:extLst xmlns:a="http://schemas.openxmlformats.org/drawingml/2006/main">
+              <a:ext uri="{FF2B5EF4-FFF2-40B4-BE49-F238E27FC236}">
+                <a16:creationId xmlns:a16="http://schemas.microsoft.com/office/drawing/2014/main" id="{042BBF61-E85C-48AA-885A-77A9E63B1EAB}"/>
               </a:ext>
             </a:extLst>
           </p:cNvPr>
@@ -10500,10 +10628,10 @@
       </p:sp>
       <p:sp>
         <p:nvSpPr>
-          <p:cNvPr id="10" name="s9-takeaway">
-            <a:extLst xmlns:a="http://schemas.openxmlformats.org/drawingml/2006/main">
-              <a:ext uri="{FF2B5EF4-FFF2-40B4-BE49-F238E27FC236}">
-                <a16:creationId xmlns:a16="http://schemas.microsoft.com/office/drawing/2014/main" id="{02BE3132-4E92-4F67-AE29-4716F7D08538}"/>
+          <p:cNvPr id="12" name="s9-takeaway">
+            <a:extLst xmlns:a="http://schemas.openxmlformats.org/drawingml/2006/main">
+              <a:ext uri="{FF2B5EF4-FFF2-40B4-BE49-F238E27FC236}">
+                <a16:creationId xmlns:a16="http://schemas.microsoft.com/office/drawing/2014/main" id="{D047FB29-B51A-4B5B-B408-AFC29CDEA07D}"/>
               </a:ext>
             </a:extLst>
           </p:cNvPr>
@@ -10551,7 +10679,7 @@
                 <a:ea typeface="PingFang SC"/>
                 <a:cs typeface="PingFang SC"/>
               </a:rPr>
-              <a:t>只有质量不低于人工基线且总成本在保守假设下仍下降，才扩大覆盖范围</a:t>
+              <a:t>试点只有质量与成本同时达标才值得扩展</a:t>
             </a:r>
           </a:p>
         </p:txBody>
@@ -10559,7 +10687,7 @@
     </p:spTree>
     <p:extLst>
       <p:ext uri="{BB962C8B-B14F-4D97-AF65-F5344CB8AC3E}">
-        <p14:creationId xmlns:p14="http://schemas.microsoft.com/office/powerpoint/2010/main" val="337005998"/>
+        <p14:creationId xmlns:p14="http://schemas.microsoft.com/office/powerpoint/2010/main" val="386075117"/>
       </p:ext>
     </p:extLst>
   </p:cSld>

--- a/docs/public/course-assets/course-pptx/in-001.pptx
+++ b/docs/public/course-assets/course-pptx/in-001.pptx
@@ -2,25 +2,25 @@
 <file path=ppt/presentation.xml><?xml version="1.0" encoding="utf-8"?>
 <p:presentation xmlns:p="http://schemas.openxmlformats.org/presentationml/2006/main">
   <p:sldMasterIdLst>
-    <p:sldMasterId xmlns:r="http://schemas.openxmlformats.org/officeDocument/2006/relationships" id="2147483648" r:id="R0f6a82a5db7043c1"/>
+    <p:sldMasterId xmlns:r="http://schemas.openxmlformats.org/officeDocument/2006/relationships" id="2147483648" r:id="R4725a0300b6f4560"/>
   </p:sldMasterIdLst>
   <p:notesMasterIdLst>
-    <p:notesMasterId xmlns:r="http://schemas.openxmlformats.org/officeDocument/2006/relationships" r:id="Ref083f67417c49ae"/>
+    <p:notesMasterId xmlns:r="http://schemas.openxmlformats.org/officeDocument/2006/relationships" r:id="R51619076006a4935"/>
   </p:notesMasterIdLst>
   <p:sldIdLst>
-    <p:sldId xmlns:r="http://schemas.openxmlformats.org/officeDocument/2006/relationships" id="256" r:id="Rd08ab3ce0f934648"/>
-    <p:sldId xmlns:r="http://schemas.openxmlformats.org/officeDocument/2006/relationships" id="257" r:id="Ra097b812b6df47af"/>
-    <p:sldId xmlns:r="http://schemas.openxmlformats.org/officeDocument/2006/relationships" id="258" r:id="R14399fbdc88f4876"/>
-    <p:sldId xmlns:r="http://schemas.openxmlformats.org/officeDocument/2006/relationships" id="259" r:id="R2ee01b1426d34125"/>
-    <p:sldId xmlns:r="http://schemas.openxmlformats.org/officeDocument/2006/relationships" id="260" r:id="R830f9871d34c44d2"/>
-    <p:sldId xmlns:r="http://schemas.openxmlformats.org/officeDocument/2006/relationships" id="261" r:id="R0bd237496b984e1e"/>
-    <p:sldId xmlns:r="http://schemas.openxmlformats.org/officeDocument/2006/relationships" id="262" r:id="Rc358a63dc26545a4"/>
-    <p:sldId xmlns:r="http://schemas.openxmlformats.org/officeDocument/2006/relationships" id="263" r:id="R50665e7e97914636"/>
-    <p:sldId xmlns:r="http://schemas.openxmlformats.org/officeDocument/2006/relationships" id="264" r:id="Rcaf63838c33445f7"/>
-    <p:sldId xmlns:r="http://schemas.openxmlformats.org/officeDocument/2006/relationships" id="265" r:id="Rd190253fd45d4a4c"/>
-    <p:sldId xmlns:r="http://schemas.openxmlformats.org/officeDocument/2006/relationships" id="266" r:id="R9c985ca745294518"/>
-    <p:sldId xmlns:r="http://schemas.openxmlformats.org/officeDocument/2006/relationships" id="267" r:id="Rd1ca4f5778804283"/>
-    <p:sldId xmlns:r="http://schemas.openxmlformats.org/officeDocument/2006/relationships" id="268" r:id="R4403f97f3e7e45aa"/>
+    <p:sldId xmlns:r="http://schemas.openxmlformats.org/officeDocument/2006/relationships" id="256" r:id="Rfb3c7c263deb41de"/>
+    <p:sldId xmlns:r="http://schemas.openxmlformats.org/officeDocument/2006/relationships" id="257" r:id="R78ee469f005f48d5"/>
+    <p:sldId xmlns:r="http://schemas.openxmlformats.org/officeDocument/2006/relationships" id="258" r:id="R8020fb915a504c73"/>
+    <p:sldId xmlns:r="http://schemas.openxmlformats.org/officeDocument/2006/relationships" id="259" r:id="R1b7901a809254d22"/>
+    <p:sldId xmlns:r="http://schemas.openxmlformats.org/officeDocument/2006/relationships" id="260" r:id="R43a70e924a9c4b8b"/>
+    <p:sldId xmlns:r="http://schemas.openxmlformats.org/officeDocument/2006/relationships" id="261" r:id="R30e71be5f465402d"/>
+    <p:sldId xmlns:r="http://schemas.openxmlformats.org/officeDocument/2006/relationships" id="262" r:id="R46153c4e82c4472a"/>
+    <p:sldId xmlns:r="http://schemas.openxmlformats.org/officeDocument/2006/relationships" id="263" r:id="R7e1840b6d5f94744"/>
+    <p:sldId xmlns:r="http://schemas.openxmlformats.org/officeDocument/2006/relationships" id="264" r:id="R51c57df80dae46e2"/>
+    <p:sldId xmlns:r="http://schemas.openxmlformats.org/officeDocument/2006/relationships" id="265" r:id="Rfb58e048706b4991"/>
+    <p:sldId xmlns:r="http://schemas.openxmlformats.org/officeDocument/2006/relationships" id="266" r:id="R1985fb4e6546486b"/>
+    <p:sldId xmlns:r="http://schemas.openxmlformats.org/officeDocument/2006/relationships" id="267" r:id="R4af65c301fd54506"/>
+    <p:sldId xmlns:r="http://schemas.openxmlformats.org/officeDocument/2006/relationships" id="268" r:id="R15333b20e5af47cf"/>
   </p:sldIdLst>
   <p:sldSz cx="12192000" cy="6858000"/>
   <p:notesSz cx="6858000" cy="9144000"/>
@@ -1405,7 +1405,7 @@
   </p:cSld>
   <p:clrMap bg1="lt1" tx1="dk1" bg2="lt2" tx2="dk2" accent1="accent1" accent2="accent2" accent3="accent3" accent4="accent4" accent5="accent5" accent6="accent6" hlink="hlink" folHlink="folHlink"/>
   <p:sldLayoutIdLst>
-    <p:sldLayoutId xmlns:r="http://schemas.openxmlformats.org/officeDocument/2006/relationships" id="2147483649" r:id="R6922189ee89d4af0"/>
+    <p:sldLayoutId xmlns:r="http://schemas.openxmlformats.org/officeDocument/2006/relationships" id="2147483649" r:id="R53a5ed4bdba94a57"/>
   </p:sldLayoutIdLst>
   <p:txStyles>
     <p:titleStyle>
@@ -1956,7 +1956,7 @@
           <p:cNvPr id="1" name="cover-rule">
             <a:extLst xmlns:a="http://schemas.openxmlformats.org/drawingml/2006/main">
               <a:ext uri="{FF2B5EF4-FFF2-40B4-BE49-F238E27FC236}">
-                <a16:creationId xmlns:a16="http://schemas.microsoft.com/office/drawing/2014/main" id="{9E3FAFF8-1D26-46CF-9EA0-F6D9B1C7AA1D}"/>
+                <a16:creationId xmlns:a16="http://schemas.microsoft.com/office/drawing/2014/main" id="{B5D0F58D-9242-4364-A393-C54EA7271A59}"/>
               </a:ext>
             </a:extLst>
           </p:cNvPr>
@@ -1989,7 +1989,7 @@
           <p:cNvPr id="2" name="cover-ring-1">
             <a:extLst xmlns:a="http://schemas.openxmlformats.org/drawingml/2006/main">
               <a:ext uri="{FF2B5EF4-FFF2-40B4-BE49-F238E27FC236}">
-                <a16:creationId xmlns:a16="http://schemas.microsoft.com/office/drawing/2014/main" id="{3DD5F489-65E0-41A6-885D-82F38C6CA547}"/>
+                <a16:creationId xmlns:a16="http://schemas.microsoft.com/office/drawing/2014/main" id="{BB203A77-6FEE-4833-B302-699F69D0AE1D}"/>
               </a:ext>
             </a:extLst>
           </p:cNvPr>
@@ -2020,7 +2020,7 @@
           <p:cNvPr id="3" name="cover-ring-2">
             <a:extLst xmlns:a="http://schemas.openxmlformats.org/drawingml/2006/main">
               <a:ext uri="{FF2B5EF4-FFF2-40B4-BE49-F238E27FC236}">
-                <a16:creationId xmlns:a16="http://schemas.microsoft.com/office/drawing/2014/main" id="{44F50904-509F-44C7-A146-EF9C786C8E39}"/>
+                <a16:creationId xmlns:a16="http://schemas.microsoft.com/office/drawing/2014/main" id="{EF202BF9-FD31-4F1F-96E7-A3F54B9E51FF}"/>
               </a:ext>
             </a:extLst>
           </p:cNvPr>
@@ -2051,7 +2051,7 @@
           <p:cNvPr id="4" name="cover-core">
             <a:extLst xmlns:a="http://schemas.openxmlformats.org/drawingml/2006/main">
               <a:ext uri="{FF2B5EF4-FFF2-40B4-BE49-F238E27FC236}">
-                <a16:creationId xmlns:a16="http://schemas.microsoft.com/office/drawing/2014/main" id="{B4B21456-34E9-4484-9D3C-4798592D78B0}"/>
+                <a16:creationId xmlns:a16="http://schemas.microsoft.com/office/drawing/2014/main" id="{F6E33F58-89B6-42B0-870F-B08128A5C565}"/>
               </a:ext>
             </a:extLst>
           </p:cNvPr>
@@ -2084,7 +2084,7 @@
           <p:cNvPr id="5" name="cover-line-1">
             <a:extLst xmlns:a="http://schemas.openxmlformats.org/drawingml/2006/main">
               <a:ext uri="{FF2B5EF4-FFF2-40B4-BE49-F238E27FC236}">
-                <a16:creationId xmlns:a16="http://schemas.microsoft.com/office/drawing/2014/main" id="{CEB936FD-CCBE-48FC-B784-E2EE16702DF8}"/>
+                <a16:creationId xmlns:a16="http://schemas.microsoft.com/office/drawing/2014/main" id="{94B95438-B50E-4F5B-9741-568524801EB4}"/>
               </a:ext>
             </a:extLst>
           </p:cNvPr>
@@ -2115,7 +2115,7 @@
           <p:cNvPr id="6" name="cover-line-2">
             <a:extLst xmlns:a="http://schemas.openxmlformats.org/drawingml/2006/main">
               <a:ext uri="{FF2B5EF4-FFF2-40B4-BE49-F238E27FC236}">
-                <a16:creationId xmlns:a16="http://schemas.microsoft.com/office/drawing/2014/main" id="{E1BD70FA-B75C-40AA-A90F-1A28907BDD8B}"/>
+                <a16:creationId xmlns:a16="http://schemas.microsoft.com/office/drawing/2014/main" id="{A35E2E2D-A7AE-48BC-8C43-24F71551FC78}"/>
               </a:ext>
             </a:extLst>
           </p:cNvPr>
@@ -2146,7 +2146,7 @@
           <p:cNvPr id="7" name="cover-eyebrow">
             <a:extLst xmlns:a="http://schemas.openxmlformats.org/drawingml/2006/main">
               <a:ext uri="{FF2B5EF4-FFF2-40B4-BE49-F238E27FC236}">
-                <a16:creationId xmlns:a16="http://schemas.microsoft.com/office/drawing/2014/main" id="{DF458740-E20B-4C40-B76B-6072BC2206B4}"/>
+                <a16:creationId xmlns:a16="http://schemas.microsoft.com/office/drawing/2014/main" id="{630100FE-9303-4C03-A3FC-E8576C7542B7}"/>
               </a:ext>
             </a:extLst>
           </p:cNvPr>
@@ -2204,7 +2204,7 @@
           <p:cNvPr id="8" name="cover-title">
             <a:extLst xmlns:a="http://schemas.openxmlformats.org/drawingml/2006/main">
               <a:ext uri="{FF2B5EF4-FFF2-40B4-BE49-F238E27FC236}">
-                <a16:creationId xmlns:a16="http://schemas.microsoft.com/office/drawing/2014/main" id="{790E07EA-30C2-4E3D-97D0-229FA84ABD54}"/>
+                <a16:creationId xmlns:a16="http://schemas.microsoft.com/office/drawing/2014/main" id="{7A643594-611D-4174-9F62-138FDC309C15}"/>
               </a:ext>
             </a:extLst>
           </p:cNvPr>
@@ -2262,7 +2262,7 @@
           <p:cNvPr id="9" name="cover-subtitle">
             <a:extLst xmlns:a="http://schemas.openxmlformats.org/drawingml/2006/main">
               <a:ext uri="{FF2B5EF4-FFF2-40B4-BE49-F238E27FC236}">
-                <a16:creationId xmlns:a16="http://schemas.microsoft.com/office/drawing/2014/main" id="{D66D2DAB-9531-444B-A6A0-DD4A22DDBD00}"/>
+                <a16:creationId xmlns:a16="http://schemas.microsoft.com/office/drawing/2014/main" id="{40C45C7E-ECDB-4C90-B863-622584AAF985}"/>
               </a:ext>
             </a:extLst>
           </p:cNvPr>
@@ -2324,7 +2324,7 @@
           <p:cNvPr id="10" name="cover-lead">
             <a:extLst xmlns:a="http://schemas.openxmlformats.org/drawingml/2006/main">
               <a:ext uri="{FF2B5EF4-FFF2-40B4-BE49-F238E27FC236}">
-                <a16:creationId xmlns:a16="http://schemas.microsoft.com/office/drawing/2014/main" id="{FA3927FA-01F5-4C20-91E0-A6D724AF7C64}"/>
+                <a16:creationId xmlns:a16="http://schemas.microsoft.com/office/drawing/2014/main" id="{5A3F480A-2B52-4D74-BC38-80BCD6B807C6}"/>
               </a:ext>
             </a:extLst>
           </p:cNvPr>
@@ -2382,7 +2382,7 @@
           <p:cNvPr id="11" name="cover-course">
             <a:extLst xmlns:a="http://schemas.openxmlformats.org/drawingml/2006/main">
               <a:ext uri="{FF2B5EF4-FFF2-40B4-BE49-F238E27FC236}">
-                <a16:creationId xmlns:a16="http://schemas.microsoft.com/office/drawing/2014/main" id="{F4928327-A7E5-47FC-A171-64AF6FA74712}"/>
+                <a16:creationId xmlns:a16="http://schemas.microsoft.com/office/drawing/2014/main" id="{0A2B622C-98D7-4461-A410-06968EEA106A}"/>
               </a:ext>
             </a:extLst>
           </p:cNvPr>
@@ -2440,7 +2440,7 @@
           <p:cNvPr id="12" name="cover-id">
             <a:extLst xmlns:a="http://schemas.openxmlformats.org/drawingml/2006/main">
               <a:ext uri="{FF2B5EF4-FFF2-40B4-BE49-F238E27FC236}">
-                <a16:creationId xmlns:a16="http://schemas.microsoft.com/office/drawing/2014/main" id="{276893B7-BA70-4EAD-98D3-0BF524E344F2}"/>
+                <a16:creationId xmlns:a16="http://schemas.microsoft.com/office/drawing/2014/main" id="{A54B65DE-DF4C-4AA1-9A35-3AD11E7C786A}"/>
               </a:ext>
             </a:extLst>
           </p:cNvPr>
@@ -2496,7 +2496,7 @@
     </p:spTree>
     <p:extLst>
       <p:ext uri="{BB962C8B-B14F-4D97-AF65-F5344CB8AC3E}">
-        <p14:creationId xmlns:p14="http://schemas.microsoft.com/office/powerpoint/2010/main" val="312304544"/>
+        <p14:creationId xmlns:p14="http://schemas.microsoft.com/office/powerpoint/2010/main" val="219475078"/>
       </p:ext>
     </p:extLst>
   </p:cSld>
@@ -2527,7 +2527,7 @@
           <p:cNvPr id="1" name="s10-rule">
             <a:extLst xmlns:a="http://schemas.openxmlformats.org/drawingml/2006/main">
               <a:ext uri="{FF2B5EF4-FFF2-40B4-BE49-F238E27FC236}">
-                <a16:creationId xmlns:a16="http://schemas.microsoft.com/office/drawing/2014/main" id="{E2427349-52F7-40DA-A0F8-7963B1CA3EC3}"/>
+                <a16:creationId xmlns:a16="http://schemas.microsoft.com/office/drawing/2014/main" id="{CBFEABAE-BCFA-4D44-ABCA-3C6E78C8462D}"/>
               </a:ext>
             </a:extLst>
           </p:cNvPr>
@@ -2560,7 +2560,7 @@
           <p:cNvPr id="2" name="s10-eyebrow">
             <a:extLst xmlns:a="http://schemas.openxmlformats.org/drawingml/2006/main">
               <a:ext uri="{FF2B5EF4-FFF2-40B4-BE49-F238E27FC236}">
-                <a16:creationId xmlns:a16="http://schemas.microsoft.com/office/drawing/2014/main" id="{4F389CD0-7A3F-4D06-8CA4-7A5F0BD7D9FE}"/>
+                <a16:creationId xmlns:a16="http://schemas.microsoft.com/office/drawing/2014/main" id="{B9AA5A0B-2127-4170-9B6F-60A33BA8BAF6}"/>
               </a:ext>
             </a:extLst>
           </p:cNvPr>
@@ -2618,7 +2618,7 @@
           <p:cNvPr id="3" name="s10-title">
             <a:extLst xmlns:a="http://schemas.openxmlformats.org/drawingml/2006/main">
               <a:ext uri="{FF2B5EF4-FFF2-40B4-BE49-F238E27FC236}">
-                <a16:creationId xmlns:a16="http://schemas.microsoft.com/office/drawing/2014/main" id="{DAC2C490-158B-4C50-8FD3-83418F68485B}"/>
+                <a16:creationId xmlns:a16="http://schemas.microsoft.com/office/drawing/2014/main" id="{2E5B8487-5271-4C20-9414-CAFDCB1224C4}"/>
               </a:ext>
             </a:extLst>
           </p:cNvPr>
@@ -2676,7 +2676,7 @@
           <p:cNvPr id="4" name="s10-footer">
             <a:extLst xmlns:a="http://schemas.openxmlformats.org/drawingml/2006/main">
               <a:ext uri="{FF2B5EF4-FFF2-40B4-BE49-F238E27FC236}">
-                <a16:creationId xmlns:a16="http://schemas.microsoft.com/office/drawing/2014/main" id="{25014AE0-B2AE-43F5-B613-ADB4D89071B9}"/>
+                <a16:creationId xmlns:a16="http://schemas.microsoft.com/office/drawing/2014/main" id="{7CF87E4D-4DE2-4A3D-BCB9-ED114EEE8FB5}"/>
               </a:ext>
             </a:extLst>
           </p:cNvPr>
@@ -2707,7 +2707,7 @@
           <p:cNvPr id="5" name="s10-identity">
             <a:extLst xmlns:a="http://schemas.openxmlformats.org/drawingml/2006/main">
               <a:ext uri="{FF2B5EF4-FFF2-40B4-BE49-F238E27FC236}">
-                <a16:creationId xmlns:a16="http://schemas.microsoft.com/office/drawing/2014/main" id="{9688E158-3522-4791-ACE5-22244438EDAA}"/>
+                <a16:creationId xmlns:a16="http://schemas.microsoft.com/office/drawing/2014/main" id="{00701225-B506-47E3-92A3-41DBAE9E59F3}"/>
               </a:ext>
             </a:extLst>
           </p:cNvPr>
@@ -2765,7 +2765,7 @@
           <p:cNvPr id="6" name="case-title">
             <a:extLst xmlns:a="http://schemas.openxmlformats.org/drawingml/2006/main">
               <a:ext uri="{FF2B5EF4-FFF2-40B4-BE49-F238E27FC236}">
-                <a16:creationId xmlns:a16="http://schemas.microsoft.com/office/drawing/2014/main" id="{C5BC596A-B5BB-4A05-BD91-8ED93307AB98}"/>
+                <a16:creationId xmlns:a16="http://schemas.microsoft.com/office/drawing/2014/main" id="{3518D7EC-D1A9-4D59-B5FB-A7672C85C270}"/>
               </a:ext>
             </a:extLst>
           </p:cNvPr>
@@ -2829,7 +2829,7 @@
           <p:cNvPr id="7" name="case-row-0">
             <a:extLst xmlns:a="http://schemas.openxmlformats.org/drawingml/2006/main">
               <a:ext uri="{FF2B5EF4-FFF2-40B4-BE49-F238E27FC236}">
-                <a16:creationId xmlns:a16="http://schemas.microsoft.com/office/drawing/2014/main" id="{6AA54462-B479-4A46-8FEF-E2A2321DA6DD}"/>
+                <a16:creationId xmlns:a16="http://schemas.microsoft.com/office/drawing/2014/main" id="{7E189AF3-6005-4FB4-A2F4-F1A372C7699E}"/>
               </a:ext>
             </a:extLst>
           </p:cNvPr>
@@ -2893,7 +2893,7 @@
           <p:cNvPr id="8" name="case-row-1">
             <a:extLst xmlns:a="http://schemas.openxmlformats.org/drawingml/2006/main">
               <a:ext uri="{FF2B5EF4-FFF2-40B4-BE49-F238E27FC236}">
-                <a16:creationId xmlns:a16="http://schemas.microsoft.com/office/drawing/2014/main" id="{BDE538BB-9FCD-479D-9B00-5F0FFA167E7E}"/>
+                <a16:creationId xmlns:a16="http://schemas.microsoft.com/office/drawing/2014/main" id="{51125A0B-88AC-48E1-BFD0-88BDED6C4F86}"/>
               </a:ext>
             </a:extLst>
           </p:cNvPr>
@@ -2957,7 +2957,7 @@
           <p:cNvPr id="9" name="case-row-2">
             <a:extLst xmlns:a="http://schemas.openxmlformats.org/drawingml/2006/main">
               <a:ext uri="{FF2B5EF4-FFF2-40B4-BE49-F238E27FC236}">
-                <a16:creationId xmlns:a16="http://schemas.microsoft.com/office/drawing/2014/main" id="{72609B32-4AB3-4EA0-A228-CAD7B58257C2}"/>
+                <a16:creationId xmlns:a16="http://schemas.microsoft.com/office/drawing/2014/main" id="{882BB2E0-3EDB-4561-8F7C-574DB59209AB}"/>
               </a:ext>
             </a:extLst>
           </p:cNvPr>
@@ -3021,7 +3021,7 @@
           <p:cNvPr id="10" name="s10-takeaway-rule">
             <a:extLst xmlns:a="http://schemas.openxmlformats.org/drawingml/2006/main">
               <a:ext uri="{FF2B5EF4-FFF2-40B4-BE49-F238E27FC236}">
-                <a16:creationId xmlns:a16="http://schemas.microsoft.com/office/drawing/2014/main" id="{52839893-AE32-4DEA-9E89-88880EDE437B}"/>
+                <a16:creationId xmlns:a16="http://schemas.microsoft.com/office/drawing/2014/main" id="{161EDA12-CDB8-421A-9BF1-FDFF438B149B}"/>
               </a:ext>
             </a:extLst>
           </p:cNvPr>
@@ -3054,7 +3054,7 @@
           <p:cNvPr id="11" name="s10-takeaway">
             <a:extLst xmlns:a="http://schemas.openxmlformats.org/drawingml/2006/main">
               <a:ext uri="{FF2B5EF4-FFF2-40B4-BE49-F238E27FC236}">
-                <a16:creationId xmlns:a16="http://schemas.microsoft.com/office/drawing/2014/main" id="{AB54A642-173B-411C-8072-9B7532F3389E}"/>
+                <a16:creationId xmlns:a16="http://schemas.microsoft.com/office/drawing/2014/main" id="{2F89B53B-283B-43FC-9AAD-E06B94697316}"/>
               </a:ext>
             </a:extLst>
           </p:cNvPr>
@@ -3110,7 +3110,7 @@
     </p:spTree>
     <p:extLst>
       <p:ext uri="{BB962C8B-B14F-4D97-AF65-F5344CB8AC3E}">
-        <p14:creationId xmlns:p14="http://schemas.microsoft.com/office/powerpoint/2010/main" val="67973387"/>
+        <p14:creationId xmlns:p14="http://schemas.microsoft.com/office/powerpoint/2010/main" val="275780473"/>
       </p:ext>
     </p:extLst>
   </p:cSld>
@@ -3141,7 +3141,7 @@
           <p:cNvPr id="1" name="s11-rule">
             <a:extLst xmlns:a="http://schemas.openxmlformats.org/drawingml/2006/main">
               <a:ext uri="{FF2B5EF4-FFF2-40B4-BE49-F238E27FC236}">
-                <a16:creationId xmlns:a16="http://schemas.microsoft.com/office/drawing/2014/main" id="{9A9A4BB7-A094-4F97-806D-019742174EAC}"/>
+                <a16:creationId xmlns:a16="http://schemas.microsoft.com/office/drawing/2014/main" id="{429299F8-A823-4523-A430-07CB056B53D7}"/>
               </a:ext>
             </a:extLst>
           </p:cNvPr>
@@ -3174,7 +3174,7 @@
           <p:cNvPr id="2" name="s11-eyebrow">
             <a:extLst xmlns:a="http://schemas.openxmlformats.org/drawingml/2006/main">
               <a:ext uri="{FF2B5EF4-FFF2-40B4-BE49-F238E27FC236}">
-                <a16:creationId xmlns:a16="http://schemas.microsoft.com/office/drawing/2014/main" id="{F50CAB27-4333-4DE2-8C5F-52D28C100F72}"/>
+                <a16:creationId xmlns:a16="http://schemas.microsoft.com/office/drawing/2014/main" id="{A05FB7D6-54A7-42D9-8689-C16F8965C24C}"/>
               </a:ext>
             </a:extLst>
           </p:cNvPr>
@@ -3232,7 +3232,7 @@
           <p:cNvPr id="3" name="s11-title">
             <a:extLst xmlns:a="http://schemas.openxmlformats.org/drawingml/2006/main">
               <a:ext uri="{FF2B5EF4-FFF2-40B4-BE49-F238E27FC236}">
-                <a16:creationId xmlns:a16="http://schemas.microsoft.com/office/drawing/2014/main" id="{2D2D979D-864A-492F-A1A2-8B3ED9EBB5B9}"/>
+                <a16:creationId xmlns:a16="http://schemas.microsoft.com/office/drawing/2014/main" id="{4805C703-E521-4342-ADCF-4C3D46C50B42}"/>
               </a:ext>
             </a:extLst>
           </p:cNvPr>
@@ -3290,7 +3290,7 @@
           <p:cNvPr id="4" name="s11-footer">
             <a:extLst xmlns:a="http://schemas.openxmlformats.org/drawingml/2006/main">
               <a:ext uri="{FF2B5EF4-FFF2-40B4-BE49-F238E27FC236}">
-                <a16:creationId xmlns:a16="http://schemas.microsoft.com/office/drawing/2014/main" id="{A052230E-F5A3-489A-B508-A30FE45CEB5B}"/>
+                <a16:creationId xmlns:a16="http://schemas.microsoft.com/office/drawing/2014/main" id="{665C0A7B-E81A-48B7-917D-055267A4EB52}"/>
               </a:ext>
             </a:extLst>
           </p:cNvPr>
@@ -3321,7 +3321,7 @@
           <p:cNvPr id="5" name="s11-identity">
             <a:extLst xmlns:a="http://schemas.openxmlformats.org/drawingml/2006/main">
               <a:ext uri="{FF2B5EF4-FFF2-40B4-BE49-F238E27FC236}">
-                <a16:creationId xmlns:a16="http://schemas.microsoft.com/office/drawing/2014/main" id="{FBC71A5C-1E32-487B-9EE5-7B25F9C0E3F8}"/>
+                <a16:creationId xmlns:a16="http://schemas.microsoft.com/office/drawing/2014/main" id="{BED04171-49AE-46F8-A4FD-9D74404A91F1}"/>
               </a:ext>
             </a:extLst>
           </p:cNvPr>
@@ -3379,7 +3379,7 @@
           <p:cNvPr id="6" name="practice-circle-0">
             <a:extLst xmlns:a="http://schemas.openxmlformats.org/drawingml/2006/main">
               <a:ext uri="{FF2B5EF4-FFF2-40B4-BE49-F238E27FC236}">
-                <a16:creationId xmlns:a16="http://schemas.microsoft.com/office/drawing/2014/main" id="{16057B2D-A82F-40BB-B568-3140D6515EA3}"/>
+                <a16:creationId xmlns:a16="http://schemas.microsoft.com/office/drawing/2014/main" id="{184FBADE-E867-4268-B098-C1017A8730C4}"/>
               </a:ext>
             </a:extLst>
           </p:cNvPr>
@@ -3412,7 +3412,7 @@
           <p:cNvPr id="7" name="practice-number-0">
             <a:extLst xmlns:a="http://schemas.openxmlformats.org/drawingml/2006/main">
               <a:ext uri="{FF2B5EF4-FFF2-40B4-BE49-F238E27FC236}">
-                <a16:creationId xmlns:a16="http://schemas.microsoft.com/office/drawing/2014/main" id="{984F2046-77F7-4B6A-8324-3F2BEE406DA7}"/>
+                <a16:creationId xmlns:a16="http://schemas.microsoft.com/office/drawing/2014/main" id="{0FD027C0-8A7C-4A77-96E6-93750FA9CABC}"/>
               </a:ext>
             </a:extLst>
           </p:cNvPr>
@@ -3470,7 +3470,7 @@
           <p:cNvPr id="8" name="practice-item-0">
             <a:extLst xmlns:a="http://schemas.openxmlformats.org/drawingml/2006/main">
               <a:ext uri="{FF2B5EF4-FFF2-40B4-BE49-F238E27FC236}">
-                <a16:creationId xmlns:a16="http://schemas.microsoft.com/office/drawing/2014/main" id="{091635AA-5F1E-4D64-9147-565021A7E304}"/>
+                <a16:creationId xmlns:a16="http://schemas.microsoft.com/office/drawing/2014/main" id="{72A99A00-E851-4622-A4F1-DB27B7726A71}"/>
               </a:ext>
             </a:extLst>
           </p:cNvPr>
@@ -3534,7 +3534,7 @@
           <p:cNvPr id="9" name="practice-connector-0">
             <a:extLst xmlns:a="http://schemas.openxmlformats.org/drawingml/2006/main">
               <a:ext uri="{FF2B5EF4-FFF2-40B4-BE49-F238E27FC236}">
-                <a16:creationId xmlns:a16="http://schemas.microsoft.com/office/drawing/2014/main" id="{946856A2-3E31-4D86-BBDE-6306C79406F3}"/>
+                <a16:creationId xmlns:a16="http://schemas.microsoft.com/office/drawing/2014/main" id="{1624147A-7070-4D78-945F-D2B302B2F1BB}"/>
               </a:ext>
             </a:extLst>
           </p:cNvPr>
@@ -3565,7 +3565,7 @@
           <p:cNvPr id="10" name="practice-circle-1">
             <a:extLst xmlns:a="http://schemas.openxmlformats.org/drawingml/2006/main">
               <a:ext uri="{FF2B5EF4-FFF2-40B4-BE49-F238E27FC236}">
-                <a16:creationId xmlns:a16="http://schemas.microsoft.com/office/drawing/2014/main" id="{71972BAF-C163-4669-839D-7589C1B0FDAD}"/>
+                <a16:creationId xmlns:a16="http://schemas.microsoft.com/office/drawing/2014/main" id="{A4E6816C-E49F-45F6-B8F5-297B7BD8A2EE}"/>
               </a:ext>
             </a:extLst>
           </p:cNvPr>
@@ -3598,7 +3598,7 @@
           <p:cNvPr id="11" name="practice-number-1">
             <a:extLst xmlns:a="http://schemas.openxmlformats.org/drawingml/2006/main">
               <a:ext uri="{FF2B5EF4-FFF2-40B4-BE49-F238E27FC236}">
-                <a16:creationId xmlns:a16="http://schemas.microsoft.com/office/drawing/2014/main" id="{D9774060-2DB7-4448-A43B-14330E1087C6}"/>
+                <a16:creationId xmlns:a16="http://schemas.microsoft.com/office/drawing/2014/main" id="{49E2D187-81BA-4AC5-A951-A2D0CE412B78}"/>
               </a:ext>
             </a:extLst>
           </p:cNvPr>
@@ -3656,7 +3656,7 @@
           <p:cNvPr id="12" name="practice-item-1">
             <a:extLst xmlns:a="http://schemas.openxmlformats.org/drawingml/2006/main">
               <a:ext uri="{FF2B5EF4-FFF2-40B4-BE49-F238E27FC236}">
-                <a16:creationId xmlns:a16="http://schemas.microsoft.com/office/drawing/2014/main" id="{6B8A9C8F-43D0-4C73-8BF2-88EA0F02A47C}"/>
+                <a16:creationId xmlns:a16="http://schemas.microsoft.com/office/drawing/2014/main" id="{9A162600-F56A-4860-A364-546BDBA48CE3}"/>
               </a:ext>
             </a:extLst>
           </p:cNvPr>
@@ -3720,7 +3720,7 @@
           <p:cNvPr id="13" name="practice-connector-1">
             <a:extLst xmlns:a="http://schemas.openxmlformats.org/drawingml/2006/main">
               <a:ext uri="{FF2B5EF4-FFF2-40B4-BE49-F238E27FC236}">
-                <a16:creationId xmlns:a16="http://schemas.microsoft.com/office/drawing/2014/main" id="{04EFEA6B-6679-4BF5-8890-8390CAA26289}"/>
+                <a16:creationId xmlns:a16="http://schemas.microsoft.com/office/drawing/2014/main" id="{04C2541E-EA8A-46D9-9440-B7F037BFAB6A}"/>
               </a:ext>
             </a:extLst>
           </p:cNvPr>
@@ -3751,7 +3751,7 @@
           <p:cNvPr id="14" name="practice-circle-2">
             <a:extLst xmlns:a="http://schemas.openxmlformats.org/drawingml/2006/main">
               <a:ext uri="{FF2B5EF4-FFF2-40B4-BE49-F238E27FC236}">
-                <a16:creationId xmlns:a16="http://schemas.microsoft.com/office/drawing/2014/main" id="{CD08845D-27F4-4CED-B2C1-599022018230}"/>
+                <a16:creationId xmlns:a16="http://schemas.microsoft.com/office/drawing/2014/main" id="{AD5B091C-1079-4A4B-9E25-497123A29E11}"/>
               </a:ext>
             </a:extLst>
           </p:cNvPr>
@@ -3784,7 +3784,7 @@
           <p:cNvPr id="15" name="practice-number-2">
             <a:extLst xmlns:a="http://schemas.openxmlformats.org/drawingml/2006/main">
               <a:ext uri="{FF2B5EF4-FFF2-40B4-BE49-F238E27FC236}">
-                <a16:creationId xmlns:a16="http://schemas.microsoft.com/office/drawing/2014/main" id="{A9374991-E8A2-45F3-875E-DCA00C67A8A3}"/>
+                <a16:creationId xmlns:a16="http://schemas.microsoft.com/office/drawing/2014/main" id="{653DBD4B-5343-4922-B952-814394F7A0A6}"/>
               </a:ext>
             </a:extLst>
           </p:cNvPr>
@@ -3842,7 +3842,7 @@
           <p:cNvPr id="16" name="practice-item-2">
             <a:extLst xmlns:a="http://schemas.openxmlformats.org/drawingml/2006/main">
               <a:ext uri="{FF2B5EF4-FFF2-40B4-BE49-F238E27FC236}">
-                <a16:creationId xmlns:a16="http://schemas.microsoft.com/office/drawing/2014/main" id="{062D41AC-0E34-43A5-AEF9-8558EFF03A92}"/>
+                <a16:creationId xmlns:a16="http://schemas.microsoft.com/office/drawing/2014/main" id="{B14F278D-3199-4729-9A19-D14E3ADFCE37}"/>
               </a:ext>
             </a:extLst>
           </p:cNvPr>
@@ -3904,7 +3904,7 @@
     </p:spTree>
     <p:extLst>
       <p:ext uri="{BB962C8B-B14F-4D97-AF65-F5344CB8AC3E}">
-        <p14:creationId xmlns:p14="http://schemas.microsoft.com/office/powerpoint/2010/main" val="2013552921"/>
+        <p14:creationId xmlns:p14="http://schemas.microsoft.com/office/powerpoint/2010/main" val="765754431"/>
       </p:ext>
     </p:extLst>
   </p:cSld>
@@ -3935,7 +3935,7 @@
           <p:cNvPr id="1" name="s12-rule">
             <a:extLst xmlns:a="http://schemas.openxmlformats.org/drawingml/2006/main">
               <a:ext uri="{FF2B5EF4-FFF2-40B4-BE49-F238E27FC236}">
-                <a16:creationId xmlns:a16="http://schemas.microsoft.com/office/drawing/2014/main" id="{193D5C1E-6C5B-424D-AB85-8FF3B9BEF146}"/>
+                <a16:creationId xmlns:a16="http://schemas.microsoft.com/office/drawing/2014/main" id="{D675C232-8254-43CE-A507-B9137D0783A9}"/>
               </a:ext>
             </a:extLst>
           </p:cNvPr>
@@ -3968,7 +3968,7 @@
           <p:cNvPr id="2" name="s12-eyebrow">
             <a:extLst xmlns:a="http://schemas.openxmlformats.org/drawingml/2006/main">
               <a:ext uri="{FF2B5EF4-FFF2-40B4-BE49-F238E27FC236}">
-                <a16:creationId xmlns:a16="http://schemas.microsoft.com/office/drawing/2014/main" id="{2FE277EE-2987-4304-AB87-344DD40B3318}"/>
+                <a16:creationId xmlns:a16="http://schemas.microsoft.com/office/drawing/2014/main" id="{3C9CF1C3-9885-4376-858C-0DA94D561BF7}"/>
               </a:ext>
             </a:extLst>
           </p:cNvPr>
@@ -4026,7 +4026,7 @@
           <p:cNvPr id="3" name="s12-title">
             <a:extLst xmlns:a="http://schemas.openxmlformats.org/drawingml/2006/main">
               <a:ext uri="{FF2B5EF4-FFF2-40B4-BE49-F238E27FC236}">
-                <a16:creationId xmlns:a16="http://schemas.microsoft.com/office/drawing/2014/main" id="{6CACB4EF-DAD2-40B8-A9F5-EA4EBBE20605}"/>
+                <a16:creationId xmlns:a16="http://schemas.microsoft.com/office/drawing/2014/main" id="{8524E424-3DD5-4741-B518-0E8EDDE8C027}"/>
               </a:ext>
             </a:extLst>
           </p:cNvPr>
@@ -4084,7 +4084,7 @@
           <p:cNvPr id="4" name="s12-footer">
             <a:extLst xmlns:a="http://schemas.openxmlformats.org/drawingml/2006/main">
               <a:ext uri="{FF2B5EF4-FFF2-40B4-BE49-F238E27FC236}">
-                <a16:creationId xmlns:a16="http://schemas.microsoft.com/office/drawing/2014/main" id="{80D9C438-5CAD-421F-84EF-B05206606F86}"/>
+                <a16:creationId xmlns:a16="http://schemas.microsoft.com/office/drawing/2014/main" id="{6CE7C263-A468-4FC7-A605-B81F1CB08C49}"/>
               </a:ext>
             </a:extLst>
           </p:cNvPr>
@@ -4115,7 +4115,7 @@
           <p:cNvPr id="5" name="s12-identity">
             <a:extLst xmlns:a="http://schemas.openxmlformats.org/drawingml/2006/main">
               <a:ext uri="{FF2B5EF4-FFF2-40B4-BE49-F238E27FC236}">
-                <a16:creationId xmlns:a16="http://schemas.microsoft.com/office/drawing/2014/main" id="{9B9ACE8F-8FDC-400F-9882-76EBC805B57F}"/>
+                <a16:creationId xmlns:a16="http://schemas.microsoft.com/office/drawing/2014/main" id="{FE25C6EF-A5D6-4A25-A61D-B54E193CA1D4}"/>
               </a:ext>
             </a:extLst>
           </p:cNvPr>
@@ -4173,7 +4173,7 @@
           <p:cNvPr id="6" name="recap-circle-0">
             <a:extLst xmlns:a="http://schemas.openxmlformats.org/drawingml/2006/main">
               <a:ext uri="{FF2B5EF4-FFF2-40B4-BE49-F238E27FC236}">
-                <a16:creationId xmlns:a16="http://schemas.microsoft.com/office/drawing/2014/main" id="{C10C04EA-985E-4ABF-939D-970A686E7E26}"/>
+                <a16:creationId xmlns:a16="http://schemas.microsoft.com/office/drawing/2014/main" id="{61323F9B-CE84-4452-96D6-41AA17E0C0B2}"/>
               </a:ext>
             </a:extLst>
           </p:cNvPr>
@@ -4206,7 +4206,7 @@
           <p:cNvPr id="7" name="recap-number-0">
             <a:extLst xmlns:a="http://schemas.openxmlformats.org/drawingml/2006/main">
               <a:ext uri="{FF2B5EF4-FFF2-40B4-BE49-F238E27FC236}">
-                <a16:creationId xmlns:a16="http://schemas.microsoft.com/office/drawing/2014/main" id="{5581EC07-81AC-4EF5-A619-C8AFFD922AA0}"/>
+                <a16:creationId xmlns:a16="http://schemas.microsoft.com/office/drawing/2014/main" id="{D165CA78-E405-40F7-B5CF-F2F28B93D397}"/>
               </a:ext>
             </a:extLst>
           </p:cNvPr>
@@ -4264,7 +4264,7 @@
           <p:cNvPr id="8" name="recap-item-0">
             <a:extLst xmlns:a="http://schemas.openxmlformats.org/drawingml/2006/main">
               <a:ext uri="{FF2B5EF4-FFF2-40B4-BE49-F238E27FC236}">
-                <a16:creationId xmlns:a16="http://schemas.microsoft.com/office/drawing/2014/main" id="{112D250F-6AB8-4D4D-A914-A84EAD9ED572}"/>
+                <a16:creationId xmlns:a16="http://schemas.microsoft.com/office/drawing/2014/main" id="{929DBE1B-A312-4AA2-877C-2C8A1C82DC8D}"/>
               </a:ext>
             </a:extLst>
           </p:cNvPr>
@@ -4328,7 +4328,7 @@
           <p:cNvPr id="9" name="recap-connector-0">
             <a:extLst xmlns:a="http://schemas.openxmlformats.org/drawingml/2006/main">
               <a:ext uri="{FF2B5EF4-FFF2-40B4-BE49-F238E27FC236}">
-                <a16:creationId xmlns:a16="http://schemas.microsoft.com/office/drawing/2014/main" id="{C190A3F8-E4AB-4297-BACA-3221FD9031C7}"/>
+                <a16:creationId xmlns:a16="http://schemas.microsoft.com/office/drawing/2014/main" id="{826AE7E9-7C72-4714-9A87-A76F7C30B85D}"/>
               </a:ext>
             </a:extLst>
           </p:cNvPr>
@@ -4359,7 +4359,7 @@
           <p:cNvPr id="10" name="recap-circle-1">
             <a:extLst xmlns:a="http://schemas.openxmlformats.org/drawingml/2006/main">
               <a:ext uri="{FF2B5EF4-FFF2-40B4-BE49-F238E27FC236}">
-                <a16:creationId xmlns:a16="http://schemas.microsoft.com/office/drawing/2014/main" id="{7BC2D9BB-63C4-408B-BFDB-00088AC27AD9}"/>
+                <a16:creationId xmlns:a16="http://schemas.microsoft.com/office/drawing/2014/main" id="{A7BAF909-DCF1-454D-92F3-98AC9A4D9B2A}"/>
               </a:ext>
             </a:extLst>
           </p:cNvPr>
@@ -4392,7 +4392,7 @@
           <p:cNvPr id="11" name="recap-number-1">
             <a:extLst xmlns:a="http://schemas.openxmlformats.org/drawingml/2006/main">
               <a:ext uri="{FF2B5EF4-FFF2-40B4-BE49-F238E27FC236}">
-                <a16:creationId xmlns:a16="http://schemas.microsoft.com/office/drawing/2014/main" id="{05118521-61FF-4FDB-B274-5F3471730F07}"/>
+                <a16:creationId xmlns:a16="http://schemas.microsoft.com/office/drawing/2014/main" id="{1B73175A-00E2-4B53-A522-7E3A401B2730}"/>
               </a:ext>
             </a:extLst>
           </p:cNvPr>
@@ -4450,7 +4450,7 @@
           <p:cNvPr id="12" name="recap-item-1">
             <a:extLst xmlns:a="http://schemas.openxmlformats.org/drawingml/2006/main">
               <a:ext uri="{FF2B5EF4-FFF2-40B4-BE49-F238E27FC236}">
-                <a16:creationId xmlns:a16="http://schemas.microsoft.com/office/drawing/2014/main" id="{3872CCAA-A904-4196-AAA5-1C72F30CD639}"/>
+                <a16:creationId xmlns:a16="http://schemas.microsoft.com/office/drawing/2014/main" id="{6C112E41-D0D2-45C0-9CA2-BD6301962A08}"/>
               </a:ext>
             </a:extLst>
           </p:cNvPr>
@@ -4514,7 +4514,7 @@
           <p:cNvPr id="13" name="recap-connector-1">
             <a:extLst xmlns:a="http://schemas.openxmlformats.org/drawingml/2006/main">
               <a:ext uri="{FF2B5EF4-FFF2-40B4-BE49-F238E27FC236}">
-                <a16:creationId xmlns:a16="http://schemas.microsoft.com/office/drawing/2014/main" id="{326B2A32-C3C3-43DA-A001-65EF4FEB424F}"/>
+                <a16:creationId xmlns:a16="http://schemas.microsoft.com/office/drawing/2014/main" id="{6A1AB752-64B9-4C94-B5E4-99149947C981}"/>
               </a:ext>
             </a:extLst>
           </p:cNvPr>
@@ -4545,7 +4545,7 @@
           <p:cNvPr id="14" name="recap-circle-2">
             <a:extLst xmlns:a="http://schemas.openxmlformats.org/drawingml/2006/main">
               <a:ext uri="{FF2B5EF4-FFF2-40B4-BE49-F238E27FC236}">
-                <a16:creationId xmlns:a16="http://schemas.microsoft.com/office/drawing/2014/main" id="{D02F504D-B572-48FE-A628-05EA76923B03}"/>
+                <a16:creationId xmlns:a16="http://schemas.microsoft.com/office/drawing/2014/main" id="{42430B7A-187F-4587-94BC-D078565921E2}"/>
               </a:ext>
             </a:extLst>
           </p:cNvPr>
@@ -4578,7 +4578,7 @@
           <p:cNvPr id="15" name="recap-number-2">
             <a:extLst xmlns:a="http://schemas.openxmlformats.org/drawingml/2006/main">
               <a:ext uri="{FF2B5EF4-FFF2-40B4-BE49-F238E27FC236}">
-                <a16:creationId xmlns:a16="http://schemas.microsoft.com/office/drawing/2014/main" id="{B8D948D9-CFB2-4D48-B123-E4CFCC5A30AB}"/>
+                <a16:creationId xmlns:a16="http://schemas.microsoft.com/office/drawing/2014/main" id="{F7977CEA-313F-46F7-AEEF-C482C1BC8461}"/>
               </a:ext>
             </a:extLst>
           </p:cNvPr>
@@ -4636,7 +4636,7 @@
           <p:cNvPr id="16" name="recap-item-2">
             <a:extLst xmlns:a="http://schemas.openxmlformats.org/drawingml/2006/main">
               <a:ext uri="{FF2B5EF4-FFF2-40B4-BE49-F238E27FC236}">
-                <a16:creationId xmlns:a16="http://schemas.microsoft.com/office/drawing/2014/main" id="{E1869728-7902-42B1-912A-8F7BACBE09EE}"/>
+                <a16:creationId xmlns:a16="http://schemas.microsoft.com/office/drawing/2014/main" id="{0B700A3A-5202-40A0-82D1-63CE3C9FEDDA}"/>
               </a:ext>
             </a:extLst>
           </p:cNvPr>
@@ -4698,7 +4698,7 @@
     </p:spTree>
     <p:extLst>
       <p:ext uri="{BB962C8B-B14F-4D97-AF65-F5344CB8AC3E}">
-        <p14:creationId xmlns:p14="http://schemas.microsoft.com/office/powerpoint/2010/main" val="1250881970"/>
+        <p14:creationId xmlns:p14="http://schemas.microsoft.com/office/powerpoint/2010/main" val="963172251"/>
       </p:ext>
     </p:extLst>
   </p:cSld>
@@ -4729,7 +4729,7 @@
           <p:cNvPr id="1" name="s13-rule">
             <a:extLst xmlns:a="http://schemas.openxmlformats.org/drawingml/2006/main">
               <a:ext uri="{FF2B5EF4-FFF2-40B4-BE49-F238E27FC236}">
-                <a16:creationId xmlns:a16="http://schemas.microsoft.com/office/drawing/2014/main" id="{8D74E5D5-EEBD-43F6-8011-D5AC5AFB60D9}"/>
+                <a16:creationId xmlns:a16="http://schemas.microsoft.com/office/drawing/2014/main" id="{AF67BB23-DA12-43D2-BF4A-81E196FE4976}"/>
               </a:ext>
             </a:extLst>
           </p:cNvPr>
@@ -4762,7 +4762,7 @@
           <p:cNvPr id="2" name="s13-eyebrow">
             <a:extLst xmlns:a="http://schemas.openxmlformats.org/drawingml/2006/main">
               <a:ext uri="{FF2B5EF4-FFF2-40B4-BE49-F238E27FC236}">
-                <a16:creationId xmlns:a16="http://schemas.microsoft.com/office/drawing/2014/main" id="{E9E219AD-ED53-439E-9161-164F85196BD4}"/>
+                <a16:creationId xmlns:a16="http://schemas.microsoft.com/office/drawing/2014/main" id="{DFB5FFD9-FFA7-425A-B890-7603899FC13A}"/>
               </a:ext>
             </a:extLst>
           </p:cNvPr>
@@ -4820,7 +4820,7 @@
           <p:cNvPr id="3" name="s13-title">
             <a:extLst xmlns:a="http://schemas.openxmlformats.org/drawingml/2006/main">
               <a:ext uri="{FF2B5EF4-FFF2-40B4-BE49-F238E27FC236}">
-                <a16:creationId xmlns:a16="http://schemas.microsoft.com/office/drawing/2014/main" id="{528644F3-9FD6-4693-A3C3-8E38F79D09A4}"/>
+                <a16:creationId xmlns:a16="http://schemas.microsoft.com/office/drawing/2014/main" id="{7796777C-6679-425F-A983-87BB91452519}"/>
               </a:ext>
             </a:extLst>
           </p:cNvPr>
@@ -4878,7 +4878,7 @@
           <p:cNvPr id="4" name="s13-footer">
             <a:extLst xmlns:a="http://schemas.openxmlformats.org/drawingml/2006/main">
               <a:ext uri="{FF2B5EF4-FFF2-40B4-BE49-F238E27FC236}">
-                <a16:creationId xmlns:a16="http://schemas.microsoft.com/office/drawing/2014/main" id="{9685E289-83AB-4BDE-B19B-B12D7326B771}"/>
+                <a16:creationId xmlns:a16="http://schemas.microsoft.com/office/drawing/2014/main" id="{F4223251-AA29-4079-9FCD-EC7CB09AFD22}"/>
               </a:ext>
             </a:extLst>
           </p:cNvPr>
@@ -4909,7 +4909,7 @@
           <p:cNvPr id="5" name="s13-identity">
             <a:extLst xmlns:a="http://schemas.openxmlformats.org/drawingml/2006/main">
               <a:ext uri="{FF2B5EF4-FFF2-40B4-BE49-F238E27FC236}">
-                <a16:creationId xmlns:a16="http://schemas.microsoft.com/office/drawing/2014/main" id="{04EEF58F-B2E2-4B0F-8CB1-A5C90F70245D}"/>
+                <a16:creationId xmlns:a16="http://schemas.microsoft.com/office/drawing/2014/main" id="{1165A0F6-81B7-40BC-9CEE-5E401E2E5F84}"/>
               </a:ext>
             </a:extLst>
           </p:cNvPr>
@@ -4967,7 +4967,7 @@
           <p:cNvPr id="6" name="source-0">
             <a:extLst xmlns:a="http://schemas.openxmlformats.org/drawingml/2006/main">
               <a:ext uri="{FF2B5EF4-FFF2-40B4-BE49-F238E27FC236}">
-                <a16:creationId xmlns:a16="http://schemas.microsoft.com/office/drawing/2014/main" id="{E91004A4-1925-48A0-90CF-2944392A2F88}"/>
+                <a16:creationId xmlns:a16="http://schemas.microsoft.com/office/drawing/2014/main" id="{DCF17EC7-C87B-473A-9573-EAECB61A8147}"/>
               </a:ext>
             </a:extLst>
           </p:cNvPr>
@@ -5031,7 +5031,7 @@
           <p:cNvPr id="7" name="source-1">
             <a:extLst xmlns:a="http://schemas.openxmlformats.org/drawingml/2006/main">
               <a:ext uri="{FF2B5EF4-FFF2-40B4-BE49-F238E27FC236}">
-                <a16:creationId xmlns:a16="http://schemas.microsoft.com/office/drawing/2014/main" id="{B9BBB8D9-218F-4E41-8092-ADCDF2434ABC}"/>
+                <a16:creationId xmlns:a16="http://schemas.microsoft.com/office/drawing/2014/main" id="{C6A94AF6-2FAB-468B-ADFE-73B929738E8B}"/>
               </a:ext>
             </a:extLst>
           </p:cNvPr>
@@ -5095,7 +5095,7 @@
           <p:cNvPr id="8" name="source-2">
             <a:extLst xmlns:a="http://schemas.openxmlformats.org/drawingml/2006/main">
               <a:ext uri="{FF2B5EF4-FFF2-40B4-BE49-F238E27FC236}">
-                <a16:creationId xmlns:a16="http://schemas.microsoft.com/office/drawing/2014/main" id="{D66031D6-CA70-4060-9308-6EF56955BAEF}"/>
+                <a16:creationId xmlns:a16="http://schemas.microsoft.com/office/drawing/2014/main" id="{8164E1E7-4E94-4519-B1CC-9360CD6F3135}"/>
               </a:ext>
             </a:extLst>
           </p:cNvPr>
@@ -5159,7 +5159,7 @@
           <p:cNvPr id="9" name="source-3">
             <a:extLst xmlns:a="http://schemas.openxmlformats.org/drawingml/2006/main">
               <a:ext uri="{FF2B5EF4-FFF2-40B4-BE49-F238E27FC236}">
-                <a16:creationId xmlns:a16="http://schemas.microsoft.com/office/drawing/2014/main" id="{23FCEDD9-BE98-4E9F-95C1-AD67FBE08118}"/>
+                <a16:creationId xmlns:a16="http://schemas.microsoft.com/office/drawing/2014/main" id="{A1C418C8-7AA1-45D4-A036-3E435D633F9B}"/>
               </a:ext>
             </a:extLst>
           </p:cNvPr>
@@ -5223,7 +5223,7 @@
           <p:cNvPr id="10" name="s13-takeaway-rule">
             <a:extLst xmlns:a="http://schemas.openxmlformats.org/drawingml/2006/main">
               <a:ext uri="{FF2B5EF4-FFF2-40B4-BE49-F238E27FC236}">
-                <a16:creationId xmlns:a16="http://schemas.microsoft.com/office/drawing/2014/main" id="{17A1CFCB-F90C-4F7F-A819-4DED322FE2C2}"/>
+                <a16:creationId xmlns:a16="http://schemas.microsoft.com/office/drawing/2014/main" id="{11CA6C5A-780E-403E-B660-D30335E6D216}"/>
               </a:ext>
             </a:extLst>
           </p:cNvPr>
@@ -5256,7 +5256,7 @@
           <p:cNvPr id="11" name="s13-takeaway">
             <a:extLst xmlns:a="http://schemas.openxmlformats.org/drawingml/2006/main">
               <a:ext uri="{FF2B5EF4-FFF2-40B4-BE49-F238E27FC236}">
-                <a16:creationId xmlns:a16="http://schemas.microsoft.com/office/drawing/2014/main" id="{F5B12498-25D3-4450-9FCF-3E36DCCC047B}"/>
+                <a16:creationId xmlns:a16="http://schemas.microsoft.com/office/drawing/2014/main" id="{2A96E980-BDAF-4AD6-A4A9-44C4432D217B}"/>
               </a:ext>
             </a:extLst>
           </p:cNvPr>
@@ -5281,7 +5281,7 @@
         </p:spPr>
         <p:txBody>
           <a:bodyPr xmlns:a="http://schemas.openxmlformats.org/drawingml/2006/main" lIns="0" tIns="0" rIns="0" bIns="0" anchor="ctr">
-            <a:normAutofit fontScale="100000"/>
+            <a:normAutofit fontScale="95911"/>
           </a:bodyPr>
           <a:lstStyle xmlns:a="http://schemas.openxmlformats.org/drawingml/2006/main"/>
           <a:p xmlns:a="http://schemas.openxmlformats.org/drawingml/2006/main">
@@ -5304,7 +5304,7 @@
                 <a:ea typeface="PingFang SC"/>
                 <a:cs typeface="PingFang SC"/>
               </a:rPr>
-              <a:t>公开幻灯片只使用课程原创文字与原生图形；完整论证、链接和事实边界请见本节讲义。</a:t>
+              <a:t>课程精编页用于讲授主线；播放器中的“原课件”模式保留团队 PowerPoint 精选页、真实图片和可播放视频。</a:t>
             </a:r>
           </a:p>
         </p:txBody>
@@ -5312,7 +5312,7 @@
     </p:spTree>
     <p:extLst>
       <p:ext uri="{BB962C8B-B14F-4D97-AF65-F5344CB8AC3E}">
-        <p14:creationId xmlns:p14="http://schemas.microsoft.com/office/powerpoint/2010/main" val="42111135"/>
+        <p14:creationId xmlns:p14="http://schemas.microsoft.com/office/powerpoint/2010/main" val="1744904006"/>
       </p:ext>
     </p:extLst>
   </p:cSld>
@@ -5343,7 +5343,7 @@
           <p:cNvPr id="1" name="s2-rule">
             <a:extLst xmlns:a="http://schemas.openxmlformats.org/drawingml/2006/main">
               <a:ext uri="{FF2B5EF4-FFF2-40B4-BE49-F238E27FC236}">
-                <a16:creationId xmlns:a16="http://schemas.microsoft.com/office/drawing/2014/main" id="{1112C332-D56C-4BA0-9E77-639A54A51445}"/>
+                <a16:creationId xmlns:a16="http://schemas.microsoft.com/office/drawing/2014/main" id="{6B16882F-C358-408B-8226-9859195B1ABF}"/>
               </a:ext>
             </a:extLst>
           </p:cNvPr>
@@ -5376,7 +5376,7 @@
           <p:cNvPr id="2" name="s2-eyebrow">
             <a:extLst xmlns:a="http://schemas.openxmlformats.org/drawingml/2006/main">
               <a:ext uri="{FF2B5EF4-FFF2-40B4-BE49-F238E27FC236}">
-                <a16:creationId xmlns:a16="http://schemas.microsoft.com/office/drawing/2014/main" id="{079F64C4-DCD6-4FF9-BB41-B5E5B56A1C7E}"/>
+                <a16:creationId xmlns:a16="http://schemas.microsoft.com/office/drawing/2014/main" id="{D580A160-B1A4-49A7-BACB-C2EE29344AA4}"/>
               </a:ext>
             </a:extLst>
           </p:cNvPr>
@@ -5434,7 +5434,7 @@
           <p:cNvPr id="3" name="s2-title">
             <a:extLst xmlns:a="http://schemas.openxmlformats.org/drawingml/2006/main">
               <a:ext uri="{FF2B5EF4-FFF2-40B4-BE49-F238E27FC236}">
-                <a16:creationId xmlns:a16="http://schemas.microsoft.com/office/drawing/2014/main" id="{62265D5E-AB65-414B-9A17-C80530ED8FAE}"/>
+                <a16:creationId xmlns:a16="http://schemas.microsoft.com/office/drawing/2014/main" id="{3EB9CFAB-6B1E-4BF0-9400-2AB9C94E2CE9}"/>
               </a:ext>
             </a:extLst>
           </p:cNvPr>
@@ -5492,7 +5492,7 @@
           <p:cNvPr id="4" name="s2-footer">
             <a:extLst xmlns:a="http://schemas.openxmlformats.org/drawingml/2006/main">
               <a:ext uri="{FF2B5EF4-FFF2-40B4-BE49-F238E27FC236}">
-                <a16:creationId xmlns:a16="http://schemas.microsoft.com/office/drawing/2014/main" id="{FB3B48F7-510A-4786-8D5A-26BC980D8711}"/>
+                <a16:creationId xmlns:a16="http://schemas.microsoft.com/office/drawing/2014/main" id="{8B5121A7-9C08-4457-86DC-9A4707DB7FDC}"/>
               </a:ext>
             </a:extLst>
           </p:cNvPr>
@@ -5523,7 +5523,7 @@
           <p:cNvPr id="5" name="s2-identity">
             <a:extLst xmlns:a="http://schemas.openxmlformats.org/drawingml/2006/main">
               <a:ext uri="{FF2B5EF4-FFF2-40B4-BE49-F238E27FC236}">
-                <a16:creationId xmlns:a16="http://schemas.microsoft.com/office/drawing/2014/main" id="{125EC867-9904-478C-93D9-318EFB32F75C}"/>
+                <a16:creationId xmlns:a16="http://schemas.microsoft.com/office/drawing/2014/main" id="{472DC61D-8995-4AB9-8DBC-DA710E7808BF}"/>
               </a:ext>
             </a:extLst>
           </p:cNvPr>
@@ -5581,7 +5581,7 @@
           <p:cNvPr id="6" name="objective-1">
             <a:extLst xmlns:a="http://schemas.openxmlformats.org/drawingml/2006/main">
               <a:ext uri="{FF2B5EF4-FFF2-40B4-BE49-F238E27FC236}">
-                <a16:creationId xmlns:a16="http://schemas.microsoft.com/office/drawing/2014/main" id="{9352496F-A757-450A-89B2-A1734C7BE532}"/>
+                <a16:creationId xmlns:a16="http://schemas.microsoft.com/office/drawing/2014/main" id="{C0CDF81B-7096-480E-BE8A-2DF7C364C23E}"/>
               </a:ext>
             </a:extLst>
           </p:cNvPr>
@@ -5668,7 +5668,7 @@
           <p:cNvPr id="7" name="objective-2">
             <a:extLst xmlns:a="http://schemas.openxmlformats.org/drawingml/2006/main">
               <a:ext uri="{FF2B5EF4-FFF2-40B4-BE49-F238E27FC236}">
-                <a16:creationId xmlns:a16="http://schemas.microsoft.com/office/drawing/2014/main" id="{D1C588F1-964A-4AD7-97DD-F203C6B6C4F5}"/>
+                <a16:creationId xmlns:a16="http://schemas.microsoft.com/office/drawing/2014/main" id="{4C1949B3-D613-4A00-A65C-830A21DE819F}"/>
               </a:ext>
             </a:extLst>
           </p:cNvPr>
@@ -5755,7 +5755,7 @@
           <p:cNvPr id="8" name="objective-3">
             <a:extLst xmlns:a="http://schemas.openxmlformats.org/drawingml/2006/main">
               <a:ext uri="{FF2B5EF4-FFF2-40B4-BE49-F238E27FC236}">
-                <a16:creationId xmlns:a16="http://schemas.microsoft.com/office/drawing/2014/main" id="{EE7B71DE-396B-4749-815D-7F1B5AD29216}"/>
+                <a16:creationId xmlns:a16="http://schemas.microsoft.com/office/drawing/2014/main" id="{4E88CF44-1296-4794-B3F8-E07AE76A60C0}"/>
               </a:ext>
             </a:extLst>
           </p:cNvPr>
@@ -5842,7 +5842,7 @@
           <p:cNvPr id="9" name="objective-4">
             <a:extLst xmlns:a="http://schemas.openxmlformats.org/drawingml/2006/main">
               <a:ext uri="{FF2B5EF4-FFF2-40B4-BE49-F238E27FC236}">
-                <a16:creationId xmlns:a16="http://schemas.microsoft.com/office/drawing/2014/main" id="{BD99009E-9F41-4FA2-89D6-586C5FF01CE4}"/>
+                <a16:creationId xmlns:a16="http://schemas.microsoft.com/office/drawing/2014/main" id="{FE9349F8-F362-4B81-A62F-1E9E1550361B}"/>
               </a:ext>
             </a:extLst>
           </p:cNvPr>
@@ -5927,7 +5927,7 @@
     </p:spTree>
     <p:extLst>
       <p:ext uri="{BB962C8B-B14F-4D97-AF65-F5344CB8AC3E}">
-        <p14:creationId xmlns:p14="http://schemas.microsoft.com/office/powerpoint/2010/main" val="1461444123"/>
+        <p14:creationId xmlns:p14="http://schemas.microsoft.com/office/powerpoint/2010/main" val="2017602814"/>
       </p:ext>
     </p:extLst>
   </p:cSld>
@@ -5958,7 +5958,7 @@
           <p:cNvPr id="1" name="s3-rule">
             <a:extLst xmlns:a="http://schemas.openxmlformats.org/drawingml/2006/main">
               <a:ext uri="{FF2B5EF4-FFF2-40B4-BE49-F238E27FC236}">
-                <a16:creationId xmlns:a16="http://schemas.microsoft.com/office/drawing/2014/main" id="{5E0ACAD0-D045-49EE-9A46-A7855952D981}"/>
+                <a16:creationId xmlns:a16="http://schemas.microsoft.com/office/drawing/2014/main" id="{90B24289-E430-4FB5-AEAF-F25F86F28CDC}"/>
               </a:ext>
             </a:extLst>
           </p:cNvPr>
@@ -5991,7 +5991,7 @@
           <p:cNvPr id="2" name="s3-eyebrow">
             <a:extLst xmlns:a="http://schemas.openxmlformats.org/drawingml/2006/main">
               <a:ext uri="{FF2B5EF4-FFF2-40B4-BE49-F238E27FC236}">
-                <a16:creationId xmlns:a16="http://schemas.microsoft.com/office/drawing/2014/main" id="{ACD8C6AD-CE88-4F61-BD90-1249C103D8BA}"/>
+                <a16:creationId xmlns:a16="http://schemas.microsoft.com/office/drawing/2014/main" id="{FC3301E1-C4E9-44C9-BEED-E455DFEB357C}"/>
               </a:ext>
             </a:extLst>
           </p:cNvPr>
@@ -6049,7 +6049,7 @@
           <p:cNvPr id="3" name="s3-title">
             <a:extLst xmlns:a="http://schemas.openxmlformats.org/drawingml/2006/main">
               <a:ext uri="{FF2B5EF4-FFF2-40B4-BE49-F238E27FC236}">
-                <a16:creationId xmlns:a16="http://schemas.microsoft.com/office/drawing/2014/main" id="{DFAD3622-B5C1-4DC7-B9E4-846E84F88872}"/>
+                <a16:creationId xmlns:a16="http://schemas.microsoft.com/office/drawing/2014/main" id="{E13A8ADA-AB97-4732-A22D-5D67D765F43C}"/>
               </a:ext>
             </a:extLst>
           </p:cNvPr>
@@ -6107,7 +6107,7 @@
           <p:cNvPr id="4" name="s3-footer">
             <a:extLst xmlns:a="http://schemas.openxmlformats.org/drawingml/2006/main">
               <a:ext uri="{FF2B5EF4-FFF2-40B4-BE49-F238E27FC236}">
-                <a16:creationId xmlns:a16="http://schemas.microsoft.com/office/drawing/2014/main" id="{84AF50E4-BEC1-4101-9E0E-E0C17A5ADDBB}"/>
+                <a16:creationId xmlns:a16="http://schemas.microsoft.com/office/drawing/2014/main" id="{13CCECB4-D371-4F00-B38E-827708257820}"/>
               </a:ext>
             </a:extLst>
           </p:cNvPr>
@@ -6138,7 +6138,7 @@
           <p:cNvPr id="5" name="s3-identity">
             <a:extLst xmlns:a="http://schemas.openxmlformats.org/drawingml/2006/main">
               <a:ext uri="{FF2B5EF4-FFF2-40B4-BE49-F238E27FC236}">
-                <a16:creationId xmlns:a16="http://schemas.microsoft.com/office/drawing/2014/main" id="{E0BF8CDA-B9CC-4AC8-BDDD-0703AD7BD105}"/>
+                <a16:creationId xmlns:a16="http://schemas.microsoft.com/office/drawing/2014/main" id="{D724BDD6-AE1B-4F6A-9862-6EFBF3C8846D}"/>
               </a:ext>
             </a:extLst>
           </p:cNvPr>
@@ -6196,7 +6196,7 @@
           <p:cNvPr id="6" name="core-no-0">
             <a:extLst xmlns:a="http://schemas.openxmlformats.org/drawingml/2006/main">
               <a:ext uri="{FF2B5EF4-FFF2-40B4-BE49-F238E27FC236}">
-                <a16:creationId xmlns:a16="http://schemas.microsoft.com/office/drawing/2014/main" id="{A22B6904-E5D4-4D5F-B52D-1A85AB647EC9}"/>
+                <a16:creationId xmlns:a16="http://schemas.microsoft.com/office/drawing/2014/main" id="{EDC9F6C7-8EB1-4D54-84E3-9F7066A48EFE}"/>
               </a:ext>
             </a:extLst>
           </p:cNvPr>
@@ -6254,7 +6254,7 @@
           <p:cNvPr id="7" name="core-label-0">
             <a:extLst xmlns:a="http://schemas.openxmlformats.org/drawingml/2006/main">
               <a:ext uri="{FF2B5EF4-FFF2-40B4-BE49-F238E27FC236}">
-                <a16:creationId xmlns:a16="http://schemas.microsoft.com/office/drawing/2014/main" id="{512496D4-E76A-452B-A4CC-825C53A9CD83}"/>
+                <a16:creationId xmlns:a16="http://schemas.microsoft.com/office/drawing/2014/main" id="{EFB63ECA-FA16-4996-ADF8-D461284F7857}"/>
               </a:ext>
             </a:extLst>
           </p:cNvPr>
@@ -6312,7 +6312,7 @@
           <p:cNvPr id="8" name="core-body-0">
             <a:extLst xmlns:a="http://schemas.openxmlformats.org/drawingml/2006/main">
               <a:ext uri="{FF2B5EF4-FFF2-40B4-BE49-F238E27FC236}">
-                <a16:creationId xmlns:a16="http://schemas.microsoft.com/office/drawing/2014/main" id="{9D9D4592-BA50-48EF-BF75-B8B3EC2ECCAD}"/>
+                <a16:creationId xmlns:a16="http://schemas.microsoft.com/office/drawing/2014/main" id="{940BEDFC-BD84-4B84-A956-F0B873EBD9DD}"/>
               </a:ext>
             </a:extLst>
           </p:cNvPr>
@@ -6376,7 +6376,7 @@
           <p:cNvPr id="9" name="core-no-1">
             <a:extLst xmlns:a="http://schemas.openxmlformats.org/drawingml/2006/main">
               <a:ext uri="{FF2B5EF4-FFF2-40B4-BE49-F238E27FC236}">
-                <a16:creationId xmlns:a16="http://schemas.microsoft.com/office/drawing/2014/main" id="{7D019930-E48F-4B32-9202-D1435B15AA5B}"/>
+                <a16:creationId xmlns:a16="http://schemas.microsoft.com/office/drawing/2014/main" id="{6EA0967F-59AA-402C-897B-A00EA665B3E4}"/>
               </a:ext>
             </a:extLst>
           </p:cNvPr>
@@ -6434,7 +6434,7 @@
           <p:cNvPr id="10" name="core-body-1">
             <a:extLst xmlns:a="http://schemas.openxmlformats.org/drawingml/2006/main">
               <a:ext uri="{FF2B5EF4-FFF2-40B4-BE49-F238E27FC236}">
-                <a16:creationId xmlns:a16="http://schemas.microsoft.com/office/drawing/2014/main" id="{D05A79EE-3F97-4C9E-A589-57D811A3646A}"/>
+                <a16:creationId xmlns:a16="http://schemas.microsoft.com/office/drawing/2014/main" id="{40A9650E-63EE-4D7B-9865-CE03499787C1}"/>
               </a:ext>
             </a:extLst>
           </p:cNvPr>
@@ -6498,7 +6498,7 @@
           <p:cNvPr id="11" name="s3-takeaway-rule">
             <a:extLst xmlns:a="http://schemas.openxmlformats.org/drawingml/2006/main">
               <a:ext uri="{FF2B5EF4-FFF2-40B4-BE49-F238E27FC236}">
-                <a16:creationId xmlns:a16="http://schemas.microsoft.com/office/drawing/2014/main" id="{469D215C-5296-4E33-9632-375CE3A95BA4}"/>
+                <a16:creationId xmlns:a16="http://schemas.microsoft.com/office/drawing/2014/main" id="{37CCF5BA-B83B-4F4F-BEEC-D68F938F3029}"/>
               </a:ext>
             </a:extLst>
           </p:cNvPr>
@@ -6531,7 +6531,7 @@
           <p:cNvPr id="12" name="s3-takeaway">
             <a:extLst xmlns:a="http://schemas.openxmlformats.org/drawingml/2006/main">
               <a:ext uri="{FF2B5EF4-FFF2-40B4-BE49-F238E27FC236}">
-                <a16:creationId xmlns:a16="http://schemas.microsoft.com/office/drawing/2014/main" id="{49D83DE1-C657-4F0E-9916-AC2D2104E2BC}"/>
+                <a16:creationId xmlns:a16="http://schemas.microsoft.com/office/drawing/2014/main" id="{AA0C8CF9-E8EB-4CD2-8341-5A8938DF2574}"/>
               </a:ext>
             </a:extLst>
           </p:cNvPr>
@@ -6587,7 +6587,7 @@
     </p:spTree>
     <p:extLst>
       <p:ext uri="{BB962C8B-B14F-4D97-AF65-F5344CB8AC3E}">
-        <p14:creationId xmlns:p14="http://schemas.microsoft.com/office/powerpoint/2010/main" val="1485698871"/>
+        <p14:creationId xmlns:p14="http://schemas.microsoft.com/office/powerpoint/2010/main" val="2118102044"/>
       </p:ext>
     </p:extLst>
   </p:cSld>
@@ -6618,7 +6618,7 @@
           <p:cNvPr id="1" name="s4-rule">
             <a:extLst xmlns:a="http://schemas.openxmlformats.org/drawingml/2006/main">
               <a:ext uri="{FF2B5EF4-FFF2-40B4-BE49-F238E27FC236}">
-                <a16:creationId xmlns:a16="http://schemas.microsoft.com/office/drawing/2014/main" id="{5318389F-BAB6-448B-B3AA-DA6F978FE824}"/>
+                <a16:creationId xmlns:a16="http://schemas.microsoft.com/office/drawing/2014/main" id="{CE5A875E-3407-4D4D-8986-9C429089760C}"/>
               </a:ext>
             </a:extLst>
           </p:cNvPr>
@@ -6651,7 +6651,7 @@
           <p:cNvPr id="2" name="s4-eyebrow">
             <a:extLst xmlns:a="http://schemas.openxmlformats.org/drawingml/2006/main">
               <a:ext uri="{FF2B5EF4-FFF2-40B4-BE49-F238E27FC236}">
-                <a16:creationId xmlns:a16="http://schemas.microsoft.com/office/drawing/2014/main" id="{E441FB2B-0C93-4962-810B-F02EF8D537D7}"/>
+                <a16:creationId xmlns:a16="http://schemas.microsoft.com/office/drawing/2014/main" id="{C169944D-C7E2-4FCC-835C-5B1814DCDAD5}"/>
               </a:ext>
             </a:extLst>
           </p:cNvPr>
@@ -6709,7 +6709,7 @@
           <p:cNvPr id="3" name="s4-title">
             <a:extLst xmlns:a="http://schemas.openxmlformats.org/drawingml/2006/main">
               <a:ext uri="{FF2B5EF4-FFF2-40B4-BE49-F238E27FC236}">
-                <a16:creationId xmlns:a16="http://schemas.microsoft.com/office/drawing/2014/main" id="{F828D3B1-2389-4790-8E74-34029C7E71F6}"/>
+                <a16:creationId xmlns:a16="http://schemas.microsoft.com/office/drawing/2014/main" id="{E53B1328-0E2F-40DB-B2C4-8304B1A9E683}"/>
               </a:ext>
             </a:extLst>
           </p:cNvPr>
@@ -6767,7 +6767,7 @@
           <p:cNvPr id="4" name="s4-footer">
             <a:extLst xmlns:a="http://schemas.openxmlformats.org/drawingml/2006/main">
               <a:ext uri="{FF2B5EF4-FFF2-40B4-BE49-F238E27FC236}">
-                <a16:creationId xmlns:a16="http://schemas.microsoft.com/office/drawing/2014/main" id="{33FE1A99-35B6-4FDE-9B7A-B7A355B24CC3}"/>
+                <a16:creationId xmlns:a16="http://schemas.microsoft.com/office/drawing/2014/main" id="{7E323102-8641-4F40-B78D-542C4D46371A}"/>
               </a:ext>
             </a:extLst>
           </p:cNvPr>
@@ -6798,7 +6798,7 @@
           <p:cNvPr id="5" name="s4-identity">
             <a:extLst xmlns:a="http://schemas.openxmlformats.org/drawingml/2006/main">
               <a:ext uri="{FF2B5EF4-FFF2-40B4-BE49-F238E27FC236}">
-                <a16:creationId xmlns:a16="http://schemas.microsoft.com/office/drawing/2014/main" id="{51CA6540-FF99-4E99-9A6C-CF7ACD3D5C5F}"/>
+                <a16:creationId xmlns:a16="http://schemas.microsoft.com/office/drawing/2014/main" id="{F55FAD7E-6768-4200-815D-B0AE1C4B5BA9}"/>
               </a:ext>
             </a:extLst>
           </p:cNvPr>
@@ -6856,7 +6856,7 @@
           <p:cNvPr id="6" name="core-no-0">
             <a:extLst xmlns:a="http://schemas.openxmlformats.org/drawingml/2006/main">
               <a:ext uri="{FF2B5EF4-FFF2-40B4-BE49-F238E27FC236}">
-                <a16:creationId xmlns:a16="http://schemas.microsoft.com/office/drawing/2014/main" id="{CACCB43E-0BA8-45B1-AC48-A5DA44C5D598}"/>
+                <a16:creationId xmlns:a16="http://schemas.microsoft.com/office/drawing/2014/main" id="{36703542-DFAD-4368-BE6E-7B700E6073BA}"/>
               </a:ext>
             </a:extLst>
           </p:cNvPr>
@@ -6914,7 +6914,7 @@
           <p:cNvPr id="7" name="core-label-0">
             <a:extLst xmlns:a="http://schemas.openxmlformats.org/drawingml/2006/main">
               <a:ext uri="{FF2B5EF4-FFF2-40B4-BE49-F238E27FC236}">
-                <a16:creationId xmlns:a16="http://schemas.microsoft.com/office/drawing/2014/main" id="{8F5ED636-5C53-4485-B064-077904A7B6A6}"/>
+                <a16:creationId xmlns:a16="http://schemas.microsoft.com/office/drawing/2014/main" id="{93F5472C-5BBB-44FB-A0D5-02A179940B87}"/>
               </a:ext>
             </a:extLst>
           </p:cNvPr>
@@ -6972,7 +6972,7 @@
           <p:cNvPr id="8" name="core-body-0">
             <a:extLst xmlns:a="http://schemas.openxmlformats.org/drawingml/2006/main">
               <a:ext uri="{FF2B5EF4-FFF2-40B4-BE49-F238E27FC236}">
-                <a16:creationId xmlns:a16="http://schemas.microsoft.com/office/drawing/2014/main" id="{54CD7910-BDE8-4CE6-B6A8-1D77372819E6}"/>
+                <a16:creationId xmlns:a16="http://schemas.microsoft.com/office/drawing/2014/main" id="{CED3944D-EAEA-47B5-B0CD-BBAB97B1AAE7}"/>
               </a:ext>
             </a:extLst>
           </p:cNvPr>
@@ -7036,7 +7036,7 @@
           <p:cNvPr id="9" name="core-no-1">
             <a:extLst xmlns:a="http://schemas.openxmlformats.org/drawingml/2006/main">
               <a:ext uri="{FF2B5EF4-FFF2-40B4-BE49-F238E27FC236}">
-                <a16:creationId xmlns:a16="http://schemas.microsoft.com/office/drawing/2014/main" id="{067B8E89-C364-4519-8484-EAC4E1D91964}"/>
+                <a16:creationId xmlns:a16="http://schemas.microsoft.com/office/drawing/2014/main" id="{B81838B0-8381-4AFD-96DB-AB08A54CF828}"/>
               </a:ext>
             </a:extLst>
           </p:cNvPr>
@@ -7094,7 +7094,7 @@
           <p:cNvPr id="10" name="core-body-1">
             <a:extLst xmlns:a="http://schemas.openxmlformats.org/drawingml/2006/main">
               <a:ext uri="{FF2B5EF4-FFF2-40B4-BE49-F238E27FC236}">
-                <a16:creationId xmlns:a16="http://schemas.microsoft.com/office/drawing/2014/main" id="{81E16B2D-9ABC-47E1-BF8D-6E221AB1D688}"/>
+                <a16:creationId xmlns:a16="http://schemas.microsoft.com/office/drawing/2014/main" id="{79B12B9E-BECC-455C-9012-C94939938E55}"/>
               </a:ext>
             </a:extLst>
           </p:cNvPr>
@@ -7158,7 +7158,7 @@
           <p:cNvPr id="11" name="s4-takeaway-rule">
             <a:extLst xmlns:a="http://schemas.openxmlformats.org/drawingml/2006/main">
               <a:ext uri="{FF2B5EF4-FFF2-40B4-BE49-F238E27FC236}">
-                <a16:creationId xmlns:a16="http://schemas.microsoft.com/office/drawing/2014/main" id="{E04999E0-DCD7-4747-96BE-046AC528C62D}"/>
+                <a16:creationId xmlns:a16="http://schemas.microsoft.com/office/drawing/2014/main" id="{7C9A58F4-A8A1-41CD-BF45-C0335452AC81}"/>
               </a:ext>
             </a:extLst>
           </p:cNvPr>
@@ -7191,7 +7191,7 @@
           <p:cNvPr id="12" name="s4-takeaway">
             <a:extLst xmlns:a="http://schemas.openxmlformats.org/drawingml/2006/main">
               <a:ext uri="{FF2B5EF4-FFF2-40B4-BE49-F238E27FC236}">
-                <a16:creationId xmlns:a16="http://schemas.microsoft.com/office/drawing/2014/main" id="{75E0BF78-CBB9-41E5-8E1A-CADA62CC19A1}"/>
+                <a16:creationId xmlns:a16="http://schemas.microsoft.com/office/drawing/2014/main" id="{6BC9BF1A-E14B-4C41-BBA6-E4A22A21E846}"/>
               </a:ext>
             </a:extLst>
           </p:cNvPr>
@@ -7247,7 +7247,7 @@
     </p:spTree>
     <p:extLst>
       <p:ext uri="{BB962C8B-B14F-4D97-AF65-F5344CB8AC3E}">
-        <p14:creationId xmlns:p14="http://schemas.microsoft.com/office/powerpoint/2010/main" val="153153296"/>
+        <p14:creationId xmlns:p14="http://schemas.microsoft.com/office/powerpoint/2010/main" val="396356578"/>
       </p:ext>
     </p:extLst>
   </p:cSld>
@@ -7278,7 +7278,7 @@
           <p:cNvPr id="1" name="s5-rule">
             <a:extLst xmlns:a="http://schemas.openxmlformats.org/drawingml/2006/main">
               <a:ext uri="{FF2B5EF4-FFF2-40B4-BE49-F238E27FC236}">
-                <a16:creationId xmlns:a16="http://schemas.microsoft.com/office/drawing/2014/main" id="{FED20D1B-3402-4A0B-A39F-843D19FD2E29}"/>
+                <a16:creationId xmlns:a16="http://schemas.microsoft.com/office/drawing/2014/main" id="{F9E73214-8402-4054-8CC2-1475027A989B}"/>
               </a:ext>
             </a:extLst>
           </p:cNvPr>
@@ -7311,7 +7311,7 @@
           <p:cNvPr id="2" name="s5-eyebrow">
             <a:extLst xmlns:a="http://schemas.openxmlformats.org/drawingml/2006/main">
               <a:ext uri="{FF2B5EF4-FFF2-40B4-BE49-F238E27FC236}">
-                <a16:creationId xmlns:a16="http://schemas.microsoft.com/office/drawing/2014/main" id="{A4C7CB0E-29F7-4508-A117-334751B43F97}"/>
+                <a16:creationId xmlns:a16="http://schemas.microsoft.com/office/drawing/2014/main" id="{28BC7375-0862-4329-AAC3-65994D90C78A}"/>
               </a:ext>
             </a:extLst>
           </p:cNvPr>
@@ -7369,7 +7369,7 @@
           <p:cNvPr id="3" name="s5-title">
             <a:extLst xmlns:a="http://schemas.openxmlformats.org/drawingml/2006/main">
               <a:ext uri="{FF2B5EF4-FFF2-40B4-BE49-F238E27FC236}">
-                <a16:creationId xmlns:a16="http://schemas.microsoft.com/office/drawing/2014/main" id="{7EEC9D94-6012-4DE8-BA49-24F6D01A3659}"/>
+                <a16:creationId xmlns:a16="http://schemas.microsoft.com/office/drawing/2014/main" id="{BFF16679-6663-46BF-8A8B-DE4030539D3D}"/>
               </a:ext>
             </a:extLst>
           </p:cNvPr>
@@ -7427,7 +7427,7 @@
           <p:cNvPr id="4" name="s5-footer">
             <a:extLst xmlns:a="http://schemas.openxmlformats.org/drawingml/2006/main">
               <a:ext uri="{FF2B5EF4-FFF2-40B4-BE49-F238E27FC236}">
-                <a16:creationId xmlns:a16="http://schemas.microsoft.com/office/drawing/2014/main" id="{4DB5BB30-E176-48C6-8A1B-E8DF0C898BC1}"/>
+                <a16:creationId xmlns:a16="http://schemas.microsoft.com/office/drawing/2014/main" id="{6E01D582-B782-497B-B01E-36E0B421A67E}"/>
               </a:ext>
             </a:extLst>
           </p:cNvPr>
@@ -7458,7 +7458,7 @@
           <p:cNvPr id="5" name="s5-identity">
             <a:extLst xmlns:a="http://schemas.openxmlformats.org/drawingml/2006/main">
               <a:ext uri="{FF2B5EF4-FFF2-40B4-BE49-F238E27FC236}">
-                <a16:creationId xmlns:a16="http://schemas.microsoft.com/office/drawing/2014/main" id="{98368054-04AF-49AA-9B11-0484A566733D}"/>
+                <a16:creationId xmlns:a16="http://schemas.microsoft.com/office/drawing/2014/main" id="{9ED06F3E-1997-42A9-95ED-7A1FA6EFC682}"/>
               </a:ext>
             </a:extLst>
           </p:cNvPr>
@@ -7516,7 +7516,7 @@
           <p:cNvPr id="6" name="core-no-0">
             <a:extLst xmlns:a="http://schemas.openxmlformats.org/drawingml/2006/main">
               <a:ext uri="{FF2B5EF4-FFF2-40B4-BE49-F238E27FC236}">
-                <a16:creationId xmlns:a16="http://schemas.microsoft.com/office/drawing/2014/main" id="{41BF5002-AD1E-4DE2-B7BF-BFE6AB7A468D}"/>
+                <a16:creationId xmlns:a16="http://schemas.microsoft.com/office/drawing/2014/main" id="{72455B80-0264-49F0-AE8E-5A354C653CAA}"/>
               </a:ext>
             </a:extLst>
           </p:cNvPr>
@@ -7574,7 +7574,7 @@
           <p:cNvPr id="7" name="core-label-0">
             <a:extLst xmlns:a="http://schemas.openxmlformats.org/drawingml/2006/main">
               <a:ext uri="{FF2B5EF4-FFF2-40B4-BE49-F238E27FC236}">
-                <a16:creationId xmlns:a16="http://schemas.microsoft.com/office/drawing/2014/main" id="{C2EA45A3-30A4-4F12-A5F1-FF851ACC237A}"/>
+                <a16:creationId xmlns:a16="http://schemas.microsoft.com/office/drawing/2014/main" id="{0C202B2E-2F3F-412F-BC2B-5A0A4285A94E}"/>
               </a:ext>
             </a:extLst>
           </p:cNvPr>
@@ -7632,7 +7632,7 @@
           <p:cNvPr id="8" name="core-body-0">
             <a:extLst xmlns:a="http://schemas.openxmlformats.org/drawingml/2006/main">
               <a:ext uri="{FF2B5EF4-FFF2-40B4-BE49-F238E27FC236}">
-                <a16:creationId xmlns:a16="http://schemas.microsoft.com/office/drawing/2014/main" id="{BCCD4E7C-9838-4044-8F70-8015814B93C2}"/>
+                <a16:creationId xmlns:a16="http://schemas.microsoft.com/office/drawing/2014/main" id="{6C8AA3FC-362F-4C60-838F-7AAF669F4290}"/>
               </a:ext>
             </a:extLst>
           </p:cNvPr>
@@ -7696,7 +7696,7 @@
           <p:cNvPr id="9" name="core-no-1">
             <a:extLst xmlns:a="http://schemas.openxmlformats.org/drawingml/2006/main">
               <a:ext uri="{FF2B5EF4-FFF2-40B4-BE49-F238E27FC236}">
-                <a16:creationId xmlns:a16="http://schemas.microsoft.com/office/drawing/2014/main" id="{34AC77CA-7506-456C-9F0F-0CC9F051DD5D}"/>
+                <a16:creationId xmlns:a16="http://schemas.microsoft.com/office/drawing/2014/main" id="{38B68D5C-7447-44E7-B026-36E552C00549}"/>
               </a:ext>
             </a:extLst>
           </p:cNvPr>
@@ -7754,7 +7754,7 @@
           <p:cNvPr id="10" name="core-body-1">
             <a:extLst xmlns:a="http://schemas.openxmlformats.org/drawingml/2006/main">
               <a:ext uri="{FF2B5EF4-FFF2-40B4-BE49-F238E27FC236}">
-                <a16:creationId xmlns:a16="http://schemas.microsoft.com/office/drawing/2014/main" id="{7AD34FFE-F7EA-42E5-B9DC-CD9DBF34E211}"/>
+                <a16:creationId xmlns:a16="http://schemas.microsoft.com/office/drawing/2014/main" id="{C94B76E0-A60C-4038-8613-547B77598F93}"/>
               </a:ext>
             </a:extLst>
           </p:cNvPr>
@@ -7818,7 +7818,7 @@
           <p:cNvPr id="11" name="s5-takeaway-rule">
             <a:extLst xmlns:a="http://schemas.openxmlformats.org/drawingml/2006/main">
               <a:ext uri="{FF2B5EF4-FFF2-40B4-BE49-F238E27FC236}">
-                <a16:creationId xmlns:a16="http://schemas.microsoft.com/office/drawing/2014/main" id="{9A49D4CA-9234-437D-BC78-74E2E66093A1}"/>
+                <a16:creationId xmlns:a16="http://schemas.microsoft.com/office/drawing/2014/main" id="{6B8671FF-B169-4B52-8E8D-EC105973FD9D}"/>
               </a:ext>
             </a:extLst>
           </p:cNvPr>
@@ -7851,7 +7851,7 @@
           <p:cNvPr id="12" name="s5-takeaway">
             <a:extLst xmlns:a="http://schemas.openxmlformats.org/drawingml/2006/main">
               <a:ext uri="{FF2B5EF4-FFF2-40B4-BE49-F238E27FC236}">
-                <a16:creationId xmlns:a16="http://schemas.microsoft.com/office/drawing/2014/main" id="{FCE7634F-7F7A-419B-AE1D-C1A452A9CEC9}"/>
+                <a16:creationId xmlns:a16="http://schemas.microsoft.com/office/drawing/2014/main" id="{9BF30F32-105B-4C32-B510-13391E248D53}"/>
               </a:ext>
             </a:extLst>
           </p:cNvPr>
@@ -7907,7 +7907,7 @@
     </p:spTree>
     <p:extLst>
       <p:ext uri="{BB962C8B-B14F-4D97-AF65-F5344CB8AC3E}">
-        <p14:creationId xmlns:p14="http://schemas.microsoft.com/office/powerpoint/2010/main" val="834065665"/>
+        <p14:creationId xmlns:p14="http://schemas.microsoft.com/office/powerpoint/2010/main" val="1571104148"/>
       </p:ext>
     </p:extLst>
   </p:cSld>
@@ -7938,7 +7938,7 @@
           <p:cNvPr id="1" name="s6-rule">
             <a:extLst xmlns:a="http://schemas.openxmlformats.org/drawingml/2006/main">
               <a:ext uri="{FF2B5EF4-FFF2-40B4-BE49-F238E27FC236}">
-                <a16:creationId xmlns:a16="http://schemas.microsoft.com/office/drawing/2014/main" id="{E5B5EB29-C01F-43D6-89AF-B66A407AEE91}"/>
+                <a16:creationId xmlns:a16="http://schemas.microsoft.com/office/drawing/2014/main" id="{CD71CF0C-50DE-4582-8704-D3AC1072A621}"/>
               </a:ext>
             </a:extLst>
           </p:cNvPr>
@@ -7971,7 +7971,7 @@
           <p:cNvPr id="2" name="s6-eyebrow">
             <a:extLst xmlns:a="http://schemas.openxmlformats.org/drawingml/2006/main">
               <a:ext uri="{FF2B5EF4-FFF2-40B4-BE49-F238E27FC236}">
-                <a16:creationId xmlns:a16="http://schemas.microsoft.com/office/drawing/2014/main" id="{8393FE4B-2B7F-4606-8A7D-63DA9F9BBA5D}"/>
+                <a16:creationId xmlns:a16="http://schemas.microsoft.com/office/drawing/2014/main" id="{DBA6C6C9-97B7-41E4-84E6-D1E853B30572}"/>
               </a:ext>
             </a:extLst>
           </p:cNvPr>
@@ -8029,7 +8029,7 @@
           <p:cNvPr id="3" name="s6-title">
             <a:extLst xmlns:a="http://schemas.openxmlformats.org/drawingml/2006/main">
               <a:ext uri="{FF2B5EF4-FFF2-40B4-BE49-F238E27FC236}">
-                <a16:creationId xmlns:a16="http://schemas.microsoft.com/office/drawing/2014/main" id="{A522B168-D209-4CA0-910C-3C2A2AC1DDA8}"/>
+                <a16:creationId xmlns:a16="http://schemas.microsoft.com/office/drawing/2014/main" id="{14D74BC1-9C39-40A7-B72E-86048080BD7E}"/>
               </a:ext>
             </a:extLst>
           </p:cNvPr>
@@ -8087,7 +8087,7 @@
           <p:cNvPr id="4" name="s6-footer">
             <a:extLst xmlns:a="http://schemas.openxmlformats.org/drawingml/2006/main">
               <a:ext uri="{FF2B5EF4-FFF2-40B4-BE49-F238E27FC236}">
-                <a16:creationId xmlns:a16="http://schemas.microsoft.com/office/drawing/2014/main" id="{ECFF72C8-245B-44E7-B7E6-F8D41DAF5E5B}"/>
+                <a16:creationId xmlns:a16="http://schemas.microsoft.com/office/drawing/2014/main" id="{5176F7EC-9A15-4F3A-81A5-04C01E286096}"/>
               </a:ext>
             </a:extLst>
           </p:cNvPr>
@@ -8118,7 +8118,7 @@
           <p:cNvPr id="5" name="s6-identity">
             <a:extLst xmlns:a="http://schemas.openxmlformats.org/drawingml/2006/main">
               <a:ext uri="{FF2B5EF4-FFF2-40B4-BE49-F238E27FC236}">
-                <a16:creationId xmlns:a16="http://schemas.microsoft.com/office/drawing/2014/main" id="{A8E71C4E-15EE-460D-8BA4-D53AB8560FF6}"/>
+                <a16:creationId xmlns:a16="http://schemas.microsoft.com/office/drawing/2014/main" id="{DD3D7CDA-71A3-4800-8272-9CB52F02A792}"/>
               </a:ext>
             </a:extLst>
           </p:cNvPr>
@@ -8176,7 +8176,7 @@
           <p:cNvPr id="6" name="core-no-0">
             <a:extLst xmlns:a="http://schemas.openxmlformats.org/drawingml/2006/main">
               <a:ext uri="{FF2B5EF4-FFF2-40B4-BE49-F238E27FC236}">
-                <a16:creationId xmlns:a16="http://schemas.microsoft.com/office/drawing/2014/main" id="{F4FA9F78-8009-48B2-89C7-2B0DCF62F48F}"/>
+                <a16:creationId xmlns:a16="http://schemas.microsoft.com/office/drawing/2014/main" id="{9FBD06F6-89EE-42BB-ACC1-1EEC96E9BB14}"/>
               </a:ext>
             </a:extLst>
           </p:cNvPr>
@@ -8234,7 +8234,7 @@
           <p:cNvPr id="7" name="core-label-0">
             <a:extLst xmlns:a="http://schemas.openxmlformats.org/drawingml/2006/main">
               <a:ext uri="{FF2B5EF4-FFF2-40B4-BE49-F238E27FC236}">
-                <a16:creationId xmlns:a16="http://schemas.microsoft.com/office/drawing/2014/main" id="{F9A30B20-9866-479B-AA72-A112FEB1077B}"/>
+                <a16:creationId xmlns:a16="http://schemas.microsoft.com/office/drawing/2014/main" id="{EC32363B-424E-48F3-9F23-57050F404CD5}"/>
               </a:ext>
             </a:extLst>
           </p:cNvPr>
@@ -8292,7 +8292,7 @@
           <p:cNvPr id="8" name="core-body-0">
             <a:extLst xmlns:a="http://schemas.openxmlformats.org/drawingml/2006/main">
               <a:ext uri="{FF2B5EF4-FFF2-40B4-BE49-F238E27FC236}">
-                <a16:creationId xmlns:a16="http://schemas.microsoft.com/office/drawing/2014/main" id="{455A8D0B-E809-4464-BD1E-43161BA25904}"/>
+                <a16:creationId xmlns:a16="http://schemas.microsoft.com/office/drawing/2014/main" id="{71AAAA17-F1B0-4AB5-A422-69B882BD269A}"/>
               </a:ext>
             </a:extLst>
           </p:cNvPr>
@@ -8356,7 +8356,7 @@
           <p:cNvPr id="9" name="core-no-1">
             <a:extLst xmlns:a="http://schemas.openxmlformats.org/drawingml/2006/main">
               <a:ext uri="{FF2B5EF4-FFF2-40B4-BE49-F238E27FC236}">
-                <a16:creationId xmlns:a16="http://schemas.microsoft.com/office/drawing/2014/main" id="{8D3C26B5-01AC-465A-A4C8-0C3DE972B21B}"/>
+                <a16:creationId xmlns:a16="http://schemas.microsoft.com/office/drawing/2014/main" id="{402C766B-3CE0-4B8B-BB1E-7A28319A7892}"/>
               </a:ext>
             </a:extLst>
           </p:cNvPr>
@@ -8414,7 +8414,7 @@
           <p:cNvPr id="10" name="core-body-1">
             <a:extLst xmlns:a="http://schemas.openxmlformats.org/drawingml/2006/main">
               <a:ext uri="{FF2B5EF4-FFF2-40B4-BE49-F238E27FC236}">
-                <a16:creationId xmlns:a16="http://schemas.microsoft.com/office/drawing/2014/main" id="{487EEC3D-84A0-47C4-AAF0-9ED6532CB8C6}"/>
+                <a16:creationId xmlns:a16="http://schemas.microsoft.com/office/drawing/2014/main" id="{58D9C838-A46C-4FB7-BB4C-E1FC69370BAE}"/>
               </a:ext>
             </a:extLst>
           </p:cNvPr>
@@ -8478,7 +8478,7 @@
           <p:cNvPr id="11" name="core-no-2">
             <a:extLst xmlns:a="http://schemas.openxmlformats.org/drawingml/2006/main">
               <a:ext uri="{FF2B5EF4-FFF2-40B4-BE49-F238E27FC236}">
-                <a16:creationId xmlns:a16="http://schemas.microsoft.com/office/drawing/2014/main" id="{704CD798-4DDD-472D-939E-144FE84F0651}"/>
+                <a16:creationId xmlns:a16="http://schemas.microsoft.com/office/drawing/2014/main" id="{5EFCAB28-0FEE-4109-B53C-676A728381A5}"/>
               </a:ext>
             </a:extLst>
           </p:cNvPr>
@@ -8536,7 +8536,7 @@
           <p:cNvPr id="12" name="core-body-2">
             <a:extLst xmlns:a="http://schemas.openxmlformats.org/drawingml/2006/main">
               <a:ext uri="{FF2B5EF4-FFF2-40B4-BE49-F238E27FC236}">
-                <a16:creationId xmlns:a16="http://schemas.microsoft.com/office/drawing/2014/main" id="{DCB9BFF0-B5A0-48F7-98BF-1A0DEFEE183A}"/>
+                <a16:creationId xmlns:a16="http://schemas.microsoft.com/office/drawing/2014/main" id="{ABAE2308-C8F5-43B3-B64B-D2CD555DC266}"/>
               </a:ext>
             </a:extLst>
           </p:cNvPr>
@@ -8600,7 +8600,7 @@
           <p:cNvPr id="13" name="s6-takeaway-rule">
             <a:extLst xmlns:a="http://schemas.openxmlformats.org/drawingml/2006/main">
               <a:ext uri="{FF2B5EF4-FFF2-40B4-BE49-F238E27FC236}">
-                <a16:creationId xmlns:a16="http://schemas.microsoft.com/office/drawing/2014/main" id="{87A9040A-727B-401E-A66F-C2C384477075}"/>
+                <a16:creationId xmlns:a16="http://schemas.microsoft.com/office/drawing/2014/main" id="{5FCEAEAE-BF3E-4E2B-9594-109C9B923CC9}"/>
               </a:ext>
             </a:extLst>
           </p:cNvPr>
@@ -8633,7 +8633,7 @@
           <p:cNvPr id="14" name="s6-takeaway">
             <a:extLst xmlns:a="http://schemas.openxmlformats.org/drawingml/2006/main">
               <a:ext uri="{FF2B5EF4-FFF2-40B4-BE49-F238E27FC236}">
-                <a16:creationId xmlns:a16="http://schemas.microsoft.com/office/drawing/2014/main" id="{A1403538-8C4A-4F39-8C7F-46C6417E4472}"/>
+                <a16:creationId xmlns:a16="http://schemas.microsoft.com/office/drawing/2014/main" id="{55B8B5C8-E4EB-4C67-9475-4220CAE9AD63}"/>
               </a:ext>
             </a:extLst>
           </p:cNvPr>
@@ -8689,7 +8689,7 @@
     </p:spTree>
     <p:extLst>
       <p:ext uri="{BB962C8B-B14F-4D97-AF65-F5344CB8AC3E}">
-        <p14:creationId xmlns:p14="http://schemas.microsoft.com/office/powerpoint/2010/main" val="269491504"/>
+        <p14:creationId xmlns:p14="http://schemas.microsoft.com/office/powerpoint/2010/main" val="671989699"/>
       </p:ext>
     </p:extLst>
   </p:cSld>
@@ -8720,7 +8720,7 @@
           <p:cNvPr id="1" name="s7-rule">
             <a:extLst xmlns:a="http://schemas.openxmlformats.org/drawingml/2006/main">
               <a:ext uri="{FF2B5EF4-FFF2-40B4-BE49-F238E27FC236}">
-                <a16:creationId xmlns:a16="http://schemas.microsoft.com/office/drawing/2014/main" id="{90671825-1B3B-44E8-A8DF-C74E9A01E2AE}"/>
+                <a16:creationId xmlns:a16="http://schemas.microsoft.com/office/drawing/2014/main" id="{4BE05915-3375-4631-AD15-F985C84C84D4}"/>
               </a:ext>
             </a:extLst>
           </p:cNvPr>
@@ -8753,7 +8753,7 @@
           <p:cNvPr id="2" name="s7-eyebrow">
             <a:extLst xmlns:a="http://schemas.openxmlformats.org/drawingml/2006/main">
               <a:ext uri="{FF2B5EF4-FFF2-40B4-BE49-F238E27FC236}">
-                <a16:creationId xmlns:a16="http://schemas.microsoft.com/office/drawing/2014/main" id="{2DFC4BD7-DF8C-4351-9052-127F6F71FDE3}"/>
+                <a16:creationId xmlns:a16="http://schemas.microsoft.com/office/drawing/2014/main" id="{94A7C995-589C-4306-8EF0-2FA98BB549A8}"/>
               </a:ext>
             </a:extLst>
           </p:cNvPr>
@@ -8811,7 +8811,7 @@
           <p:cNvPr id="3" name="s7-title">
             <a:extLst xmlns:a="http://schemas.openxmlformats.org/drawingml/2006/main">
               <a:ext uri="{FF2B5EF4-FFF2-40B4-BE49-F238E27FC236}">
-                <a16:creationId xmlns:a16="http://schemas.microsoft.com/office/drawing/2014/main" id="{934C0F66-6B3B-494D-8187-D624C6C590E9}"/>
+                <a16:creationId xmlns:a16="http://schemas.microsoft.com/office/drawing/2014/main" id="{87AFF6A7-3E87-464E-81CE-E63DED8C5AB0}"/>
               </a:ext>
             </a:extLst>
           </p:cNvPr>
@@ -8869,7 +8869,7 @@
           <p:cNvPr id="4" name="s7-footer">
             <a:extLst xmlns:a="http://schemas.openxmlformats.org/drawingml/2006/main">
               <a:ext uri="{FF2B5EF4-FFF2-40B4-BE49-F238E27FC236}">
-                <a16:creationId xmlns:a16="http://schemas.microsoft.com/office/drawing/2014/main" id="{B43CA108-AA05-4E23-AF34-485D37E78694}"/>
+                <a16:creationId xmlns:a16="http://schemas.microsoft.com/office/drawing/2014/main" id="{D1FBCD5B-3730-43E4-A8B1-6D7FEEFA315C}"/>
               </a:ext>
             </a:extLst>
           </p:cNvPr>
@@ -8900,7 +8900,7 @@
           <p:cNvPr id="5" name="s7-identity">
             <a:extLst xmlns:a="http://schemas.openxmlformats.org/drawingml/2006/main">
               <a:ext uri="{FF2B5EF4-FFF2-40B4-BE49-F238E27FC236}">
-                <a16:creationId xmlns:a16="http://schemas.microsoft.com/office/drawing/2014/main" id="{10038C1F-4F3A-4E57-BFE0-B7199F06CF8B}"/>
+                <a16:creationId xmlns:a16="http://schemas.microsoft.com/office/drawing/2014/main" id="{FF759F65-C6C7-4DC6-9A23-CEFA01FA18FF}"/>
               </a:ext>
             </a:extLst>
           </p:cNvPr>
@@ -8958,7 +8958,7 @@
           <p:cNvPr id="6" name="core-no-0">
             <a:extLst xmlns:a="http://schemas.openxmlformats.org/drawingml/2006/main">
               <a:ext uri="{FF2B5EF4-FFF2-40B4-BE49-F238E27FC236}">
-                <a16:creationId xmlns:a16="http://schemas.microsoft.com/office/drawing/2014/main" id="{3B38B420-6D0C-4D25-B18E-6D39DB9DF9E3}"/>
+                <a16:creationId xmlns:a16="http://schemas.microsoft.com/office/drawing/2014/main" id="{114D3078-4F18-45E7-87CC-9F07C58A1829}"/>
               </a:ext>
             </a:extLst>
           </p:cNvPr>
@@ -9016,7 +9016,7 @@
           <p:cNvPr id="7" name="core-label-0">
             <a:extLst xmlns:a="http://schemas.openxmlformats.org/drawingml/2006/main">
               <a:ext uri="{FF2B5EF4-FFF2-40B4-BE49-F238E27FC236}">
-                <a16:creationId xmlns:a16="http://schemas.microsoft.com/office/drawing/2014/main" id="{5F684D92-E43C-4A32-B5AD-9E4EA95DF8AF}"/>
+                <a16:creationId xmlns:a16="http://schemas.microsoft.com/office/drawing/2014/main" id="{85103E16-C22C-417A-A887-E7D070A16B57}"/>
               </a:ext>
             </a:extLst>
           </p:cNvPr>
@@ -9074,7 +9074,7 @@
           <p:cNvPr id="8" name="core-body-0">
             <a:extLst xmlns:a="http://schemas.openxmlformats.org/drawingml/2006/main">
               <a:ext uri="{FF2B5EF4-FFF2-40B4-BE49-F238E27FC236}">
-                <a16:creationId xmlns:a16="http://schemas.microsoft.com/office/drawing/2014/main" id="{EC4C0385-CE76-494F-855B-A9807BF0CD3A}"/>
+                <a16:creationId xmlns:a16="http://schemas.microsoft.com/office/drawing/2014/main" id="{D1BC267D-A8B8-44A4-B0CC-91AA62F061D4}"/>
               </a:ext>
             </a:extLst>
           </p:cNvPr>
@@ -9138,7 +9138,7 @@
           <p:cNvPr id="9" name="core-no-1">
             <a:extLst xmlns:a="http://schemas.openxmlformats.org/drawingml/2006/main">
               <a:ext uri="{FF2B5EF4-FFF2-40B4-BE49-F238E27FC236}">
-                <a16:creationId xmlns:a16="http://schemas.microsoft.com/office/drawing/2014/main" id="{35D8ED11-2055-482F-8852-705C0C7A9DED}"/>
+                <a16:creationId xmlns:a16="http://schemas.microsoft.com/office/drawing/2014/main" id="{D6DC07FC-46B7-4B67-8287-E314F13607D5}"/>
               </a:ext>
             </a:extLst>
           </p:cNvPr>
@@ -9196,7 +9196,7 @@
           <p:cNvPr id="10" name="core-body-1">
             <a:extLst xmlns:a="http://schemas.openxmlformats.org/drawingml/2006/main">
               <a:ext uri="{FF2B5EF4-FFF2-40B4-BE49-F238E27FC236}">
-                <a16:creationId xmlns:a16="http://schemas.microsoft.com/office/drawing/2014/main" id="{15F0293E-76B7-459B-B45B-60386B966697}"/>
+                <a16:creationId xmlns:a16="http://schemas.microsoft.com/office/drawing/2014/main" id="{E87A9656-5661-456B-9375-51711347351A}"/>
               </a:ext>
             </a:extLst>
           </p:cNvPr>
@@ -9260,7 +9260,7 @@
           <p:cNvPr id="11" name="s7-takeaway-rule">
             <a:extLst xmlns:a="http://schemas.openxmlformats.org/drawingml/2006/main">
               <a:ext uri="{FF2B5EF4-FFF2-40B4-BE49-F238E27FC236}">
-                <a16:creationId xmlns:a16="http://schemas.microsoft.com/office/drawing/2014/main" id="{D6E4C9B1-2F67-40D8-B6CD-7380904DB0DA}"/>
+                <a16:creationId xmlns:a16="http://schemas.microsoft.com/office/drawing/2014/main" id="{D5E6BD24-4D8B-434D-8181-C6D552DC1245}"/>
               </a:ext>
             </a:extLst>
           </p:cNvPr>
@@ -9293,7 +9293,7 @@
           <p:cNvPr id="12" name="s7-takeaway">
             <a:extLst xmlns:a="http://schemas.openxmlformats.org/drawingml/2006/main">
               <a:ext uri="{FF2B5EF4-FFF2-40B4-BE49-F238E27FC236}">
-                <a16:creationId xmlns:a16="http://schemas.microsoft.com/office/drawing/2014/main" id="{0799985C-705D-4AB7-8C19-57513C63F969}"/>
+                <a16:creationId xmlns:a16="http://schemas.microsoft.com/office/drawing/2014/main" id="{444FB93F-062E-4417-93A0-D9665DA3DB70}"/>
               </a:ext>
             </a:extLst>
           </p:cNvPr>
@@ -9349,7 +9349,7 @@
     </p:spTree>
     <p:extLst>
       <p:ext uri="{BB962C8B-B14F-4D97-AF65-F5344CB8AC3E}">
-        <p14:creationId xmlns:p14="http://schemas.microsoft.com/office/powerpoint/2010/main" val="2100993344"/>
+        <p14:creationId xmlns:p14="http://schemas.microsoft.com/office/powerpoint/2010/main" val="1480684515"/>
       </p:ext>
     </p:extLst>
   </p:cSld>
@@ -9380,7 +9380,7 @@
           <p:cNvPr id="1" name="s8-rule">
             <a:extLst xmlns:a="http://schemas.openxmlformats.org/drawingml/2006/main">
               <a:ext uri="{FF2B5EF4-FFF2-40B4-BE49-F238E27FC236}">
-                <a16:creationId xmlns:a16="http://schemas.microsoft.com/office/drawing/2014/main" id="{675BCA9F-D33D-455E-B5B2-09F0A58B9352}"/>
+                <a16:creationId xmlns:a16="http://schemas.microsoft.com/office/drawing/2014/main" id="{C2C70282-92E3-4B0D-915B-4267442F67BF}"/>
               </a:ext>
             </a:extLst>
           </p:cNvPr>
@@ -9413,7 +9413,7 @@
           <p:cNvPr id="2" name="s8-eyebrow">
             <a:extLst xmlns:a="http://schemas.openxmlformats.org/drawingml/2006/main">
               <a:ext uri="{FF2B5EF4-FFF2-40B4-BE49-F238E27FC236}">
-                <a16:creationId xmlns:a16="http://schemas.microsoft.com/office/drawing/2014/main" id="{D2A1D671-A278-46B4-BC43-8D57CF1A1453}"/>
+                <a16:creationId xmlns:a16="http://schemas.microsoft.com/office/drawing/2014/main" id="{9AF71734-912F-4858-941C-BD12C3D46AD4}"/>
               </a:ext>
             </a:extLst>
           </p:cNvPr>
@@ -9471,7 +9471,7 @@
           <p:cNvPr id="3" name="s8-title">
             <a:extLst xmlns:a="http://schemas.openxmlformats.org/drawingml/2006/main">
               <a:ext uri="{FF2B5EF4-FFF2-40B4-BE49-F238E27FC236}">
-                <a16:creationId xmlns:a16="http://schemas.microsoft.com/office/drawing/2014/main" id="{19DA0C5C-59D7-47BD-8CC5-797A218A1714}"/>
+                <a16:creationId xmlns:a16="http://schemas.microsoft.com/office/drawing/2014/main" id="{F5BF88B3-5297-4074-AF30-63E18F4D7489}"/>
               </a:ext>
             </a:extLst>
           </p:cNvPr>
@@ -9529,7 +9529,7 @@
           <p:cNvPr id="4" name="s8-footer">
             <a:extLst xmlns:a="http://schemas.openxmlformats.org/drawingml/2006/main">
               <a:ext uri="{FF2B5EF4-FFF2-40B4-BE49-F238E27FC236}">
-                <a16:creationId xmlns:a16="http://schemas.microsoft.com/office/drawing/2014/main" id="{6295F0E7-6347-40DA-93A6-AD295B0E1C44}"/>
+                <a16:creationId xmlns:a16="http://schemas.microsoft.com/office/drawing/2014/main" id="{C72F37C3-A17C-4EA0-9719-1C4DC848DE7E}"/>
               </a:ext>
             </a:extLst>
           </p:cNvPr>
@@ -9560,7 +9560,7 @@
           <p:cNvPr id="5" name="s8-identity">
             <a:extLst xmlns:a="http://schemas.openxmlformats.org/drawingml/2006/main">
               <a:ext uri="{FF2B5EF4-FFF2-40B4-BE49-F238E27FC236}">
-                <a16:creationId xmlns:a16="http://schemas.microsoft.com/office/drawing/2014/main" id="{A8A5E544-FBCF-4929-B4F2-DE264A0B846C}"/>
+                <a16:creationId xmlns:a16="http://schemas.microsoft.com/office/drawing/2014/main" id="{A2086D1F-4022-4AEC-B5AC-62C8B5C95D05}"/>
               </a:ext>
             </a:extLst>
           </p:cNvPr>
@@ -9618,7 +9618,7 @@
           <p:cNvPr id="6" name="core-no-0">
             <a:extLst xmlns:a="http://schemas.openxmlformats.org/drawingml/2006/main">
               <a:ext uri="{FF2B5EF4-FFF2-40B4-BE49-F238E27FC236}">
-                <a16:creationId xmlns:a16="http://schemas.microsoft.com/office/drawing/2014/main" id="{5F6E70C3-B83B-4193-918D-D9F32CD02B37}"/>
+                <a16:creationId xmlns:a16="http://schemas.microsoft.com/office/drawing/2014/main" id="{75CC8D72-CDA8-428F-B78B-D0C238330CE2}"/>
               </a:ext>
             </a:extLst>
           </p:cNvPr>
@@ -9676,7 +9676,7 @@
           <p:cNvPr id="7" name="core-label-0">
             <a:extLst xmlns:a="http://schemas.openxmlformats.org/drawingml/2006/main">
               <a:ext uri="{FF2B5EF4-FFF2-40B4-BE49-F238E27FC236}">
-                <a16:creationId xmlns:a16="http://schemas.microsoft.com/office/drawing/2014/main" id="{DDE08F6E-F99B-4342-93D8-267AE81E36A5}"/>
+                <a16:creationId xmlns:a16="http://schemas.microsoft.com/office/drawing/2014/main" id="{7C7BE9D7-DAA0-4299-98E0-0966AEA1B4D7}"/>
               </a:ext>
             </a:extLst>
           </p:cNvPr>
@@ -9734,7 +9734,7 @@
           <p:cNvPr id="8" name="core-body-0">
             <a:extLst xmlns:a="http://schemas.openxmlformats.org/drawingml/2006/main">
               <a:ext uri="{FF2B5EF4-FFF2-40B4-BE49-F238E27FC236}">
-                <a16:creationId xmlns:a16="http://schemas.microsoft.com/office/drawing/2014/main" id="{A5BFD1BB-0900-44AE-B581-8383B61FF494}"/>
+                <a16:creationId xmlns:a16="http://schemas.microsoft.com/office/drawing/2014/main" id="{B4F0934A-42FD-4B0C-BD81-F0663F5DC94F}"/>
               </a:ext>
             </a:extLst>
           </p:cNvPr>
@@ -9798,7 +9798,7 @@
           <p:cNvPr id="9" name="core-no-1">
             <a:extLst xmlns:a="http://schemas.openxmlformats.org/drawingml/2006/main">
               <a:ext uri="{FF2B5EF4-FFF2-40B4-BE49-F238E27FC236}">
-                <a16:creationId xmlns:a16="http://schemas.microsoft.com/office/drawing/2014/main" id="{E12E7BE8-C13F-45FF-B84B-8834E6522D24}"/>
+                <a16:creationId xmlns:a16="http://schemas.microsoft.com/office/drawing/2014/main" id="{A645DA0F-9C7A-4617-8C1A-0D269FFD979E}"/>
               </a:ext>
             </a:extLst>
           </p:cNvPr>
@@ -9856,7 +9856,7 @@
           <p:cNvPr id="10" name="core-body-1">
             <a:extLst xmlns:a="http://schemas.openxmlformats.org/drawingml/2006/main">
               <a:ext uri="{FF2B5EF4-FFF2-40B4-BE49-F238E27FC236}">
-                <a16:creationId xmlns:a16="http://schemas.microsoft.com/office/drawing/2014/main" id="{C605E277-D6A5-4297-8D9E-5297798F8F24}"/>
+                <a16:creationId xmlns:a16="http://schemas.microsoft.com/office/drawing/2014/main" id="{8F93F25B-F69F-43BC-9B9A-189A225DF911}"/>
               </a:ext>
             </a:extLst>
           </p:cNvPr>
@@ -9920,7 +9920,7 @@
           <p:cNvPr id="11" name="s8-takeaway-rule">
             <a:extLst xmlns:a="http://schemas.openxmlformats.org/drawingml/2006/main">
               <a:ext uri="{FF2B5EF4-FFF2-40B4-BE49-F238E27FC236}">
-                <a16:creationId xmlns:a16="http://schemas.microsoft.com/office/drawing/2014/main" id="{0EB24D0B-7AC6-4C16-9AF5-340A46796FDF}"/>
+                <a16:creationId xmlns:a16="http://schemas.microsoft.com/office/drawing/2014/main" id="{1AA50D6D-EB4F-448A-8B5B-E91BBE041629}"/>
               </a:ext>
             </a:extLst>
           </p:cNvPr>
@@ -9953,7 +9953,7 @@
           <p:cNvPr id="12" name="s8-takeaway">
             <a:extLst xmlns:a="http://schemas.openxmlformats.org/drawingml/2006/main">
               <a:ext uri="{FF2B5EF4-FFF2-40B4-BE49-F238E27FC236}">
-                <a16:creationId xmlns:a16="http://schemas.microsoft.com/office/drawing/2014/main" id="{E8546499-279E-4BEA-9D0D-3BFFAB067213}"/>
+                <a16:creationId xmlns:a16="http://schemas.microsoft.com/office/drawing/2014/main" id="{2B82AD37-CFC4-4B53-A555-0A9E6E35236C}"/>
               </a:ext>
             </a:extLst>
           </p:cNvPr>
@@ -10009,7 +10009,7 @@
     </p:spTree>
     <p:extLst>
       <p:ext uri="{BB962C8B-B14F-4D97-AF65-F5344CB8AC3E}">
-        <p14:creationId xmlns:p14="http://schemas.microsoft.com/office/powerpoint/2010/main" val="219001023"/>
+        <p14:creationId xmlns:p14="http://schemas.microsoft.com/office/powerpoint/2010/main" val="771403267"/>
       </p:ext>
     </p:extLst>
   </p:cSld>
@@ -10040,7 +10040,7 @@
           <p:cNvPr id="1" name="s9-rule">
             <a:extLst xmlns:a="http://schemas.openxmlformats.org/drawingml/2006/main">
               <a:ext uri="{FF2B5EF4-FFF2-40B4-BE49-F238E27FC236}">
-                <a16:creationId xmlns:a16="http://schemas.microsoft.com/office/drawing/2014/main" id="{C8D3B56C-5F41-4771-A6C8-A524C776509B}"/>
+                <a16:creationId xmlns:a16="http://schemas.microsoft.com/office/drawing/2014/main" id="{286E9A32-E34D-43D1-BB61-9843AB92854D}"/>
               </a:ext>
             </a:extLst>
           </p:cNvPr>
@@ -10073,7 +10073,7 @@
           <p:cNvPr id="2" name="s9-eyebrow">
             <a:extLst xmlns:a="http://schemas.openxmlformats.org/drawingml/2006/main">
               <a:ext uri="{FF2B5EF4-FFF2-40B4-BE49-F238E27FC236}">
-                <a16:creationId xmlns:a16="http://schemas.microsoft.com/office/drawing/2014/main" id="{266A7DF2-43D3-4C49-836B-FBD579BE51EA}"/>
+                <a16:creationId xmlns:a16="http://schemas.microsoft.com/office/drawing/2014/main" id="{CC62CDDE-EBFF-47B5-B236-2DDA05D89EF5}"/>
               </a:ext>
             </a:extLst>
           </p:cNvPr>
@@ -10131,7 +10131,7 @@
           <p:cNvPr id="3" name="s9-title">
             <a:extLst xmlns:a="http://schemas.openxmlformats.org/drawingml/2006/main">
               <a:ext uri="{FF2B5EF4-FFF2-40B4-BE49-F238E27FC236}">
-                <a16:creationId xmlns:a16="http://schemas.microsoft.com/office/drawing/2014/main" id="{D5D25E83-92F3-4116-89F0-4CA6364E468A}"/>
+                <a16:creationId xmlns:a16="http://schemas.microsoft.com/office/drawing/2014/main" id="{5A7D3373-4473-42AA-9D63-068ED17B5B4B}"/>
               </a:ext>
             </a:extLst>
           </p:cNvPr>
@@ -10189,7 +10189,7 @@
           <p:cNvPr id="4" name="s9-footer">
             <a:extLst xmlns:a="http://schemas.openxmlformats.org/drawingml/2006/main">
               <a:ext uri="{FF2B5EF4-FFF2-40B4-BE49-F238E27FC236}">
-                <a16:creationId xmlns:a16="http://schemas.microsoft.com/office/drawing/2014/main" id="{13466A9E-56D3-4225-80A9-050ECEC62C0B}"/>
+                <a16:creationId xmlns:a16="http://schemas.microsoft.com/office/drawing/2014/main" id="{66E88984-B50A-4A6F-BA4A-BDDE8550156E}"/>
               </a:ext>
             </a:extLst>
           </p:cNvPr>
@@ -10220,7 +10220,7 @@
           <p:cNvPr id="5" name="s9-identity">
             <a:extLst xmlns:a="http://schemas.openxmlformats.org/drawingml/2006/main">
               <a:ext uri="{FF2B5EF4-FFF2-40B4-BE49-F238E27FC236}">
-                <a16:creationId xmlns:a16="http://schemas.microsoft.com/office/drawing/2014/main" id="{D651683F-B7D9-4A75-A6E8-821AA3BBD173}"/>
+                <a16:creationId xmlns:a16="http://schemas.microsoft.com/office/drawing/2014/main" id="{317398D1-0DCC-499C-842E-65D2EA856DB4}"/>
               </a:ext>
             </a:extLst>
           </p:cNvPr>
@@ -10278,7 +10278,7 @@
           <p:cNvPr id="6" name="case-title">
             <a:extLst xmlns:a="http://schemas.openxmlformats.org/drawingml/2006/main">
               <a:ext uri="{FF2B5EF4-FFF2-40B4-BE49-F238E27FC236}">
-                <a16:creationId xmlns:a16="http://schemas.microsoft.com/office/drawing/2014/main" id="{09D8768B-41DD-4A00-8787-422FE197B9F4}"/>
+                <a16:creationId xmlns:a16="http://schemas.microsoft.com/office/drawing/2014/main" id="{8646BB21-D853-48BE-B032-3C92E2CD5662}"/>
               </a:ext>
             </a:extLst>
           </p:cNvPr>
@@ -10342,7 +10342,7 @@
           <p:cNvPr id="7" name="case-row-0">
             <a:extLst xmlns:a="http://schemas.openxmlformats.org/drawingml/2006/main">
               <a:ext uri="{FF2B5EF4-FFF2-40B4-BE49-F238E27FC236}">
-                <a16:creationId xmlns:a16="http://schemas.microsoft.com/office/drawing/2014/main" id="{DBAA2CCE-8F68-4D67-B2AA-BD5A40FAE070}"/>
+                <a16:creationId xmlns:a16="http://schemas.microsoft.com/office/drawing/2014/main" id="{D39C4FCA-3678-4B26-9E11-556D010B6BD4}"/>
               </a:ext>
             </a:extLst>
           </p:cNvPr>
@@ -10406,7 +10406,7 @@
           <p:cNvPr id="8" name="case-row-1">
             <a:extLst xmlns:a="http://schemas.openxmlformats.org/drawingml/2006/main">
               <a:ext uri="{FF2B5EF4-FFF2-40B4-BE49-F238E27FC236}">
-                <a16:creationId xmlns:a16="http://schemas.microsoft.com/office/drawing/2014/main" id="{02BE1AEC-2C69-46C6-8EF2-567111121F0F}"/>
+                <a16:creationId xmlns:a16="http://schemas.microsoft.com/office/drawing/2014/main" id="{F5EC4DB6-1A93-4EA6-83E8-7CD4ADA5AF42}"/>
               </a:ext>
             </a:extLst>
           </p:cNvPr>
@@ -10470,7 +10470,7 @@
           <p:cNvPr id="9" name="case-row-2">
             <a:extLst xmlns:a="http://schemas.openxmlformats.org/drawingml/2006/main">
               <a:ext uri="{FF2B5EF4-FFF2-40B4-BE49-F238E27FC236}">
-                <a16:creationId xmlns:a16="http://schemas.microsoft.com/office/drawing/2014/main" id="{44366778-5EC9-479E-ACC3-88E259F4A079}"/>
+                <a16:creationId xmlns:a16="http://schemas.microsoft.com/office/drawing/2014/main" id="{37B70F8A-839E-45EE-9E5A-6F7E1726DAC1}"/>
               </a:ext>
             </a:extLst>
           </p:cNvPr>
@@ -10534,7 +10534,7 @@
           <p:cNvPr id="10" name="case-row-3">
             <a:extLst xmlns:a="http://schemas.openxmlformats.org/drawingml/2006/main">
               <a:ext uri="{FF2B5EF4-FFF2-40B4-BE49-F238E27FC236}">
-                <a16:creationId xmlns:a16="http://schemas.microsoft.com/office/drawing/2014/main" id="{616E2862-95E6-4F5C-BF06-2D9F736E0A27}"/>
+                <a16:creationId xmlns:a16="http://schemas.microsoft.com/office/drawing/2014/main" id="{4951A4FC-68F1-4B50-AB47-41EB25DF7C26}"/>
               </a:ext>
             </a:extLst>
           </p:cNvPr>
@@ -10598,7 +10598,7 @@
           <p:cNvPr id="11" name="s9-takeaway-rule">
             <a:extLst xmlns:a="http://schemas.openxmlformats.org/drawingml/2006/main">
               <a:ext uri="{FF2B5EF4-FFF2-40B4-BE49-F238E27FC236}">
-                <a16:creationId xmlns:a16="http://schemas.microsoft.com/office/drawing/2014/main" id="{042BBF61-E85C-48AA-885A-77A9E63B1EAB}"/>
+                <a16:creationId xmlns:a16="http://schemas.microsoft.com/office/drawing/2014/main" id="{12D9AC6D-FF36-459A-B9F0-A7A0A9F72BC4}"/>
               </a:ext>
             </a:extLst>
           </p:cNvPr>
@@ -10631,7 +10631,7 @@
           <p:cNvPr id="12" name="s9-takeaway">
             <a:extLst xmlns:a="http://schemas.openxmlformats.org/drawingml/2006/main">
               <a:ext uri="{FF2B5EF4-FFF2-40B4-BE49-F238E27FC236}">
-                <a16:creationId xmlns:a16="http://schemas.microsoft.com/office/drawing/2014/main" id="{D047FB29-B51A-4B5B-B408-AFC29CDEA07D}"/>
+                <a16:creationId xmlns:a16="http://schemas.microsoft.com/office/drawing/2014/main" id="{E2CAB8A0-30C4-415E-A633-4854163BBF43}"/>
               </a:ext>
             </a:extLst>
           </p:cNvPr>
@@ -10687,7 +10687,7 @@
     </p:spTree>
     <p:extLst>
       <p:ext uri="{BB962C8B-B14F-4D97-AF65-F5344CB8AC3E}">
-        <p14:creationId xmlns:p14="http://schemas.microsoft.com/office/powerpoint/2010/main" val="386075117"/>
+        <p14:creationId xmlns:p14="http://schemas.microsoft.com/office/powerpoint/2010/main" val="43925550"/>
       </p:ext>
     </p:extLst>
   </p:cSld>

--- a/docs/public/course-assets/course-pptx/in-001.pptx
+++ b/docs/public/course-assets/course-pptx/in-001.pptx
@@ -2,25 +2,25 @@
 <file path=ppt/presentation.xml><?xml version="1.0" encoding="utf-8"?>
 <p:presentation xmlns:p="http://schemas.openxmlformats.org/presentationml/2006/main">
   <p:sldMasterIdLst>
-    <p:sldMasterId xmlns:r="http://schemas.openxmlformats.org/officeDocument/2006/relationships" id="2147483648" r:id="R4725a0300b6f4560"/>
+    <p:sldMasterId xmlns:r="http://schemas.openxmlformats.org/officeDocument/2006/relationships" id="2147483648" r:id="R5dcd8e5e01534a74"/>
   </p:sldMasterIdLst>
   <p:notesMasterIdLst>
-    <p:notesMasterId xmlns:r="http://schemas.openxmlformats.org/officeDocument/2006/relationships" r:id="R51619076006a4935"/>
+    <p:notesMasterId xmlns:r="http://schemas.openxmlformats.org/officeDocument/2006/relationships" r:id="R97340e4cd61e4bd6"/>
   </p:notesMasterIdLst>
   <p:sldIdLst>
-    <p:sldId xmlns:r="http://schemas.openxmlformats.org/officeDocument/2006/relationships" id="256" r:id="Rfb3c7c263deb41de"/>
-    <p:sldId xmlns:r="http://schemas.openxmlformats.org/officeDocument/2006/relationships" id="257" r:id="R78ee469f005f48d5"/>
-    <p:sldId xmlns:r="http://schemas.openxmlformats.org/officeDocument/2006/relationships" id="258" r:id="R8020fb915a504c73"/>
-    <p:sldId xmlns:r="http://schemas.openxmlformats.org/officeDocument/2006/relationships" id="259" r:id="R1b7901a809254d22"/>
-    <p:sldId xmlns:r="http://schemas.openxmlformats.org/officeDocument/2006/relationships" id="260" r:id="R43a70e924a9c4b8b"/>
-    <p:sldId xmlns:r="http://schemas.openxmlformats.org/officeDocument/2006/relationships" id="261" r:id="R30e71be5f465402d"/>
-    <p:sldId xmlns:r="http://schemas.openxmlformats.org/officeDocument/2006/relationships" id="262" r:id="R46153c4e82c4472a"/>
-    <p:sldId xmlns:r="http://schemas.openxmlformats.org/officeDocument/2006/relationships" id="263" r:id="R7e1840b6d5f94744"/>
-    <p:sldId xmlns:r="http://schemas.openxmlformats.org/officeDocument/2006/relationships" id="264" r:id="R51c57df80dae46e2"/>
-    <p:sldId xmlns:r="http://schemas.openxmlformats.org/officeDocument/2006/relationships" id="265" r:id="Rfb58e048706b4991"/>
-    <p:sldId xmlns:r="http://schemas.openxmlformats.org/officeDocument/2006/relationships" id="266" r:id="R1985fb4e6546486b"/>
-    <p:sldId xmlns:r="http://schemas.openxmlformats.org/officeDocument/2006/relationships" id="267" r:id="R4af65c301fd54506"/>
-    <p:sldId xmlns:r="http://schemas.openxmlformats.org/officeDocument/2006/relationships" id="268" r:id="R15333b20e5af47cf"/>
+    <p:sldId xmlns:r="http://schemas.openxmlformats.org/officeDocument/2006/relationships" id="256" r:id="Re481eb0f69ea459e"/>
+    <p:sldId xmlns:r="http://schemas.openxmlformats.org/officeDocument/2006/relationships" id="257" r:id="R3564abb8327744f1"/>
+    <p:sldId xmlns:r="http://schemas.openxmlformats.org/officeDocument/2006/relationships" id="258" r:id="Rad19d6acba414450"/>
+    <p:sldId xmlns:r="http://schemas.openxmlformats.org/officeDocument/2006/relationships" id="259" r:id="R42ff3d0b31c64951"/>
+    <p:sldId xmlns:r="http://schemas.openxmlformats.org/officeDocument/2006/relationships" id="260" r:id="Rfaaed9f668f7428f"/>
+    <p:sldId xmlns:r="http://schemas.openxmlformats.org/officeDocument/2006/relationships" id="261" r:id="R0926b67315b04fdd"/>
+    <p:sldId xmlns:r="http://schemas.openxmlformats.org/officeDocument/2006/relationships" id="262" r:id="Rd8c5b901cd8a4af3"/>
+    <p:sldId xmlns:r="http://schemas.openxmlformats.org/officeDocument/2006/relationships" id="263" r:id="R0698faae0eb24dd6"/>
+    <p:sldId xmlns:r="http://schemas.openxmlformats.org/officeDocument/2006/relationships" id="264" r:id="R693d7824b27d4ed7"/>
+    <p:sldId xmlns:r="http://schemas.openxmlformats.org/officeDocument/2006/relationships" id="265" r:id="R86dafe98ed10456f"/>
+    <p:sldId xmlns:r="http://schemas.openxmlformats.org/officeDocument/2006/relationships" id="266" r:id="R3d4213ba96274c0b"/>
+    <p:sldId xmlns:r="http://schemas.openxmlformats.org/officeDocument/2006/relationships" id="267" r:id="Rc57674206fd44061"/>
+    <p:sldId xmlns:r="http://schemas.openxmlformats.org/officeDocument/2006/relationships" id="268" r:id="Rf720988848574f42"/>
   </p:sldIdLst>
   <p:sldSz cx="12192000" cy="6858000"/>
   <p:notesSz cx="6858000" cy="9144000"/>
@@ -1405,7 +1405,7 @@
   </p:cSld>
   <p:clrMap bg1="lt1" tx1="dk1" bg2="lt2" tx2="dk2" accent1="accent1" accent2="accent2" accent3="accent3" accent4="accent4" accent5="accent5" accent6="accent6" hlink="hlink" folHlink="folHlink"/>
   <p:sldLayoutIdLst>
-    <p:sldLayoutId xmlns:r="http://schemas.openxmlformats.org/officeDocument/2006/relationships" id="2147483649" r:id="R53a5ed4bdba94a57"/>
+    <p:sldLayoutId xmlns:r="http://schemas.openxmlformats.org/officeDocument/2006/relationships" id="2147483649" r:id="R196d9c077da246f1"/>
   </p:sldLayoutIdLst>
   <p:txStyles>
     <p:titleStyle>
@@ -1956,7 +1956,7 @@
           <p:cNvPr id="1" name="cover-rule">
             <a:extLst xmlns:a="http://schemas.openxmlformats.org/drawingml/2006/main">
               <a:ext uri="{FF2B5EF4-FFF2-40B4-BE49-F238E27FC236}">
-                <a16:creationId xmlns:a16="http://schemas.microsoft.com/office/drawing/2014/main" id="{B5D0F58D-9242-4364-A393-C54EA7271A59}"/>
+                <a16:creationId xmlns:a16="http://schemas.microsoft.com/office/drawing/2014/main" id="{2C3D3D0A-1404-4479-B016-95BADDFE2EE0}"/>
               </a:ext>
             </a:extLst>
           </p:cNvPr>
@@ -1989,7 +1989,7 @@
           <p:cNvPr id="2" name="cover-ring-1">
             <a:extLst xmlns:a="http://schemas.openxmlformats.org/drawingml/2006/main">
               <a:ext uri="{FF2B5EF4-FFF2-40B4-BE49-F238E27FC236}">
-                <a16:creationId xmlns:a16="http://schemas.microsoft.com/office/drawing/2014/main" id="{BB203A77-6FEE-4833-B302-699F69D0AE1D}"/>
+                <a16:creationId xmlns:a16="http://schemas.microsoft.com/office/drawing/2014/main" id="{7D0BA25A-5A97-4BD8-9CB5-3C101D27A7DC}"/>
               </a:ext>
             </a:extLst>
           </p:cNvPr>
@@ -2020,7 +2020,7 @@
           <p:cNvPr id="3" name="cover-ring-2">
             <a:extLst xmlns:a="http://schemas.openxmlformats.org/drawingml/2006/main">
               <a:ext uri="{FF2B5EF4-FFF2-40B4-BE49-F238E27FC236}">
-                <a16:creationId xmlns:a16="http://schemas.microsoft.com/office/drawing/2014/main" id="{EF202BF9-FD31-4F1F-96E7-A3F54B9E51FF}"/>
+                <a16:creationId xmlns:a16="http://schemas.microsoft.com/office/drawing/2014/main" id="{EBD14304-DDF0-440F-8A95-BC3E5D9216A9}"/>
               </a:ext>
             </a:extLst>
           </p:cNvPr>
@@ -2051,7 +2051,7 @@
           <p:cNvPr id="4" name="cover-core">
             <a:extLst xmlns:a="http://schemas.openxmlformats.org/drawingml/2006/main">
               <a:ext uri="{FF2B5EF4-FFF2-40B4-BE49-F238E27FC236}">
-                <a16:creationId xmlns:a16="http://schemas.microsoft.com/office/drawing/2014/main" id="{F6E33F58-89B6-42B0-870F-B08128A5C565}"/>
+                <a16:creationId xmlns:a16="http://schemas.microsoft.com/office/drawing/2014/main" id="{DC69BBB2-3325-4D77-ACA1-3DC559BD516E}"/>
               </a:ext>
             </a:extLst>
           </p:cNvPr>
@@ -2084,7 +2084,7 @@
           <p:cNvPr id="5" name="cover-line-1">
             <a:extLst xmlns:a="http://schemas.openxmlformats.org/drawingml/2006/main">
               <a:ext uri="{FF2B5EF4-FFF2-40B4-BE49-F238E27FC236}">
-                <a16:creationId xmlns:a16="http://schemas.microsoft.com/office/drawing/2014/main" id="{94B95438-B50E-4F5B-9741-568524801EB4}"/>
+                <a16:creationId xmlns:a16="http://schemas.microsoft.com/office/drawing/2014/main" id="{E718AC02-B76B-4A47-B968-20CBA187A4F7}"/>
               </a:ext>
             </a:extLst>
           </p:cNvPr>
@@ -2115,7 +2115,7 @@
           <p:cNvPr id="6" name="cover-line-2">
             <a:extLst xmlns:a="http://schemas.openxmlformats.org/drawingml/2006/main">
               <a:ext uri="{FF2B5EF4-FFF2-40B4-BE49-F238E27FC236}">
-                <a16:creationId xmlns:a16="http://schemas.microsoft.com/office/drawing/2014/main" id="{A35E2E2D-A7AE-48BC-8C43-24F71551FC78}"/>
+                <a16:creationId xmlns:a16="http://schemas.microsoft.com/office/drawing/2014/main" id="{08E15644-537A-4A14-B6AF-8743EFB6D8C4}"/>
               </a:ext>
             </a:extLst>
           </p:cNvPr>
@@ -2146,7 +2146,7 @@
           <p:cNvPr id="7" name="cover-eyebrow">
             <a:extLst xmlns:a="http://schemas.openxmlformats.org/drawingml/2006/main">
               <a:ext uri="{FF2B5EF4-FFF2-40B4-BE49-F238E27FC236}">
-                <a16:creationId xmlns:a16="http://schemas.microsoft.com/office/drawing/2014/main" id="{630100FE-9303-4C03-A3FC-E8576C7542B7}"/>
+                <a16:creationId xmlns:a16="http://schemas.microsoft.com/office/drawing/2014/main" id="{BB7E0B86-21C6-4B02-9070-5056981A2EA9}"/>
               </a:ext>
             </a:extLst>
           </p:cNvPr>
@@ -2204,7 +2204,7 @@
           <p:cNvPr id="8" name="cover-title">
             <a:extLst xmlns:a="http://schemas.openxmlformats.org/drawingml/2006/main">
               <a:ext uri="{FF2B5EF4-FFF2-40B4-BE49-F238E27FC236}">
-                <a16:creationId xmlns:a16="http://schemas.microsoft.com/office/drawing/2014/main" id="{7A643594-611D-4174-9F62-138FDC309C15}"/>
+                <a16:creationId xmlns:a16="http://schemas.microsoft.com/office/drawing/2014/main" id="{CD5311BD-2F76-4219-A781-BFFA4CE3E05C}"/>
               </a:ext>
             </a:extLst>
           </p:cNvPr>
@@ -2262,7 +2262,7 @@
           <p:cNvPr id="9" name="cover-subtitle">
             <a:extLst xmlns:a="http://schemas.openxmlformats.org/drawingml/2006/main">
               <a:ext uri="{FF2B5EF4-FFF2-40B4-BE49-F238E27FC236}">
-                <a16:creationId xmlns:a16="http://schemas.microsoft.com/office/drawing/2014/main" id="{40C45C7E-ECDB-4C90-B863-622584AAF985}"/>
+                <a16:creationId xmlns:a16="http://schemas.microsoft.com/office/drawing/2014/main" id="{4821FA04-31E8-4C0A-BBEE-31FD254EEC14}"/>
               </a:ext>
             </a:extLst>
           </p:cNvPr>
@@ -2324,7 +2324,7 @@
           <p:cNvPr id="10" name="cover-lead">
             <a:extLst xmlns:a="http://schemas.openxmlformats.org/drawingml/2006/main">
               <a:ext uri="{FF2B5EF4-FFF2-40B4-BE49-F238E27FC236}">
-                <a16:creationId xmlns:a16="http://schemas.microsoft.com/office/drawing/2014/main" id="{5A3F480A-2B52-4D74-BC38-80BCD6B807C6}"/>
+                <a16:creationId xmlns:a16="http://schemas.microsoft.com/office/drawing/2014/main" id="{74F7730D-56C6-494D-81F1-785FDE5F74E6}"/>
               </a:ext>
             </a:extLst>
           </p:cNvPr>
@@ -2382,7 +2382,7 @@
           <p:cNvPr id="11" name="cover-course">
             <a:extLst xmlns:a="http://schemas.openxmlformats.org/drawingml/2006/main">
               <a:ext uri="{FF2B5EF4-FFF2-40B4-BE49-F238E27FC236}">
-                <a16:creationId xmlns:a16="http://schemas.microsoft.com/office/drawing/2014/main" id="{0A2B622C-98D7-4461-A410-06968EEA106A}"/>
+                <a16:creationId xmlns:a16="http://schemas.microsoft.com/office/drawing/2014/main" id="{E87230D1-8E6B-44ED-B960-4DD7C98BD327}"/>
               </a:ext>
             </a:extLst>
           </p:cNvPr>
@@ -2440,7 +2440,7 @@
           <p:cNvPr id="12" name="cover-id">
             <a:extLst xmlns:a="http://schemas.openxmlformats.org/drawingml/2006/main">
               <a:ext uri="{FF2B5EF4-FFF2-40B4-BE49-F238E27FC236}">
-                <a16:creationId xmlns:a16="http://schemas.microsoft.com/office/drawing/2014/main" id="{A54B65DE-DF4C-4AA1-9A35-3AD11E7C786A}"/>
+                <a16:creationId xmlns:a16="http://schemas.microsoft.com/office/drawing/2014/main" id="{FC5347E0-04F1-4CD2-8882-EA2302D451DA}"/>
               </a:ext>
             </a:extLst>
           </p:cNvPr>
@@ -2496,7 +2496,7 @@
     </p:spTree>
     <p:extLst>
       <p:ext uri="{BB962C8B-B14F-4D97-AF65-F5344CB8AC3E}">
-        <p14:creationId xmlns:p14="http://schemas.microsoft.com/office/powerpoint/2010/main" val="219475078"/>
+        <p14:creationId xmlns:p14="http://schemas.microsoft.com/office/powerpoint/2010/main" val="443281123"/>
       </p:ext>
     </p:extLst>
   </p:cSld>
@@ -2527,7 +2527,7 @@
           <p:cNvPr id="1" name="s10-rule">
             <a:extLst xmlns:a="http://schemas.openxmlformats.org/drawingml/2006/main">
               <a:ext uri="{FF2B5EF4-FFF2-40B4-BE49-F238E27FC236}">
-                <a16:creationId xmlns:a16="http://schemas.microsoft.com/office/drawing/2014/main" id="{CBFEABAE-BCFA-4D44-ABCA-3C6E78C8462D}"/>
+                <a16:creationId xmlns:a16="http://schemas.microsoft.com/office/drawing/2014/main" id="{31E0A1AC-73FC-4C36-AE8B-21D1AD0321D4}"/>
               </a:ext>
             </a:extLst>
           </p:cNvPr>
@@ -2560,7 +2560,7 @@
           <p:cNvPr id="2" name="s10-eyebrow">
             <a:extLst xmlns:a="http://schemas.openxmlformats.org/drawingml/2006/main">
               <a:ext uri="{FF2B5EF4-FFF2-40B4-BE49-F238E27FC236}">
-                <a16:creationId xmlns:a16="http://schemas.microsoft.com/office/drawing/2014/main" id="{B9AA5A0B-2127-4170-9B6F-60A33BA8BAF6}"/>
+                <a16:creationId xmlns:a16="http://schemas.microsoft.com/office/drawing/2014/main" id="{B5359E42-DFFB-4EC5-AF9F-2741A189734D}"/>
               </a:ext>
             </a:extLst>
           </p:cNvPr>
@@ -2618,7 +2618,7 @@
           <p:cNvPr id="3" name="s10-title">
             <a:extLst xmlns:a="http://schemas.openxmlformats.org/drawingml/2006/main">
               <a:ext uri="{FF2B5EF4-FFF2-40B4-BE49-F238E27FC236}">
-                <a16:creationId xmlns:a16="http://schemas.microsoft.com/office/drawing/2014/main" id="{2E5B8487-5271-4C20-9414-CAFDCB1224C4}"/>
+                <a16:creationId xmlns:a16="http://schemas.microsoft.com/office/drawing/2014/main" id="{93BA95EC-DDD8-4FEF-BF3F-19C6FC8086F3}"/>
               </a:ext>
             </a:extLst>
           </p:cNvPr>
@@ -2676,7 +2676,7 @@
           <p:cNvPr id="4" name="s10-footer">
             <a:extLst xmlns:a="http://schemas.openxmlformats.org/drawingml/2006/main">
               <a:ext uri="{FF2B5EF4-FFF2-40B4-BE49-F238E27FC236}">
-                <a16:creationId xmlns:a16="http://schemas.microsoft.com/office/drawing/2014/main" id="{7CF87E4D-4DE2-4A3D-BCB9-ED114EEE8FB5}"/>
+                <a16:creationId xmlns:a16="http://schemas.microsoft.com/office/drawing/2014/main" id="{0CEA50D9-AF81-41A3-81B6-670620C62C7C}"/>
               </a:ext>
             </a:extLst>
           </p:cNvPr>
@@ -2707,7 +2707,7 @@
           <p:cNvPr id="5" name="s10-identity">
             <a:extLst xmlns:a="http://schemas.openxmlformats.org/drawingml/2006/main">
               <a:ext uri="{FF2B5EF4-FFF2-40B4-BE49-F238E27FC236}">
-                <a16:creationId xmlns:a16="http://schemas.microsoft.com/office/drawing/2014/main" id="{00701225-B506-47E3-92A3-41DBAE9E59F3}"/>
+                <a16:creationId xmlns:a16="http://schemas.microsoft.com/office/drawing/2014/main" id="{FD331E4B-DFEA-4A73-948F-0EB18B7C4913}"/>
               </a:ext>
             </a:extLst>
           </p:cNvPr>
@@ -2765,7 +2765,7 @@
           <p:cNvPr id="6" name="case-title">
             <a:extLst xmlns:a="http://schemas.openxmlformats.org/drawingml/2006/main">
               <a:ext uri="{FF2B5EF4-FFF2-40B4-BE49-F238E27FC236}">
-                <a16:creationId xmlns:a16="http://schemas.microsoft.com/office/drawing/2014/main" id="{3518D7EC-D1A9-4D59-B5FB-A7672C85C270}"/>
+                <a16:creationId xmlns:a16="http://schemas.microsoft.com/office/drawing/2014/main" id="{ECDEE008-A38F-4736-8B8D-85F5A6865790}"/>
               </a:ext>
             </a:extLst>
           </p:cNvPr>
@@ -2829,7 +2829,7 @@
           <p:cNvPr id="7" name="case-row-0">
             <a:extLst xmlns:a="http://schemas.openxmlformats.org/drawingml/2006/main">
               <a:ext uri="{FF2B5EF4-FFF2-40B4-BE49-F238E27FC236}">
-                <a16:creationId xmlns:a16="http://schemas.microsoft.com/office/drawing/2014/main" id="{7E189AF3-6005-4FB4-A2F4-F1A372C7699E}"/>
+                <a16:creationId xmlns:a16="http://schemas.microsoft.com/office/drawing/2014/main" id="{A393981B-7A48-47FB-8B5B-1CA3281E1993}"/>
               </a:ext>
             </a:extLst>
           </p:cNvPr>
@@ -2893,7 +2893,7 @@
           <p:cNvPr id="8" name="case-row-1">
             <a:extLst xmlns:a="http://schemas.openxmlformats.org/drawingml/2006/main">
               <a:ext uri="{FF2B5EF4-FFF2-40B4-BE49-F238E27FC236}">
-                <a16:creationId xmlns:a16="http://schemas.microsoft.com/office/drawing/2014/main" id="{51125A0B-88AC-48E1-BFD0-88BDED6C4F86}"/>
+                <a16:creationId xmlns:a16="http://schemas.microsoft.com/office/drawing/2014/main" id="{9467641A-1534-422B-8314-A31CD7BF2741}"/>
               </a:ext>
             </a:extLst>
           </p:cNvPr>
@@ -2957,7 +2957,7 @@
           <p:cNvPr id="9" name="case-row-2">
             <a:extLst xmlns:a="http://schemas.openxmlformats.org/drawingml/2006/main">
               <a:ext uri="{FF2B5EF4-FFF2-40B4-BE49-F238E27FC236}">
-                <a16:creationId xmlns:a16="http://schemas.microsoft.com/office/drawing/2014/main" id="{882BB2E0-3EDB-4561-8F7C-574DB59209AB}"/>
+                <a16:creationId xmlns:a16="http://schemas.microsoft.com/office/drawing/2014/main" id="{E91CFE2D-B514-4687-B78C-8159981E0524}"/>
               </a:ext>
             </a:extLst>
           </p:cNvPr>
@@ -3021,7 +3021,7 @@
           <p:cNvPr id="10" name="s10-takeaway-rule">
             <a:extLst xmlns:a="http://schemas.openxmlformats.org/drawingml/2006/main">
               <a:ext uri="{FF2B5EF4-FFF2-40B4-BE49-F238E27FC236}">
-                <a16:creationId xmlns:a16="http://schemas.microsoft.com/office/drawing/2014/main" id="{161EDA12-CDB8-421A-9BF1-FDFF438B149B}"/>
+                <a16:creationId xmlns:a16="http://schemas.microsoft.com/office/drawing/2014/main" id="{790F1211-7CD5-4E80-9426-FA6A4ED34F95}"/>
               </a:ext>
             </a:extLst>
           </p:cNvPr>
@@ -3054,7 +3054,7 @@
           <p:cNvPr id="11" name="s10-takeaway">
             <a:extLst xmlns:a="http://schemas.openxmlformats.org/drawingml/2006/main">
               <a:ext uri="{FF2B5EF4-FFF2-40B4-BE49-F238E27FC236}">
-                <a16:creationId xmlns:a16="http://schemas.microsoft.com/office/drawing/2014/main" id="{2F89B53B-283B-43FC-9AAD-E06B94697316}"/>
+                <a16:creationId xmlns:a16="http://schemas.microsoft.com/office/drawing/2014/main" id="{DC2A052A-D578-4DC3-9CB5-6880B3AA2044}"/>
               </a:ext>
             </a:extLst>
           </p:cNvPr>
@@ -3110,7 +3110,7 @@
     </p:spTree>
     <p:extLst>
       <p:ext uri="{BB962C8B-B14F-4D97-AF65-F5344CB8AC3E}">
-        <p14:creationId xmlns:p14="http://schemas.microsoft.com/office/powerpoint/2010/main" val="275780473"/>
+        <p14:creationId xmlns:p14="http://schemas.microsoft.com/office/powerpoint/2010/main" val="317693050"/>
       </p:ext>
     </p:extLst>
   </p:cSld>
@@ -3141,7 +3141,7 @@
           <p:cNvPr id="1" name="s11-rule">
             <a:extLst xmlns:a="http://schemas.openxmlformats.org/drawingml/2006/main">
               <a:ext uri="{FF2B5EF4-FFF2-40B4-BE49-F238E27FC236}">
-                <a16:creationId xmlns:a16="http://schemas.microsoft.com/office/drawing/2014/main" id="{429299F8-A823-4523-A430-07CB056B53D7}"/>
+                <a16:creationId xmlns:a16="http://schemas.microsoft.com/office/drawing/2014/main" id="{1F80B80F-C144-4E1B-8F28-944E25731BF6}"/>
               </a:ext>
             </a:extLst>
           </p:cNvPr>
@@ -3174,7 +3174,7 @@
           <p:cNvPr id="2" name="s11-eyebrow">
             <a:extLst xmlns:a="http://schemas.openxmlformats.org/drawingml/2006/main">
               <a:ext uri="{FF2B5EF4-FFF2-40B4-BE49-F238E27FC236}">
-                <a16:creationId xmlns:a16="http://schemas.microsoft.com/office/drawing/2014/main" id="{A05FB7D6-54A7-42D9-8689-C16F8965C24C}"/>
+                <a16:creationId xmlns:a16="http://schemas.microsoft.com/office/drawing/2014/main" id="{4092CC40-FCBB-4F4B-B719-008AB2C2B0CC}"/>
               </a:ext>
             </a:extLst>
           </p:cNvPr>
@@ -3232,7 +3232,7 @@
           <p:cNvPr id="3" name="s11-title">
             <a:extLst xmlns:a="http://schemas.openxmlformats.org/drawingml/2006/main">
               <a:ext uri="{FF2B5EF4-FFF2-40B4-BE49-F238E27FC236}">
-                <a16:creationId xmlns:a16="http://schemas.microsoft.com/office/drawing/2014/main" id="{4805C703-E521-4342-ADCF-4C3D46C50B42}"/>
+                <a16:creationId xmlns:a16="http://schemas.microsoft.com/office/drawing/2014/main" id="{3FD91D59-5448-479E-BED1-E9FAB2CEBB03}"/>
               </a:ext>
             </a:extLst>
           </p:cNvPr>
@@ -3290,7 +3290,7 @@
           <p:cNvPr id="4" name="s11-footer">
             <a:extLst xmlns:a="http://schemas.openxmlformats.org/drawingml/2006/main">
               <a:ext uri="{FF2B5EF4-FFF2-40B4-BE49-F238E27FC236}">
-                <a16:creationId xmlns:a16="http://schemas.microsoft.com/office/drawing/2014/main" id="{665C0A7B-E81A-48B7-917D-055267A4EB52}"/>
+                <a16:creationId xmlns:a16="http://schemas.microsoft.com/office/drawing/2014/main" id="{55998131-4061-41D0-9702-A7DC2DF3A15A}"/>
               </a:ext>
             </a:extLst>
           </p:cNvPr>
@@ -3321,7 +3321,7 @@
           <p:cNvPr id="5" name="s11-identity">
             <a:extLst xmlns:a="http://schemas.openxmlformats.org/drawingml/2006/main">
               <a:ext uri="{FF2B5EF4-FFF2-40B4-BE49-F238E27FC236}">
-                <a16:creationId xmlns:a16="http://schemas.microsoft.com/office/drawing/2014/main" id="{BED04171-49AE-46F8-A4FD-9D74404A91F1}"/>
+                <a16:creationId xmlns:a16="http://schemas.microsoft.com/office/drawing/2014/main" id="{86D9932E-1699-4554-ADD6-C36FA3E68A7B}"/>
               </a:ext>
             </a:extLst>
           </p:cNvPr>
@@ -3379,7 +3379,7 @@
           <p:cNvPr id="6" name="practice-circle-0">
             <a:extLst xmlns:a="http://schemas.openxmlformats.org/drawingml/2006/main">
               <a:ext uri="{FF2B5EF4-FFF2-40B4-BE49-F238E27FC236}">
-                <a16:creationId xmlns:a16="http://schemas.microsoft.com/office/drawing/2014/main" id="{184FBADE-E867-4268-B098-C1017A8730C4}"/>
+                <a16:creationId xmlns:a16="http://schemas.microsoft.com/office/drawing/2014/main" id="{9F368EA9-7D12-4B6A-BA6F-FC6EE11A9249}"/>
               </a:ext>
             </a:extLst>
           </p:cNvPr>
@@ -3412,7 +3412,7 @@
           <p:cNvPr id="7" name="practice-number-0">
             <a:extLst xmlns:a="http://schemas.openxmlformats.org/drawingml/2006/main">
               <a:ext uri="{FF2B5EF4-FFF2-40B4-BE49-F238E27FC236}">
-                <a16:creationId xmlns:a16="http://schemas.microsoft.com/office/drawing/2014/main" id="{0FD027C0-8A7C-4A77-96E6-93750FA9CABC}"/>
+                <a16:creationId xmlns:a16="http://schemas.microsoft.com/office/drawing/2014/main" id="{9652FAE7-FC97-49E5-913E-70E164043B6A}"/>
               </a:ext>
             </a:extLst>
           </p:cNvPr>
@@ -3470,7 +3470,7 @@
           <p:cNvPr id="8" name="practice-item-0">
             <a:extLst xmlns:a="http://schemas.openxmlformats.org/drawingml/2006/main">
               <a:ext uri="{FF2B5EF4-FFF2-40B4-BE49-F238E27FC236}">
-                <a16:creationId xmlns:a16="http://schemas.microsoft.com/office/drawing/2014/main" id="{72A99A00-E851-4622-A4F1-DB27B7726A71}"/>
+                <a16:creationId xmlns:a16="http://schemas.microsoft.com/office/drawing/2014/main" id="{DC20928A-CF72-44F9-A494-8D43BB7FBC04}"/>
               </a:ext>
             </a:extLst>
           </p:cNvPr>
@@ -3534,7 +3534,7 @@
           <p:cNvPr id="9" name="practice-connector-0">
             <a:extLst xmlns:a="http://schemas.openxmlformats.org/drawingml/2006/main">
               <a:ext uri="{FF2B5EF4-FFF2-40B4-BE49-F238E27FC236}">
-                <a16:creationId xmlns:a16="http://schemas.microsoft.com/office/drawing/2014/main" id="{1624147A-7070-4D78-945F-D2B302B2F1BB}"/>
+                <a16:creationId xmlns:a16="http://schemas.microsoft.com/office/drawing/2014/main" id="{019AF793-D7ED-48BF-9215-373AE5B7B13D}"/>
               </a:ext>
             </a:extLst>
           </p:cNvPr>
@@ -3565,7 +3565,7 @@
           <p:cNvPr id="10" name="practice-circle-1">
             <a:extLst xmlns:a="http://schemas.openxmlformats.org/drawingml/2006/main">
               <a:ext uri="{FF2B5EF4-FFF2-40B4-BE49-F238E27FC236}">
-                <a16:creationId xmlns:a16="http://schemas.microsoft.com/office/drawing/2014/main" id="{A4E6816C-E49F-45F6-B8F5-297B7BD8A2EE}"/>
+                <a16:creationId xmlns:a16="http://schemas.microsoft.com/office/drawing/2014/main" id="{2B46A9F9-5480-41CC-885A-4738815F9EA0}"/>
               </a:ext>
             </a:extLst>
           </p:cNvPr>
@@ -3598,7 +3598,7 @@
           <p:cNvPr id="11" name="practice-number-1">
             <a:extLst xmlns:a="http://schemas.openxmlformats.org/drawingml/2006/main">
               <a:ext uri="{FF2B5EF4-FFF2-40B4-BE49-F238E27FC236}">
-                <a16:creationId xmlns:a16="http://schemas.microsoft.com/office/drawing/2014/main" id="{49E2D187-81BA-4AC5-A951-A2D0CE412B78}"/>
+                <a16:creationId xmlns:a16="http://schemas.microsoft.com/office/drawing/2014/main" id="{A0DE9BC6-6DF7-4991-9AE3-597591EE5572}"/>
               </a:ext>
             </a:extLst>
           </p:cNvPr>
@@ -3656,7 +3656,7 @@
           <p:cNvPr id="12" name="practice-item-1">
             <a:extLst xmlns:a="http://schemas.openxmlformats.org/drawingml/2006/main">
               <a:ext uri="{FF2B5EF4-FFF2-40B4-BE49-F238E27FC236}">
-                <a16:creationId xmlns:a16="http://schemas.microsoft.com/office/drawing/2014/main" id="{9A162600-F56A-4860-A364-546BDBA48CE3}"/>
+                <a16:creationId xmlns:a16="http://schemas.microsoft.com/office/drawing/2014/main" id="{DEE0D199-7612-455F-959B-C4190DFF92F7}"/>
               </a:ext>
             </a:extLst>
           </p:cNvPr>
@@ -3720,7 +3720,7 @@
           <p:cNvPr id="13" name="practice-connector-1">
             <a:extLst xmlns:a="http://schemas.openxmlformats.org/drawingml/2006/main">
               <a:ext uri="{FF2B5EF4-FFF2-40B4-BE49-F238E27FC236}">
-                <a16:creationId xmlns:a16="http://schemas.microsoft.com/office/drawing/2014/main" id="{04C2541E-EA8A-46D9-9440-B7F037BFAB6A}"/>
+                <a16:creationId xmlns:a16="http://schemas.microsoft.com/office/drawing/2014/main" id="{C5CF4537-8961-4821-B6BB-C54405C4A53F}"/>
               </a:ext>
             </a:extLst>
           </p:cNvPr>
@@ -3751,7 +3751,7 @@
           <p:cNvPr id="14" name="practice-circle-2">
             <a:extLst xmlns:a="http://schemas.openxmlformats.org/drawingml/2006/main">
               <a:ext uri="{FF2B5EF4-FFF2-40B4-BE49-F238E27FC236}">
-                <a16:creationId xmlns:a16="http://schemas.microsoft.com/office/drawing/2014/main" id="{AD5B091C-1079-4A4B-9E25-497123A29E11}"/>
+                <a16:creationId xmlns:a16="http://schemas.microsoft.com/office/drawing/2014/main" id="{725AEE12-953C-491C-BA85-3311AE40F161}"/>
               </a:ext>
             </a:extLst>
           </p:cNvPr>
@@ -3784,7 +3784,7 @@
           <p:cNvPr id="15" name="practice-number-2">
             <a:extLst xmlns:a="http://schemas.openxmlformats.org/drawingml/2006/main">
               <a:ext uri="{FF2B5EF4-FFF2-40B4-BE49-F238E27FC236}">
-                <a16:creationId xmlns:a16="http://schemas.microsoft.com/office/drawing/2014/main" id="{653DBD4B-5343-4922-B952-814394F7A0A6}"/>
+                <a16:creationId xmlns:a16="http://schemas.microsoft.com/office/drawing/2014/main" id="{7FAF3877-2A2A-4A79-B785-A0A2ED34CE48}"/>
               </a:ext>
             </a:extLst>
           </p:cNvPr>
@@ -3842,7 +3842,7 @@
           <p:cNvPr id="16" name="practice-item-2">
             <a:extLst xmlns:a="http://schemas.openxmlformats.org/drawingml/2006/main">
               <a:ext uri="{FF2B5EF4-FFF2-40B4-BE49-F238E27FC236}">
-                <a16:creationId xmlns:a16="http://schemas.microsoft.com/office/drawing/2014/main" id="{B14F278D-3199-4729-9A19-D14E3ADFCE37}"/>
+                <a16:creationId xmlns:a16="http://schemas.microsoft.com/office/drawing/2014/main" id="{F9581D21-CCDC-4C49-A23F-C893A52B1F57}"/>
               </a:ext>
             </a:extLst>
           </p:cNvPr>
@@ -3904,7 +3904,7 @@
     </p:spTree>
     <p:extLst>
       <p:ext uri="{BB962C8B-B14F-4D97-AF65-F5344CB8AC3E}">
-        <p14:creationId xmlns:p14="http://schemas.microsoft.com/office/powerpoint/2010/main" val="765754431"/>
+        <p14:creationId xmlns:p14="http://schemas.microsoft.com/office/powerpoint/2010/main" val="391957067"/>
       </p:ext>
     </p:extLst>
   </p:cSld>
@@ -3935,7 +3935,7 @@
           <p:cNvPr id="1" name="s12-rule">
             <a:extLst xmlns:a="http://schemas.openxmlformats.org/drawingml/2006/main">
               <a:ext uri="{FF2B5EF4-FFF2-40B4-BE49-F238E27FC236}">
-                <a16:creationId xmlns:a16="http://schemas.microsoft.com/office/drawing/2014/main" id="{D675C232-8254-43CE-A507-B9137D0783A9}"/>
+                <a16:creationId xmlns:a16="http://schemas.microsoft.com/office/drawing/2014/main" id="{CB4DBBB3-5F74-4215-BCB9-DEA5B70D2008}"/>
               </a:ext>
             </a:extLst>
           </p:cNvPr>
@@ -3968,7 +3968,7 @@
           <p:cNvPr id="2" name="s12-eyebrow">
             <a:extLst xmlns:a="http://schemas.openxmlformats.org/drawingml/2006/main">
               <a:ext uri="{FF2B5EF4-FFF2-40B4-BE49-F238E27FC236}">
-                <a16:creationId xmlns:a16="http://schemas.microsoft.com/office/drawing/2014/main" id="{3C9CF1C3-9885-4376-858C-0DA94D561BF7}"/>
+                <a16:creationId xmlns:a16="http://schemas.microsoft.com/office/drawing/2014/main" id="{69553C8A-072E-4FC3-8F48-3E2F3406889A}"/>
               </a:ext>
             </a:extLst>
           </p:cNvPr>
@@ -4026,7 +4026,7 @@
           <p:cNvPr id="3" name="s12-title">
             <a:extLst xmlns:a="http://schemas.openxmlformats.org/drawingml/2006/main">
               <a:ext uri="{FF2B5EF4-FFF2-40B4-BE49-F238E27FC236}">
-                <a16:creationId xmlns:a16="http://schemas.microsoft.com/office/drawing/2014/main" id="{8524E424-3DD5-4741-B518-0E8EDDE8C027}"/>
+                <a16:creationId xmlns:a16="http://schemas.microsoft.com/office/drawing/2014/main" id="{CAB7677E-CDE4-4ADA-BE2E-C43320DADEA5}"/>
               </a:ext>
             </a:extLst>
           </p:cNvPr>
@@ -4084,7 +4084,7 @@
           <p:cNvPr id="4" name="s12-footer">
             <a:extLst xmlns:a="http://schemas.openxmlformats.org/drawingml/2006/main">
               <a:ext uri="{FF2B5EF4-FFF2-40B4-BE49-F238E27FC236}">
-                <a16:creationId xmlns:a16="http://schemas.microsoft.com/office/drawing/2014/main" id="{6CE7C263-A468-4FC7-A605-B81F1CB08C49}"/>
+                <a16:creationId xmlns:a16="http://schemas.microsoft.com/office/drawing/2014/main" id="{03AF3AE1-E0AF-4268-93DF-F720AA0A7076}"/>
               </a:ext>
             </a:extLst>
           </p:cNvPr>
@@ -4115,7 +4115,7 @@
           <p:cNvPr id="5" name="s12-identity">
             <a:extLst xmlns:a="http://schemas.openxmlformats.org/drawingml/2006/main">
               <a:ext uri="{FF2B5EF4-FFF2-40B4-BE49-F238E27FC236}">
-                <a16:creationId xmlns:a16="http://schemas.microsoft.com/office/drawing/2014/main" id="{FE25C6EF-A5D6-4A25-A61D-B54E193CA1D4}"/>
+                <a16:creationId xmlns:a16="http://schemas.microsoft.com/office/drawing/2014/main" id="{EE35BC6E-02E4-478F-9B65-6EFE1D43A5A2}"/>
               </a:ext>
             </a:extLst>
           </p:cNvPr>
@@ -4173,7 +4173,7 @@
           <p:cNvPr id="6" name="recap-circle-0">
             <a:extLst xmlns:a="http://schemas.openxmlformats.org/drawingml/2006/main">
               <a:ext uri="{FF2B5EF4-FFF2-40B4-BE49-F238E27FC236}">
-                <a16:creationId xmlns:a16="http://schemas.microsoft.com/office/drawing/2014/main" id="{61323F9B-CE84-4452-96D6-41AA17E0C0B2}"/>
+                <a16:creationId xmlns:a16="http://schemas.microsoft.com/office/drawing/2014/main" id="{DC5156A4-3A86-4C41-9DF2-A831326AB81D}"/>
               </a:ext>
             </a:extLst>
           </p:cNvPr>
@@ -4206,7 +4206,7 @@
           <p:cNvPr id="7" name="recap-number-0">
             <a:extLst xmlns:a="http://schemas.openxmlformats.org/drawingml/2006/main">
               <a:ext uri="{FF2B5EF4-FFF2-40B4-BE49-F238E27FC236}">
-                <a16:creationId xmlns:a16="http://schemas.microsoft.com/office/drawing/2014/main" id="{D165CA78-E405-40F7-B5CF-F2F28B93D397}"/>
+                <a16:creationId xmlns:a16="http://schemas.microsoft.com/office/drawing/2014/main" id="{6E1F215B-38DF-4F9D-A87F-DA849408F45D}"/>
               </a:ext>
             </a:extLst>
           </p:cNvPr>
@@ -4264,7 +4264,7 @@
           <p:cNvPr id="8" name="recap-item-0">
             <a:extLst xmlns:a="http://schemas.openxmlformats.org/drawingml/2006/main">
               <a:ext uri="{FF2B5EF4-FFF2-40B4-BE49-F238E27FC236}">
-                <a16:creationId xmlns:a16="http://schemas.microsoft.com/office/drawing/2014/main" id="{929DBE1B-A312-4AA2-877C-2C8A1C82DC8D}"/>
+                <a16:creationId xmlns:a16="http://schemas.microsoft.com/office/drawing/2014/main" id="{E8A364A1-787B-4E3E-97A6-CD4D468E944A}"/>
               </a:ext>
             </a:extLst>
           </p:cNvPr>
@@ -4328,7 +4328,7 @@
           <p:cNvPr id="9" name="recap-connector-0">
             <a:extLst xmlns:a="http://schemas.openxmlformats.org/drawingml/2006/main">
               <a:ext uri="{FF2B5EF4-FFF2-40B4-BE49-F238E27FC236}">
-                <a16:creationId xmlns:a16="http://schemas.microsoft.com/office/drawing/2014/main" id="{826AE7E9-7C72-4714-9A87-A76F7C30B85D}"/>
+                <a16:creationId xmlns:a16="http://schemas.microsoft.com/office/drawing/2014/main" id="{77C7B8AE-F31C-47D3-8CCA-DA74C8FABB1E}"/>
               </a:ext>
             </a:extLst>
           </p:cNvPr>
@@ -4359,7 +4359,7 @@
           <p:cNvPr id="10" name="recap-circle-1">
             <a:extLst xmlns:a="http://schemas.openxmlformats.org/drawingml/2006/main">
               <a:ext uri="{FF2B5EF4-FFF2-40B4-BE49-F238E27FC236}">
-                <a16:creationId xmlns:a16="http://schemas.microsoft.com/office/drawing/2014/main" id="{A7BAF909-DCF1-454D-92F3-98AC9A4D9B2A}"/>
+                <a16:creationId xmlns:a16="http://schemas.microsoft.com/office/drawing/2014/main" id="{478A8CE1-F3A2-4CCD-9B44-D3496D7AAFCD}"/>
               </a:ext>
             </a:extLst>
           </p:cNvPr>
@@ -4392,7 +4392,7 @@
           <p:cNvPr id="11" name="recap-number-1">
             <a:extLst xmlns:a="http://schemas.openxmlformats.org/drawingml/2006/main">
               <a:ext uri="{FF2B5EF4-FFF2-40B4-BE49-F238E27FC236}">
-                <a16:creationId xmlns:a16="http://schemas.microsoft.com/office/drawing/2014/main" id="{1B73175A-00E2-4B53-A522-7E3A401B2730}"/>
+                <a16:creationId xmlns:a16="http://schemas.microsoft.com/office/drawing/2014/main" id="{61B195A5-6A19-4D7B-9727-4C2A815C6E00}"/>
               </a:ext>
             </a:extLst>
           </p:cNvPr>
@@ -4450,7 +4450,7 @@
           <p:cNvPr id="12" name="recap-item-1">
             <a:extLst xmlns:a="http://schemas.openxmlformats.org/drawingml/2006/main">
               <a:ext uri="{FF2B5EF4-FFF2-40B4-BE49-F238E27FC236}">
-                <a16:creationId xmlns:a16="http://schemas.microsoft.com/office/drawing/2014/main" id="{6C112E41-D0D2-45C0-9CA2-BD6301962A08}"/>
+                <a16:creationId xmlns:a16="http://schemas.microsoft.com/office/drawing/2014/main" id="{2BA3840F-E397-4759-8B2E-DF322922F456}"/>
               </a:ext>
             </a:extLst>
           </p:cNvPr>
@@ -4514,7 +4514,7 @@
           <p:cNvPr id="13" name="recap-connector-1">
             <a:extLst xmlns:a="http://schemas.openxmlformats.org/drawingml/2006/main">
               <a:ext uri="{FF2B5EF4-FFF2-40B4-BE49-F238E27FC236}">
-                <a16:creationId xmlns:a16="http://schemas.microsoft.com/office/drawing/2014/main" id="{6A1AB752-64B9-4C94-B5E4-99149947C981}"/>
+                <a16:creationId xmlns:a16="http://schemas.microsoft.com/office/drawing/2014/main" id="{725E2404-CF42-41BE-B5AB-4A9EF07AFCF3}"/>
               </a:ext>
             </a:extLst>
           </p:cNvPr>
@@ -4545,7 +4545,7 @@
           <p:cNvPr id="14" name="recap-circle-2">
             <a:extLst xmlns:a="http://schemas.openxmlformats.org/drawingml/2006/main">
               <a:ext uri="{FF2B5EF4-FFF2-40B4-BE49-F238E27FC236}">
-                <a16:creationId xmlns:a16="http://schemas.microsoft.com/office/drawing/2014/main" id="{42430B7A-187F-4587-94BC-D078565921E2}"/>
+                <a16:creationId xmlns:a16="http://schemas.microsoft.com/office/drawing/2014/main" id="{4C376F07-AA7E-4057-BB65-3B5805C744C6}"/>
               </a:ext>
             </a:extLst>
           </p:cNvPr>
@@ -4578,7 +4578,7 @@
           <p:cNvPr id="15" name="recap-number-2">
             <a:extLst xmlns:a="http://schemas.openxmlformats.org/drawingml/2006/main">
               <a:ext uri="{FF2B5EF4-FFF2-40B4-BE49-F238E27FC236}">
-                <a16:creationId xmlns:a16="http://schemas.microsoft.com/office/drawing/2014/main" id="{F7977CEA-313F-46F7-AEEF-C482C1BC8461}"/>
+                <a16:creationId xmlns:a16="http://schemas.microsoft.com/office/drawing/2014/main" id="{479D6853-F11F-45A0-8587-861757833E2A}"/>
               </a:ext>
             </a:extLst>
           </p:cNvPr>
@@ -4636,7 +4636,7 @@
           <p:cNvPr id="16" name="recap-item-2">
             <a:extLst xmlns:a="http://schemas.openxmlformats.org/drawingml/2006/main">
               <a:ext uri="{FF2B5EF4-FFF2-40B4-BE49-F238E27FC236}">
-                <a16:creationId xmlns:a16="http://schemas.microsoft.com/office/drawing/2014/main" id="{0B700A3A-5202-40A0-82D1-63CE3C9FEDDA}"/>
+                <a16:creationId xmlns:a16="http://schemas.microsoft.com/office/drawing/2014/main" id="{6AA490BE-026C-46C3-BA37-DE4B674CE998}"/>
               </a:ext>
             </a:extLst>
           </p:cNvPr>
@@ -4698,7 +4698,7 @@
     </p:spTree>
     <p:extLst>
       <p:ext uri="{BB962C8B-B14F-4D97-AF65-F5344CB8AC3E}">
-        <p14:creationId xmlns:p14="http://schemas.microsoft.com/office/powerpoint/2010/main" val="963172251"/>
+        <p14:creationId xmlns:p14="http://schemas.microsoft.com/office/powerpoint/2010/main" val="84550650"/>
       </p:ext>
     </p:extLst>
   </p:cSld>
@@ -4729,7 +4729,7 @@
           <p:cNvPr id="1" name="s13-rule">
             <a:extLst xmlns:a="http://schemas.openxmlformats.org/drawingml/2006/main">
               <a:ext uri="{FF2B5EF4-FFF2-40B4-BE49-F238E27FC236}">
-                <a16:creationId xmlns:a16="http://schemas.microsoft.com/office/drawing/2014/main" id="{AF67BB23-DA12-43D2-BF4A-81E196FE4976}"/>
+                <a16:creationId xmlns:a16="http://schemas.microsoft.com/office/drawing/2014/main" id="{911890CE-9686-476B-ACE0-9C45599D64D4}"/>
               </a:ext>
             </a:extLst>
           </p:cNvPr>
@@ -4762,7 +4762,7 @@
           <p:cNvPr id="2" name="s13-eyebrow">
             <a:extLst xmlns:a="http://schemas.openxmlformats.org/drawingml/2006/main">
               <a:ext uri="{FF2B5EF4-FFF2-40B4-BE49-F238E27FC236}">
-                <a16:creationId xmlns:a16="http://schemas.microsoft.com/office/drawing/2014/main" id="{DFB5FFD9-FFA7-425A-B890-7603899FC13A}"/>
+                <a16:creationId xmlns:a16="http://schemas.microsoft.com/office/drawing/2014/main" id="{4CA6F3E7-BA92-4C37-B9FF-1E77B5BDB574}"/>
               </a:ext>
             </a:extLst>
           </p:cNvPr>
@@ -4820,7 +4820,7 @@
           <p:cNvPr id="3" name="s13-title">
             <a:extLst xmlns:a="http://schemas.openxmlformats.org/drawingml/2006/main">
               <a:ext uri="{FF2B5EF4-FFF2-40B4-BE49-F238E27FC236}">
-                <a16:creationId xmlns:a16="http://schemas.microsoft.com/office/drawing/2014/main" id="{7796777C-6679-425F-A983-87BB91452519}"/>
+                <a16:creationId xmlns:a16="http://schemas.microsoft.com/office/drawing/2014/main" id="{447B56A6-1C8E-413B-81A6-5DBCE06B1597}"/>
               </a:ext>
             </a:extLst>
           </p:cNvPr>
@@ -4878,7 +4878,7 @@
           <p:cNvPr id="4" name="s13-footer">
             <a:extLst xmlns:a="http://schemas.openxmlformats.org/drawingml/2006/main">
               <a:ext uri="{FF2B5EF4-FFF2-40B4-BE49-F238E27FC236}">
-                <a16:creationId xmlns:a16="http://schemas.microsoft.com/office/drawing/2014/main" id="{F4223251-AA29-4079-9FCD-EC7CB09AFD22}"/>
+                <a16:creationId xmlns:a16="http://schemas.microsoft.com/office/drawing/2014/main" id="{7E4FE1EF-65A8-4CD2-BF54-FEE10BCC5D24}"/>
               </a:ext>
             </a:extLst>
           </p:cNvPr>
@@ -4909,7 +4909,7 @@
           <p:cNvPr id="5" name="s13-identity">
             <a:extLst xmlns:a="http://schemas.openxmlformats.org/drawingml/2006/main">
               <a:ext uri="{FF2B5EF4-FFF2-40B4-BE49-F238E27FC236}">
-                <a16:creationId xmlns:a16="http://schemas.microsoft.com/office/drawing/2014/main" id="{1165A0F6-81B7-40BC-9CEE-5E401E2E5F84}"/>
+                <a16:creationId xmlns:a16="http://schemas.microsoft.com/office/drawing/2014/main" id="{AB88CC84-ECC6-4D04-B829-F19D3400EA43}"/>
               </a:ext>
             </a:extLst>
           </p:cNvPr>
@@ -4967,7 +4967,7 @@
           <p:cNvPr id="6" name="source-0">
             <a:extLst xmlns:a="http://schemas.openxmlformats.org/drawingml/2006/main">
               <a:ext uri="{FF2B5EF4-FFF2-40B4-BE49-F238E27FC236}">
-                <a16:creationId xmlns:a16="http://schemas.microsoft.com/office/drawing/2014/main" id="{DCF17EC7-C87B-473A-9573-EAECB61A8147}"/>
+                <a16:creationId xmlns:a16="http://schemas.microsoft.com/office/drawing/2014/main" id="{B057449D-1B73-4139-9542-EC4AD0B6895F}"/>
               </a:ext>
             </a:extLst>
           </p:cNvPr>
@@ -5031,7 +5031,7 @@
           <p:cNvPr id="7" name="source-1">
             <a:extLst xmlns:a="http://schemas.openxmlformats.org/drawingml/2006/main">
               <a:ext uri="{FF2B5EF4-FFF2-40B4-BE49-F238E27FC236}">
-                <a16:creationId xmlns:a16="http://schemas.microsoft.com/office/drawing/2014/main" id="{C6A94AF6-2FAB-468B-ADFE-73B929738E8B}"/>
+                <a16:creationId xmlns:a16="http://schemas.microsoft.com/office/drawing/2014/main" id="{B6BB8484-CF00-4E11-94CB-05F3DF13D843}"/>
               </a:ext>
             </a:extLst>
           </p:cNvPr>
@@ -5095,7 +5095,7 @@
           <p:cNvPr id="8" name="source-2">
             <a:extLst xmlns:a="http://schemas.openxmlformats.org/drawingml/2006/main">
               <a:ext uri="{FF2B5EF4-FFF2-40B4-BE49-F238E27FC236}">
-                <a16:creationId xmlns:a16="http://schemas.microsoft.com/office/drawing/2014/main" id="{8164E1E7-4E94-4519-B1CC-9360CD6F3135}"/>
+                <a16:creationId xmlns:a16="http://schemas.microsoft.com/office/drawing/2014/main" id="{7E6C728A-943E-4B43-A4E2-9553821C4BE9}"/>
               </a:ext>
             </a:extLst>
           </p:cNvPr>
@@ -5159,7 +5159,7 @@
           <p:cNvPr id="9" name="source-3">
             <a:extLst xmlns:a="http://schemas.openxmlformats.org/drawingml/2006/main">
               <a:ext uri="{FF2B5EF4-FFF2-40B4-BE49-F238E27FC236}">
-                <a16:creationId xmlns:a16="http://schemas.microsoft.com/office/drawing/2014/main" id="{A1C418C8-7AA1-45D4-A036-3E435D633F9B}"/>
+                <a16:creationId xmlns:a16="http://schemas.microsoft.com/office/drawing/2014/main" id="{99F02BE9-6CAA-44F0-B72A-688C07E86CAA}"/>
               </a:ext>
             </a:extLst>
           </p:cNvPr>
@@ -5223,7 +5223,7 @@
           <p:cNvPr id="10" name="s13-takeaway-rule">
             <a:extLst xmlns:a="http://schemas.openxmlformats.org/drawingml/2006/main">
               <a:ext uri="{FF2B5EF4-FFF2-40B4-BE49-F238E27FC236}">
-                <a16:creationId xmlns:a16="http://schemas.microsoft.com/office/drawing/2014/main" id="{11CA6C5A-780E-403E-B660-D30335E6D216}"/>
+                <a16:creationId xmlns:a16="http://schemas.microsoft.com/office/drawing/2014/main" id="{A09FB440-2E29-4197-AB63-8E6BC7BC8095}"/>
               </a:ext>
             </a:extLst>
           </p:cNvPr>
@@ -5256,7 +5256,7 @@
           <p:cNvPr id="11" name="s13-takeaway">
             <a:extLst xmlns:a="http://schemas.openxmlformats.org/drawingml/2006/main">
               <a:ext uri="{FF2B5EF4-FFF2-40B4-BE49-F238E27FC236}">
-                <a16:creationId xmlns:a16="http://schemas.microsoft.com/office/drawing/2014/main" id="{2A96E980-BDAF-4AD6-A4A9-44C4432D217B}"/>
+                <a16:creationId xmlns:a16="http://schemas.microsoft.com/office/drawing/2014/main" id="{C81AADFE-7FDB-4A16-B621-5255056D5467}"/>
               </a:ext>
             </a:extLst>
           </p:cNvPr>
@@ -5281,7 +5281,7 @@
         </p:spPr>
         <p:txBody>
           <a:bodyPr xmlns:a="http://schemas.openxmlformats.org/drawingml/2006/main" lIns="0" tIns="0" rIns="0" bIns="0" anchor="ctr">
-            <a:normAutofit fontScale="95911"/>
+            <a:normAutofit fontScale="100000"/>
           </a:bodyPr>
           <a:lstStyle xmlns:a="http://schemas.openxmlformats.org/drawingml/2006/main"/>
           <a:p xmlns:a="http://schemas.openxmlformats.org/drawingml/2006/main">
@@ -5304,7 +5304,7 @@
                 <a:ea typeface="PingFang SC"/>
                 <a:cs typeface="PingFang SC"/>
               </a:rPr>
-              <a:t>课程精编页用于讲授主线；播放器中的“原课件”模式保留团队 PowerPoint 精选页、真实图片和可播放视频。</a:t>
+              <a:t>课程正文与幻灯片共享同一知识主线，图片和视频用于帮助理解本节概念与案例。</a:t>
             </a:r>
           </a:p>
         </p:txBody>
@@ -5312,7 +5312,7 @@
     </p:spTree>
     <p:extLst>
       <p:ext uri="{BB962C8B-B14F-4D97-AF65-F5344CB8AC3E}">
-        <p14:creationId xmlns:p14="http://schemas.microsoft.com/office/powerpoint/2010/main" val="1744904006"/>
+        <p14:creationId xmlns:p14="http://schemas.microsoft.com/office/powerpoint/2010/main" val="1462523664"/>
       </p:ext>
     </p:extLst>
   </p:cSld>
@@ -5343,7 +5343,7 @@
           <p:cNvPr id="1" name="s2-rule">
             <a:extLst xmlns:a="http://schemas.openxmlformats.org/drawingml/2006/main">
               <a:ext uri="{FF2B5EF4-FFF2-40B4-BE49-F238E27FC236}">
-                <a16:creationId xmlns:a16="http://schemas.microsoft.com/office/drawing/2014/main" id="{6B16882F-C358-408B-8226-9859195B1ABF}"/>
+                <a16:creationId xmlns:a16="http://schemas.microsoft.com/office/drawing/2014/main" id="{22E56849-7E23-4321-BE88-F07747D85368}"/>
               </a:ext>
             </a:extLst>
           </p:cNvPr>
@@ -5376,7 +5376,7 @@
           <p:cNvPr id="2" name="s2-eyebrow">
             <a:extLst xmlns:a="http://schemas.openxmlformats.org/drawingml/2006/main">
               <a:ext uri="{FF2B5EF4-FFF2-40B4-BE49-F238E27FC236}">
-                <a16:creationId xmlns:a16="http://schemas.microsoft.com/office/drawing/2014/main" id="{D580A160-B1A4-49A7-BACB-C2EE29344AA4}"/>
+                <a16:creationId xmlns:a16="http://schemas.microsoft.com/office/drawing/2014/main" id="{8ECDA273-1F6F-4F8B-99C5-BDA77C40B3C2}"/>
               </a:ext>
             </a:extLst>
           </p:cNvPr>
@@ -5434,7 +5434,7 @@
           <p:cNvPr id="3" name="s2-title">
             <a:extLst xmlns:a="http://schemas.openxmlformats.org/drawingml/2006/main">
               <a:ext uri="{FF2B5EF4-FFF2-40B4-BE49-F238E27FC236}">
-                <a16:creationId xmlns:a16="http://schemas.microsoft.com/office/drawing/2014/main" id="{3EB9CFAB-6B1E-4BF0-9400-2AB9C94E2CE9}"/>
+                <a16:creationId xmlns:a16="http://schemas.microsoft.com/office/drawing/2014/main" id="{D684DE03-0186-4153-9E85-8CA5C89B39D7}"/>
               </a:ext>
             </a:extLst>
           </p:cNvPr>
@@ -5492,7 +5492,7 @@
           <p:cNvPr id="4" name="s2-footer">
             <a:extLst xmlns:a="http://schemas.openxmlformats.org/drawingml/2006/main">
               <a:ext uri="{FF2B5EF4-FFF2-40B4-BE49-F238E27FC236}">
-                <a16:creationId xmlns:a16="http://schemas.microsoft.com/office/drawing/2014/main" id="{8B5121A7-9C08-4457-86DC-9A4707DB7FDC}"/>
+                <a16:creationId xmlns:a16="http://schemas.microsoft.com/office/drawing/2014/main" id="{598EBD0D-E5EC-4C7B-8FF3-2373D3DED202}"/>
               </a:ext>
             </a:extLst>
           </p:cNvPr>
@@ -5523,7 +5523,7 @@
           <p:cNvPr id="5" name="s2-identity">
             <a:extLst xmlns:a="http://schemas.openxmlformats.org/drawingml/2006/main">
               <a:ext uri="{FF2B5EF4-FFF2-40B4-BE49-F238E27FC236}">
-                <a16:creationId xmlns:a16="http://schemas.microsoft.com/office/drawing/2014/main" id="{472DC61D-8995-4AB9-8DBC-DA710E7808BF}"/>
+                <a16:creationId xmlns:a16="http://schemas.microsoft.com/office/drawing/2014/main" id="{A0F13C6E-6C0F-4F03-8BCC-EC0099F82B5E}"/>
               </a:ext>
             </a:extLst>
           </p:cNvPr>
@@ -5581,7 +5581,7 @@
           <p:cNvPr id="6" name="objective-1">
             <a:extLst xmlns:a="http://schemas.openxmlformats.org/drawingml/2006/main">
               <a:ext uri="{FF2B5EF4-FFF2-40B4-BE49-F238E27FC236}">
-                <a16:creationId xmlns:a16="http://schemas.microsoft.com/office/drawing/2014/main" id="{C0CDF81B-7096-480E-BE8A-2DF7C364C23E}"/>
+                <a16:creationId xmlns:a16="http://schemas.microsoft.com/office/drawing/2014/main" id="{DBB688B3-1E30-4335-8AB0-35B1645CABB7}"/>
               </a:ext>
             </a:extLst>
           </p:cNvPr>
@@ -5668,7 +5668,7 @@
           <p:cNvPr id="7" name="objective-2">
             <a:extLst xmlns:a="http://schemas.openxmlformats.org/drawingml/2006/main">
               <a:ext uri="{FF2B5EF4-FFF2-40B4-BE49-F238E27FC236}">
-                <a16:creationId xmlns:a16="http://schemas.microsoft.com/office/drawing/2014/main" id="{4C1949B3-D613-4A00-A65C-830A21DE819F}"/>
+                <a16:creationId xmlns:a16="http://schemas.microsoft.com/office/drawing/2014/main" id="{58D09D3D-98BF-4F0C-97C5-6034CCA98C95}"/>
               </a:ext>
             </a:extLst>
           </p:cNvPr>
@@ -5755,7 +5755,7 @@
           <p:cNvPr id="8" name="objective-3">
             <a:extLst xmlns:a="http://schemas.openxmlformats.org/drawingml/2006/main">
               <a:ext uri="{FF2B5EF4-FFF2-40B4-BE49-F238E27FC236}">
-                <a16:creationId xmlns:a16="http://schemas.microsoft.com/office/drawing/2014/main" id="{4E88CF44-1296-4794-B3F8-E07AE76A60C0}"/>
+                <a16:creationId xmlns:a16="http://schemas.microsoft.com/office/drawing/2014/main" id="{BFC21C7F-0A78-459A-AE33-92CD5C396A37}"/>
               </a:ext>
             </a:extLst>
           </p:cNvPr>
@@ -5842,7 +5842,7 @@
           <p:cNvPr id="9" name="objective-4">
             <a:extLst xmlns:a="http://schemas.openxmlformats.org/drawingml/2006/main">
               <a:ext uri="{FF2B5EF4-FFF2-40B4-BE49-F238E27FC236}">
-                <a16:creationId xmlns:a16="http://schemas.microsoft.com/office/drawing/2014/main" id="{FE9349F8-F362-4B81-A62F-1E9E1550361B}"/>
+                <a16:creationId xmlns:a16="http://schemas.microsoft.com/office/drawing/2014/main" id="{354EF093-4A6A-4E1E-9F3F-F7D99947F354}"/>
               </a:ext>
             </a:extLst>
           </p:cNvPr>
@@ -5927,7 +5927,7 @@
     </p:spTree>
     <p:extLst>
       <p:ext uri="{BB962C8B-B14F-4D97-AF65-F5344CB8AC3E}">
-        <p14:creationId xmlns:p14="http://schemas.microsoft.com/office/powerpoint/2010/main" val="2017602814"/>
+        <p14:creationId xmlns:p14="http://schemas.microsoft.com/office/powerpoint/2010/main" val="497006143"/>
       </p:ext>
     </p:extLst>
   </p:cSld>
@@ -5958,7 +5958,7 @@
           <p:cNvPr id="1" name="s3-rule">
             <a:extLst xmlns:a="http://schemas.openxmlformats.org/drawingml/2006/main">
               <a:ext uri="{FF2B5EF4-FFF2-40B4-BE49-F238E27FC236}">
-                <a16:creationId xmlns:a16="http://schemas.microsoft.com/office/drawing/2014/main" id="{90B24289-E430-4FB5-AEAF-F25F86F28CDC}"/>
+                <a16:creationId xmlns:a16="http://schemas.microsoft.com/office/drawing/2014/main" id="{CCB4E1C9-3251-4E61-AECB-BC6671F64374}"/>
               </a:ext>
             </a:extLst>
           </p:cNvPr>
@@ -5991,7 +5991,7 @@
           <p:cNvPr id="2" name="s3-eyebrow">
             <a:extLst xmlns:a="http://schemas.openxmlformats.org/drawingml/2006/main">
               <a:ext uri="{FF2B5EF4-FFF2-40B4-BE49-F238E27FC236}">
-                <a16:creationId xmlns:a16="http://schemas.microsoft.com/office/drawing/2014/main" id="{FC3301E1-C4E9-44C9-BEED-E455DFEB357C}"/>
+                <a16:creationId xmlns:a16="http://schemas.microsoft.com/office/drawing/2014/main" id="{43D7B545-7B80-47CD-9254-76EB571B18FE}"/>
               </a:ext>
             </a:extLst>
           </p:cNvPr>
@@ -6049,7 +6049,7 @@
           <p:cNvPr id="3" name="s3-title">
             <a:extLst xmlns:a="http://schemas.openxmlformats.org/drawingml/2006/main">
               <a:ext uri="{FF2B5EF4-FFF2-40B4-BE49-F238E27FC236}">
-                <a16:creationId xmlns:a16="http://schemas.microsoft.com/office/drawing/2014/main" id="{E13A8ADA-AB97-4732-A22D-5D67D765F43C}"/>
+                <a16:creationId xmlns:a16="http://schemas.microsoft.com/office/drawing/2014/main" id="{90270253-7443-40A7-80AB-F0C1D645AA15}"/>
               </a:ext>
             </a:extLst>
           </p:cNvPr>
@@ -6107,7 +6107,7 @@
           <p:cNvPr id="4" name="s3-footer">
             <a:extLst xmlns:a="http://schemas.openxmlformats.org/drawingml/2006/main">
               <a:ext uri="{FF2B5EF4-FFF2-40B4-BE49-F238E27FC236}">
-                <a16:creationId xmlns:a16="http://schemas.microsoft.com/office/drawing/2014/main" id="{13CCECB4-D371-4F00-B38E-827708257820}"/>
+                <a16:creationId xmlns:a16="http://schemas.microsoft.com/office/drawing/2014/main" id="{9FC5F8C5-D5DC-459B-B0E4-86E45A0C48D8}"/>
               </a:ext>
             </a:extLst>
           </p:cNvPr>
@@ -6138,7 +6138,7 @@
           <p:cNvPr id="5" name="s3-identity">
             <a:extLst xmlns:a="http://schemas.openxmlformats.org/drawingml/2006/main">
               <a:ext uri="{FF2B5EF4-FFF2-40B4-BE49-F238E27FC236}">
-                <a16:creationId xmlns:a16="http://schemas.microsoft.com/office/drawing/2014/main" id="{D724BDD6-AE1B-4F6A-9862-6EFBF3C8846D}"/>
+                <a16:creationId xmlns:a16="http://schemas.microsoft.com/office/drawing/2014/main" id="{2661EAF7-FD78-4901-8D3C-E40C9D23846C}"/>
               </a:ext>
             </a:extLst>
           </p:cNvPr>
@@ -6196,7 +6196,7 @@
           <p:cNvPr id="6" name="core-no-0">
             <a:extLst xmlns:a="http://schemas.openxmlformats.org/drawingml/2006/main">
               <a:ext uri="{FF2B5EF4-FFF2-40B4-BE49-F238E27FC236}">
-                <a16:creationId xmlns:a16="http://schemas.microsoft.com/office/drawing/2014/main" id="{EDC9F6C7-8EB1-4D54-84E3-9F7066A48EFE}"/>
+                <a16:creationId xmlns:a16="http://schemas.microsoft.com/office/drawing/2014/main" id="{7A65E730-BA34-4EC1-A0D6-EFE7D9DF606E}"/>
               </a:ext>
             </a:extLst>
           </p:cNvPr>
@@ -6254,7 +6254,7 @@
           <p:cNvPr id="7" name="core-label-0">
             <a:extLst xmlns:a="http://schemas.openxmlformats.org/drawingml/2006/main">
               <a:ext uri="{FF2B5EF4-FFF2-40B4-BE49-F238E27FC236}">
-                <a16:creationId xmlns:a16="http://schemas.microsoft.com/office/drawing/2014/main" id="{EFB63ECA-FA16-4996-ADF8-D461284F7857}"/>
+                <a16:creationId xmlns:a16="http://schemas.microsoft.com/office/drawing/2014/main" id="{9DCC6438-5D4F-44E6-84A5-DEBE202DB702}"/>
               </a:ext>
             </a:extLst>
           </p:cNvPr>
@@ -6312,7 +6312,7 @@
           <p:cNvPr id="8" name="core-body-0">
             <a:extLst xmlns:a="http://schemas.openxmlformats.org/drawingml/2006/main">
               <a:ext uri="{FF2B5EF4-FFF2-40B4-BE49-F238E27FC236}">
-                <a16:creationId xmlns:a16="http://schemas.microsoft.com/office/drawing/2014/main" id="{940BEDFC-BD84-4B84-A956-F0B873EBD9DD}"/>
+                <a16:creationId xmlns:a16="http://schemas.microsoft.com/office/drawing/2014/main" id="{C09B19E7-CF9C-4A54-8B6A-7B7771879CD6}"/>
               </a:ext>
             </a:extLst>
           </p:cNvPr>
@@ -6376,7 +6376,7 @@
           <p:cNvPr id="9" name="core-no-1">
             <a:extLst xmlns:a="http://schemas.openxmlformats.org/drawingml/2006/main">
               <a:ext uri="{FF2B5EF4-FFF2-40B4-BE49-F238E27FC236}">
-                <a16:creationId xmlns:a16="http://schemas.microsoft.com/office/drawing/2014/main" id="{6EA0967F-59AA-402C-897B-A00EA665B3E4}"/>
+                <a16:creationId xmlns:a16="http://schemas.microsoft.com/office/drawing/2014/main" id="{4DC670F9-17AD-40E2-AD02-58D390EFB045}"/>
               </a:ext>
             </a:extLst>
           </p:cNvPr>
@@ -6434,7 +6434,7 @@
           <p:cNvPr id="10" name="core-body-1">
             <a:extLst xmlns:a="http://schemas.openxmlformats.org/drawingml/2006/main">
               <a:ext uri="{FF2B5EF4-FFF2-40B4-BE49-F238E27FC236}">
-                <a16:creationId xmlns:a16="http://schemas.microsoft.com/office/drawing/2014/main" id="{40A9650E-63EE-4D7B-9865-CE03499787C1}"/>
+                <a16:creationId xmlns:a16="http://schemas.microsoft.com/office/drawing/2014/main" id="{435AB3FF-2450-40E8-B99C-87349A769303}"/>
               </a:ext>
             </a:extLst>
           </p:cNvPr>
@@ -6498,7 +6498,7 @@
           <p:cNvPr id="11" name="s3-takeaway-rule">
             <a:extLst xmlns:a="http://schemas.openxmlformats.org/drawingml/2006/main">
               <a:ext uri="{FF2B5EF4-FFF2-40B4-BE49-F238E27FC236}">
-                <a16:creationId xmlns:a16="http://schemas.microsoft.com/office/drawing/2014/main" id="{37CCF5BA-B83B-4F4F-BEEC-D68F938F3029}"/>
+                <a16:creationId xmlns:a16="http://schemas.microsoft.com/office/drawing/2014/main" id="{E383DBCA-FA54-4704-9796-A32A2C0DE1FF}"/>
               </a:ext>
             </a:extLst>
           </p:cNvPr>
@@ -6531,7 +6531,7 @@
           <p:cNvPr id="12" name="s3-takeaway">
             <a:extLst xmlns:a="http://schemas.openxmlformats.org/drawingml/2006/main">
               <a:ext uri="{FF2B5EF4-FFF2-40B4-BE49-F238E27FC236}">
-                <a16:creationId xmlns:a16="http://schemas.microsoft.com/office/drawing/2014/main" id="{AA0C8CF9-E8EB-4CD2-8341-5A8938DF2574}"/>
+                <a16:creationId xmlns:a16="http://schemas.microsoft.com/office/drawing/2014/main" id="{EB0BAAD1-50D4-4947-A151-FF6A0D9008E8}"/>
               </a:ext>
             </a:extLst>
           </p:cNvPr>
@@ -6587,7 +6587,7 @@
     </p:spTree>
     <p:extLst>
       <p:ext uri="{BB962C8B-B14F-4D97-AF65-F5344CB8AC3E}">
-        <p14:creationId xmlns:p14="http://schemas.microsoft.com/office/powerpoint/2010/main" val="2118102044"/>
+        <p14:creationId xmlns:p14="http://schemas.microsoft.com/office/powerpoint/2010/main" val="630147890"/>
       </p:ext>
     </p:extLst>
   </p:cSld>
@@ -6618,7 +6618,7 @@
           <p:cNvPr id="1" name="s4-rule">
             <a:extLst xmlns:a="http://schemas.openxmlformats.org/drawingml/2006/main">
               <a:ext uri="{FF2B5EF4-FFF2-40B4-BE49-F238E27FC236}">
-                <a16:creationId xmlns:a16="http://schemas.microsoft.com/office/drawing/2014/main" id="{CE5A875E-3407-4D4D-8986-9C429089760C}"/>
+                <a16:creationId xmlns:a16="http://schemas.microsoft.com/office/drawing/2014/main" id="{5B100842-385E-40F5-A9EF-4B1E78FE6CC5}"/>
               </a:ext>
             </a:extLst>
           </p:cNvPr>
@@ -6651,7 +6651,7 @@
           <p:cNvPr id="2" name="s4-eyebrow">
             <a:extLst xmlns:a="http://schemas.openxmlformats.org/drawingml/2006/main">
               <a:ext uri="{FF2B5EF4-FFF2-40B4-BE49-F238E27FC236}">
-                <a16:creationId xmlns:a16="http://schemas.microsoft.com/office/drawing/2014/main" id="{C169944D-C7E2-4FCC-835C-5B1814DCDAD5}"/>
+                <a16:creationId xmlns:a16="http://schemas.microsoft.com/office/drawing/2014/main" id="{0BEE01AD-014E-4443-930C-48F7F0CDF246}"/>
               </a:ext>
             </a:extLst>
           </p:cNvPr>
@@ -6709,7 +6709,7 @@
           <p:cNvPr id="3" name="s4-title">
             <a:extLst xmlns:a="http://schemas.openxmlformats.org/drawingml/2006/main">
               <a:ext uri="{FF2B5EF4-FFF2-40B4-BE49-F238E27FC236}">
-                <a16:creationId xmlns:a16="http://schemas.microsoft.com/office/drawing/2014/main" id="{E53B1328-0E2F-40DB-B2C4-8304B1A9E683}"/>
+                <a16:creationId xmlns:a16="http://schemas.microsoft.com/office/drawing/2014/main" id="{ABB9C975-D367-45AB-860A-3E52AB5C0AB2}"/>
               </a:ext>
             </a:extLst>
           </p:cNvPr>
@@ -6767,7 +6767,7 @@
           <p:cNvPr id="4" name="s4-footer">
             <a:extLst xmlns:a="http://schemas.openxmlformats.org/drawingml/2006/main">
               <a:ext uri="{FF2B5EF4-FFF2-40B4-BE49-F238E27FC236}">
-                <a16:creationId xmlns:a16="http://schemas.microsoft.com/office/drawing/2014/main" id="{7E323102-8641-4F40-B78D-542C4D46371A}"/>
+                <a16:creationId xmlns:a16="http://schemas.microsoft.com/office/drawing/2014/main" id="{A37B6EA2-815A-4913-9F60-31CC90953981}"/>
               </a:ext>
             </a:extLst>
           </p:cNvPr>
@@ -6798,7 +6798,7 @@
           <p:cNvPr id="5" name="s4-identity">
             <a:extLst xmlns:a="http://schemas.openxmlformats.org/drawingml/2006/main">
               <a:ext uri="{FF2B5EF4-FFF2-40B4-BE49-F238E27FC236}">
-                <a16:creationId xmlns:a16="http://schemas.microsoft.com/office/drawing/2014/main" id="{F55FAD7E-6768-4200-815D-B0AE1C4B5BA9}"/>
+                <a16:creationId xmlns:a16="http://schemas.microsoft.com/office/drawing/2014/main" id="{7D48B4E8-9F3B-49EC-9164-D38612407F02}"/>
               </a:ext>
             </a:extLst>
           </p:cNvPr>
@@ -6856,7 +6856,7 @@
           <p:cNvPr id="6" name="core-no-0">
             <a:extLst xmlns:a="http://schemas.openxmlformats.org/drawingml/2006/main">
               <a:ext uri="{FF2B5EF4-FFF2-40B4-BE49-F238E27FC236}">
-                <a16:creationId xmlns:a16="http://schemas.microsoft.com/office/drawing/2014/main" id="{36703542-DFAD-4368-BE6E-7B700E6073BA}"/>
+                <a16:creationId xmlns:a16="http://schemas.microsoft.com/office/drawing/2014/main" id="{7C48F280-E666-4836-9C49-0C5D6F9F1241}"/>
               </a:ext>
             </a:extLst>
           </p:cNvPr>
@@ -6914,7 +6914,7 @@
           <p:cNvPr id="7" name="core-label-0">
             <a:extLst xmlns:a="http://schemas.openxmlformats.org/drawingml/2006/main">
               <a:ext uri="{FF2B5EF4-FFF2-40B4-BE49-F238E27FC236}">
-                <a16:creationId xmlns:a16="http://schemas.microsoft.com/office/drawing/2014/main" id="{93F5472C-5BBB-44FB-A0D5-02A179940B87}"/>
+                <a16:creationId xmlns:a16="http://schemas.microsoft.com/office/drawing/2014/main" id="{704B1B3D-6689-47F8-8475-77E20A0F6179}"/>
               </a:ext>
             </a:extLst>
           </p:cNvPr>
@@ -6972,7 +6972,7 @@
           <p:cNvPr id="8" name="core-body-0">
             <a:extLst xmlns:a="http://schemas.openxmlformats.org/drawingml/2006/main">
               <a:ext uri="{FF2B5EF4-FFF2-40B4-BE49-F238E27FC236}">
-                <a16:creationId xmlns:a16="http://schemas.microsoft.com/office/drawing/2014/main" id="{CED3944D-EAEA-47B5-B0CD-BBAB97B1AAE7}"/>
+                <a16:creationId xmlns:a16="http://schemas.microsoft.com/office/drawing/2014/main" id="{CB7D0B28-EE0E-424B-A039-B68263B01D60}"/>
               </a:ext>
             </a:extLst>
           </p:cNvPr>
@@ -7036,7 +7036,7 @@
           <p:cNvPr id="9" name="core-no-1">
             <a:extLst xmlns:a="http://schemas.openxmlformats.org/drawingml/2006/main">
               <a:ext uri="{FF2B5EF4-FFF2-40B4-BE49-F238E27FC236}">
-                <a16:creationId xmlns:a16="http://schemas.microsoft.com/office/drawing/2014/main" id="{B81838B0-8381-4AFD-96DB-AB08A54CF828}"/>
+                <a16:creationId xmlns:a16="http://schemas.microsoft.com/office/drawing/2014/main" id="{D7CD0FC8-37A5-47F8-B926-FDBB114110E9}"/>
               </a:ext>
             </a:extLst>
           </p:cNvPr>
@@ -7094,7 +7094,7 @@
           <p:cNvPr id="10" name="core-body-1">
             <a:extLst xmlns:a="http://schemas.openxmlformats.org/drawingml/2006/main">
               <a:ext uri="{FF2B5EF4-FFF2-40B4-BE49-F238E27FC236}">
-                <a16:creationId xmlns:a16="http://schemas.microsoft.com/office/drawing/2014/main" id="{79B12B9E-BECC-455C-9012-C94939938E55}"/>
+                <a16:creationId xmlns:a16="http://schemas.microsoft.com/office/drawing/2014/main" id="{A55DED17-83DD-4EB9-BE27-192C93D6F8DC}"/>
               </a:ext>
             </a:extLst>
           </p:cNvPr>
@@ -7158,7 +7158,7 @@
           <p:cNvPr id="11" name="s4-takeaway-rule">
             <a:extLst xmlns:a="http://schemas.openxmlformats.org/drawingml/2006/main">
               <a:ext uri="{FF2B5EF4-FFF2-40B4-BE49-F238E27FC236}">
-                <a16:creationId xmlns:a16="http://schemas.microsoft.com/office/drawing/2014/main" id="{7C9A58F4-A8A1-41CD-BF45-C0335452AC81}"/>
+                <a16:creationId xmlns:a16="http://schemas.microsoft.com/office/drawing/2014/main" id="{28BE35E4-58F1-4E59-B510-3CF6895A951F}"/>
               </a:ext>
             </a:extLst>
           </p:cNvPr>
@@ -7191,7 +7191,7 @@
           <p:cNvPr id="12" name="s4-takeaway">
             <a:extLst xmlns:a="http://schemas.openxmlformats.org/drawingml/2006/main">
               <a:ext uri="{FF2B5EF4-FFF2-40B4-BE49-F238E27FC236}">
-                <a16:creationId xmlns:a16="http://schemas.microsoft.com/office/drawing/2014/main" id="{6BC9BF1A-E14B-4C41-BBA6-E4A22A21E846}"/>
+                <a16:creationId xmlns:a16="http://schemas.microsoft.com/office/drawing/2014/main" id="{ECCCBEAB-2A5B-4F4B-8808-45B7C2B88A1D}"/>
               </a:ext>
             </a:extLst>
           </p:cNvPr>
@@ -7247,7 +7247,7 @@
     </p:spTree>
     <p:extLst>
       <p:ext uri="{BB962C8B-B14F-4D97-AF65-F5344CB8AC3E}">
-        <p14:creationId xmlns:p14="http://schemas.microsoft.com/office/powerpoint/2010/main" val="396356578"/>
+        <p14:creationId xmlns:p14="http://schemas.microsoft.com/office/powerpoint/2010/main" val="1204503679"/>
       </p:ext>
     </p:extLst>
   </p:cSld>
@@ -7278,7 +7278,7 @@
           <p:cNvPr id="1" name="s5-rule">
             <a:extLst xmlns:a="http://schemas.openxmlformats.org/drawingml/2006/main">
               <a:ext uri="{FF2B5EF4-FFF2-40B4-BE49-F238E27FC236}">
-                <a16:creationId xmlns:a16="http://schemas.microsoft.com/office/drawing/2014/main" id="{F9E73214-8402-4054-8CC2-1475027A989B}"/>
+                <a16:creationId xmlns:a16="http://schemas.microsoft.com/office/drawing/2014/main" id="{3DC8C9F1-986D-4ED4-ADC2-A662847499D8}"/>
               </a:ext>
             </a:extLst>
           </p:cNvPr>
@@ -7311,7 +7311,7 @@
           <p:cNvPr id="2" name="s5-eyebrow">
             <a:extLst xmlns:a="http://schemas.openxmlformats.org/drawingml/2006/main">
               <a:ext uri="{FF2B5EF4-FFF2-40B4-BE49-F238E27FC236}">
-                <a16:creationId xmlns:a16="http://schemas.microsoft.com/office/drawing/2014/main" id="{28BC7375-0862-4329-AAC3-65994D90C78A}"/>
+                <a16:creationId xmlns:a16="http://schemas.microsoft.com/office/drawing/2014/main" id="{78478D53-C9F0-41B1-A20D-527BB8A1A8EF}"/>
               </a:ext>
             </a:extLst>
           </p:cNvPr>
@@ -7369,7 +7369,7 @@
           <p:cNvPr id="3" name="s5-title">
             <a:extLst xmlns:a="http://schemas.openxmlformats.org/drawingml/2006/main">
               <a:ext uri="{FF2B5EF4-FFF2-40B4-BE49-F238E27FC236}">
-                <a16:creationId xmlns:a16="http://schemas.microsoft.com/office/drawing/2014/main" id="{BFF16679-6663-46BF-8A8B-DE4030539D3D}"/>
+                <a16:creationId xmlns:a16="http://schemas.microsoft.com/office/drawing/2014/main" id="{4159C144-6B74-4417-B639-9D9ACC2E86E3}"/>
               </a:ext>
             </a:extLst>
           </p:cNvPr>
@@ -7427,7 +7427,7 @@
           <p:cNvPr id="4" name="s5-footer">
             <a:extLst xmlns:a="http://schemas.openxmlformats.org/drawingml/2006/main">
               <a:ext uri="{FF2B5EF4-FFF2-40B4-BE49-F238E27FC236}">
-                <a16:creationId xmlns:a16="http://schemas.microsoft.com/office/drawing/2014/main" id="{6E01D582-B782-497B-B01E-36E0B421A67E}"/>
+                <a16:creationId xmlns:a16="http://schemas.microsoft.com/office/drawing/2014/main" id="{7E59993B-C304-43D0-9AB9-60FC47D7B7F0}"/>
               </a:ext>
             </a:extLst>
           </p:cNvPr>
@@ -7458,7 +7458,7 @@
           <p:cNvPr id="5" name="s5-identity">
             <a:extLst xmlns:a="http://schemas.openxmlformats.org/drawingml/2006/main">
               <a:ext uri="{FF2B5EF4-FFF2-40B4-BE49-F238E27FC236}">
-                <a16:creationId xmlns:a16="http://schemas.microsoft.com/office/drawing/2014/main" id="{9ED06F3E-1997-42A9-95ED-7A1FA6EFC682}"/>
+                <a16:creationId xmlns:a16="http://schemas.microsoft.com/office/drawing/2014/main" id="{D24ABBC0-B7DC-47E0-99BF-37B9F304817D}"/>
               </a:ext>
             </a:extLst>
           </p:cNvPr>
@@ -7516,7 +7516,7 @@
           <p:cNvPr id="6" name="core-no-0">
             <a:extLst xmlns:a="http://schemas.openxmlformats.org/drawingml/2006/main">
               <a:ext uri="{FF2B5EF4-FFF2-40B4-BE49-F238E27FC236}">
-                <a16:creationId xmlns:a16="http://schemas.microsoft.com/office/drawing/2014/main" id="{72455B80-0264-49F0-AE8E-5A354C653CAA}"/>
+                <a16:creationId xmlns:a16="http://schemas.microsoft.com/office/drawing/2014/main" id="{E83873A1-9E58-4677-9088-5A8E5B688A9D}"/>
               </a:ext>
             </a:extLst>
           </p:cNvPr>
@@ -7574,7 +7574,7 @@
           <p:cNvPr id="7" name="core-label-0">
             <a:extLst xmlns:a="http://schemas.openxmlformats.org/drawingml/2006/main">
               <a:ext uri="{FF2B5EF4-FFF2-40B4-BE49-F238E27FC236}">
-                <a16:creationId xmlns:a16="http://schemas.microsoft.com/office/drawing/2014/main" id="{0C202B2E-2F3F-412F-BC2B-5A0A4285A94E}"/>
+                <a16:creationId xmlns:a16="http://schemas.microsoft.com/office/drawing/2014/main" id="{01999DCA-BE64-45BC-BD45-76425FCA6102}"/>
               </a:ext>
             </a:extLst>
           </p:cNvPr>
@@ -7632,7 +7632,7 @@
           <p:cNvPr id="8" name="core-body-0">
             <a:extLst xmlns:a="http://schemas.openxmlformats.org/drawingml/2006/main">
               <a:ext uri="{FF2B5EF4-FFF2-40B4-BE49-F238E27FC236}">
-                <a16:creationId xmlns:a16="http://schemas.microsoft.com/office/drawing/2014/main" id="{6C8AA3FC-362F-4C60-838F-7AAF669F4290}"/>
+                <a16:creationId xmlns:a16="http://schemas.microsoft.com/office/drawing/2014/main" id="{EA4BD6DA-9373-4477-8F7F-F2D7A24B88C1}"/>
               </a:ext>
             </a:extLst>
           </p:cNvPr>
@@ -7696,7 +7696,7 @@
           <p:cNvPr id="9" name="core-no-1">
             <a:extLst xmlns:a="http://schemas.openxmlformats.org/drawingml/2006/main">
               <a:ext uri="{FF2B5EF4-FFF2-40B4-BE49-F238E27FC236}">
-                <a16:creationId xmlns:a16="http://schemas.microsoft.com/office/drawing/2014/main" id="{38B68D5C-7447-44E7-B026-36E552C00549}"/>
+                <a16:creationId xmlns:a16="http://schemas.microsoft.com/office/drawing/2014/main" id="{28FD89A8-AD2E-4BE8-BFB4-DD225F9398BA}"/>
               </a:ext>
             </a:extLst>
           </p:cNvPr>
@@ -7754,7 +7754,7 @@
           <p:cNvPr id="10" name="core-body-1">
             <a:extLst xmlns:a="http://schemas.openxmlformats.org/drawingml/2006/main">
               <a:ext uri="{FF2B5EF4-FFF2-40B4-BE49-F238E27FC236}">
-                <a16:creationId xmlns:a16="http://schemas.microsoft.com/office/drawing/2014/main" id="{C94B76E0-A60C-4038-8613-547B77598F93}"/>
+                <a16:creationId xmlns:a16="http://schemas.microsoft.com/office/drawing/2014/main" id="{5F15F839-7115-4964-9D87-A320BDB2E112}"/>
               </a:ext>
             </a:extLst>
           </p:cNvPr>
@@ -7818,7 +7818,7 @@
           <p:cNvPr id="11" name="s5-takeaway-rule">
             <a:extLst xmlns:a="http://schemas.openxmlformats.org/drawingml/2006/main">
               <a:ext uri="{FF2B5EF4-FFF2-40B4-BE49-F238E27FC236}">
-                <a16:creationId xmlns:a16="http://schemas.microsoft.com/office/drawing/2014/main" id="{6B8671FF-B169-4B52-8E8D-EC105973FD9D}"/>
+                <a16:creationId xmlns:a16="http://schemas.microsoft.com/office/drawing/2014/main" id="{89885FF9-5411-4E5F-9165-FFED424D7890}"/>
               </a:ext>
             </a:extLst>
           </p:cNvPr>
@@ -7851,7 +7851,7 @@
           <p:cNvPr id="12" name="s5-takeaway">
             <a:extLst xmlns:a="http://schemas.openxmlformats.org/drawingml/2006/main">
               <a:ext uri="{FF2B5EF4-FFF2-40B4-BE49-F238E27FC236}">
-                <a16:creationId xmlns:a16="http://schemas.microsoft.com/office/drawing/2014/main" id="{9BF30F32-105B-4C32-B510-13391E248D53}"/>
+                <a16:creationId xmlns:a16="http://schemas.microsoft.com/office/drawing/2014/main" id="{93D79AFD-FF97-48BA-B80F-58C8C1ABC911}"/>
               </a:ext>
             </a:extLst>
           </p:cNvPr>
@@ -7907,7 +7907,7 @@
     </p:spTree>
     <p:extLst>
       <p:ext uri="{BB962C8B-B14F-4D97-AF65-F5344CB8AC3E}">
-        <p14:creationId xmlns:p14="http://schemas.microsoft.com/office/powerpoint/2010/main" val="1571104148"/>
+        <p14:creationId xmlns:p14="http://schemas.microsoft.com/office/powerpoint/2010/main" val="1565310600"/>
       </p:ext>
     </p:extLst>
   </p:cSld>
@@ -7938,7 +7938,7 @@
           <p:cNvPr id="1" name="s6-rule">
             <a:extLst xmlns:a="http://schemas.openxmlformats.org/drawingml/2006/main">
               <a:ext uri="{FF2B5EF4-FFF2-40B4-BE49-F238E27FC236}">
-                <a16:creationId xmlns:a16="http://schemas.microsoft.com/office/drawing/2014/main" id="{CD71CF0C-50DE-4582-8704-D3AC1072A621}"/>
+                <a16:creationId xmlns:a16="http://schemas.microsoft.com/office/drawing/2014/main" id="{DC57FE10-AC24-4D65-BA31-5FB33F73FDE1}"/>
               </a:ext>
             </a:extLst>
           </p:cNvPr>
@@ -7971,7 +7971,7 @@
           <p:cNvPr id="2" name="s6-eyebrow">
             <a:extLst xmlns:a="http://schemas.openxmlformats.org/drawingml/2006/main">
               <a:ext uri="{FF2B5EF4-FFF2-40B4-BE49-F238E27FC236}">
-                <a16:creationId xmlns:a16="http://schemas.microsoft.com/office/drawing/2014/main" id="{DBA6C6C9-97B7-41E4-84E6-D1E853B30572}"/>
+                <a16:creationId xmlns:a16="http://schemas.microsoft.com/office/drawing/2014/main" id="{F3F0FF00-E497-40E3-BC6D-32509C30A847}"/>
               </a:ext>
             </a:extLst>
           </p:cNvPr>
@@ -8029,7 +8029,7 @@
           <p:cNvPr id="3" name="s6-title">
             <a:extLst xmlns:a="http://schemas.openxmlformats.org/drawingml/2006/main">
               <a:ext uri="{FF2B5EF4-FFF2-40B4-BE49-F238E27FC236}">
-                <a16:creationId xmlns:a16="http://schemas.microsoft.com/office/drawing/2014/main" id="{14D74BC1-9C39-40A7-B72E-86048080BD7E}"/>
+                <a16:creationId xmlns:a16="http://schemas.microsoft.com/office/drawing/2014/main" id="{78F0CBED-A766-4EB7-8168-CF8578D0E236}"/>
               </a:ext>
             </a:extLst>
           </p:cNvPr>
@@ -8087,7 +8087,7 @@
           <p:cNvPr id="4" name="s6-footer">
             <a:extLst xmlns:a="http://schemas.openxmlformats.org/drawingml/2006/main">
               <a:ext uri="{FF2B5EF4-FFF2-40B4-BE49-F238E27FC236}">
-                <a16:creationId xmlns:a16="http://schemas.microsoft.com/office/drawing/2014/main" id="{5176F7EC-9A15-4F3A-81A5-04C01E286096}"/>
+                <a16:creationId xmlns:a16="http://schemas.microsoft.com/office/drawing/2014/main" id="{82604B57-8AFB-4E15-9906-9246DCBC07E0}"/>
               </a:ext>
             </a:extLst>
           </p:cNvPr>
@@ -8118,7 +8118,7 @@
           <p:cNvPr id="5" name="s6-identity">
             <a:extLst xmlns:a="http://schemas.openxmlformats.org/drawingml/2006/main">
               <a:ext uri="{FF2B5EF4-FFF2-40B4-BE49-F238E27FC236}">
-                <a16:creationId xmlns:a16="http://schemas.microsoft.com/office/drawing/2014/main" id="{DD3D7CDA-71A3-4800-8272-9CB52F02A792}"/>
+                <a16:creationId xmlns:a16="http://schemas.microsoft.com/office/drawing/2014/main" id="{39BB6618-CA2D-4FC0-BC54-B9968104919E}"/>
               </a:ext>
             </a:extLst>
           </p:cNvPr>
@@ -8176,7 +8176,7 @@
           <p:cNvPr id="6" name="core-no-0">
             <a:extLst xmlns:a="http://schemas.openxmlformats.org/drawingml/2006/main">
               <a:ext uri="{FF2B5EF4-FFF2-40B4-BE49-F238E27FC236}">
-                <a16:creationId xmlns:a16="http://schemas.microsoft.com/office/drawing/2014/main" id="{9FBD06F6-89EE-42BB-ACC1-1EEC96E9BB14}"/>
+                <a16:creationId xmlns:a16="http://schemas.microsoft.com/office/drawing/2014/main" id="{48EAF423-6DA4-42A1-BA5C-2F73A118C27D}"/>
               </a:ext>
             </a:extLst>
           </p:cNvPr>
@@ -8234,7 +8234,7 @@
           <p:cNvPr id="7" name="core-label-0">
             <a:extLst xmlns:a="http://schemas.openxmlformats.org/drawingml/2006/main">
               <a:ext uri="{FF2B5EF4-FFF2-40B4-BE49-F238E27FC236}">
-                <a16:creationId xmlns:a16="http://schemas.microsoft.com/office/drawing/2014/main" id="{EC32363B-424E-48F3-9F23-57050F404CD5}"/>
+                <a16:creationId xmlns:a16="http://schemas.microsoft.com/office/drawing/2014/main" id="{9B84C80B-8CD6-4C73-9178-35CD894C5ACA}"/>
               </a:ext>
             </a:extLst>
           </p:cNvPr>
@@ -8292,7 +8292,7 @@
           <p:cNvPr id="8" name="core-body-0">
             <a:extLst xmlns:a="http://schemas.openxmlformats.org/drawingml/2006/main">
               <a:ext uri="{FF2B5EF4-FFF2-40B4-BE49-F238E27FC236}">
-                <a16:creationId xmlns:a16="http://schemas.microsoft.com/office/drawing/2014/main" id="{71AAAA17-F1B0-4AB5-A422-69B882BD269A}"/>
+                <a16:creationId xmlns:a16="http://schemas.microsoft.com/office/drawing/2014/main" id="{E738ADFE-03DC-497F-BB73-96D9F95AC79C}"/>
               </a:ext>
             </a:extLst>
           </p:cNvPr>
@@ -8356,7 +8356,7 @@
           <p:cNvPr id="9" name="core-no-1">
             <a:extLst xmlns:a="http://schemas.openxmlformats.org/drawingml/2006/main">
               <a:ext uri="{FF2B5EF4-FFF2-40B4-BE49-F238E27FC236}">
-                <a16:creationId xmlns:a16="http://schemas.microsoft.com/office/drawing/2014/main" id="{402C766B-3CE0-4B8B-BB1E-7A28319A7892}"/>
+                <a16:creationId xmlns:a16="http://schemas.microsoft.com/office/drawing/2014/main" id="{C46B5B9D-A86C-4E5D-80C1-A0911B088B3B}"/>
               </a:ext>
             </a:extLst>
           </p:cNvPr>
@@ -8414,7 +8414,7 @@
           <p:cNvPr id="10" name="core-body-1">
             <a:extLst xmlns:a="http://schemas.openxmlformats.org/drawingml/2006/main">
               <a:ext uri="{FF2B5EF4-FFF2-40B4-BE49-F238E27FC236}">
-                <a16:creationId xmlns:a16="http://schemas.microsoft.com/office/drawing/2014/main" id="{58D9C838-A46C-4FB7-BB4C-E1FC69370BAE}"/>
+                <a16:creationId xmlns:a16="http://schemas.microsoft.com/office/drawing/2014/main" id="{1034CAC7-1D89-4E2D-A6AD-4EC076B4F331}"/>
               </a:ext>
             </a:extLst>
           </p:cNvPr>
@@ -8478,7 +8478,7 @@
           <p:cNvPr id="11" name="core-no-2">
             <a:extLst xmlns:a="http://schemas.openxmlformats.org/drawingml/2006/main">
               <a:ext uri="{FF2B5EF4-FFF2-40B4-BE49-F238E27FC236}">
-                <a16:creationId xmlns:a16="http://schemas.microsoft.com/office/drawing/2014/main" id="{5EFCAB28-0FEE-4109-B53C-676A728381A5}"/>
+                <a16:creationId xmlns:a16="http://schemas.microsoft.com/office/drawing/2014/main" id="{29367CAA-304F-45E1-9389-BFFAA670326F}"/>
               </a:ext>
             </a:extLst>
           </p:cNvPr>
@@ -8536,7 +8536,7 @@
           <p:cNvPr id="12" name="core-body-2">
             <a:extLst xmlns:a="http://schemas.openxmlformats.org/drawingml/2006/main">
               <a:ext uri="{FF2B5EF4-FFF2-40B4-BE49-F238E27FC236}">
-                <a16:creationId xmlns:a16="http://schemas.microsoft.com/office/drawing/2014/main" id="{ABAE2308-C8F5-43B3-B64B-D2CD555DC266}"/>
+                <a16:creationId xmlns:a16="http://schemas.microsoft.com/office/drawing/2014/main" id="{B4C1CB1F-7727-4A6E-AA0D-4C8B4ECBD7ED}"/>
               </a:ext>
             </a:extLst>
           </p:cNvPr>
@@ -8600,7 +8600,7 @@
           <p:cNvPr id="13" name="s6-takeaway-rule">
             <a:extLst xmlns:a="http://schemas.openxmlformats.org/drawingml/2006/main">
               <a:ext uri="{FF2B5EF4-FFF2-40B4-BE49-F238E27FC236}">
-                <a16:creationId xmlns:a16="http://schemas.microsoft.com/office/drawing/2014/main" id="{5FCEAEAE-BF3E-4E2B-9594-109C9B923CC9}"/>
+                <a16:creationId xmlns:a16="http://schemas.microsoft.com/office/drawing/2014/main" id="{51B20285-813A-46B0-8EB8-205923F80E15}"/>
               </a:ext>
             </a:extLst>
           </p:cNvPr>
@@ -8633,7 +8633,7 @@
           <p:cNvPr id="14" name="s6-takeaway">
             <a:extLst xmlns:a="http://schemas.openxmlformats.org/drawingml/2006/main">
               <a:ext uri="{FF2B5EF4-FFF2-40B4-BE49-F238E27FC236}">
-                <a16:creationId xmlns:a16="http://schemas.microsoft.com/office/drawing/2014/main" id="{55B8B5C8-E4EB-4C67-9475-4220CAE9AD63}"/>
+                <a16:creationId xmlns:a16="http://schemas.microsoft.com/office/drawing/2014/main" id="{36198E9C-E0B8-448E-BCF8-2742940585AF}"/>
               </a:ext>
             </a:extLst>
           </p:cNvPr>
@@ -8689,7 +8689,7 @@
     </p:spTree>
     <p:extLst>
       <p:ext uri="{BB962C8B-B14F-4D97-AF65-F5344CB8AC3E}">
-        <p14:creationId xmlns:p14="http://schemas.microsoft.com/office/powerpoint/2010/main" val="671989699"/>
+        <p14:creationId xmlns:p14="http://schemas.microsoft.com/office/powerpoint/2010/main" val="1050134838"/>
       </p:ext>
     </p:extLst>
   </p:cSld>
@@ -8720,7 +8720,7 @@
           <p:cNvPr id="1" name="s7-rule">
             <a:extLst xmlns:a="http://schemas.openxmlformats.org/drawingml/2006/main">
               <a:ext uri="{FF2B5EF4-FFF2-40B4-BE49-F238E27FC236}">
-                <a16:creationId xmlns:a16="http://schemas.microsoft.com/office/drawing/2014/main" id="{4BE05915-3375-4631-AD15-F985C84C84D4}"/>
+                <a16:creationId xmlns:a16="http://schemas.microsoft.com/office/drawing/2014/main" id="{2BF2029C-230B-4299-9521-0631D96AF610}"/>
               </a:ext>
             </a:extLst>
           </p:cNvPr>
@@ -8753,7 +8753,7 @@
           <p:cNvPr id="2" name="s7-eyebrow">
             <a:extLst xmlns:a="http://schemas.openxmlformats.org/drawingml/2006/main">
               <a:ext uri="{FF2B5EF4-FFF2-40B4-BE49-F238E27FC236}">
-                <a16:creationId xmlns:a16="http://schemas.microsoft.com/office/drawing/2014/main" id="{94A7C995-589C-4306-8EF0-2FA98BB549A8}"/>
+                <a16:creationId xmlns:a16="http://schemas.microsoft.com/office/drawing/2014/main" id="{24CDD98F-2D9B-494F-BB5F-A6CC3ACA5134}"/>
               </a:ext>
             </a:extLst>
           </p:cNvPr>
@@ -8811,7 +8811,7 @@
           <p:cNvPr id="3" name="s7-title">
             <a:extLst xmlns:a="http://schemas.openxmlformats.org/drawingml/2006/main">
               <a:ext uri="{FF2B5EF4-FFF2-40B4-BE49-F238E27FC236}">
-                <a16:creationId xmlns:a16="http://schemas.microsoft.com/office/drawing/2014/main" id="{87AFF6A7-3E87-464E-81CE-E63DED8C5AB0}"/>
+                <a16:creationId xmlns:a16="http://schemas.microsoft.com/office/drawing/2014/main" id="{79532BFA-04A6-49DB-B2ED-67676B1D0BC0}"/>
               </a:ext>
             </a:extLst>
           </p:cNvPr>
@@ -8869,7 +8869,7 @@
           <p:cNvPr id="4" name="s7-footer">
             <a:extLst xmlns:a="http://schemas.openxmlformats.org/drawingml/2006/main">
               <a:ext uri="{FF2B5EF4-FFF2-40B4-BE49-F238E27FC236}">
-                <a16:creationId xmlns:a16="http://schemas.microsoft.com/office/drawing/2014/main" id="{D1FBCD5B-3730-43E4-A8B1-6D7FEEFA315C}"/>
+                <a16:creationId xmlns:a16="http://schemas.microsoft.com/office/drawing/2014/main" id="{81211687-41D3-4EAD-94FA-69A2AAE7C078}"/>
               </a:ext>
             </a:extLst>
           </p:cNvPr>
@@ -8900,7 +8900,7 @@
           <p:cNvPr id="5" name="s7-identity">
             <a:extLst xmlns:a="http://schemas.openxmlformats.org/drawingml/2006/main">
               <a:ext uri="{FF2B5EF4-FFF2-40B4-BE49-F238E27FC236}">
-                <a16:creationId xmlns:a16="http://schemas.microsoft.com/office/drawing/2014/main" id="{FF759F65-C6C7-4DC6-9A23-CEFA01FA18FF}"/>
+                <a16:creationId xmlns:a16="http://schemas.microsoft.com/office/drawing/2014/main" id="{DE150C32-69D9-4D0C-8450-F26FAFF1C299}"/>
               </a:ext>
             </a:extLst>
           </p:cNvPr>
@@ -8958,7 +8958,7 @@
           <p:cNvPr id="6" name="core-no-0">
             <a:extLst xmlns:a="http://schemas.openxmlformats.org/drawingml/2006/main">
               <a:ext uri="{FF2B5EF4-FFF2-40B4-BE49-F238E27FC236}">
-                <a16:creationId xmlns:a16="http://schemas.microsoft.com/office/drawing/2014/main" id="{114D3078-4F18-45E7-87CC-9F07C58A1829}"/>
+                <a16:creationId xmlns:a16="http://schemas.microsoft.com/office/drawing/2014/main" id="{79A78D27-E2E5-4844-93A7-D63230E0B9EC}"/>
               </a:ext>
             </a:extLst>
           </p:cNvPr>
@@ -9016,7 +9016,7 @@
           <p:cNvPr id="7" name="core-label-0">
             <a:extLst xmlns:a="http://schemas.openxmlformats.org/drawingml/2006/main">
               <a:ext uri="{FF2B5EF4-FFF2-40B4-BE49-F238E27FC236}">
-                <a16:creationId xmlns:a16="http://schemas.microsoft.com/office/drawing/2014/main" id="{85103E16-C22C-417A-A887-E7D070A16B57}"/>
+                <a16:creationId xmlns:a16="http://schemas.microsoft.com/office/drawing/2014/main" id="{B7E69939-C224-4F33-8707-54C15F1ABEDE}"/>
               </a:ext>
             </a:extLst>
           </p:cNvPr>
@@ -9074,7 +9074,7 @@
           <p:cNvPr id="8" name="core-body-0">
             <a:extLst xmlns:a="http://schemas.openxmlformats.org/drawingml/2006/main">
               <a:ext uri="{FF2B5EF4-FFF2-40B4-BE49-F238E27FC236}">
-                <a16:creationId xmlns:a16="http://schemas.microsoft.com/office/drawing/2014/main" id="{D1BC267D-A8B8-44A4-B0CC-91AA62F061D4}"/>
+                <a16:creationId xmlns:a16="http://schemas.microsoft.com/office/drawing/2014/main" id="{4C414942-2B7D-41AA-BD20-3CE71F510DAD}"/>
               </a:ext>
             </a:extLst>
           </p:cNvPr>
@@ -9138,7 +9138,7 @@
           <p:cNvPr id="9" name="core-no-1">
             <a:extLst xmlns:a="http://schemas.openxmlformats.org/drawingml/2006/main">
               <a:ext uri="{FF2B5EF4-FFF2-40B4-BE49-F238E27FC236}">
-                <a16:creationId xmlns:a16="http://schemas.microsoft.com/office/drawing/2014/main" id="{D6DC07FC-46B7-4B67-8287-E314F13607D5}"/>
+                <a16:creationId xmlns:a16="http://schemas.microsoft.com/office/drawing/2014/main" id="{AA7DF0A5-AD46-4F43-B1D0-A512B6CECCF2}"/>
               </a:ext>
             </a:extLst>
           </p:cNvPr>
@@ -9196,7 +9196,7 @@
           <p:cNvPr id="10" name="core-body-1">
             <a:extLst xmlns:a="http://schemas.openxmlformats.org/drawingml/2006/main">
               <a:ext uri="{FF2B5EF4-FFF2-40B4-BE49-F238E27FC236}">
-                <a16:creationId xmlns:a16="http://schemas.microsoft.com/office/drawing/2014/main" id="{E87A9656-5661-456B-9375-51711347351A}"/>
+                <a16:creationId xmlns:a16="http://schemas.microsoft.com/office/drawing/2014/main" id="{B9927BE3-C5E9-4FDA-A404-6B4F389B0074}"/>
               </a:ext>
             </a:extLst>
           </p:cNvPr>
@@ -9260,7 +9260,7 @@
           <p:cNvPr id="11" name="s7-takeaway-rule">
             <a:extLst xmlns:a="http://schemas.openxmlformats.org/drawingml/2006/main">
               <a:ext uri="{FF2B5EF4-FFF2-40B4-BE49-F238E27FC236}">
-                <a16:creationId xmlns:a16="http://schemas.microsoft.com/office/drawing/2014/main" id="{D5E6BD24-4D8B-434D-8181-C6D552DC1245}"/>
+                <a16:creationId xmlns:a16="http://schemas.microsoft.com/office/drawing/2014/main" id="{640E43A4-335D-4BA5-8EA1-C794AE7506B3}"/>
               </a:ext>
             </a:extLst>
           </p:cNvPr>
@@ -9293,7 +9293,7 @@
           <p:cNvPr id="12" name="s7-takeaway">
             <a:extLst xmlns:a="http://schemas.openxmlformats.org/drawingml/2006/main">
               <a:ext uri="{FF2B5EF4-FFF2-40B4-BE49-F238E27FC236}">
-                <a16:creationId xmlns:a16="http://schemas.microsoft.com/office/drawing/2014/main" id="{444FB93F-062E-4417-93A0-D9665DA3DB70}"/>
+                <a16:creationId xmlns:a16="http://schemas.microsoft.com/office/drawing/2014/main" id="{0C4EE68D-FCFE-444F-A4A8-9C92AAD7167D}"/>
               </a:ext>
             </a:extLst>
           </p:cNvPr>
@@ -9349,7 +9349,7 @@
     </p:spTree>
     <p:extLst>
       <p:ext uri="{BB962C8B-B14F-4D97-AF65-F5344CB8AC3E}">
-        <p14:creationId xmlns:p14="http://schemas.microsoft.com/office/powerpoint/2010/main" val="1480684515"/>
+        <p14:creationId xmlns:p14="http://schemas.microsoft.com/office/powerpoint/2010/main" val="961410127"/>
       </p:ext>
     </p:extLst>
   </p:cSld>
@@ -9380,7 +9380,7 @@
           <p:cNvPr id="1" name="s8-rule">
             <a:extLst xmlns:a="http://schemas.openxmlformats.org/drawingml/2006/main">
               <a:ext uri="{FF2B5EF4-FFF2-40B4-BE49-F238E27FC236}">
-                <a16:creationId xmlns:a16="http://schemas.microsoft.com/office/drawing/2014/main" id="{C2C70282-92E3-4B0D-915B-4267442F67BF}"/>
+                <a16:creationId xmlns:a16="http://schemas.microsoft.com/office/drawing/2014/main" id="{671F1DD1-6DD4-4B44-A533-4172A0FD9E6E}"/>
               </a:ext>
             </a:extLst>
           </p:cNvPr>
@@ -9413,7 +9413,7 @@
           <p:cNvPr id="2" name="s8-eyebrow">
             <a:extLst xmlns:a="http://schemas.openxmlformats.org/drawingml/2006/main">
               <a:ext uri="{FF2B5EF4-FFF2-40B4-BE49-F238E27FC236}">
-                <a16:creationId xmlns:a16="http://schemas.microsoft.com/office/drawing/2014/main" id="{9AF71734-912F-4858-941C-BD12C3D46AD4}"/>
+                <a16:creationId xmlns:a16="http://schemas.microsoft.com/office/drawing/2014/main" id="{C319D6C4-AAD5-43CC-9435-4487B8876E5C}"/>
               </a:ext>
             </a:extLst>
           </p:cNvPr>
@@ -9471,7 +9471,7 @@
           <p:cNvPr id="3" name="s8-title">
             <a:extLst xmlns:a="http://schemas.openxmlformats.org/drawingml/2006/main">
               <a:ext uri="{FF2B5EF4-FFF2-40B4-BE49-F238E27FC236}">
-                <a16:creationId xmlns:a16="http://schemas.microsoft.com/office/drawing/2014/main" id="{F5BF88B3-5297-4074-AF30-63E18F4D7489}"/>
+                <a16:creationId xmlns:a16="http://schemas.microsoft.com/office/drawing/2014/main" id="{D08362AF-1FFA-4E7E-8E0D-31BB1BE41E2F}"/>
               </a:ext>
             </a:extLst>
           </p:cNvPr>
@@ -9529,7 +9529,7 @@
           <p:cNvPr id="4" name="s8-footer">
             <a:extLst xmlns:a="http://schemas.openxmlformats.org/drawingml/2006/main">
               <a:ext uri="{FF2B5EF4-FFF2-40B4-BE49-F238E27FC236}">
-                <a16:creationId xmlns:a16="http://schemas.microsoft.com/office/drawing/2014/main" id="{C72F37C3-A17C-4EA0-9719-1C4DC848DE7E}"/>
+                <a16:creationId xmlns:a16="http://schemas.microsoft.com/office/drawing/2014/main" id="{0B82CE7E-C81C-4AF6-8BBB-D8F9663E06BC}"/>
               </a:ext>
             </a:extLst>
           </p:cNvPr>
@@ -9560,7 +9560,7 @@
           <p:cNvPr id="5" name="s8-identity">
             <a:extLst xmlns:a="http://schemas.openxmlformats.org/drawingml/2006/main">
               <a:ext uri="{FF2B5EF4-FFF2-40B4-BE49-F238E27FC236}">
-                <a16:creationId xmlns:a16="http://schemas.microsoft.com/office/drawing/2014/main" id="{A2086D1F-4022-4AEC-B5AC-62C8B5C95D05}"/>
+                <a16:creationId xmlns:a16="http://schemas.microsoft.com/office/drawing/2014/main" id="{ED1390DE-A9F9-4BAB-9840-362F82C651ED}"/>
               </a:ext>
             </a:extLst>
           </p:cNvPr>
@@ -9618,7 +9618,7 @@
           <p:cNvPr id="6" name="core-no-0">
             <a:extLst xmlns:a="http://schemas.openxmlformats.org/drawingml/2006/main">
               <a:ext uri="{FF2B5EF4-FFF2-40B4-BE49-F238E27FC236}">
-                <a16:creationId xmlns:a16="http://schemas.microsoft.com/office/drawing/2014/main" id="{75CC8D72-CDA8-428F-B78B-D0C238330CE2}"/>
+                <a16:creationId xmlns:a16="http://schemas.microsoft.com/office/drawing/2014/main" id="{12CFCB2A-9E8A-4826-943B-FFAD3EA85D86}"/>
               </a:ext>
             </a:extLst>
           </p:cNvPr>
@@ -9676,7 +9676,7 @@
           <p:cNvPr id="7" name="core-label-0">
             <a:extLst xmlns:a="http://schemas.openxmlformats.org/drawingml/2006/main">
               <a:ext uri="{FF2B5EF4-FFF2-40B4-BE49-F238E27FC236}">
-                <a16:creationId xmlns:a16="http://schemas.microsoft.com/office/drawing/2014/main" id="{7C7BE9D7-DAA0-4299-98E0-0966AEA1B4D7}"/>
+                <a16:creationId xmlns:a16="http://schemas.microsoft.com/office/drawing/2014/main" id="{CA400425-3587-463B-8334-433456E5D157}"/>
               </a:ext>
             </a:extLst>
           </p:cNvPr>
@@ -9734,7 +9734,7 @@
           <p:cNvPr id="8" name="core-body-0">
             <a:extLst xmlns:a="http://schemas.openxmlformats.org/drawingml/2006/main">
               <a:ext uri="{FF2B5EF4-FFF2-40B4-BE49-F238E27FC236}">
-                <a16:creationId xmlns:a16="http://schemas.microsoft.com/office/drawing/2014/main" id="{B4F0934A-42FD-4B0C-BD81-F0663F5DC94F}"/>
+                <a16:creationId xmlns:a16="http://schemas.microsoft.com/office/drawing/2014/main" id="{A5E5A742-DE6F-4F5F-886C-B4CF3E892B65}"/>
               </a:ext>
             </a:extLst>
           </p:cNvPr>
@@ -9798,7 +9798,7 @@
           <p:cNvPr id="9" name="core-no-1">
             <a:extLst xmlns:a="http://schemas.openxmlformats.org/drawingml/2006/main">
               <a:ext uri="{FF2B5EF4-FFF2-40B4-BE49-F238E27FC236}">
-                <a16:creationId xmlns:a16="http://schemas.microsoft.com/office/drawing/2014/main" id="{A645DA0F-9C7A-4617-8C1A-0D269FFD979E}"/>
+                <a16:creationId xmlns:a16="http://schemas.microsoft.com/office/drawing/2014/main" id="{DF0DAAE7-98A5-47E9-AA78-7AEEE031833F}"/>
               </a:ext>
             </a:extLst>
           </p:cNvPr>
@@ -9856,7 +9856,7 @@
           <p:cNvPr id="10" name="core-body-1">
             <a:extLst xmlns:a="http://schemas.openxmlformats.org/drawingml/2006/main">
               <a:ext uri="{FF2B5EF4-FFF2-40B4-BE49-F238E27FC236}">
-                <a16:creationId xmlns:a16="http://schemas.microsoft.com/office/drawing/2014/main" id="{8F93F25B-F69F-43BC-9B9A-189A225DF911}"/>
+                <a16:creationId xmlns:a16="http://schemas.microsoft.com/office/drawing/2014/main" id="{1189A481-E95A-4DF4-8DCD-AD657CB7E6C9}"/>
               </a:ext>
             </a:extLst>
           </p:cNvPr>
@@ -9920,7 +9920,7 @@
           <p:cNvPr id="11" name="s8-takeaway-rule">
             <a:extLst xmlns:a="http://schemas.openxmlformats.org/drawingml/2006/main">
               <a:ext uri="{FF2B5EF4-FFF2-40B4-BE49-F238E27FC236}">
-                <a16:creationId xmlns:a16="http://schemas.microsoft.com/office/drawing/2014/main" id="{1AA50D6D-EB4F-448A-8B5B-E91BBE041629}"/>
+                <a16:creationId xmlns:a16="http://schemas.microsoft.com/office/drawing/2014/main" id="{8291440A-238A-4BE1-95E9-224B4A1A5760}"/>
               </a:ext>
             </a:extLst>
           </p:cNvPr>
@@ -9953,7 +9953,7 @@
           <p:cNvPr id="12" name="s8-takeaway">
             <a:extLst xmlns:a="http://schemas.openxmlformats.org/drawingml/2006/main">
               <a:ext uri="{FF2B5EF4-FFF2-40B4-BE49-F238E27FC236}">
-                <a16:creationId xmlns:a16="http://schemas.microsoft.com/office/drawing/2014/main" id="{2B82AD37-CFC4-4B53-A555-0A9E6E35236C}"/>
+                <a16:creationId xmlns:a16="http://schemas.microsoft.com/office/drawing/2014/main" id="{AA5D00C9-308B-4C3F-99B8-31987B8487A4}"/>
               </a:ext>
             </a:extLst>
           </p:cNvPr>
@@ -10009,7 +10009,7 @@
     </p:spTree>
     <p:extLst>
       <p:ext uri="{BB962C8B-B14F-4D97-AF65-F5344CB8AC3E}">
-        <p14:creationId xmlns:p14="http://schemas.microsoft.com/office/powerpoint/2010/main" val="771403267"/>
+        <p14:creationId xmlns:p14="http://schemas.microsoft.com/office/powerpoint/2010/main" val="801036905"/>
       </p:ext>
     </p:extLst>
   </p:cSld>
@@ -10040,7 +10040,7 @@
           <p:cNvPr id="1" name="s9-rule">
             <a:extLst xmlns:a="http://schemas.openxmlformats.org/drawingml/2006/main">
               <a:ext uri="{FF2B5EF4-FFF2-40B4-BE49-F238E27FC236}">
-                <a16:creationId xmlns:a16="http://schemas.microsoft.com/office/drawing/2014/main" id="{286E9A32-E34D-43D1-BB61-9843AB92854D}"/>
+                <a16:creationId xmlns:a16="http://schemas.microsoft.com/office/drawing/2014/main" id="{26846E63-8E4B-4800-8240-A46203D6B319}"/>
               </a:ext>
             </a:extLst>
           </p:cNvPr>
@@ -10073,7 +10073,7 @@
           <p:cNvPr id="2" name="s9-eyebrow">
             <a:extLst xmlns:a="http://schemas.openxmlformats.org/drawingml/2006/main">
               <a:ext uri="{FF2B5EF4-FFF2-40B4-BE49-F238E27FC236}">
-                <a16:creationId xmlns:a16="http://schemas.microsoft.com/office/drawing/2014/main" id="{CC62CDDE-EBFF-47B5-B236-2DDA05D89EF5}"/>
+                <a16:creationId xmlns:a16="http://schemas.microsoft.com/office/drawing/2014/main" id="{71CA00B0-3DCD-46DC-A6D2-C7D8DD5E033A}"/>
               </a:ext>
             </a:extLst>
           </p:cNvPr>
@@ -10131,7 +10131,7 @@
           <p:cNvPr id="3" name="s9-title">
             <a:extLst xmlns:a="http://schemas.openxmlformats.org/drawingml/2006/main">
               <a:ext uri="{FF2B5EF4-FFF2-40B4-BE49-F238E27FC236}">
-                <a16:creationId xmlns:a16="http://schemas.microsoft.com/office/drawing/2014/main" id="{5A7D3373-4473-42AA-9D63-068ED17B5B4B}"/>
+                <a16:creationId xmlns:a16="http://schemas.microsoft.com/office/drawing/2014/main" id="{D132A316-CFEC-49A8-9037-58EEB9A108B1}"/>
               </a:ext>
             </a:extLst>
           </p:cNvPr>
@@ -10189,7 +10189,7 @@
           <p:cNvPr id="4" name="s9-footer">
             <a:extLst xmlns:a="http://schemas.openxmlformats.org/drawingml/2006/main">
               <a:ext uri="{FF2B5EF4-FFF2-40B4-BE49-F238E27FC236}">
-                <a16:creationId xmlns:a16="http://schemas.microsoft.com/office/drawing/2014/main" id="{66E88984-B50A-4A6F-BA4A-BDDE8550156E}"/>
+                <a16:creationId xmlns:a16="http://schemas.microsoft.com/office/drawing/2014/main" id="{D29897D8-D254-48E3-AD7F-2DFE9411B609}"/>
               </a:ext>
             </a:extLst>
           </p:cNvPr>
@@ -10220,7 +10220,7 @@
           <p:cNvPr id="5" name="s9-identity">
             <a:extLst xmlns:a="http://schemas.openxmlformats.org/drawingml/2006/main">
               <a:ext uri="{FF2B5EF4-FFF2-40B4-BE49-F238E27FC236}">
-                <a16:creationId xmlns:a16="http://schemas.microsoft.com/office/drawing/2014/main" id="{317398D1-0DCC-499C-842E-65D2EA856DB4}"/>
+                <a16:creationId xmlns:a16="http://schemas.microsoft.com/office/drawing/2014/main" id="{072A06A5-7C94-4EB4-8358-6198EF21F2F1}"/>
               </a:ext>
             </a:extLst>
           </p:cNvPr>
@@ -10278,7 +10278,7 @@
           <p:cNvPr id="6" name="case-title">
             <a:extLst xmlns:a="http://schemas.openxmlformats.org/drawingml/2006/main">
               <a:ext uri="{FF2B5EF4-FFF2-40B4-BE49-F238E27FC236}">
-                <a16:creationId xmlns:a16="http://schemas.microsoft.com/office/drawing/2014/main" id="{8646BB21-D853-48BE-B032-3C92E2CD5662}"/>
+                <a16:creationId xmlns:a16="http://schemas.microsoft.com/office/drawing/2014/main" id="{4DF6574A-81D4-40BE-A555-039C1DA5DDB6}"/>
               </a:ext>
             </a:extLst>
           </p:cNvPr>
@@ -10342,7 +10342,7 @@
           <p:cNvPr id="7" name="case-row-0">
             <a:extLst xmlns:a="http://schemas.openxmlformats.org/drawingml/2006/main">
               <a:ext uri="{FF2B5EF4-FFF2-40B4-BE49-F238E27FC236}">
-                <a16:creationId xmlns:a16="http://schemas.microsoft.com/office/drawing/2014/main" id="{D39C4FCA-3678-4B26-9E11-556D010B6BD4}"/>
+                <a16:creationId xmlns:a16="http://schemas.microsoft.com/office/drawing/2014/main" id="{52EC0A4F-96C6-43B0-806A-384D835FB436}"/>
               </a:ext>
             </a:extLst>
           </p:cNvPr>
@@ -10406,7 +10406,7 @@
           <p:cNvPr id="8" name="case-row-1">
             <a:extLst xmlns:a="http://schemas.openxmlformats.org/drawingml/2006/main">
               <a:ext uri="{FF2B5EF4-FFF2-40B4-BE49-F238E27FC236}">
-                <a16:creationId xmlns:a16="http://schemas.microsoft.com/office/drawing/2014/main" id="{F5EC4DB6-1A93-4EA6-83E8-7CD4ADA5AF42}"/>
+                <a16:creationId xmlns:a16="http://schemas.microsoft.com/office/drawing/2014/main" id="{E1B95314-AEFB-4839-A5B0-32A49FEE6DD9}"/>
               </a:ext>
             </a:extLst>
           </p:cNvPr>
@@ -10470,7 +10470,7 @@
           <p:cNvPr id="9" name="case-row-2">
             <a:extLst xmlns:a="http://schemas.openxmlformats.org/drawingml/2006/main">
               <a:ext uri="{FF2B5EF4-FFF2-40B4-BE49-F238E27FC236}">
-                <a16:creationId xmlns:a16="http://schemas.microsoft.com/office/drawing/2014/main" id="{37B70F8A-839E-45EE-9E5A-6F7E1726DAC1}"/>
+                <a16:creationId xmlns:a16="http://schemas.microsoft.com/office/drawing/2014/main" id="{C99CE031-D0E6-4D71-AB1C-60A58CE5ACD7}"/>
               </a:ext>
             </a:extLst>
           </p:cNvPr>
@@ -10534,7 +10534,7 @@
           <p:cNvPr id="10" name="case-row-3">
             <a:extLst xmlns:a="http://schemas.openxmlformats.org/drawingml/2006/main">
               <a:ext uri="{FF2B5EF4-FFF2-40B4-BE49-F238E27FC236}">
-                <a16:creationId xmlns:a16="http://schemas.microsoft.com/office/drawing/2014/main" id="{4951A4FC-68F1-4B50-AB47-41EB25DF7C26}"/>
+                <a16:creationId xmlns:a16="http://schemas.microsoft.com/office/drawing/2014/main" id="{D9839C0A-C7AB-4DF5-A489-B77CC256CECA}"/>
               </a:ext>
             </a:extLst>
           </p:cNvPr>
@@ -10598,7 +10598,7 @@
           <p:cNvPr id="11" name="s9-takeaway-rule">
             <a:extLst xmlns:a="http://schemas.openxmlformats.org/drawingml/2006/main">
               <a:ext uri="{FF2B5EF4-FFF2-40B4-BE49-F238E27FC236}">
-                <a16:creationId xmlns:a16="http://schemas.microsoft.com/office/drawing/2014/main" id="{12D9AC6D-FF36-459A-B9F0-A7A0A9F72BC4}"/>
+                <a16:creationId xmlns:a16="http://schemas.microsoft.com/office/drawing/2014/main" id="{ABD09AF0-3ADB-432A-81AD-88CC58A266CD}"/>
               </a:ext>
             </a:extLst>
           </p:cNvPr>
@@ -10631,7 +10631,7 @@
           <p:cNvPr id="12" name="s9-takeaway">
             <a:extLst xmlns:a="http://schemas.openxmlformats.org/drawingml/2006/main">
               <a:ext uri="{FF2B5EF4-FFF2-40B4-BE49-F238E27FC236}">
-                <a16:creationId xmlns:a16="http://schemas.microsoft.com/office/drawing/2014/main" id="{E2CAB8A0-30C4-415E-A633-4854163BBF43}"/>
+                <a16:creationId xmlns:a16="http://schemas.microsoft.com/office/drawing/2014/main" id="{D0CAB19B-DFFD-4B3B-A400-6E7A2F7CE18F}"/>
               </a:ext>
             </a:extLst>
           </p:cNvPr>
@@ -10687,7 +10687,7 @@
     </p:spTree>
     <p:extLst>
       <p:ext uri="{BB962C8B-B14F-4D97-AF65-F5344CB8AC3E}">
-        <p14:creationId xmlns:p14="http://schemas.microsoft.com/office/powerpoint/2010/main" val="43925550"/>
+        <p14:creationId xmlns:p14="http://schemas.microsoft.com/office/powerpoint/2010/main" val="91055517"/>
       </p:ext>
     </p:extLst>
   </p:cSld>
